--- a/ppt/b2g_day2_eda.pptx
+++ b/ppt/b2g_day2_eda.pptx
@@ -3911,137 +3911,32 @@
           </a:p>
         </p:txBody>
       </p:sp>
-      <p:sp>
-        <p:nvSpPr>
-          <p:cNvPr id="6" name="Shape 4"/>
-          <p:cNvSpPr/>
-          <p:nvPr/>
-        </p:nvSpPr>
+      <p:pic>
+        <p:nvPicPr>
+          <p:cNvPr id="6" name="Image 0" descr="/Users/sujinpark/b2b-lecture-note/20260512_inflearn_B2G_dataanalysis/assets/screenshots/day2/single_data_result.png">    </p:cNvPr>
+          <p:cNvPicPr>
+            <a:picLocks noChangeAspect="1"/>
+          </p:cNvPicPr>
+          <p:nvPr/>
+        </p:nvPicPr>
+        <p:blipFill>
+          <a:blip r:embed="rId1"/>
+          <a:srcRect l="0" r="0" t="0" b="0"/>
+          <a:stretch/>
+        </p:blipFill>
         <p:spPr>
           <a:xfrm>
             <a:off x="2194560" y="2240280"/>
             <a:ext cx="7772400" cy="3657600"/>
           </a:xfrm>
-          <a:prstGeom prst="roundRect">
-            <a:avLst>
-              <a:gd name="adj" fmla="val 3000"/>
-            </a:avLst>
-          </a:prstGeom>
-          <a:solidFill>
-            <a:srgbClr val="F5F7FA"/>
-          </a:solidFill>
-          <a:ln w="12700">
-            <a:solidFill>
-              <a:srgbClr val="CBD5E0"/>
-            </a:solidFill>
-            <a:prstDash val="dash"/>
-          </a:ln>
-        </p:spPr>
-      </p:sp>
-      <p:sp>
-        <p:nvSpPr>
-          <p:cNvPr id="7" name="Text 5"/>
-          <p:cNvSpPr/>
-          <p:nvPr/>
-        </p:nvSpPr>
-        <p:spPr>
-          <a:xfrm>
-            <a:off x="2194560" y="3703320"/>
-            <a:ext cx="7772400" cy="731520"/>
-          </a:xfrm>
-          <a:prstGeom prst="rect">
-            <a:avLst/>
-          </a:prstGeom>
-          <a:noFill/>
-          <a:ln/>
-        </p:spPr>
-        <p:txBody>
-          <a:bodyPr wrap="square" rtlCol="0" anchor="ctr"/>
-          <a:lstStyle/>
-          <a:p>
-            <a:pPr algn="ctr" indent="0" marL="0">
-              <a:lnSpc>
-                <a:spcPct val="140000"/>
-              </a:lnSpc>
-              <a:buNone/>
-            </a:pPr>
-            <a:r>
-              <a:rPr lang="en-US" sz="1400" i="1" dirty="0">
-                <a:solidFill>
-                  <a:srgbClr val="718096"/>
-                </a:solidFill>
-                <a:latin typeface="Noto Sans KR" pitchFamily="34" charset="0"/>
-                <a:ea typeface="Noto Sans KR" pitchFamily="34" charset="-122"/>
-                <a:cs typeface="Noto Sans KR" pitchFamily="34" charset="-120"/>
-              </a:rPr>
-              <a:t>📷  결과 이미지 위치</a:t>
-            </a:r>
-            <a:endParaRPr lang="en-US" sz="1400" dirty="0"/>
-          </a:p>
-          <a:p>
-            <a:pPr algn="ctr" indent="0" marL="0">
-              <a:lnSpc>
-                <a:spcPct val="140000"/>
-              </a:lnSpc>
-              <a:buNone/>
-            </a:pPr>
-            <a:r>
-              <a:rPr lang="en-US" sz="1400" i="1" dirty="0">
-                <a:solidFill>
-                  <a:srgbClr val="718096"/>
-                </a:solidFill>
-                <a:latin typeface="Noto Sans KR" pitchFamily="34" charset="0"/>
-                <a:ea typeface="Noto Sans KR" pitchFamily="34" charset="-122"/>
-                <a:cs typeface="Noto Sans KR" pitchFamily="34" charset="-120"/>
-              </a:rPr>
-              <a:t>(강의 시연 캡처가 들어갈 자리)</a:t>
-            </a:r>
-            <a:endParaRPr lang="en-US" sz="1400" dirty="0"/>
-          </a:p>
-        </p:txBody>
-      </p:sp>
-      <p:sp>
-        <p:nvSpPr>
-          <p:cNvPr id="8" name="Text 6"/>
-          <p:cNvSpPr/>
-          <p:nvPr/>
-        </p:nvSpPr>
-        <p:spPr>
-          <a:xfrm>
-            <a:off x="2194560" y="4983480"/>
-            <a:ext cx="7772400" cy="365760"/>
-          </a:xfrm>
-          <a:prstGeom prst="rect">
-            <a:avLst/>
-          </a:prstGeom>
-          <a:noFill/>
-          <a:ln/>
-        </p:spPr>
-        <p:txBody>
-          <a:bodyPr wrap="square" rtlCol="0" anchor="ctr"/>
-          <a:lstStyle/>
-          <a:p>
-            <a:pPr algn="ctr" indent="0" marL="0">
-              <a:buNone/>
-            </a:pPr>
-            <a:r>
-              <a:rPr lang="en-US" sz="1000" i="1" dirty="0">
-                <a:solidFill>
-                  <a:srgbClr val="718096"/>
-                </a:solidFill>
-                <a:latin typeface="Roboto Mono" pitchFamily="34" charset="0"/>
-                <a:ea typeface="Roboto Mono" pitchFamily="34" charset="-122"/>
-                <a:cs typeface="Roboto Mono" pitchFamily="34" charset="-120"/>
-              </a:rPr>
-              <a:t>screenshots/day2/single_data_result.png</a:t>
-            </a:r>
-            <a:endParaRPr lang="en-US" sz="1000" dirty="0"/>
-          </a:p>
-        </p:txBody>
-      </p:sp>
-      <p:sp>
-        <p:nvSpPr>
-          <p:cNvPr id="9" name="Text 7"/>
+          <a:prstGeom prst="rect">
+            <a:avLst/>
+          </a:prstGeom>
+        </p:spPr>
+      </p:pic>
+      <p:sp>
+        <p:nvSpPr>
+          <p:cNvPr id="7" name="Text 4"/>
           <p:cNvSpPr/>
           <p:nvPr/>
         </p:nvSpPr>
@@ -4080,7 +3975,7 @@
       </p:sp>
       <p:sp>
         <p:nvSpPr>
-          <p:cNvPr id="10" name="Text 8"/>
+          <p:cNvPr id="8" name="Text 5"/>
           <p:cNvSpPr/>
           <p:nvPr/>
         </p:nvSpPr>
@@ -4635,137 +4530,32 @@
           </a:p>
         </p:txBody>
       </p:sp>
-      <p:sp>
-        <p:nvSpPr>
-          <p:cNvPr id="6" name="Shape 4"/>
-          <p:cNvSpPr/>
-          <p:nvPr/>
-        </p:nvSpPr>
+      <p:pic>
+        <p:nvPicPr>
+          <p:cNvPr id="6" name="Image 0" descr="/Users/sujinpark/b2b-lecture-note/20260512_inflearn_B2G_dataanalysis/assets/screenshots/day2/joined_bike_vs_subway.png">    </p:cNvPr>
+          <p:cNvPicPr>
+            <a:picLocks noChangeAspect="1"/>
+          </p:cNvPicPr>
+          <p:nvPr/>
+        </p:nvPicPr>
+        <p:blipFill>
+          <a:blip r:embed="rId1"/>
+          <a:srcRect l="0" r="0" t="0" b="0"/>
+          <a:stretch/>
+        </p:blipFill>
         <p:spPr>
           <a:xfrm>
             <a:off x="2194560" y="2240280"/>
             <a:ext cx="7772400" cy="3657600"/>
           </a:xfrm>
-          <a:prstGeom prst="roundRect">
-            <a:avLst>
-              <a:gd name="adj" fmla="val 3000"/>
-            </a:avLst>
-          </a:prstGeom>
-          <a:solidFill>
-            <a:srgbClr val="F5F7FA"/>
-          </a:solidFill>
-          <a:ln w="12700">
-            <a:solidFill>
-              <a:srgbClr val="CBD5E0"/>
-            </a:solidFill>
-            <a:prstDash val="dash"/>
-          </a:ln>
-        </p:spPr>
-      </p:sp>
-      <p:sp>
-        <p:nvSpPr>
-          <p:cNvPr id="7" name="Text 5"/>
-          <p:cNvSpPr/>
-          <p:nvPr/>
-        </p:nvSpPr>
-        <p:spPr>
-          <a:xfrm>
-            <a:off x="2194560" y="3703320"/>
-            <a:ext cx="7772400" cy="731520"/>
-          </a:xfrm>
-          <a:prstGeom prst="rect">
-            <a:avLst/>
-          </a:prstGeom>
-          <a:noFill/>
-          <a:ln/>
-        </p:spPr>
-        <p:txBody>
-          <a:bodyPr wrap="square" rtlCol="0" anchor="ctr"/>
-          <a:lstStyle/>
-          <a:p>
-            <a:pPr algn="ctr" indent="0" marL="0">
-              <a:lnSpc>
-                <a:spcPct val="140000"/>
-              </a:lnSpc>
-              <a:buNone/>
-            </a:pPr>
-            <a:r>
-              <a:rPr lang="en-US" sz="1400" i="1" dirty="0">
-                <a:solidFill>
-                  <a:srgbClr val="718096"/>
-                </a:solidFill>
-                <a:latin typeface="Noto Sans KR" pitchFamily="34" charset="0"/>
-                <a:ea typeface="Noto Sans KR" pitchFamily="34" charset="-122"/>
-                <a:cs typeface="Noto Sans KR" pitchFamily="34" charset="-120"/>
-              </a:rPr>
-              <a:t>📷  결과 이미지 위치</a:t>
-            </a:r>
-            <a:endParaRPr lang="en-US" sz="1400" dirty="0"/>
-          </a:p>
-          <a:p>
-            <a:pPr algn="ctr" indent="0" marL="0">
-              <a:lnSpc>
-                <a:spcPct val="140000"/>
-              </a:lnSpc>
-              <a:buNone/>
-            </a:pPr>
-            <a:r>
-              <a:rPr lang="en-US" sz="1400" i="1" dirty="0">
-                <a:solidFill>
-                  <a:srgbClr val="718096"/>
-                </a:solidFill>
-                <a:latin typeface="Noto Sans KR" pitchFamily="34" charset="0"/>
-                <a:ea typeface="Noto Sans KR" pitchFamily="34" charset="-122"/>
-                <a:cs typeface="Noto Sans KR" pitchFamily="34" charset="-120"/>
-              </a:rPr>
-              <a:t>(강의 시연 캡처가 들어갈 자리)</a:t>
-            </a:r>
-            <a:endParaRPr lang="en-US" sz="1400" dirty="0"/>
-          </a:p>
-        </p:txBody>
-      </p:sp>
-      <p:sp>
-        <p:nvSpPr>
-          <p:cNvPr id="8" name="Text 6"/>
-          <p:cNvSpPr/>
-          <p:nvPr/>
-        </p:nvSpPr>
-        <p:spPr>
-          <a:xfrm>
-            <a:off x="2194560" y="4983480"/>
-            <a:ext cx="7772400" cy="365760"/>
-          </a:xfrm>
-          <a:prstGeom prst="rect">
-            <a:avLst/>
-          </a:prstGeom>
-          <a:noFill/>
-          <a:ln/>
-        </p:spPr>
-        <p:txBody>
-          <a:bodyPr wrap="square" rtlCol="0" anchor="ctr"/>
-          <a:lstStyle/>
-          <a:p>
-            <a:pPr algn="ctr" indent="0" marL="0">
-              <a:buNone/>
-            </a:pPr>
-            <a:r>
-              <a:rPr lang="en-US" sz="1000" i="1" dirty="0">
-                <a:solidFill>
-                  <a:srgbClr val="718096"/>
-                </a:solidFill>
-                <a:latin typeface="Roboto Mono" pitchFamily="34" charset="0"/>
-                <a:ea typeface="Roboto Mono" pitchFamily="34" charset="-122"/>
-                <a:cs typeface="Roboto Mono" pitchFamily="34" charset="-120"/>
-              </a:rPr>
-              <a:t>screenshots/day2/joined_bike_vs_subway.png</a:t>
-            </a:r>
-            <a:endParaRPr lang="en-US" sz="1000" dirty="0"/>
-          </a:p>
-        </p:txBody>
-      </p:sp>
-      <p:sp>
-        <p:nvSpPr>
-          <p:cNvPr id="9" name="Text 7"/>
+          <a:prstGeom prst="rect">
+            <a:avLst/>
+          </a:prstGeom>
+        </p:spPr>
+      </p:pic>
+      <p:sp>
+        <p:nvSpPr>
+          <p:cNvPr id="7" name="Text 4"/>
           <p:cNvSpPr/>
           <p:nvPr/>
         </p:nvSpPr>
@@ -4804,7 +4594,7 @@
       </p:sp>
       <p:sp>
         <p:nvSpPr>
-          <p:cNvPr id="10" name="Text 8"/>
+          <p:cNvPr id="8" name="Text 5"/>
           <p:cNvSpPr/>
           <p:nvPr/>
         </p:nvSpPr>
@@ -7206,7 +6996,7 @@
                 <a:ea typeface="Noto Sans KR" pitchFamily="34" charset="-122"/>
                 <a:cs typeface="Noto Sans KR" pitchFamily="34" charset="-120"/>
               </a:rPr>
-              <a:t>4. Colab에서 코드 직접 수정 + CLAUDE.md 자연어로 누적 → day2/ 푸시</a:t>
+              <a:t>4. Colab에서 코드 직접 수정 + CLAUDE.md 자연어 누적 → 운영 채널 업로드</a:t>
             </a:r>
             <a:endParaRPr lang="en-US" sz="1300" dirty="0"/>
           </a:p>
@@ -9097,7 +8887,7 @@
                 <a:ea typeface="Noto Sans KR" pitchFamily="34" charset="-122"/>
                 <a:cs typeface="Noto Sans KR" pitchFamily="34" charset="-120"/>
               </a:rPr>
-              <a:t>산출물을 GitHub day2/ 폴더에 푸시</a:t>
+              <a:t>산출물 정리 + 운영 채널 업로드</a:t>
             </a:r>
             <a:endParaRPr lang="en-US" sz="4200" dirty="0"/>
           </a:p>
@@ -9162,7 +8952,7 @@
                 <a:ea typeface="Noto Sans KR" pitchFamily="34" charset="-122"/>
                 <a:cs typeface="Noto Sans KR" pitchFamily="34" charset="-120"/>
               </a:rPr>
-              <a:t>day2/</a:t>
+              <a:t>inflearn_ccd_challenge/</a:t>
             </a:r>
             <a:endParaRPr lang="en-US" sz="1700" dirty="0"/>
           </a:p>
@@ -9182,7 +8972,7 @@
                 <a:ea typeface="Noto Sans KR" pitchFamily="34" charset="-122"/>
                 <a:cs typeface="Noto Sans KR" pitchFamily="34" charset="-120"/>
               </a:rPr>
-              <a:t>├── CLAUDE.md   (1일차 그대로 복사 + 오늘 누적 반영)</a:t>
+              <a:t>├── CLAUDE.md   (1일차 그대로 + 자연어 누적 반영)</a:t>
             </a:r>
             <a:endParaRPr lang="en-US" sz="1700" dirty="0"/>
           </a:p>
@@ -9302,7 +9092,7 @@
                 <a:ea typeface="Noto Sans KR" pitchFamily="34" charset="-122"/>
                 <a:cs typeface="Noto Sans KR" pitchFamily="34" charset="-120"/>
               </a:rPr>
-              <a:t>├── notebook.ipynb</a:t>
+              <a:t>└── notebook.ipynb</a:t>
             </a:r>
             <a:endParaRPr lang="en-US" sz="1700" dirty="0"/>
           </a:p>
@@ -9313,6 +9103,15 @@
               </a:lnSpc>
               <a:buNone/>
             </a:pPr>
+            <a:endParaRPr lang="en-US" sz="1700" dirty="0"/>
+          </a:p>
+          <a:p>
+            <a:pPr indent="0" marL="0">
+              <a:lnSpc>
+                <a:spcPct val="155000"/>
+              </a:lnSpc>
+              <a:buNone/>
+            </a:pPr>
             <a:r>
               <a:rPr lang="en-US" sz="1700" dirty="0">
                 <a:solidFill>
@@ -9322,7 +9121,7 @@
                 <a:ea typeface="Noto Sans KR" pitchFamily="34" charset="-122"/>
                 <a:cs typeface="Noto Sans KR" pitchFamily="34" charset="-120"/>
               </a:rPr>
-              <a:t>└── notes.md</a:t>
+              <a:t>→ outputs/ PNG · CLAUDE.md · notebook.ipynb 를 인프런/운영 채널에 업로드</a:t>
             </a:r>
             <a:endParaRPr lang="en-US" sz="1700" dirty="0"/>
           </a:p>
@@ -9484,7 +9283,7 @@
                 <a:ea typeface="Noto Sans KR" pitchFamily="34" charset="-122"/>
                 <a:cs typeface="Noto Sans KR" pitchFamily="34" charset="-120"/>
               </a:rPr>
-              <a:t>질문 5개 (단독 3 + 결합 2) + Colab + CLAUDE.md → GitHub day2/ 푸시</a:t>
+              <a:t>질문 5개 (단독 3 + 결합 2) + Colab + CLAUDE.md → 인프런/운영 채널 업로드</a:t>
             </a:r>
             <a:endParaRPr lang="en-US" sz="1400" dirty="0"/>
           </a:p>
@@ -9686,7 +9485,7 @@
                 <a:ea typeface="Noto Sans KR" pitchFamily="34" charset="-122"/>
                 <a:cs typeface="Noto Sans KR" pitchFamily="34" charset="-120"/>
               </a:rPr>
-              <a:t>✅ GitHub 레포 day2/ 폴더에 push</a:t>
+              <a:t>✅ 운영 채널 업로드 (PNG · CLAUDE.md · notebook)</a:t>
             </a:r>
             <a:endParaRPr lang="en-US" sz="1300" dirty="0"/>
           </a:p>
@@ -11175,7 +10974,7 @@
                           <a:ea typeface="Noto Sans KR" pitchFamily="34" charset="-122"/>
                           <a:cs typeface="Noto Sans KR" pitchFamily="34" charset="-120"/>
                         </a:rPr>
-                        <a:t>GitHub day2/ 푸시 동선</a:t>
+                        <a:t>운영 채널 제출 동선</a:t>
                       </a:r>
                       <a:endParaRPr lang="en-US" sz="1100" dirty="0">
                         <a:latin typeface="Noto Sans KR" charset="0"/>
@@ -12199,7 +11998,7 @@
                 <a:ea typeface="Roboto Mono" pitchFamily="34" charset="-122"/>
                 <a:cs typeface="Roboto Mono" pitchFamily="34" charset="-120"/>
               </a:rPr>
-              <a:t>seoul_air_quality_2024.csv + seoul_air_quality_2025.csv 통합해서 EDA 해줘.</a:t>
+              <a:t>기간별_일평균_대기환경_정보_2024년.csv + 기간별_일평균_대기환경_정보_2025년.csv 통합해서 EDA 해줘.</a:t>
             </a:r>
             <a:endParaRPr lang="en-US" sz="1150" dirty="0"/>
           </a:p>
@@ -12486,137 +12285,32 @@
           </a:p>
         </p:txBody>
       </p:sp>
-      <p:sp>
-        <p:nvSpPr>
-          <p:cNvPr id="6" name="Shape 4"/>
-          <p:cNvSpPr/>
-          <p:nvPr/>
-        </p:nvSpPr>
+      <p:pic>
+        <p:nvPicPr>
+          <p:cNvPr id="6" name="Image 0" descr="/Users/sujinpark/b2b-lecture-note/20260512_inflearn_B2G_dataanalysis/assets/screenshots/day2/eda_demo.png">    </p:cNvPr>
+          <p:cNvPicPr>
+            <a:picLocks noChangeAspect="1"/>
+          </p:cNvPicPr>
+          <p:nvPr/>
+        </p:nvPicPr>
+        <p:blipFill>
+          <a:blip r:embed="rId1"/>
+          <a:srcRect l="0" r="0" t="0" b="0"/>
+          <a:stretch/>
+        </p:blipFill>
         <p:spPr>
           <a:xfrm>
             <a:off x="2194560" y="2240280"/>
             <a:ext cx="7772400" cy="3657600"/>
           </a:xfrm>
-          <a:prstGeom prst="roundRect">
-            <a:avLst>
-              <a:gd name="adj" fmla="val 3000"/>
-            </a:avLst>
-          </a:prstGeom>
-          <a:solidFill>
-            <a:srgbClr val="F5F7FA"/>
-          </a:solidFill>
-          <a:ln w="12700">
-            <a:solidFill>
-              <a:srgbClr val="CBD5E0"/>
-            </a:solidFill>
-            <a:prstDash val="dash"/>
-          </a:ln>
-        </p:spPr>
-      </p:sp>
-      <p:sp>
-        <p:nvSpPr>
-          <p:cNvPr id="7" name="Text 5"/>
-          <p:cNvSpPr/>
-          <p:nvPr/>
-        </p:nvSpPr>
-        <p:spPr>
-          <a:xfrm>
-            <a:off x="2194560" y="3703320"/>
-            <a:ext cx="7772400" cy="731520"/>
-          </a:xfrm>
-          <a:prstGeom prst="rect">
-            <a:avLst/>
-          </a:prstGeom>
-          <a:noFill/>
-          <a:ln/>
-        </p:spPr>
-        <p:txBody>
-          <a:bodyPr wrap="square" rtlCol="0" anchor="ctr"/>
-          <a:lstStyle/>
-          <a:p>
-            <a:pPr algn="ctr" indent="0" marL="0">
-              <a:lnSpc>
-                <a:spcPct val="140000"/>
-              </a:lnSpc>
-              <a:buNone/>
-            </a:pPr>
-            <a:r>
-              <a:rPr lang="en-US" sz="1400" i="1" dirty="0">
-                <a:solidFill>
-                  <a:srgbClr val="718096"/>
-                </a:solidFill>
-                <a:latin typeface="Noto Sans KR" pitchFamily="34" charset="0"/>
-                <a:ea typeface="Noto Sans KR" pitchFamily="34" charset="-122"/>
-                <a:cs typeface="Noto Sans KR" pitchFamily="34" charset="-120"/>
-              </a:rPr>
-              <a:t>📷  결과 이미지 위치</a:t>
-            </a:r>
-            <a:endParaRPr lang="en-US" sz="1400" dirty="0"/>
-          </a:p>
-          <a:p>
-            <a:pPr algn="ctr" indent="0" marL="0">
-              <a:lnSpc>
-                <a:spcPct val="140000"/>
-              </a:lnSpc>
-              <a:buNone/>
-            </a:pPr>
-            <a:r>
-              <a:rPr lang="en-US" sz="1400" i="1" dirty="0">
-                <a:solidFill>
-                  <a:srgbClr val="718096"/>
-                </a:solidFill>
-                <a:latin typeface="Noto Sans KR" pitchFamily="34" charset="0"/>
-                <a:ea typeface="Noto Sans KR" pitchFamily="34" charset="-122"/>
-                <a:cs typeface="Noto Sans KR" pitchFamily="34" charset="-120"/>
-              </a:rPr>
-              <a:t>(강의 시연 캡처가 들어갈 자리)</a:t>
-            </a:r>
-            <a:endParaRPr lang="en-US" sz="1400" dirty="0"/>
-          </a:p>
-        </p:txBody>
-      </p:sp>
-      <p:sp>
-        <p:nvSpPr>
-          <p:cNvPr id="8" name="Text 6"/>
-          <p:cNvSpPr/>
-          <p:nvPr/>
-        </p:nvSpPr>
-        <p:spPr>
-          <a:xfrm>
-            <a:off x="2194560" y="4983480"/>
-            <a:ext cx="7772400" cy="365760"/>
-          </a:xfrm>
-          <a:prstGeom prst="rect">
-            <a:avLst/>
-          </a:prstGeom>
-          <a:noFill/>
-          <a:ln/>
-        </p:spPr>
-        <p:txBody>
-          <a:bodyPr wrap="square" rtlCol="0" anchor="ctr"/>
-          <a:lstStyle/>
-          <a:p>
-            <a:pPr algn="ctr" indent="0" marL="0">
-              <a:buNone/>
-            </a:pPr>
-            <a:r>
-              <a:rPr lang="en-US" sz="1000" i="1" dirty="0">
-                <a:solidFill>
-                  <a:srgbClr val="718096"/>
-                </a:solidFill>
-                <a:latin typeface="Roboto Mono" pitchFamily="34" charset="0"/>
-                <a:ea typeface="Roboto Mono" pitchFamily="34" charset="-122"/>
-                <a:cs typeface="Roboto Mono" pitchFamily="34" charset="-120"/>
-              </a:rPr>
-              <a:t>screenshots/day2/eda_demo.png</a:t>
-            </a:r>
-            <a:endParaRPr lang="en-US" sz="1000" dirty="0"/>
-          </a:p>
-        </p:txBody>
-      </p:sp>
-      <p:sp>
-        <p:nvSpPr>
-          <p:cNvPr id="9" name="Text 7"/>
+          <a:prstGeom prst="rect">
+            <a:avLst/>
+          </a:prstGeom>
+        </p:spPr>
+      </p:pic>
+      <p:sp>
+        <p:nvSpPr>
+          <p:cNvPr id="7" name="Text 4"/>
           <p:cNvSpPr/>
           <p:nvPr/>
         </p:nvSpPr>
@@ -12655,7 +12349,7 @@
       </p:sp>
       <p:sp>
         <p:nvSpPr>
-          <p:cNvPr id="10" name="Text 8"/>
+          <p:cNvPr id="8" name="Text 5"/>
           <p:cNvSpPr/>
           <p:nvPr/>
         </p:nvSpPr>

--- a/ppt/b2g_day2_eda.pptx
+++ b/ppt/b2g_day2_eda.pptx
@@ -11537,7 +11537,7 @@
                 <a:ea typeface="Noto Sans KR" pitchFamily="34" charset="-122"/>
                 <a:cs typeface="Noto Sans KR" pitchFamily="34" charset="-120"/>
               </a:rPr>
-              <a:t>오늘 쓸 데이터 6종</a:t>
+              <a:t>오늘 쓸 데이터 6종 (원칙 — 직접 다운로드)</a:t>
             </a:r>
             <a:endParaRPr lang="en-US" sz="4200" dirty="0"/>
           </a:p>
@@ -11602,7 +11602,7 @@
                 <a:ea typeface="Noto Sans KR" pitchFamily="34" charset="-122"/>
                 <a:cs typeface="Noto Sans KR" pitchFamily="34" charset="-120"/>
               </a:rPr>
-              <a:t>· AQ — 서울 미세먼지 일별 (메인, 1일차 그대로)</a:t>
+              <a:t>· AQ — 서울 미세먼지 일별 → 서울 열린데이터광장 OA-2218</a:t>
             </a:r>
             <a:endParaRPr lang="en-US" sz="1700" dirty="0"/>
           </a:p>
@@ -11622,7 +11622,7 @@
                 <a:ea typeface="Noto Sans KR" pitchFamily="34" charset="-122"/>
                 <a:cs typeface="Noto Sans KR" pitchFamily="34" charset="-120"/>
               </a:rPr>
-              <a:t>· BIKE — 따릉이 일별 대여 건수 (보유)</a:t>
+              <a:t>· BIKE — 따릉이 일별 대여 → 서울 열린데이터광장 ("따릉이 일별" 검색)</a:t>
             </a:r>
             <a:endParaRPr lang="en-US" sz="1700" dirty="0"/>
           </a:p>
@@ -11642,7 +11642,7 @@
                 <a:ea typeface="Noto Sans KR" pitchFamily="34" charset="-122"/>
                 <a:cs typeface="Noto Sans KR" pitchFamily="34" charset="-120"/>
               </a:rPr>
-              <a:t>· SUBWAY — 지하철 일별 총 승하차 (보유)</a:t>
+              <a:t>· SUBWAY — 지하철 일별 총 승하차 → 서울 열린데이터광장</a:t>
             </a:r>
             <a:endParaRPr lang="en-US" sz="1700" dirty="0"/>
           </a:p>
@@ -11662,7 +11662,7 @@
                 <a:ea typeface="Noto Sans KR" pitchFamily="34" charset="-122"/>
                 <a:cs typeface="Noto Sans KR" pitchFamily="34" charset="-120"/>
               </a:rPr>
-              <a:t>· WEATHER — 기상청 ASOS 서울 일자료 (강사 사전 배포)</a:t>
+              <a:t>· WEATHER — 기상청 ASOS 서울 일자료 → data.kma.go.kr (회원가입 필요)</a:t>
             </a:r>
             <a:endParaRPr lang="en-US" sz="1700" dirty="0"/>
           </a:p>
@@ -11682,7 +11682,7 @@
                 <a:ea typeface="Noto Sans KR" pitchFamily="34" charset="-122"/>
                 <a:cs typeface="Noto Sans KR" pitchFamily="34" charset="-120"/>
               </a:rPr>
-              <a:t>· BUZZ — 검색량/언급량 (네이버 데이터랩·구글 트렌드, 강사 사전 배포)</a:t>
+              <a:t>· BUZZ — 검색량/언급량 → 네이버 데이터랩 + 구글 트렌드</a:t>
             </a:r>
             <a:endParaRPr lang="en-US" sz="1700" dirty="0"/>
           </a:p>
@@ -11702,7 +11702,36 @@
                 <a:ea typeface="Noto Sans KR" pitchFamily="34" charset="-122"/>
                 <a:cs typeface="Noto Sans KR" pitchFamily="34" charset="-120"/>
               </a:rPr>
-              <a:t>· SHOP — 4개 도메인 적재본 (다이소·올리브영·컬리·네이버쇼핑)</a:t>
+              <a:t>· SHOP — 4개 도메인 적재본 → 강사 자산 (4일차에 활용)</a:t>
+            </a:r>
+            <a:endParaRPr lang="en-US" sz="1700" dirty="0"/>
+          </a:p>
+          <a:p>
+            <a:pPr indent="0" marL="0">
+              <a:lnSpc>
+                <a:spcPct val="155000"/>
+              </a:lnSpc>
+              <a:buNone/>
+            </a:pPr>
+            <a:endParaRPr lang="en-US" sz="1700" dirty="0"/>
+          </a:p>
+          <a:p>
+            <a:pPr indent="0" marL="0">
+              <a:lnSpc>
+                <a:spcPct val="155000"/>
+              </a:lnSpc>
+              <a:buNone/>
+            </a:pPr>
+            <a:r>
+              <a:rPr lang="en-US" sz="1700" dirty="0">
+                <a:solidFill>
+                  <a:srgbClr val="4A5568"/>
+                </a:solidFill>
+                <a:latin typeface="Noto Sans KR" pitchFamily="34" charset="0"/>
+                <a:ea typeface="Noto Sans KR" pitchFamily="34" charset="-122"/>
+                <a:cs typeface="Noto Sans KR" pitchFamily="34" charset="-120"/>
+              </a:rPr>
+              <a:t>· 받기 어려운 분은 운영 채널로 강사에게 요청</a:t>
             </a:r>
             <a:endParaRPr lang="en-US" sz="1700" dirty="0"/>
           </a:p>

--- a/ppt/b2g_day2_eda.pptx
+++ b/ppt/b2g_day2_eda.pptx
@@ -31,9 +31,10 @@
     <p:sldId id="279" r:id="rId25"/>
     <p:sldId id="280" r:id="rId26"/>
     <p:sldId id="281" r:id="rId27"/>
+    <p:sldId id="282" r:id="rId28"/>
   </p:sldIdLst>
   <p:notesMasterIdLst>
-    <p:notesMasterId r:id="rId28"/>
+    <p:notesMasterId r:id="rId29"/>
   </p:notesMasterIdLst>
   <p:sldSz cx="12192000" cy="6858000"/>
   <p:notesSz cx="6858000" cy="12192000"/>
@@ -2135,6 +2136,94 @@
             <a:fld id="{F7021451-1387-4CA6-816F-3879F97B5CBC}" type="slidenum">
               <a:rPr lang="en-US"/>
               <a:t>26</a:t>
+            </a:fld>
+            <a:endParaRPr lang="en-US"/>
+          </a:p>
+        </p:txBody>
+      </p:sp>
+    </p:spTree>
+    <p:extLst>
+      <p:ext uri="{BB962C8B-B14F-4D97-AF65-F5344CB8AC3E}">
+        <p14:creationId xmlns:p14="http://schemas.microsoft.com/office/powerpoint/2010/main" val="1024086991"/>
+      </p:ext>
+    </p:extLst>
+  </p:cSld>
+  <p:clrMapOvr>
+    <a:masterClrMapping/>
+  </p:clrMapOvr>
+</p:notes>
+</file>
+
+<file path=ppt/notesSlides/notesSlide27.xml><?xml version="1.0" encoding="utf-8"?>
+<p:notes xmlns:a="http://schemas.openxmlformats.org/drawingml/2006/main" xmlns:r="http://schemas.openxmlformats.org/officeDocument/2006/relationships" xmlns:p="http://schemas.openxmlformats.org/presentationml/2006/main">
+  <p:cSld>
+    <p:spTree>
+      <p:nvGrpSpPr>
+        <p:cNvPr id="1" name=""/>
+        <p:cNvGrpSpPr/>
+        <p:nvPr/>
+      </p:nvGrpSpPr>
+      <p:grpSpPr>
+        <a:xfrm>
+          <a:off x="0" y="0"/>
+          <a:ext cx="0" cy="0"/>
+          <a:chOff x="0" y="0"/>
+          <a:chExt cx="0" cy="0"/>
+        </a:xfrm>
+      </p:grpSpPr>
+      <p:sp>
+        <p:nvSpPr>
+          <p:cNvPr id="2" name="Slide Image Placeholder 1"/>
+          <p:cNvSpPr>
+            <a:spLocks noGrp="1" noRot="1" noChangeAspect="1"/>
+          </p:cNvSpPr>
+          <p:nvPr>
+            <p:ph type="sldImg"/>
+          </p:nvPr>
+        </p:nvSpPr>
+        <p:spPr/>
+      </p:sp>
+      <p:sp>
+        <p:nvSpPr>
+          <p:cNvPr id="3" name="Notes Placeholder 2"/>
+          <p:cNvSpPr>
+            <a:spLocks noGrp="1"/>
+          </p:cNvSpPr>
+          <p:nvPr>
+            <p:ph type="body" idx="1"/>
+          </p:nvPr>
+        </p:nvSpPr>
+        <p:spPr/>
+        <p:txBody>
+          <a:bodyPr/>
+          <a:lstStyle/>
+          <a:p>
+            <a:r>
+              <a:rPr lang="en-US" dirty="0"/>
+              <a:t/>
+            </a:r>
+            <a:endParaRPr lang="en-US" dirty="0"/>
+          </a:p>
+        </p:txBody>
+      </p:sp>
+      <p:sp>
+        <p:nvSpPr>
+          <p:cNvPr id="4" name="Slide Number Placeholder 3"/>
+          <p:cNvSpPr>
+            <a:spLocks noGrp="1"/>
+          </p:cNvSpPr>
+          <p:nvPr>
+            <p:ph type="sldNum" sz="quarter" idx="10"/>
+          </p:nvPr>
+        </p:nvSpPr>
+        <p:spPr/>
+        <p:txBody>
+          <a:bodyPr/>
+          <a:lstStyle/>
+          <a:p>
+            <a:fld id="{F7021451-1387-4CA6-816F-3879F97B5CBC}" type="slidenum">
+              <a:rPr lang="en-US"/>
+              <a:t>27</a:t>
             </a:fld>
             <a:endParaRPr lang="en-US"/>
           </a:p>
@@ -3506,7 +3595,7 @@
         <p:spPr>
           <a:xfrm>
             <a:off x="548640" y="960120"/>
-            <a:ext cx="11091672" cy="292608"/>
+            <a:ext cx="10515600" cy="292608"/>
           </a:xfrm>
           <a:prstGeom prst="rect">
             <a:avLst/>
@@ -3522,7 +3611,7 @@
               <a:buNone/>
             </a:pPr>
             <a:r>
-              <a:rPr lang="en-US" sz="1100" b="1" spc="50" kern="0" dirty="0">
+              <a:rPr lang="en-US" sz="1100" b="1" spc="150" kern="0" dirty="0">
                 <a:solidFill>
                   <a:srgbClr val="00D4AA"/>
                 </a:solidFill>
@@ -3530,7 +3619,7 @@
                 <a:ea typeface="Noto Sans KR" pitchFamily="34" charset="-122"/>
                 <a:cs typeface="Noto Sans KR" pitchFamily="34" charset="-120"/>
               </a:rPr>
-              <a:t>💬 함께 볼 시연 프롬프트 — 따라 치지 않으셔도 됩니다</a:t>
+              <a:t>섹션 1 / 6</a:t>
             </a:r>
             <a:endParaRPr lang="en-US" sz="1100" dirty="0"/>
           </a:p>
@@ -3545,7 +3634,7 @@
         <p:spPr>
           <a:xfrm>
             <a:off x="548640" y="1508760"/>
-            <a:ext cx="11091672" cy="1005840"/>
+            <a:ext cx="11091672" cy="1371600"/>
           </a:xfrm>
           <a:prstGeom prst="rect">
             <a:avLst/>
@@ -3559,12 +3648,12 @@
           <a:p>
             <a:pPr indent="0" marL="0">
               <a:lnSpc>
-                <a:spcPct val="115000"/>
+                <a:spcPct val="110000"/>
               </a:lnSpc>
               <a:buNone/>
             </a:pPr>
             <a:r>
-              <a:rPr lang="en-US" sz="3400" b="1" spc="-50" kern="0" dirty="0">
+              <a:rPr lang="en-US" sz="4200" b="1" spc="-50" kern="0" dirty="0">
                 <a:solidFill>
                   <a:srgbClr val="1A1F36"/>
                 </a:solidFill>
@@ -3572,9 +3661,9 @@
                 <a:ea typeface="Noto Sans KR" pitchFamily="34" charset="-122"/>
                 <a:cs typeface="Noto Sans KR" pitchFamily="34" charset="-120"/>
               </a:rPr>
-              <a:t>1단계 — 본인 관심사 1개부터 단독 분석</a:t>
-            </a:r>
-            <a:endParaRPr lang="en-US" sz="3400" dirty="0"/>
+              <a:t>분석 질문 뱅크 — 50개</a:t>
+            </a:r>
+            <a:endParaRPr lang="en-US" sz="4200" dirty="0"/>
           </a:p>
         </p:txBody>
       </p:sp>
@@ -3586,7 +3675,7 @@
         </p:nvSpPr>
         <p:spPr>
           <a:xfrm>
-            <a:off x="548640" y="2606040"/>
+            <a:off x="548640" y="2971800"/>
             <a:ext cx="1828800" cy="0"/>
           </a:xfrm>
           <a:prstGeom prst="line">
@@ -3603,116 +3692,138 @@
       </p:sp>
       <p:sp>
         <p:nvSpPr>
-          <p:cNvPr id="7" name="Shape 5"/>
-          <p:cNvSpPr/>
-          <p:nvPr/>
-        </p:nvSpPr>
-        <p:spPr>
-          <a:xfrm>
-            <a:off x="548640" y="2926080"/>
-            <a:ext cx="11091672" cy="3200400"/>
-          </a:xfrm>
-          <a:prstGeom prst="roundRect">
-            <a:avLst>
-              <a:gd name="adj" fmla="val 1714"/>
-            </a:avLst>
-          </a:prstGeom>
-          <a:solidFill>
-            <a:srgbClr val="F1F5F9"/>
-          </a:solidFill>
-          <a:ln w="6350">
-            <a:solidFill>
-              <a:srgbClr val="E2E8F0"/>
-            </a:solidFill>
-            <a:prstDash val="solid"/>
-          </a:ln>
-        </p:spPr>
+          <p:cNvPr id="7" name="Text 5"/>
+          <p:cNvSpPr/>
+          <p:nvPr/>
+        </p:nvSpPr>
+        <p:spPr>
+          <a:xfrm>
+            <a:off x="548640" y="3200400"/>
+            <a:ext cx="11091672" cy="2788920"/>
+          </a:xfrm>
+          <a:prstGeom prst="rect">
+            <a:avLst/>
+          </a:prstGeom>
+          <a:noFill/>
+          <a:ln/>
+        </p:spPr>
+        <p:txBody>
+          <a:bodyPr wrap="square" rtlCol="0" anchor="t"/>
+          <a:lstStyle/>
+          <a:p>
+            <a:pPr indent="0" marL="0">
+              <a:lnSpc>
+                <a:spcPct val="155000"/>
+              </a:lnSpc>
+              <a:buNone/>
+            </a:pPr>
+            <a:r>
+              <a:rPr lang="en-US" sz="1700" dirty="0">
+                <a:solidFill>
+                  <a:srgbClr val="4A5568"/>
+                </a:solidFill>
+                <a:latin typeface="Noto Sans KR" pitchFamily="34" charset="0"/>
+                <a:ea typeface="Noto Sans KR" pitchFamily="34" charset="-122"/>
+                <a:cs typeface="Noto Sans KR" pitchFamily="34" charset="-120"/>
+              </a:rPr>
+              <a:t>· A. 미세먼지 단독 (10) / B. + 따릉이 (5) / C. + 지하철 (5)</a:t>
+            </a:r>
+            <a:endParaRPr lang="en-US" sz="1700" dirty="0"/>
+          </a:p>
+          <a:p>
+            <a:pPr indent="0" marL="0">
+              <a:lnSpc>
+                <a:spcPct val="155000"/>
+              </a:lnSpc>
+              <a:buNone/>
+            </a:pPr>
+            <a:r>
+              <a:rPr lang="en-US" sz="1700" dirty="0">
+                <a:solidFill>
+                  <a:srgbClr val="4A5568"/>
+                </a:solidFill>
+                <a:latin typeface="Noto Sans KR" pitchFamily="34" charset="0"/>
+                <a:ea typeface="Noto Sans KR" pitchFamily="34" charset="-122"/>
+                <a:cs typeface="Noto Sans KR" pitchFamily="34" charset="-120"/>
+              </a:rPr>
+              <a:t>· D. + 날씨 (8) / E. + 언급량 (4) / F. + 쇼핑 적재본 (8)</a:t>
+            </a:r>
+            <a:endParaRPr lang="en-US" sz="1700" dirty="0"/>
+          </a:p>
+          <a:p>
+            <a:pPr indent="0" marL="0">
+              <a:lnSpc>
+                <a:spcPct val="155000"/>
+              </a:lnSpc>
+              <a:buNone/>
+            </a:pPr>
+            <a:r>
+              <a:rPr lang="en-US" sz="1700" dirty="0">
+                <a:solidFill>
+                  <a:srgbClr val="4A5568"/>
+                </a:solidFill>
+                <a:latin typeface="Noto Sans KR" pitchFamily="34" charset="0"/>
+                <a:ea typeface="Noto Sans KR" pitchFamily="34" charset="-122"/>
+                <a:cs typeface="Noto Sans KR" pitchFamily="34" charset="-120"/>
+              </a:rPr>
+              <a:t>· G. 답 안 되는 질문 (5) — 일별 한계 인식</a:t>
+            </a:r>
+            <a:endParaRPr lang="en-US" sz="1700" dirty="0"/>
+          </a:p>
+          <a:p>
+            <a:pPr indent="0" marL="0">
+              <a:lnSpc>
+                <a:spcPct val="155000"/>
+              </a:lnSpc>
+              <a:buNone/>
+            </a:pPr>
+            <a:r>
+              <a:rPr lang="en-US" sz="1700" dirty="0">
+                <a:solidFill>
+                  <a:srgbClr val="4A5568"/>
+                </a:solidFill>
+                <a:latin typeface="Noto Sans KR" pitchFamily="34" charset="0"/>
+                <a:ea typeface="Noto Sans KR" pitchFamily="34" charset="-122"/>
+                <a:cs typeface="Noto Sans KR" pitchFamily="34" charset="-120"/>
+              </a:rPr>
+              <a:t>· H. 워밍업 (5) — 본인 자치구 / "가장 깨끗했던 하루" 등</a:t>
+            </a:r>
+            <a:endParaRPr lang="en-US" sz="1700" dirty="0"/>
+          </a:p>
+          <a:p>
+            <a:pPr indent="0" marL="0">
+              <a:lnSpc>
+                <a:spcPct val="155000"/>
+              </a:lnSpc>
+              <a:buNone/>
+            </a:pPr>
+            <a:endParaRPr lang="en-US" sz="1700" dirty="0"/>
+          </a:p>
+          <a:p>
+            <a:pPr indent="0" marL="0">
+              <a:lnSpc>
+                <a:spcPct val="155000"/>
+              </a:lnSpc>
+              <a:buNone/>
+            </a:pPr>
+            <a:r>
+              <a:rPr lang="en-US" sz="1700" dirty="0">
+                <a:solidFill>
+                  <a:srgbClr val="4A5568"/>
+                </a:solidFill>
+                <a:latin typeface="Noto Sans KR" pitchFamily="34" charset="0"/>
+                <a:ea typeface="Noto Sans KR" pitchFamily="34" charset="-122"/>
+                <a:cs typeface="Noto Sans KR" pitchFamily="34" charset="-120"/>
+              </a:rPr>
+              <a:t>· 5분 시간 → 본인 관심사 5개 픽</a:t>
+            </a:r>
+            <a:endParaRPr lang="en-US" sz="1700" dirty="0"/>
+          </a:p>
+        </p:txBody>
       </p:sp>
       <p:sp>
         <p:nvSpPr>
           <p:cNvPr id="8" name="Text 6"/>
-          <p:cNvSpPr/>
-          <p:nvPr/>
-        </p:nvSpPr>
-        <p:spPr>
-          <a:xfrm>
-            <a:off x="713232" y="3035808"/>
-            <a:ext cx="10762488" cy="2980944"/>
-          </a:xfrm>
-          <a:prstGeom prst="rect">
-            <a:avLst/>
-          </a:prstGeom>
-          <a:noFill/>
-          <a:ln/>
-        </p:spPr>
-        <p:txBody>
-          <a:bodyPr wrap="square" rtlCol="0" anchor="t"/>
-          <a:lstStyle/>
-          <a:p>
-            <a:pPr indent="0" marL="0">
-              <a:lnSpc>
-                <a:spcPct val="140000"/>
-              </a:lnSpc>
-              <a:buNone/>
-            </a:pPr>
-            <a:r>
-              <a:rPr lang="en-US" sz="1150" dirty="0">
-                <a:solidFill>
-                  <a:srgbClr val="1A1F36"/>
-                </a:solidFill>
-                <a:latin typeface="Roboto Mono" pitchFamily="34" charset="0"/>
-                <a:ea typeface="Roboto Mono" pitchFamily="34" charset="-122"/>
-                <a:cs typeface="Roboto Mono" pitchFamily="34" charset="-120"/>
-              </a:rPr>
-              <a:t>"내가 사는 자치구의 2025 PM2.5 평균은?" 같은 식으로</a:t>
-            </a:r>
-            <a:endParaRPr lang="en-US" sz="1150" dirty="0"/>
-          </a:p>
-          <a:p>
-            <a:pPr indent="0" marL="0">
-              <a:lnSpc>
-                <a:spcPct val="140000"/>
-              </a:lnSpc>
-              <a:buNone/>
-            </a:pPr>
-            <a:r>
-              <a:rPr lang="en-US" sz="1150" dirty="0">
-                <a:solidFill>
-                  <a:srgbClr val="1A1F36"/>
-                </a:solidFill>
-                <a:latin typeface="Roboto Mono" pitchFamily="34" charset="0"/>
-                <a:ea typeface="Roboto Mono" pitchFamily="34" charset="-122"/>
-                <a:cs typeface="Roboto Mono" pitchFamily="34" charset="-120"/>
-              </a:rPr>
-              <a:t>본인이 고른 질문 1개를 그대로 던져봐.</a:t>
-            </a:r>
-            <a:endParaRPr lang="en-US" sz="1150" dirty="0"/>
-          </a:p>
-          <a:p>
-            <a:pPr indent="0" marL="0">
-              <a:lnSpc>
-                <a:spcPct val="140000"/>
-              </a:lnSpc>
-              <a:buNone/>
-            </a:pPr>
-            <a:r>
-              <a:rPr lang="en-US" sz="1150" dirty="0">
-                <a:solidFill>
-                  <a:srgbClr val="1A1F36"/>
-                </a:solidFill>
-                <a:latin typeface="Roboto Mono" pitchFamily="34" charset="0"/>
-                <a:ea typeface="Roboto Mono" pitchFamily="34" charset="-122"/>
-                <a:cs typeface="Roboto Mono" pitchFamily="34" charset="-120"/>
-              </a:rPr>
-              <a:t>결과는 표 + 한 줄 인사이트로.</a:t>
-            </a:r>
-            <a:endParaRPr lang="en-US" sz="1150" dirty="0"/>
-          </a:p>
-        </p:txBody>
-      </p:sp>
-      <p:sp>
-        <p:nvSpPr>
-          <p:cNvPr id="9" name="Text 7"/>
           <p:cNvSpPr/>
           <p:nvPr/>
         </p:nvSpPr>
@@ -3743,7 +3854,7 @@
                 <a:ea typeface="Noto Sans KR" pitchFamily="34" charset="-122"/>
                 <a:cs typeface="Noto Sans KR" pitchFamily="34" charset="-120"/>
               </a:rPr>
-              <a:t>10 / 26</a:t>
+              <a:t>10 / 27</a:t>
             </a:r>
             <a:endParaRPr lang="en-US" sz="900" dirty="0"/>
           </a:p>
@@ -3827,7 +3938,7 @@
                 <a:ea typeface="Noto Sans KR" pitchFamily="34" charset="-122"/>
                 <a:cs typeface="Noto Sans KR" pitchFamily="34" charset="-120"/>
               </a:rPr>
-              <a:t>DAY 2 · STEP 1</a:t>
+              <a:t>파트 2. 분석 질문 던지기 + 결합 데이터 EDA</a:t>
             </a:r>
             <a:endParaRPr lang="en-US" sz="1400" dirty="0"/>
           </a:p>
@@ -3842,7 +3953,7 @@
         <p:spPr>
           <a:xfrm>
             <a:off x="548640" y="960120"/>
-            <a:ext cx="10515600" cy="292608"/>
+            <a:ext cx="11091672" cy="292608"/>
           </a:xfrm>
           <a:prstGeom prst="rect">
             <a:avLst/>
@@ -3858,7 +3969,7 @@
               <a:buNone/>
             </a:pPr>
             <a:r>
-              <a:rPr lang="en-US" sz="1100" b="1" spc="150" kern="0" dirty="0">
+              <a:rPr lang="en-US" sz="1100" b="1" spc="50" kern="0" dirty="0">
                 <a:solidFill>
                   <a:srgbClr val="00D4AA"/>
                 </a:solidFill>
@@ -3866,7 +3977,7 @@
                 <a:ea typeface="Noto Sans KR" pitchFamily="34" charset="-122"/>
                 <a:cs typeface="Noto Sans KR" pitchFamily="34" charset="-120"/>
               </a:rPr>
-              <a:t>오늘 만든 결과물</a:t>
+              <a:t>💬 함께 볼 시연 프롬프트 — 따라 치지 않으셔도 됩니다</a:t>
             </a:r>
             <a:endParaRPr lang="en-US" sz="1100" dirty="0"/>
           </a:p>
@@ -3880,8 +3991,8 @@
         </p:nvSpPr>
         <p:spPr>
           <a:xfrm>
-            <a:off x="548640" y="1417320"/>
-            <a:ext cx="11091672" cy="640080"/>
+            <a:off x="548640" y="1508760"/>
+            <a:ext cx="11091672" cy="1005840"/>
           </a:xfrm>
           <a:prstGeom prst="rect">
             <a:avLst/>
@@ -3894,10 +4005,13 @@
           <a:lstStyle/>
           <a:p>
             <a:pPr indent="0" marL="0">
-              <a:buNone/>
-            </a:pPr>
-            <a:r>
-              <a:rPr lang="en-US" sz="2800" b="1" spc="-30" kern="0" dirty="0">
+              <a:lnSpc>
+                <a:spcPct val="115000"/>
+              </a:lnSpc>
+              <a:buNone/>
+            </a:pPr>
+            <a:r>
+              <a:rPr lang="en-US" sz="3400" b="1" spc="-50" kern="0" dirty="0">
                 <a:solidFill>
                   <a:srgbClr val="1A1F36"/>
                 </a:solidFill>
@@ -3905,77 +4019,147 @@
                 <a:ea typeface="Noto Sans KR" pitchFamily="34" charset="-122"/>
                 <a:cs typeface="Noto Sans KR" pitchFamily="34" charset="-120"/>
               </a:rPr>
-              <a:t>1단계 결과 — 단독 분석</a:t>
-            </a:r>
-            <a:endParaRPr lang="en-US" sz="2800" dirty="0"/>
-          </a:p>
-        </p:txBody>
-      </p:sp>
-      <p:pic>
-        <p:nvPicPr>
-          <p:cNvPr id="6" name="Image 0" descr="/Users/sujinpark/b2b-lecture-note/20260512_inflearn_B2G_dataanalysis/assets/screenshots/day2/single_data_result.png">    </p:cNvPr>
-          <p:cNvPicPr>
-            <a:picLocks noChangeAspect="1"/>
-          </p:cNvPicPr>
-          <p:nvPr/>
-        </p:nvPicPr>
-        <p:blipFill>
-          <a:blip r:embed="rId1"/>
-          <a:srcRect l="0" r="0" t="0" b="0"/>
-          <a:stretch/>
-        </p:blipFill>
-        <p:spPr>
-          <a:xfrm>
-            <a:off x="2194560" y="2240280"/>
-            <a:ext cx="7772400" cy="3657600"/>
-          </a:xfrm>
-          <a:prstGeom prst="rect">
-            <a:avLst/>
-          </a:prstGeom>
-        </p:spPr>
-      </p:pic>
-      <p:sp>
-        <p:nvSpPr>
-          <p:cNvPr id="7" name="Text 4"/>
-          <p:cNvSpPr/>
-          <p:nvPr/>
-        </p:nvSpPr>
-        <p:spPr>
-          <a:xfrm>
-            <a:off x="548640" y="5989320"/>
-            <a:ext cx="11091672" cy="411480"/>
-          </a:xfrm>
-          <a:prstGeom prst="rect">
-            <a:avLst/>
-          </a:prstGeom>
-          <a:noFill/>
-          <a:ln/>
-        </p:spPr>
-        <p:txBody>
-          <a:bodyPr wrap="square" rtlCol="0" anchor="ctr"/>
-          <a:lstStyle/>
-          <a:p>
-            <a:pPr algn="ctr" indent="0" marL="0">
-              <a:buNone/>
-            </a:pPr>
-            <a:r>
-              <a:rPr lang="en-US" sz="1200" i="1" dirty="0">
-                <a:solidFill>
-                  <a:srgbClr val="718096"/>
-                </a:solidFill>
-                <a:latin typeface="Noto Sans KR" pitchFamily="34" charset="0"/>
-                <a:ea typeface="Noto Sans KR" pitchFamily="34" charset="-122"/>
-                <a:cs typeface="Noto Sans KR" pitchFamily="34" charset="-120"/>
-              </a:rPr>
-              <a:t>수강생이 고른 질문 1개의 답</a:t>
-            </a:r>
-            <a:endParaRPr lang="en-US" sz="1200" dirty="0"/>
-          </a:p>
-        </p:txBody>
-      </p:sp>
-      <p:sp>
-        <p:nvSpPr>
-          <p:cNvPr id="8" name="Text 5"/>
+              <a:t>1단계 — 본인 관심사 1개부터 단독 분석</a:t>
+            </a:r>
+            <a:endParaRPr lang="en-US" sz="3400" dirty="0"/>
+          </a:p>
+        </p:txBody>
+      </p:sp>
+      <p:sp>
+        <p:nvSpPr>
+          <p:cNvPr id="6" name="Shape 4"/>
+          <p:cNvSpPr/>
+          <p:nvPr/>
+        </p:nvSpPr>
+        <p:spPr>
+          <a:xfrm>
+            <a:off x="548640" y="2606040"/>
+            <a:ext cx="1828800" cy="0"/>
+          </a:xfrm>
+          <a:prstGeom prst="line">
+            <a:avLst/>
+          </a:prstGeom>
+          <a:noFill/>
+          <a:ln w="25400">
+            <a:solidFill>
+              <a:srgbClr val="00D4AA"/>
+            </a:solidFill>
+            <a:prstDash val="solid"/>
+          </a:ln>
+        </p:spPr>
+      </p:sp>
+      <p:sp>
+        <p:nvSpPr>
+          <p:cNvPr id="7" name="Shape 5"/>
+          <p:cNvSpPr/>
+          <p:nvPr/>
+        </p:nvSpPr>
+        <p:spPr>
+          <a:xfrm>
+            <a:off x="548640" y="2926080"/>
+            <a:ext cx="11091672" cy="3200400"/>
+          </a:xfrm>
+          <a:prstGeom prst="roundRect">
+            <a:avLst>
+              <a:gd name="adj" fmla="val 1714"/>
+            </a:avLst>
+          </a:prstGeom>
+          <a:solidFill>
+            <a:srgbClr val="F1F5F9"/>
+          </a:solidFill>
+          <a:ln w="6350">
+            <a:solidFill>
+              <a:srgbClr val="E2E8F0"/>
+            </a:solidFill>
+            <a:prstDash val="solid"/>
+          </a:ln>
+        </p:spPr>
+      </p:sp>
+      <p:sp>
+        <p:nvSpPr>
+          <p:cNvPr id="8" name="Text 6"/>
+          <p:cNvSpPr/>
+          <p:nvPr/>
+        </p:nvSpPr>
+        <p:spPr>
+          <a:xfrm>
+            <a:off x="713232" y="3035808"/>
+            <a:ext cx="10762488" cy="2980944"/>
+          </a:xfrm>
+          <a:prstGeom prst="rect">
+            <a:avLst/>
+          </a:prstGeom>
+          <a:noFill/>
+          <a:ln/>
+        </p:spPr>
+        <p:txBody>
+          <a:bodyPr wrap="square" rtlCol="0" anchor="t"/>
+          <a:lstStyle/>
+          <a:p>
+            <a:pPr indent="0" marL="0">
+              <a:lnSpc>
+                <a:spcPct val="140000"/>
+              </a:lnSpc>
+              <a:buNone/>
+            </a:pPr>
+            <a:r>
+              <a:rPr lang="en-US" sz="1150" dirty="0">
+                <a:solidFill>
+                  <a:srgbClr val="1A1F36"/>
+                </a:solidFill>
+                <a:latin typeface="Roboto Mono" pitchFamily="34" charset="0"/>
+                <a:ea typeface="Roboto Mono" pitchFamily="34" charset="-122"/>
+                <a:cs typeface="Roboto Mono" pitchFamily="34" charset="-120"/>
+              </a:rPr>
+              <a:t>"내가 사는 자치구의 2025 PM2.5 평균은?" 같은 식으로</a:t>
+            </a:r>
+            <a:endParaRPr lang="en-US" sz="1150" dirty="0"/>
+          </a:p>
+          <a:p>
+            <a:pPr indent="0" marL="0">
+              <a:lnSpc>
+                <a:spcPct val="140000"/>
+              </a:lnSpc>
+              <a:buNone/>
+            </a:pPr>
+            <a:r>
+              <a:rPr lang="en-US" sz="1150" dirty="0">
+                <a:solidFill>
+                  <a:srgbClr val="1A1F36"/>
+                </a:solidFill>
+                <a:latin typeface="Roboto Mono" pitchFamily="34" charset="0"/>
+                <a:ea typeface="Roboto Mono" pitchFamily="34" charset="-122"/>
+                <a:cs typeface="Roboto Mono" pitchFamily="34" charset="-120"/>
+              </a:rPr>
+              <a:t>본인이 고른 질문 1개를 그대로 던져봐.</a:t>
+            </a:r>
+            <a:endParaRPr lang="en-US" sz="1150" dirty="0"/>
+          </a:p>
+          <a:p>
+            <a:pPr indent="0" marL="0">
+              <a:lnSpc>
+                <a:spcPct val="140000"/>
+              </a:lnSpc>
+              <a:buNone/>
+            </a:pPr>
+            <a:r>
+              <a:rPr lang="en-US" sz="1150" dirty="0">
+                <a:solidFill>
+                  <a:srgbClr val="1A1F36"/>
+                </a:solidFill>
+                <a:latin typeface="Roboto Mono" pitchFamily="34" charset="0"/>
+                <a:ea typeface="Roboto Mono" pitchFamily="34" charset="-122"/>
+                <a:cs typeface="Roboto Mono" pitchFamily="34" charset="-120"/>
+              </a:rPr>
+              <a:t>결과는 표 + 한 줄 인사이트로.</a:t>
+            </a:r>
+            <a:endParaRPr lang="en-US" sz="1150" dirty="0"/>
+          </a:p>
+        </p:txBody>
+      </p:sp>
+      <p:sp>
+        <p:nvSpPr>
+          <p:cNvPr id="9" name="Text 7"/>
           <p:cNvSpPr/>
           <p:nvPr/>
         </p:nvSpPr>
@@ -4006,7 +4190,7 @@
                 <a:ea typeface="Noto Sans KR" pitchFamily="34" charset="-122"/>
                 <a:cs typeface="Noto Sans KR" pitchFamily="34" charset="-120"/>
               </a:rPr>
-              <a:t>11 / 26</a:t>
+              <a:t>11 / 27</a:t>
             </a:r>
             <a:endParaRPr lang="en-US" sz="900" dirty="0"/>
           </a:p>
@@ -4090,7 +4274,7 @@
                 <a:ea typeface="Noto Sans KR" pitchFamily="34" charset="-122"/>
                 <a:cs typeface="Noto Sans KR" pitchFamily="34" charset="-120"/>
               </a:rPr>
-              <a:t>파트 2. 분석 질문 던지기 + 결합 데이터 EDA</a:t>
+              <a:t>DAY 2 · STEP 1</a:t>
             </a:r>
             <a:endParaRPr lang="en-US" sz="1400" dirty="0"/>
           </a:p>
@@ -4105,7 +4289,7 @@
         <p:spPr>
           <a:xfrm>
             <a:off x="548640" y="960120"/>
-            <a:ext cx="11091672" cy="292608"/>
+            <a:ext cx="10515600" cy="292608"/>
           </a:xfrm>
           <a:prstGeom prst="rect">
             <a:avLst/>
@@ -4121,7 +4305,7 @@
               <a:buNone/>
             </a:pPr>
             <a:r>
-              <a:rPr lang="en-US" sz="1100" b="1" spc="50" kern="0" dirty="0">
+              <a:rPr lang="en-US" sz="1100" b="1" spc="150" kern="0" dirty="0">
                 <a:solidFill>
                   <a:srgbClr val="00D4AA"/>
                 </a:solidFill>
@@ -4129,7 +4313,7 @@
                 <a:ea typeface="Noto Sans KR" pitchFamily="34" charset="-122"/>
                 <a:cs typeface="Noto Sans KR" pitchFamily="34" charset="-120"/>
               </a:rPr>
-              <a:t>💬 함께 볼 시연 프롬프트 — 따라 치지 않으셔도 됩니다</a:t>
+              <a:t>오늘 만든 결과물</a:t>
             </a:r>
             <a:endParaRPr lang="en-US" sz="1100" dirty="0"/>
           </a:p>
@@ -4143,8 +4327,8 @@
         </p:nvSpPr>
         <p:spPr>
           <a:xfrm>
-            <a:off x="548640" y="1508760"/>
-            <a:ext cx="11091672" cy="1005840"/>
+            <a:off x="548640" y="1417320"/>
+            <a:ext cx="11091672" cy="640080"/>
           </a:xfrm>
           <a:prstGeom prst="rect">
             <a:avLst/>
@@ -4157,13 +4341,10 @@
           <a:lstStyle/>
           <a:p>
             <a:pPr indent="0" marL="0">
-              <a:lnSpc>
-                <a:spcPct val="115000"/>
-              </a:lnSpc>
-              <a:buNone/>
-            </a:pPr>
-            <a:r>
-              <a:rPr lang="en-US" sz="3400" b="1" spc="-50" kern="0" dirty="0">
+              <a:buNone/>
+            </a:pPr>
+            <a:r>
+              <a:rPr lang="en-US" sz="2800" b="1" spc="-30" kern="0" dirty="0">
                 <a:solidFill>
                   <a:srgbClr val="1A1F36"/>
                 </a:solidFill>
@@ -4171,167 +4352,77 @@
                 <a:ea typeface="Noto Sans KR" pitchFamily="34" charset="-122"/>
                 <a:cs typeface="Noto Sans KR" pitchFamily="34" charset="-120"/>
               </a:rPr>
-              <a:t>2단계 — 환경에 민감한 교통수단 비교</a:t>
-            </a:r>
-            <a:endParaRPr lang="en-US" sz="3400" dirty="0"/>
-          </a:p>
-        </p:txBody>
-      </p:sp>
-      <p:sp>
-        <p:nvSpPr>
-          <p:cNvPr id="6" name="Shape 4"/>
-          <p:cNvSpPr/>
-          <p:nvPr/>
-        </p:nvSpPr>
-        <p:spPr>
-          <a:xfrm>
-            <a:off x="548640" y="2606040"/>
-            <a:ext cx="1828800" cy="0"/>
-          </a:xfrm>
-          <a:prstGeom prst="line">
-            <a:avLst/>
-          </a:prstGeom>
-          <a:noFill/>
-          <a:ln w="25400">
-            <a:solidFill>
-              <a:srgbClr val="00D4AA"/>
-            </a:solidFill>
-            <a:prstDash val="solid"/>
-          </a:ln>
-        </p:spPr>
-      </p:sp>
-      <p:sp>
-        <p:nvSpPr>
-          <p:cNvPr id="7" name="Shape 5"/>
-          <p:cNvSpPr/>
-          <p:nvPr/>
-        </p:nvSpPr>
-        <p:spPr>
-          <a:xfrm>
-            <a:off x="548640" y="2926080"/>
-            <a:ext cx="11091672" cy="3200400"/>
-          </a:xfrm>
-          <a:prstGeom prst="roundRect">
-            <a:avLst>
-              <a:gd name="adj" fmla="val 1714"/>
-            </a:avLst>
-          </a:prstGeom>
-          <a:solidFill>
-            <a:srgbClr val="F1F5F9"/>
-          </a:solidFill>
-          <a:ln w="6350">
-            <a:solidFill>
-              <a:srgbClr val="E2E8F0"/>
-            </a:solidFill>
-            <a:prstDash val="solid"/>
-          </a:ln>
-        </p:spPr>
-      </p:sp>
-      <p:sp>
-        <p:nvSpPr>
-          <p:cNvPr id="8" name="Text 6"/>
-          <p:cNvSpPr/>
-          <p:nvPr/>
-        </p:nvSpPr>
-        <p:spPr>
-          <a:xfrm>
-            <a:off x="713232" y="3035808"/>
-            <a:ext cx="10762488" cy="2980944"/>
-          </a:xfrm>
-          <a:prstGeom prst="rect">
-            <a:avLst/>
-          </a:prstGeom>
-          <a:noFill/>
-          <a:ln/>
-        </p:spPr>
-        <p:txBody>
-          <a:bodyPr wrap="square" rtlCol="0" anchor="t"/>
-          <a:lstStyle/>
-          <a:p>
-            <a:pPr indent="0" marL="0">
-              <a:lnSpc>
-                <a:spcPct val="140000"/>
-              </a:lnSpc>
-              <a:buNone/>
-            </a:pPr>
-            <a:r>
-              <a:rPr lang="en-US" sz="1150" dirty="0">
-                <a:solidFill>
-                  <a:srgbClr val="1A1F36"/>
-                </a:solidFill>
-                <a:latin typeface="Roboto Mono" pitchFamily="34" charset="0"/>
-                <a:ea typeface="Roboto Mono" pitchFamily="34" charset="-122"/>
-                <a:cs typeface="Roboto Mono" pitchFamily="34" charset="-120"/>
-              </a:rPr>
-              <a:t>미세먼지 등급(좋음/보통/나쁨/매우나쁨)별 따릉이 일평균 대여 건수 보여줘.</a:t>
-            </a:r>
-            <a:endParaRPr lang="en-US" sz="1150" dirty="0"/>
-          </a:p>
-          <a:p>
-            <a:pPr indent="0" marL="0">
-              <a:lnSpc>
-                <a:spcPct val="140000"/>
-              </a:lnSpc>
-              <a:buNone/>
-            </a:pPr>
-            <a:r>
-              <a:rPr lang="en-US" sz="1150" dirty="0">
-                <a:solidFill>
-                  <a:srgbClr val="1A1F36"/>
-                </a:solidFill>
-                <a:latin typeface="Roboto Mono" pitchFamily="34" charset="0"/>
-                <a:ea typeface="Roboto Mono" pitchFamily="34" charset="-122"/>
-                <a:cs typeface="Roboto Mono" pitchFamily="34" charset="-120"/>
-              </a:rPr>
-              <a:t>같은 분석을 지하철 일별 총 승하차로도 한 번 더.</a:t>
-            </a:r>
-            <a:endParaRPr lang="en-US" sz="1150" dirty="0"/>
-          </a:p>
-          <a:p>
-            <a:pPr indent="0" marL="0">
-              <a:lnSpc>
-                <a:spcPct val="140000"/>
-              </a:lnSpc>
-              <a:buNone/>
-            </a:pPr>
-            <a:r>
-              <a:rPr lang="en-US" sz="1150" dirty="0">
-                <a:solidFill>
-                  <a:srgbClr val="1A1F36"/>
-                </a:solidFill>
-                <a:latin typeface="Roboto Mono" pitchFamily="34" charset="0"/>
-                <a:ea typeface="Roboto Mono" pitchFamily="34" charset="-122"/>
-                <a:cs typeface="Roboto Mono" pitchFamily="34" charset="-120"/>
-              </a:rPr>
-              <a:t>두 결과를 한 화면에 나란히 그려서</a:t>
-            </a:r>
-            <a:endParaRPr lang="en-US" sz="1150" dirty="0"/>
-          </a:p>
-          <a:p>
-            <a:pPr indent="0" marL="0">
-              <a:lnSpc>
-                <a:spcPct val="140000"/>
-              </a:lnSpc>
-              <a:buNone/>
-            </a:pPr>
-            <a:r>
-              <a:rPr lang="en-US" sz="1150" dirty="0">
-                <a:solidFill>
-                  <a:srgbClr val="1A1F36"/>
-                </a:solidFill>
-                <a:latin typeface="Roboto Mono" pitchFamily="34" charset="0"/>
-                <a:ea typeface="Roboto Mono" pitchFamily="34" charset="-122"/>
-                <a:cs typeface="Roboto Mono" pitchFamily="34" charset="-120"/>
-              </a:rPr>
-              <a:t>"환경에 민감한 교통수단" 비교 메시지가 나오게.</a:t>
-            </a:r>
-            <a:endParaRPr lang="en-US" sz="1150" dirty="0"/>
-          </a:p>
-        </p:txBody>
-      </p:sp>
-      <p:sp>
-        <p:nvSpPr>
-          <p:cNvPr id="9" name="Text 7"/>
+              <a:t>1단계 결과 — 단독 분석</a:t>
+            </a:r>
+            <a:endParaRPr lang="en-US" sz="2800" dirty="0"/>
+          </a:p>
+        </p:txBody>
+      </p:sp>
+      <p:pic>
+        <p:nvPicPr>
+          <p:cNvPr id="6" name="Image 0" descr="/Users/sujinpark/b2b-lecture-note/20260512_inflearn_B2G_dataanalysis/assets/screenshots/day2/single_data_result.png">    </p:cNvPr>
+          <p:cNvPicPr>
+            <a:picLocks noChangeAspect="1"/>
+          </p:cNvPicPr>
+          <p:nvPr/>
+        </p:nvPicPr>
+        <p:blipFill>
+          <a:blip r:embed="rId1"/>
+          <a:srcRect l="0" r="0" t="0" b="0"/>
+          <a:stretch/>
+        </p:blipFill>
+        <p:spPr>
+          <a:xfrm>
+            <a:off x="2194560" y="2240280"/>
+            <a:ext cx="7772400" cy="3657600"/>
+          </a:xfrm>
+          <a:prstGeom prst="rect">
+            <a:avLst/>
+          </a:prstGeom>
+        </p:spPr>
+      </p:pic>
+      <p:sp>
+        <p:nvSpPr>
+          <p:cNvPr id="7" name="Text 4"/>
+          <p:cNvSpPr/>
+          <p:nvPr/>
+        </p:nvSpPr>
+        <p:spPr>
+          <a:xfrm>
+            <a:off x="548640" y="5989320"/>
+            <a:ext cx="11091672" cy="411480"/>
+          </a:xfrm>
+          <a:prstGeom prst="rect">
+            <a:avLst/>
+          </a:prstGeom>
+          <a:noFill/>
+          <a:ln/>
+        </p:spPr>
+        <p:txBody>
+          <a:bodyPr wrap="square" rtlCol="0" anchor="ctr"/>
+          <a:lstStyle/>
+          <a:p>
+            <a:pPr algn="ctr" indent="0" marL="0">
+              <a:buNone/>
+            </a:pPr>
+            <a:r>
+              <a:rPr lang="en-US" sz="1200" i="1" dirty="0">
+                <a:solidFill>
+                  <a:srgbClr val="718096"/>
+                </a:solidFill>
+                <a:latin typeface="Noto Sans KR" pitchFamily="34" charset="0"/>
+                <a:ea typeface="Noto Sans KR" pitchFamily="34" charset="-122"/>
+                <a:cs typeface="Noto Sans KR" pitchFamily="34" charset="-120"/>
+              </a:rPr>
+              <a:t>수강생이 고른 질문 1개의 답</a:t>
+            </a:r>
+            <a:endParaRPr lang="en-US" sz="1200" dirty="0"/>
+          </a:p>
+        </p:txBody>
+      </p:sp>
+      <p:sp>
+        <p:nvSpPr>
+          <p:cNvPr id="8" name="Text 5"/>
           <p:cNvSpPr/>
           <p:nvPr/>
         </p:nvSpPr>
@@ -4362,7 +4453,7 @@
                 <a:ea typeface="Noto Sans KR" pitchFamily="34" charset="-122"/>
                 <a:cs typeface="Noto Sans KR" pitchFamily="34" charset="-120"/>
               </a:rPr>
-              <a:t>12 / 26</a:t>
+              <a:t>12 / 27</a:t>
             </a:r>
             <a:endParaRPr lang="en-US" sz="900" dirty="0"/>
           </a:p>
@@ -4446,7 +4537,7 @@
                 <a:ea typeface="Noto Sans KR" pitchFamily="34" charset="-122"/>
                 <a:cs typeface="Noto Sans KR" pitchFamily="34" charset="-120"/>
               </a:rPr>
-              <a:t>DAY 2 · STEP 2</a:t>
+              <a:t>파트 2. 분석 질문 던지기 + 결합 데이터 EDA</a:t>
             </a:r>
             <a:endParaRPr lang="en-US" sz="1400" dirty="0"/>
           </a:p>
@@ -4461,7 +4552,7 @@
         <p:spPr>
           <a:xfrm>
             <a:off x="548640" y="960120"/>
-            <a:ext cx="10515600" cy="292608"/>
+            <a:ext cx="11091672" cy="292608"/>
           </a:xfrm>
           <a:prstGeom prst="rect">
             <a:avLst/>
@@ -4477,7 +4568,7 @@
               <a:buNone/>
             </a:pPr>
             <a:r>
-              <a:rPr lang="en-US" sz="1100" b="1" spc="150" kern="0" dirty="0">
+              <a:rPr lang="en-US" sz="1100" b="1" spc="50" kern="0" dirty="0">
                 <a:solidFill>
                   <a:srgbClr val="00D4AA"/>
                 </a:solidFill>
@@ -4485,7 +4576,7 @@
                 <a:ea typeface="Noto Sans KR" pitchFamily="34" charset="-122"/>
                 <a:cs typeface="Noto Sans KR" pitchFamily="34" charset="-120"/>
               </a:rPr>
-              <a:t>오늘 만든 결과물</a:t>
+              <a:t>💬 함께 볼 시연 프롬프트 — 따라 치지 않으셔도 됩니다</a:t>
             </a:r>
             <a:endParaRPr lang="en-US" sz="1100" dirty="0"/>
           </a:p>
@@ -4499,8 +4590,8 @@
         </p:nvSpPr>
         <p:spPr>
           <a:xfrm>
-            <a:off x="548640" y="1417320"/>
-            <a:ext cx="11091672" cy="640080"/>
+            <a:off x="548640" y="1508760"/>
+            <a:ext cx="11091672" cy="1005840"/>
           </a:xfrm>
           <a:prstGeom prst="rect">
             <a:avLst/>
@@ -4513,10 +4604,13 @@
           <a:lstStyle/>
           <a:p>
             <a:pPr indent="0" marL="0">
-              <a:buNone/>
-            </a:pPr>
-            <a:r>
-              <a:rPr lang="en-US" sz="2800" b="1" spc="-30" kern="0" dirty="0">
+              <a:lnSpc>
+                <a:spcPct val="115000"/>
+              </a:lnSpc>
+              <a:buNone/>
+            </a:pPr>
+            <a:r>
+              <a:rPr lang="en-US" sz="3400" b="1" spc="-50" kern="0" dirty="0">
                 <a:solidFill>
                   <a:srgbClr val="1A1F36"/>
                 </a:solidFill>
@@ -4524,77 +4618,167 @@
                 <a:ea typeface="Noto Sans KR" pitchFamily="34" charset="-122"/>
                 <a:cs typeface="Noto Sans KR" pitchFamily="34" charset="-120"/>
               </a:rPr>
-              <a:t>2단계 결과 — 따릉이 vs 지하철</a:t>
-            </a:r>
-            <a:endParaRPr lang="en-US" sz="2800" dirty="0"/>
-          </a:p>
-        </p:txBody>
-      </p:sp>
-      <p:pic>
-        <p:nvPicPr>
-          <p:cNvPr id="6" name="Image 0" descr="/Users/sujinpark/b2b-lecture-note/20260512_inflearn_B2G_dataanalysis/assets/screenshots/day2/joined_bike_vs_subway.png">    </p:cNvPr>
-          <p:cNvPicPr>
-            <a:picLocks noChangeAspect="1"/>
-          </p:cNvPicPr>
-          <p:nvPr/>
-        </p:nvPicPr>
-        <p:blipFill>
-          <a:blip r:embed="rId1"/>
-          <a:srcRect l="0" r="0" t="0" b="0"/>
-          <a:stretch/>
-        </p:blipFill>
-        <p:spPr>
-          <a:xfrm>
-            <a:off x="2194560" y="2240280"/>
-            <a:ext cx="7772400" cy="3657600"/>
-          </a:xfrm>
-          <a:prstGeom prst="rect">
-            <a:avLst/>
-          </a:prstGeom>
-        </p:spPr>
-      </p:pic>
-      <p:sp>
-        <p:nvSpPr>
-          <p:cNvPr id="7" name="Text 4"/>
-          <p:cNvSpPr/>
-          <p:nvPr/>
-        </p:nvSpPr>
-        <p:spPr>
-          <a:xfrm>
-            <a:off x="548640" y="5989320"/>
-            <a:ext cx="11091672" cy="411480"/>
-          </a:xfrm>
-          <a:prstGeom prst="rect">
-            <a:avLst/>
-          </a:prstGeom>
-          <a:noFill/>
-          <a:ln/>
-        </p:spPr>
-        <p:txBody>
-          <a:bodyPr wrap="square" rtlCol="0" anchor="ctr"/>
-          <a:lstStyle/>
-          <a:p>
-            <a:pPr algn="ctr" indent="0" marL="0">
-              <a:buNone/>
-            </a:pPr>
-            <a:r>
-              <a:rPr lang="en-US" sz="1200" i="1" dirty="0">
-                <a:solidFill>
-                  <a:srgbClr val="718096"/>
-                </a:solidFill>
-                <a:latin typeface="Noto Sans KR" pitchFamily="34" charset="0"/>
-                <a:ea typeface="Noto Sans KR" pitchFamily="34" charset="-122"/>
-                <a:cs typeface="Noto Sans KR" pitchFamily="34" charset="-120"/>
-              </a:rPr>
-              <a:t>미세먼지 등급별 두 교통수단 이용량</a:t>
-            </a:r>
-            <a:endParaRPr lang="en-US" sz="1200" dirty="0"/>
-          </a:p>
-        </p:txBody>
-      </p:sp>
-      <p:sp>
-        <p:nvSpPr>
-          <p:cNvPr id="8" name="Text 5"/>
+              <a:t>2단계 — 환경에 민감한 교통수단 비교</a:t>
+            </a:r>
+            <a:endParaRPr lang="en-US" sz="3400" dirty="0"/>
+          </a:p>
+        </p:txBody>
+      </p:sp>
+      <p:sp>
+        <p:nvSpPr>
+          <p:cNvPr id="6" name="Shape 4"/>
+          <p:cNvSpPr/>
+          <p:nvPr/>
+        </p:nvSpPr>
+        <p:spPr>
+          <a:xfrm>
+            <a:off x="548640" y="2606040"/>
+            <a:ext cx="1828800" cy="0"/>
+          </a:xfrm>
+          <a:prstGeom prst="line">
+            <a:avLst/>
+          </a:prstGeom>
+          <a:noFill/>
+          <a:ln w="25400">
+            <a:solidFill>
+              <a:srgbClr val="00D4AA"/>
+            </a:solidFill>
+            <a:prstDash val="solid"/>
+          </a:ln>
+        </p:spPr>
+      </p:sp>
+      <p:sp>
+        <p:nvSpPr>
+          <p:cNvPr id="7" name="Shape 5"/>
+          <p:cNvSpPr/>
+          <p:nvPr/>
+        </p:nvSpPr>
+        <p:spPr>
+          <a:xfrm>
+            <a:off x="548640" y="2926080"/>
+            <a:ext cx="11091672" cy="3200400"/>
+          </a:xfrm>
+          <a:prstGeom prst="roundRect">
+            <a:avLst>
+              <a:gd name="adj" fmla="val 1714"/>
+            </a:avLst>
+          </a:prstGeom>
+          <a:solidFill>
+            <a:srgbClr val="F1F5F9"/>
+          </a:solidFill>
+          <a:ln w="6350">
+            <a:solidFill>
+              <a:srgbClr val="E2E8F0"/>
+            </a:solidFill>
+            <a:prstDash val="solid"/>
+          </a:ln>
+        </p:spPr>
+      </p:sp>
+      <p:sp>
+        <p:nvSpPr>
+          <p:cNvPr id="8" name="Text 6"/>
+          <p:cNvSpPr/>
+          <p:nvPr/>
+        </p:nvSpPr>
+        <p:spPr>
+          <a:xfrm>
+            <a:off x="713232" y="3035808"/>
+            <a:ext cx="10762488" cy="2980944"/>
+          </a:xfrm>
+          <a:prstGeom prst="rect">
+            <a:avLst/>
+          </a:prstGeom>
+          <a:noFill/>
+          <a:ln/>
+        </p:spPr>
+        <p:txBody>
+          <a:bodyPr wrap="square" rtlCol="0" anchor="t"/>
+          <a:lstStyle/>
+          <a:p>
+            <a:pPr indent="0" marL="0">
+              <a:lnSpc>
+                <a:spcPct val="140000"/>
+              </a:lnSpc>
+              <a:buNone/>
+            </a:pPr>
+            <a:r>
+              <a:rPr lang="en-US" sz="1150" dirty="0">
+                <a:solidFill>
+                  <a:srgbClr val="1A1F36"/>
+                </a:solidFill>
+                <a:latin typeface="Roboto Mono" pitchFamily="34" charset="0"/>
+                <a:ea typeface="Roboto Mono" pitchFamily="34" charset="-122"/>
+                <a:cs typeface="Roboto Mono" pitchFamily="34" charset="-120"/>
+              </a:rPr>
+              <a:t>미세먼지 등급(좋음/보통/나쁨/매우나쁨)별 따릉이 일평균 대여 건수 보여줘.</a:t>
+            </a:r>
+            <a:endParaRPr lang="en-US" sz="1150" dirty="0"/>
+          </a:p>
+          <a:p>
+            <a:pPr indent="0" marL="0">
+              <a:lnSpc>
+                <a:spcPct val="140000"/>
+              </a:lnSpc>
+              <a:buNone/>
+            </a:pPr>
+            <a:r>
+              <a:rPr lang="en-US" sz="1150" dirty="0">
+                <a:solidFill>
+                  <a:srgbClr val="1A1F36"/>
+                </a:solidFill>
+                <a:latin typeface="Roboto Mono" pitchFamily="34" charset="0"/>
+                <a:ea typeface="Roboto Mono" pitchFamily="34" charset="-122"/>
+                <a:cs typeface="Roboto Mono" pitchFamily="34" charset="-120"/>
+              </a:rPr>
+              <a:t>같은 분석을 지하철 일별 총 승하차로도 한 번 더.</a:t>
+            </a:r>
+            <a:endParaRPr lang="en-US" sz="1150" dirty="0"/>
+          </a:p>
+          <a:p>
+            <a:pPr indent="0" marL="0">
+              <a:lnSpc>
+                <a:spcPct val="140000"/>
+              </a:lnSpc>
+              <a:buNone/>
+            </a:pPr>
+            <a:r>
+              <a:rPr lang="en-US" sz="1150" dirty="0">
+                <a:solidFill>
+                  <a:srgbClr val="1A1F36"/>
+                </a:solidFill>
+                <a:latin typeface="Roboto Mono" pitchFamily="34" charset="0"/>
+                <a:ea typeface="Roboto Mono" pitchFamily="34" charset="-122"/>
+                <a:cs typeface="Roboto Mono" pitchFamily="34" charset="-120"/>
+              </a:rPr>
+              <a:t>두 결과를 한 화면에 나란히 그려서</a:t>
+            </a:r>
+            <a:endParaRPr lang="en-US" sz="1150" dirty="0"/>
+          </a:p>
+          <a:p>
+            <a:pPr indent="0" marL="0">
+              <a:lnSpc>
+                <a:spcPct val="140000"/>
+              </a:lnSpc>
+              <a:buNone/>
+            </a:pPr>
+            <a:r>
+              <a:rPr lang="en-US" sz="1150" dirty="0">
+                <a:solidFill>
+                  <a:srgbClr val="1A1F36"/>
+                </a:solidFill>
+                <a:latin typeface="Roboto Mono" pitchFamily="34" charset="0"/>
+                <a:ea typeface="Roboto Mono" pitchFamily="34" charset="-122"/>
+                <a:cs typeface="Roboto Mono" pitchFamily="34" charset="-120"/>
+              </a:rPr>
+              <a:t>"환경에 민감한 교통수단" 비교 메시지가 나오게.</a:t>
+            </a:r>
+            <a:endParaRPr lang="en-US" sz="1150" dirty="0"/>
+          </a:p>
+        </p:txBody>
+      </p:sp>
+      <p:sp>
+        <p:nvSpPr>
+          <p:cNvPr id="9" name="Text 7"/>
           <p:cNvSpPr/>
           <p:nvPr/>
         </p:nvSpPr>
@@ -4625,7 +4809,7 @@
                 <a:ea typeface="Noto Sans KR" pitchFamily="34" charset="-122"/>
                 <a:cs typeface="Noto Sans KR" pitchFamily="34" charset="-120"/>
               </a:rPr>
-              <a:t>13 / 26</a:t>
+              <a:t>13 / 27</a:t>
             </a:r>
             <a:endParaRPr lang="en-US" sz="900" dirty="0"/>
           </a:p>
@@ -4709,7 +4893,7 @@
                 <a:ea typeface="Noto Sans KR" pitchFamily="34" charset="-122"/>
                 <a:cs typeface="Noto Sans KR" pitchFamily="34" charset="-120"/>
               </a:rPr>
-              <a:t>파트 2. 분석 질문 던지기 + 결합 데이터 EDA</a:t>
+              <a:t>DAY 2 · STEP 2</a:t>
             </a:r>
             <a:endParaRPr lang="en-US" sz="1400" dirty="0"/>
           </a:p>
@@ -4724,7 +4908,7 @@
         <p:spPr>
           <a:xfrm>
             <a:off x="548640" y="960120"/>
-            <a:ext cx="11091672" cy="292608"/>
+            <a:ext cx="10515600" cy="292608"/>
           </a:xfrm>
           <a:prstGeom prst="rect">
             <a:avLst/>
@@ -4740,7 +4924,7 @@
               <a:buNone/>
             </a:pPr>
             <a:r>
-              <a:rPr lang="en-US" sz="1100" b="1" spc="50" kern="0" dirty="0">
+              <a:rPr lang="en-US" sz="1100" b="1" spc="150" kern="0" dirty="0">
                 <a:solidFill>
                   <a:srgbClr val="00D4AA"/>
                 </a:solidFill>
@@ -4748,7 +4932,7 @@
                 <a:ea typeface="Noto Sans KR" pitchFamily="34" charset="-122"/>
                 <a:cs typeface="Noto Sans KR" pitchFamily="34" charset="-120"/>
               </a:rPr>
-              <a:t>💬 함께 볼 시연 프롬프트 — 따라 치지 않으셔도 됩니다</a:t>
+              <a:t>오늘 만든 결과물</a:t>
             </a:r>
             <a:endParaRPr lang="en-US" sz="1100" dirty="0"/>
           </a:p>
@@ -4762,8 +4946,8 @@
         </p:nvSpPr>
         <p:spPr>
           <a:xfrm>
-            <a:off x="548640" y="1508760"/>
-            <a:ext cx="11091672" cy="1005840"/>
+            <a:off x="548640" y="1417320"/>
+            <a:ext cx="11091672" cy="640080"/>
           </a:xfrm>
           <a:prstGeom prst="rect">
             <a:avLst/>
@@ -4776,13 +4960,10 @@
           <a:lstStyle/>
           <a:p>
             <a:pPr indent="0" marL="0">
-              <a:lnSpc>
-                <a:spcPct val="115000"/>
-              </a:lnSpc>
-              <a:buNone/>
-            </a:pPr>
-            <a:r>
-              <a:rPr lang="en-US" sz="3400" b="1" spc="-50" kern="0" dirty="0">
+              <a:buNone/>
+            </a:pPr>
+            <a:r>
+              <a:rPr lang="en-US" sz="2800" b="1" spc="-30" kern="0" dirty="0">
                 <a:solidFill>
                   <a:srgbClr val="1A1F36"/>
                 </a:solidFill>
@@ -4790,167 +4971,77 @@
                 <a:ea typeface="Noto Sans KR" pitchFamily="34" charset="-122"/>
                 <a:cs typeface="Noto Sans KR" pitchFamily="34" charset="-120"/>
               </a:rPr>
-              <a:t>3단계 — 날씨와 결합 (풍속·강수·기온)</a:t>
-            </a:r>
-            <a:endParaRPr lang="en-US" sz="3400" dirty="0"/>
-          </a:p>
-        </p:txBody>
-      </p:sp>
-      <p:sp>
-        <p:nvSpPr>
-          <p:cNvPr id="6" name="Shape 4"/>
-          <p:cNvSpPr/>
-          <p:nvPr/>
-        </p:nvSpPr>
-        <p:spPr>
-          <a:xfrm>
-            <a:off x="548640" y="2606040"/>
-            <a:ext cx="1828800" cy="0"/>
-          </a:xfrm>
-          <a:prstGeom prst="line">
-            <a:avLst/>
-          </a:prstGeom>
-          <a:noFill/>
-          <a:ln w="25400">
-            <a:solidFill>
-              <a:srgbClr val="00D4AA"/>
-            </a:solidFill>
-            <a:prstDash val="solid"/>
-          </a:ln>
-        </p:spPr>
-      </p:sp>
-      <p:sp>
-        <p:nvSpPr>
-          <p:cNvPr id="7" name="Shape 5"/>
-          <p:cNvSpPr/>
-          <p:nvPr/>
-        </p:nvSpPr>
-        <p:spPr>
-          <a:xfrm>
-            <a:off x="548640" y="2926080"/>
-            <a:ext cx="11091672" cy="3200400"/>
-          </a:xfrm>
-          <a:prstGeom prst="roundRect">
-            <a:avLst>
-              <a:gd name="adj" fmla="val 1714"/>
-            </a:avLst>
-          </a:prstGeom>
-          <a:solidFill>
-            <a:srgbClr val="F1F5F9"/>
-          </a:solidFill>
-          <a:ln w="6350">
-            <a:solidFill>
-              <a:srgbClr val="E2E8F0"/>
-            </a:solidFill>
-            <a:prstDash val="solid"/>
-          </a:ln>
-        </p:spPr>
-      </p:sp>
-      <p:sp>
-        <p:nvSpPr>
-          <p:cNvPr id="8" name="Text 6"/>
-          <p:cNvSpPr/>
-          <p:nvPr/>
-        </p:nvSpPr>
-        <p:spPr>
-          <a:xfrm>
-            <a:off x="713232" y="3035808"/>
-            <a:ext cx="10762488" cy="2980944"/>
-          </a:xfrm>
-          <a:prstGeom prst="rect">
-            <a:avLst/>
-          </a:prstGeom>
-          <a:noFill/>
-          <a:ln/>
-        </p:spPr>
-        <p:txBody>
-          <a:bodyPr wrap="square" rtlCol="0" anchor="t"/>
-          <a:lstStyle/>
-          <a:p>
-            <a:pPr indent="0" marL="0">
-              <a:lnSpc>
-                <a:spcPct val="140000"/>
-              </a:lnSpc>
-              <a:buNone/>
-            </a:pPr>
-            <a:r>
-              <a:rPr lang="en-US" sz="1150" dirty="0">
-                <a:solidFill>
-                  <a:srgbClr val="1A1F36"/>
-                </a:solidFill>
-                <a:latin typeface="Roboto Mono" pitchFamily="34" charset="0"/>
-                <a:ea typeface="Roboto Mono" pitchFamily="34" charset="-122"/>
-                <a:cs typeface="Roboto Mono" pitchFamily="34" charset="-120"/>
-              </a:rPr>
-              <a:t>weather_seoul_daily.csv 도 같이 읽어서,</a:t>
-            </a:r>
-            <a:endParaRPr lang="en-US" sz="1150" dirty="0"/>
-          </a:p>
-          <a:p>
-            <a:pPr indent="0" marL="0">
-              <a:lnSpc>
-                <a:spcPct val="140000"/>
-              </a:lnSpc>
-              <a:buNone/>
-            </a:pPr>
-            <a:r>
-              <a:rPr lang="en-US" sz="1150" dirty="0">
-                <a:solidFill>
-                  <a:srgbClr val="1A1F36"/>
-                </a:solidFill>
-                <a:latin typeface="Roboto Mono" pitchFamily="34" charset="0"/>
-                <a:ea typeface="Roboto Mono" pitchFamily="34" charset="-122"/>
-                <a:cs typeface="Roboto Mono" pitchFamily="34" charset="-120"/>
-              </a:rPr>
-              <a:t>PM2.5와 풍속·강수·기온의 상관계수를 표로 만들고,</a:t>
-            </a:r>
-            <a:endParaRPr lang="en-US" sz="1150" dirty="0"/>
-          </a:p>
-          <a:p>
-            <a:pPr indent="0" marL="0">
-              <a:lnSpc>
-                <a:spcPct val="140000"/>
-              </a:lnSpc>
-              <a:buNone/>
-            </a:pPr>
-            <a:r>
-              <a:rPr lang="en-US" sz="1150" dirty="0">
-                <a:solidFill>
-                  <a:srgbClr val="1A1F36"/>
-                </a:solidFill>
-                <a:latin typeface="Roboto Mono" pitchFamily="34" charset="0"/>
-                <a:ea typeface="Roboto Mono" pitchFamily="34" charset="-122"/>
-                <a:cs typeface="Roboto Mono" pitchFamily="34" charset="-120"/>
-              </a:rPr>
-              <a:t>풍속이 셀수록 PM2.5가 떨어지는지 산점도로 검증해줘.</a:t>
-            </a:r>
-            <a:endParaRPr lang="en-US" sz="1150" dirty="0"/>
-          </a:p>
-          <a:p>
-            <a:pPr indent="0" marL="0">
-              <a:lnSpc>
-                <a:spcPct val="140000"/>
-              </a:lnSpc>
-              <a:buNone/>
-            </a:pPr>
-            <a:r>
-              <a:rPr lang="en-US" sz="1150" dirty="0">
-                <a:solidFill>
-                  <a:srgbClr val="1A1F36"/>
-                </a:solidFill>
-                <a:latin typeface="Roboto Mono" pitchFamily="34" charset="0"/>
-                <a:ea typeface="Roboto Mono" pitchFamily="34" charset="-122"/>
-                <a:cs typeface="Roboto Mono" pitchFamily="34" charset="-120"/>
-              </a:rPr>
-              <a:t>황사 시즌·비황사 시즌 따로 봐줘.</a:t>
-            </a:r>
-            <a:endParaRPr lang="en-US" sz="1150" dirty="0"/>
-          </a:p>
-        </p:txBody>
-      </p:sp>
-      <p:sp>
-        <p:nvSpPr>
-          <p:cNvPr id="9" name="Text 7"/>
+              <a:t>2단계 결과 — 따릉이 vs 지하철</a:t>
+            </a:r>
+            <a:endParaRPr lang="en-US" sz="2800" dirty="0"/>
+          </a:p>
+        </p:txBody>
+      </p:sp>
+      <p:pic>
+        <p:nvPicPr>
+          <p:cNvPr id="6" name="Image 0" descr="/Users/sujinpark/b2b-lecture-note/20260512_inflearn_B2G_dataanalysis/assets/screenshots/day2/joined_bike_vs_subway.png">    </p:cNvPr>
+          <p:cNvPicPr>
+            <a:picLocks noChangeAspect="1"/>
+          </p:cNvPicPr>
+          <p:nvPr/>
+        </p:nvPicPr>
+        <p:blipFill>
+          <a:blip r:embed="rId1"/>
+          <a:srcRect l="0" r="0" t="0" b="0"/>
+          <a:stretch/>
+        </p:blipFill>
+        <p:spPr>
+          <a:xfrm>
+            <a:off x="2194560" y="2240280"/>
+            <a:ext cx="7772400" cy="3657600"/>
+          </a:xfrm>
+          <a:prstGeom prst="rect">
+            <a:avLst/>
+          </a:prstGeom>
+        </p:spPr>
+      </p:pic>
+      <p:sp>
+        <p:nvSpPr>
+          <p:cNvPr id="7" name="Text 4"/>
+          <p:cNvSpPr/>
+          <p:nvPr/>
+        </p:nvSpPr>
+        <p:spPr>
+          <a:xfrm>
+            <a:off x="548640" y="5989320"/>
+            <a:ext cx="11091672" cy="411480"/>
+          </a:xfrm>
+          <a:prstGeom prst="rect">
+            <a:avLst/>
+          </a:prstGeom>
+          <a:noFill/>
+          <a:ln/>
+        </p:spPr>
+        <p:txBody>
+          <a:bodyPr wrap="square" rtlCol="0" anchor="ctr"/>
+          <a:lstStyle/>
+          <a:p>
+            <a:pPr algn="ctr" indent="0" marL="0">
+              <a:buNone/>
+            </a:pPr>
+            <a:r>
+              <a:rPr lang="en-US" sz="1200" i="1" dirty="0">
+                <a:solidFill>
+                  <a:srgbClr val="718096"/>
+                </a:solidFill>
+                <a:latin typeface="Noto Sans KR" pitchFamily="34" charset="0"/>
+                <a:ea typeface="Noto Sans KR" pitchFamily="34" charset="-122"/>
+                <a:cs typeface="Noto Sans KR" pitchFamily="34" charset="-120"/>
+              </a:rPr>
+              <a:t>미세먼지 등급별 두 교통수단 이용량</a:t>
+            </a:r>
+            <a:endParaRPr lang="en-US" sz="1200" dirty="0"/>
+          </a:p>
+        </p:txBody>
+      </p:sp>
+      <p:sp>
+        <p:nvSpPr>
+          <p:cNvPr id="8" name="Text 5"/>
           <p:cNvSpPr/>
           <p:nvPr/>
         </p:nvSpPr>
@@ -4981,7 +5072,7 @@
                 <a:ea typeface="Noto Sans KR" pitchFamily="34" charset="-122"/>
                 <a:cs typeface="Noto Sans KR" pitchFamily="34" charset="-120"/>
               </a:rPr>
-              <a:t>14 / 26</a:t>
+              <a:t>14 / 27</a:t>
             </a:r>
             <a:endParaRPr lang="en-US" sz="900" dirty="0"/>
           </a:p>
@@ -5065,7 +5156,7 @@
                 <a:ea typeface="Noto Sans KR" pitchFamily="34" charset="-122"/>
                 <a:cs typeface="Noto Sans KR" pitchFamily="34" charset="-120"/>
               </a:rPr>
-              <a:t>DAY 2 · STEP 3</a:t>
+              <a:t>파트 2. 분석 질문 던지기 + 결합 데이터 EDA</a:t>
             </a:r>
             <a:endParaRPr lang="en-US" sz="1400" dirty="0"/>
           </a:p>
@@ -5080,7 +5171,7 @@
         <p:spPr>
           <a:xfrm>
             <a:off x="548640" y="960120"/>
-            <a:ext cx="10515600" cy="292608"/>
+            <a:ext cx="11091672" cy="292608"/>
           </a:xfrm>
           <a:prstGeom prst="rect">
             <a:avLst/>
@@ -5096,7 +5187,7 @@
               <a:buNone/>
             </a:pPr>
             <a:r>
-              <a:rPr lang="en-US" sz="1100" b="1" spc="150" kern="0" dirty="0">
+              <a:rPr lang="en-US" sz="1100" b="1" spc="50" kern="0" dirty="0">
                 <a:solidFill>
                   <a:srgbClr val="00D4AA"/>
                 </a:solidFill>
@@ -5104,7 +5195,7 @@
                 <a:ea typeface="Noto Sans KR" pitchFamily="34" charset="-122"/>
                 <a:cs typeface="Noto Sans KR" pitchFamily="34" charset="-120"/>
               </a:rPr>
-              <a:t>오늘 만든 결과물</a:t>
+              <a:t>💬 함께 볼 시연 프롬프트 — 따라 치지 않으셔도 됩니다</a:t>
             </a:r>
             <a:endParaRPr lang="en-US" sz="1100" dirty="0"/>
           </a:p>
@@ -5118,8 +5209,8 @@
         </p:nvSpPr>
         <p:spPr>
           <a:xfrm>
-            <a:off x="548640" y="1417320"/>
-            <a:ext cx="11091672" cy="640080"/>
+            <a:off x="548640" y="1508760"/>
+            <a:ext cx="11091672" cy="1005840"/>
           </a:xfrm>
           <a:prstGeom prst="rect">
             <a:avLst/>
@@ -5132,10 +5223,13 @@
           <a:lstStyle/>
           <a:p>
             <a:pPr indent="0" marL="0">
-              <a:buNone/>
-            </a:pPr>
-            <a:r>
-              <a:rPr lang="en-US" sz="2800" b="1" spc="-30" kern="0" dirty="0">
+              <a:lnSpc>
+                <a:spcPct val="115000"/>
+              </a:lnSpc>
+              <a:buNone/>
+            </a:pPr>
+            <a:r>
+              <a:rPr lang="en-US" sz="3400" b="1" spc="-50" kern="0" dirty="0">
                 <a:solidFill>
                   <a:srgbClr val="1A1F36"/>
                 </a:solidFill>
@@ -5143,9 +5237,9 @@
                 <a:ea typeface="Noto Sans KR" pitchFamily="34" charset="-122"/>
                 <a:cs typeface="Noto Sans KR" pitchFamily="34" charset="-120"/>
               </a:rPr>
-              <a:t>3단계 결과 — 날씨 결합</a:t>
-            </a:r>
-            <a:endParaRPr lang="en-US" sz="2800" dirty="0"/>
+              <a:t>3단계 — 날씨와 결합 (풍속·강수·기온)</a:t>
+            </a:r>
+            <a:endParaRPr lang="en-US" sz="3400" dirty="0"/>
           </a:p>
         </p:txBody>
       </p:sp>
@@ -5157,168 +5251,153 @@
         </p:nvSpPr>
         <p:spPr>
           <a:xfrm>
-            <a:off x="2194560" y="2240280"/>
-            <a:ext cx="7772400" cy="3657600"/>
+            <a:off x="548640" y="2606040"/>
+            <a:ext cx="1828800" cy="0"/>
+          </a:xfrm>
+          <a:prstGeom prst="line">
+            <a:avLst/>
+          </a:prstGeom>
+          <a:noFill/>
+          <a:ln w="25400">
+            <a:solidFill>
+              <a:srgbClr val="00D4AA"/>
+            </a:solidFill>
+            <a:prstDash val="solid"/>
+          </a:ln>
+        </p:spPr>
+      </p:sp>
+      <p:sp>
+        <p:nvSpPr>
+          <p:cNvPr id="7" name="Shape 5"/>
+          <p:cNvSpPr/>
+          <p:nvPr/>
+        </p:nvSpPr>
+        <p:spPr>
+          <a:xfrm>
+            <a:off x="548640" y="2926080"/>
+            <a:ext cx="11091672" cy="3200400"/>
           </a:xfrm>
           <a:prstGeom prst="roundRect">
             <a:avLst>
-              <a:gd name="adj" fmla="val 3000"/>
+              <a:gd name="adj" fmla="val 1714"/>
             </a:avLst>
           </a:prstGeom>
           <a:solidFill>
-            <a:srgbClr val="F5F7FA"/>
+            <a:srgbClr val="F1F5F9"/>
           </a:solidFill>
-          <a:ln w="12700">
+          <a:ln w="6350">
             <a:solidFill>
-              <a:srgbClr val="CBD5E0"/>
+              <a:srgbClr val="E2E8F0"/>
             </a:solidFill>
-            <a:prstDash val="dash"/>
+            <a:prstDash val="solid"/>
           </a:ln>
         </p:spPr>
       </p:sp>
       <p:sp>
         <p:nvSpPr>
-          <p:cNvPr id="7" name="Text 5"/>
-          <p:cNvSpPr/>
-          <p:nvPr/>
-        </p:nvSpPr>
-        <p:spPr>
-          <a:xfrm>
-            <a:off x="2194560" y="3703320"/>
-            <a:ext cx="7772400" cy="731520"/>
-          </a:xfrm>
-          <a:prstGeom prst="rect">
-            <a:avLst/>
-          </a:prstGeom>
-          <a:noFill/>
-          <a:ln/>
-        </p:spPr>
-        <p:txBody>
-          <a:bodyPr wrap="square" rtlCol="0" anchor="ctr"/>
-          <a:lstStyle/>
-          <a:p>
-            <a:pPr algn="ctr" indent="0" marL="0">
+          <p:cNvPr id="8" name="Text 6"/>
+          <p:cNvSpPr/>
+          <p:nvPr/>
+        </p:nvSpPr>
+        <p:spPr>
+          <a:xfrm>
+            <a:off x="713232" y="3035808"/>
+            <a:ext cx="10762488" cy="2980944"/>
+          </a:xfrm>
+          <a:prstGeom prst="rect">
+            <a:avLst/>
+          </a:prstGeom>
+          <a:noFill/>
+          <a:ln/>
+        </p:spPr>
+        <p:txBody>
+          <a:bodyPr wrap="square" rtlCol="0" anchor="t"/>
+          <a:lstStyle/>
+          <a:p>
+            <a:pPr indent="0" marL="0">
               <a:lnSpc>
                 <a:spcPct val="140000"/>
               </a:lnSpc>
               <a:buNone/>
             </a:pPr>
             <a:r>
-              <a:rPr lang="en-US" sz="1400" i="1" dirty="0">
-                <a:solidFill>
-                  <a:srgbClr val="718096"/>
-                </a:solidFill>
-                <a:latin typeface="Noto Sans KR" pitchFamily="34" charset="0"/>
-                <a:ea typeface="Noto Sans KR" pitchFamily="34" charset="-122"/>
-                <a:cs typeface="Noto Sans KR" pitchFamily="34" charset="-120"/>
-              </a:rPr>
-              <a:t>📷  결과 이미지 위치</a:t>
-            </a:r>
-            <a:endParaRPr lang="en-US" sz="1400" dirty="0"/>
-          </a:p>
-          <a:p>
-            <a:pPr algn="ctr" indent="0" marL="0">
+              <a:rPr lang="en-US" sz="1150" dirty="0">
+                <a:solidFill>
+                  <a:srgbClr val="1A1F36"/>
+                </a:solidFill>
+                <a:latin typeface="Roboto Mono" pitchFamily="34" charset="0"/>
+                <a:ea typeface="Roboto Mono" pitchFamily="34" charset="-122"/>
+                <a:cs typeface="Roboto Mono" pitchFamily="34" charset="-120"/>
+              </a:rPr>
+              <a:t>weather_seoul_daily.csv 도 같이 읽어서,</a:t>
+            </a:r>
+            <a:endParaRPr lang="en-US" sz="1150" dirty="0"/>
+          </a:p>
+          <a:p>
+            <a:pPr indent="0" marL="0">
               <a:lnSpc>
                 <a:spcPct val="140000"/>
               </a:lnSpc>
               <a:buNone/>
             </a:pPr>
             <a:r>
-              <a:rPr lang="en-US" sz="1400" i="1" dirty="0">
-                <a:solidFill>
-                  <a:srgbClr val="718096"/>
-                </a:solidFill>
-                <a:latin typeface="Noto Sans KR" pitchFamily="34" charset="0"/>
-                <a:ea typeface="Noto Sans KR" pitchFamily="34" charset="-122"/>
-                <a:cs typeface="Noto Sans KR" pitchFamily="34" charset="-120"/>
-              </a:rPr>
-              <a:t>(강의 시연 캡처가 들어갈 자리)</a:t>
-            </a:r>
-            <a:endParaRPr lang="en-US" sz="1400" dirty="0"/>
-          </a:p>
-        </p:txBody>
-      </p:sp>
-      <p:sp>
-        <p:nvSpPr>
-          <p:cNvPr id="8" name="Text 6"/>
-          <p:cNvSpPr/>
-          <p:nvPr/>
-        </p:nvSpPr>
-        <p:spPr>
-          <a:xfrm>
-            <a:off x="2194560" y="4983480"/>
-            <a:ext cx="7772400" cy="365760"/>
-          </a:xfrm>
-          <a:prstGeom prst="rect">
-            <a:avLst/>
-          </a:prstGeom>
-          <a:noFill/>
-          <a:ln/>
-        </p:spPr>
-        <p:txBody>
-          <a:bodyPr wrap="square" rtlCol="0" anchor="ctr"/>
-          <a:lstStyle/>
-          <a:p>
-            <a:pPr algn="ctr" indent="0" marL="0">
-              <a:buNone/>
-            </a:pPr>
-            <a:r>
-              <a:rPr lang="en-US" sz="1000" i="1" dirty="0">
-                <a:solidFill>
-                  <a:srgbClr val="718096"/>
+              <a:rPr lang="en-US" sz="1150" dirty="0">
+                <a:solidFill>
+                  <a:srgbClr val="1A1F36"/>
                 </a:solidFill>
                 <a:latin typeface="Roboto Mono" pitchFamily="34" charset="0"/>
                 <a:ea typeface="Roboto Mono" pitchFamily="34" charset="-122"/>
                 <a:cs typeface="Roboto Mono" pitchFamily="34" charset="-120"/>
               </a:rPr>
-              <a:t>screenshots/day2/weather_join.png</a:t>
-            </a:r>
-            <a:endParaRPr lang="en-US" sz="1000" dirty="0"/>
+              <a:t>PM2.5와 풍속·강수·기온의 상관계수를 표로 만들고,</a:t>
+            </a:r>
+            <a:endParaRPr lang="en-US" sz="1150" dirty="0"/>
+          </a:p>
+          <a:p>
+            <a:pPr indent="0" marL="0">
+              <a:lnSpc>
+                <a:spcPct val="140000"/>
+              </a:lnSpc>
+              <a:buNone/>
+            </a:pPr>
+            <a:r>
+              <a:rPr lang="en-US" sz="1150" dirty="0">
+                <a:solidFill>
+                  <a:srgbClr val="1A1F36"/>
+                </a:solidFill>
+                <a:latin typeface="Roboto Mono" pitchFamily="34" charset="0"/>
+                <a:ea typeface="Roboto Mono" pitchFamily="34" charset="-122"/>
+                <a:cs typeface="Roboto Mono" pitchFamily="34" charset="-120"/>
+              </a:rPr>
+              <a:t>풍속이 셀수록 PM2.5가 떨어지는지 산점도로 검증해줘.</a:t>
+            </a:r>
+            <a:endParaRPr lang="en-US" sz="1150" dirty="0"/>
+          </a:p>
+          <a:p>
+            <a:pPr indent="0" marL="0">
+              <a:lnSpc>
+                <a:spcPct val="140000"/>
+              </a:lnSpc>
+              <a:buNone/>
+            </a:pPr>
+            <a:r>
+              <a:rPr lang="en-US" sz="1150" dirty="0">
+                <a:solidFill>
+                  <a:srgbClr val="1A1F36"/>
+                </a:solidFill>
+                <a:latin typeface="Roboto Mono" pitchFamily="34" charset="0"/>
+                <a:ea typeface="Roboto Mono" pitchFamily="34" charset="-122"/>
+                <a:cs typeface="Roboto Mono" pitchFamily="34" charset="-120"/>
+              </a:rPr>
+              <a:t>황사 시즌·비황사 시즌 따로 봐줘.</a:t>
+            </a:r>
+            <a:endParaRPr lang="en-US" sz="1150" dirty="0"/>
           </a:p>
         </p:txBody>
       </p:sp>
       <p:sp>
         <p:nvSpPr>
           <p:cNvPr id="9" name="Text 7"/>
-          <p:cNvSpPr/>
-          <p:nvPr/>
-        </p:nvSpPr>
-        <p:spPr>
-          <a:xfrm>
-            <a:off x="548640" y="5989320"/>
-            <a:ext cx="11091672" cy="411480"/>
-          </a:xfrm>
-          <a:prstGeom prst="rect">
-            <a:avLst/>
-          </a:prstGeom>
-          <a:noFill/>
-          <a:ln/>
-        </p:spPr>
-        <p:txBody>
-          <a:bodyPr wrap="square" rtlCol="0" anchor="ctr"/>
-          <a:lstStyle/>
-          <a:p>
-            <a:pPr algn="ctr" indent="0" marL="0">
-              <a:buNone/>
-            </a:pPr>
-            <a:r>
-              <a:rPr lang="en-US" sz="1200" i="1" dirty="0">
-                <a:solidFill>
-                  <a:srgbClr val="718096"/>
-                </a:solidFill>
-                <a:latin typeface="Noto Sans KR" pitchFamily="34" charset="0"/>
-                <a:ea typeface="Noto Sans KR" pitchFamily="34" charset="-122"/>
-                <a:cs typeface="Noto Sans KR" pitchFamily="34" charset="-120"/>
-              </a:rPr>
-              <a:t>풍속-PM2.5 산점도 + 시즌별 분리</a:t>
-            </a:r>
-            <a:endParaRPr lang="en-US" sz="1200" dirty="0"/>
-          </a:p>
-        </p:txBody>
-      </p:sp>
-      <p:sp>
-        <p:nvSpPr>
-          <p:cNvPr id="10" name="Text 8"/>
           <p:cNvSpPr/>
           <p:nvPr/>
         </p:nvSpPr>
@@ -5349,7 +5428,7 @@
                 <a:ea typeface="Noto Sans KR" pitchFamily="34" charset="-122"/>
                 <a:cs typeface="Noto Sans KR" pitchFamily="34" charset="-120"/>
               </a:rPr>
-              <a:t>15 / 26</a:t>
+              <a:t>15 / 27</a:t>
             </a:r>
             <a:endParaRPr lang="en-US" sz="900" dirty="0"/>
           </a:p>
@@ -5433,7 +5512,7 @@
                 <a:ea typeface="Noto Sans KR" pitchFamily="34" charset="-122"/>
                 <a:cs typeface="Noto Sans KR" pitchFamily="34" charset="-120"/>
               </a:rPr>
-              <a:t>파트 2. 분석 질문 던지기 + 결합 데이터 EDA</a:t>
+              <a:t>DAY 2 · STEP 3</a:t>
             </a:r>
             <a:endParaRPr lang="en-US" sz="1400" dirty="0"/>
           </a:p>
@@ -5448,7 +5527,7 @@
         <p:spPr>
           <a:xfrm>
             <a:off x="548640" y="960120"/>
-            <a:ext cx="11091672" cy="292608"/>
+            <a:ext cx="10515600" cy="292608"/>
           </a:xfrm>
           <a:prstGeom prst="rect">
             <a:avLst/>
@@ -5464,7 +5543,7 @@
               <a:buNone/>
             </a:pPr>
             <a:r>
-              <a:rPr lang="en-US" sz="1100" b="1" spc="50" kern="0" dirty="0">
+              <a:rPr lang="en-US" sz="1100" b="1" spc="150" kern="0" dirty="0">
                 <a:solidFill>
                   <a:srgbClr val="00D4AA"/>
                 </a:solidFill>
@@ -5472,7 +5551,7 @@
                 <a:ea typeface="Noto Sans KR" pitchFamily="34" charset="-122"/>
                 <a:cs typeface="Noto Sans KR" pitchFamily="34" charset="-120"/>
               </a:rPr>
-              <a:t>💬 함께 볼 시연 프롬프트 — 따라 치지 않으셔도 됩니다</a:t>
+              <a:t>오늘 만든 결과물</a:t>
             </a:r>
             <a:endParaRPr lang="en-US" sz="1100" dirty="0"/>
           </a:p>
@@ -5486,8 +5565,8 @@
         </p:nvSpPr>
         <p:spPr>
           <a:xfrm>
-            <a:off x="548640" y="1508760"/>
-            <a:ext cx="11091672" cy="1005840"/>
+            <a:off x="548640" y="1417320"/>
+            <a:ext cx="11091672" cy="640080"/>
           </a:xfrm>
           <a:prstGeom prst="rect">
             <a:avLst/>
@@ -5500,13 +5579,10 @@
           <a:lstStyle/>
           <a:p>
             <a:pPr indent="0" marL="0">
-              <a:lnSpc>
-                <a:spcPct val="115000"/>
-              </a:lnSpc>
-              <a:buNone/>
-            </a:pPr>
-            <a:r>
-              <a:rPr lang="en-US" sz="3400" b="1" spc="-50" kern="0" dirty="0">
+              <a:buNone/>
+            </a:pPr>
+            <a:r>
+              <a:rPr lang="en-US" sz="2800" b="1" spc="-30" kern="0" dirty="0">
                 <a:solidFill>
                   <a:srgbClr val="1A1F36"/>
                 </a:solidFill>
@@ -5514,9 +5590,9 @@
                 <a:ea typeface="Noto Sans KR" pitchFamily="34" charset="-122"/>
                 <a:cs typeface="Noto Sans KR" pitchFamily="34" charset="-120"/>
               </a:rPr>
-              <a:t>4단계 — 사람들은 언제 검색하기 시작하나</a:t>
-            </a:r>
-            <a:endParaRPr lang="en-US" sz="3400" dirty="0"/>
+              <a:t>3단계 결과 — 날씨 결합</a:t>
+            </a:r>
+            <a:endParaRPr lang="en-US" sz="2800" dirty="0"/>
           </a:p>
         </p:txBody>
       </p:sp>
@@ -5528,133 +5604,168 @@
         </p:nvSpPr>
         <p:spPr>
           <a:xfrm>
-            <a:off x="548640" y="2606040"/>
-            <a:ext cx="1828800" cy="0"/>
-          </a:xfrm>
-          <a:prstGeom prst="line">
-            <a:avLst/>
-          </a:prstGeom>
-          <a:noFill/>
-          <a:ln w="25400">
-            <a:solidFill>
-              <a:srgbClr val="00D4AA"/>
-            </a:solidFill>
-            <a:prstDash val="solid"/>
-          </a:ln>
-        </p:spPr>
-      </p:sp>
-      <p:sp>
-        <p:nvSpPr>
-          <p:cNvPr id="7" name="Shape 5"/>
-          <p:cNvSpPr/>
-          <p:nvPr/>
-        </p:nvSpPr>
-        <p:spPr>
-          <a:xfrm>
-            <a:off x="548640" y="2926080"/>
-            <a:ext cx="11091672" cy="3200400"/>
+            <a:off x="2194560" y="2240280"/>
+            <a:ext cx="7772400" cy="3657600"/>
           </a:xfrm>
           <a:prstGeom prst="roundRect">
             <a:avLst>
-              <a:gd name="adj" fmla="val 1714"/>
+              <a:gd name="adj" fmla="val 3000"/>
             </a:avLst>
           </a:prstGeom>
           <a:solidFill>
-            <a:srgbClr val="F1F5F9"/>
+            <a:srgbClr val="F5F7FA"/>
           </a:solidFill>
-          <a:ln w="6350">
+          <a:ln w="12700">
             <a:solidFill>
-              <a:srgbClr val="E2E8F0"/>
+              <a:srgbClr val="CBD5E0"/>
             </a:solidFill>
-            <a:prstDash val="solid"/>
+            <a:prstDash val="dash"/>
           </a:ln>
         </p:spPr>
       </p:sp>
       <p:sp>
         <p:nvSpPr>
-          <p:cNvPr id="8" name="Text 6"/>
-          <p:cNvSpPr/>
-          <p:nvPr/>
-        </p:nvSpPr>
-        <p:spPr>
-          <a:xfrm>
-            <a:off x="713232" y="3035808"/>
-            <a:ext cx="10762488" cy="2980944"/>
-          </a:xfrm>
-          <a:prstGeom prst="rect">
-            <a:avLst/>
-          </a:prstGeom>
-          <a:noFill/>
-          <a:ln/>
-        </p:spPr>
-        <p:txBody>
-          <a:bodyPr wrap="square" rtlCol="0" anchor="t"/>
-          <a:lstStyle/>
-          <a:p>
-            <a:pPr indent="0" marL="0">
+          <p:cNvPr id="7" name="Text 5"/>
+          <p:cNvSpPr/>
+          <p:nvPr/>
+        </p:nvSpPr>
+        <p:spPr>
+          <a:xfrm>
+            <a:off x="2194560" y="3703320"/>
+            <a:ext cx="7772400" cy="731520"/>
+          </a:xfrm>
+          <a:prstGeom prst="rect">
+            <a:avLst/>
+          </a:prstGeom>
+          <a:noFill/>
+          <a:ln/>
+        </p:spPr>
+        <p:txBody>
+          <a:bodyPr wrap="square" rtlCol="0" anchor="ctr"/>
+          <a:lstStyle/>
+          <a:p>
+            <a:pPr algn="ctr" indent="0" marL="0">
               <a:lnSpc>
                 <a:spcPct val="140000"/>
               </a:lnSpc>
               <a:buNone/>
             </a:pPr>
             <a:r>
-              <a:rPr lang="en-US" sz="1150" dirty="0">
-                <a:solidFill>
-                  <a:srgbClr val="1A1F36"/>
+              <a:rPr lang="en-US" sz="1400" i="1" dirty="0">
+                <a:solidFill>
+                  <a:srgbClr val="718096"/>
+                </a:solidFill>
+                <a:latin typeface="Noto Sans KR" pitchFamily="34" charset="0"/>
+                <a:ea typeface="Noto Sans KR" pitchFamily="34" charset="-122"/>
+                <a:cs typeface="Noto Sans KR" pitchFamily="34" charset="-120"/>
+              </a:rPr>
+              <a:t>📷  결과 이미지 위치</a:t>
+            </a:r>
+            <a:endParaRPr lang="en-US" sz="1400" dirty="0"/>
+          </a:p>
+          <a:p>
+            <a:pPr algn="ctr" indent="0" marL="0">
+              <a:lnSpc>
+                <a:spcPct val="140000"/>
+              </a:lnSpc>
+              <a:buNone/>
+            </a:pPr>
+            <a:r>
+              <a:rPr lang="en-US" sz="1400" i="1" dirty="0">
+                <a:solidFill>
+                  <a:srgbClr val="718096"/>
+                </a:solidFill>
+                <a:latin typeface="Noto Sans KR" pitchFamily="34" charset="0"/>
+                <a:ea typeface="Noto Sans KR" pitchFamily="34" charset="-122"/>
+                <a:cs typeface="Noto Sans KR" pitchFamily="34" charset="-120"/>
+              </a:rPr>
+              <a:t>(강의 시연 캡처가 들어갈 자리)</a:t>
+            </a:r>
+            <a:endParaRPr lang="en-US" sz="1400" dirty="0"/>
+          </a:p>
+        </p:txBody>
+      </p:sp>
+      <p:sp>
+        <p:nvSpPr>
+          <p:cNvPr id="8" name="Text 6"/>
+          <p:cNvSpPr/>
+          <p:nvPr/>
+        </p:nvSpPr>
+        <p:spPr>
+          <a:xfrm>
+            <a:off x="2194560" y="4983480"/>
+            <a:ext cx="7772400" cy="365760"/>
+          </a:xfrm>
+          <a:prstGeom prst="rect">
+            <a:avLst/>
+          </a:prstGeom>
+          <a:noFill/>
+          <a:ln/>
+        </p:spPr>
+        <p:txBody>
+          <a:bodyPr wrap="square" rtlCol="0" anchor="ctr"/>
+          <a:lstStyle/>
+          <a:p>
+            <a:pPr algn="ctr" indent="0" marL="0">
+              <a:buNone/>
+            </a:pPr>
+            <a:r>
+              <a:rPr lang="en-US" sz="1000" i="1" dirty="0">
+                <a:solidFill>
+                  <a:srgbClr val="718096"/>
                 </a:solidFill>
                 <a:latin typeface="Roboto Mono" pitchFamily="34" charset="0"/>
                 <a:ea typeface="Roboto Mono" pitchFamily="34" charset="-122"/>
                 <a:cs typeface="Roboto Mono" pitchFamily="34" charset="-120"/>
               </a:rPr>
-              <a:t>buzz_keywords.csv 의 "미세먼지" 검색량과 실제 PM2.5 일별 시계열을</a:t>
-            </a:r>
-            <a:endParaRPr lang="en-US" sz="1150" dirty="0"/>
-          </a:p>
-          <a:p>
-            <a:pPr indent="0" marL="0">
-              <a:lnSpc>
-                <a:spcPct val="140000"/>
-              </a:lnSpc>
-              <a:buNone/>
-            </a:pPr>
-            <a:r>
-              <a:rPr lang="en-US" sz="1150" dirty="0">
-                <a:solidFill>
-                  <a:srgbClr val="1A1F36"/>
-                </a:solidFill>
-                <a:latin typeface="Roboto Mono" pitchFamily="34" charset="0"/>
-                <a:ea typeface="Roboto Mono" pitchFamily="34" charset="-122"/>
-                <a:cs typeface="Roboto Mono" pitchFamily="34" charset="-120"/>
-              </a:rPr>
-              <a:t>같이 그려줘. 검색량이 PM 농도를 며칠 따라가는지(상관 lag) 알려주고,</a:t>
-            </a:r>
-            <a:endParaRPr lang="en-US" sz="1150" dirty="0"/>
-          </a:p>
-          <a:p>
-            <a:pPr indent="0" marL="0">
-              <a:lnSpc>
-                <a:spcPct val="140000"/>
-              </a:lnSpc>
-              <a:buNone/>
-            </a:pPr>
-            <a:r>
-              <a:rPr lang="en-US" sz="1150" dirty="0">
-                <a:solidFill>
-                  <a:srgbClr val="1A1F36"/>
-                </a:solidFill>
-                <a:latin typeface="Roboto Mono" pitchFamily="34" charset="0"/>
-                <a:ea typeface="Roboto Mono" pitchFamily="34" charset="-122"/>
-                <a:cs typeface="Roboto Mono" pitchFamily="34" charset="-120"/>
-              </a:rPr>
-              <a:t>사람들이 PM 몇 ㎍/㎥부터 검색하기 시작하는지 임계값 추정해줘.</a:t>
-            </a:r>
-            <a:endParaRPr lang="en-US" sz="1150" dirty="0"/>
+              <a:t>screenshots/day2/weather_join.png</a:t>
+            </a:r>
+            <a:endParaRPr lang="en-US" sz="1000" dirty="0"/>
           </a:p>
         </p:txBody>
       </p:sp>
       <p:sp>
         <p:nvSpPr>
           <p:cNvPr id="9" name="Text 7"/>
+          <p:cNvSpPr/>
+          <p:nvPr/>
+        </p:nvSpPr>
+        <p:spPr>
+          <a:xfrm>
+            <a:off x="548640" y="5989320"/>
+            <a:ext cx="11091672" cy="411480"/>
+          </a:xfrm>
+          <a:prstGeom prst="rect">
+            <a:avLst/>
+          </a:prstGeom>
+          <a:noFill/>
+          <a:ln/>
+        </p:spPr>
+        <p:txBody>
+          <a:bodyPr wrap="square" rtlCol="0" anchor="ctr"/>
+          <a:lstStyle/>
+          <a:p>
+            <a:pPr algn="ctr" indent="0" marL="0">
+              <a:buNone/>
+            </a:pPr>
+            <a:r>
+              <a:rPr lang="en-US" sz="1200" i="1" dirty="0">
+                <a:solidFill>
+                  <a:srgbClr val="718096"/>
+                </a:solidFill>
+                <a:latin typeface="Noto Sans KR" pitchFamily="34" charset="0"/>
+                <a:ea typeface="Noto Sans KR" pitchFamily="34" charset="-122"/>
+                <a:cs typeface="Noto Sans KR" pitchFamily="34" charset="-120"/>
+              </a:rPr>
+              <a:t>풍속-PM2.5 산점도 + 시즌별 분리</a:t>
+            </a:r>
+            <a:endParaRPr lang="en-US" sz="1200" dirty="0"/>
+          </a:p>
+        </p:txBody>
+      </p:sp>
+      <p:sp>
+        <p:nvSpPr>
+          <p:cNvPr id="10" name="Text 8"/>
           <p:cNvSpPr/>
           <p:nvPr/>
         </p:nvSpPr>
@@ -5685,7 +5796,7 @@
                 <a:ea typeface="Noto Sans KR" pitchFamily="34" charset="-122"/>
                 <a:cs typeface="Noto Sans KR" pitchFamily="34" charset="-120"/>
               </a:rPr>
-              <a:t>16 / 26</a:t>
+              <a:t>16 / 27</a:t>
             </a:r>
             <a:endParaRPr lang="en-US" sz="900" dirty="0"/>
           </a:p>
@@ -5769,7 +5880,7 @@
                 <a:ea typeface="Noto Sans KR" pitchFamily="34" charset="-122"/>
                 <a:cs typeface="Noto Sans KR" pitchFamily="34" charset="-120"/>
               </a:rPr>
-              <a:t>DAY 2 · STEP 4</a:t>
+              <a:t>파트 2. 분석 질문 던지기 + 결합 데이터 EDA</a:t>
             </a:r>
             <a:endParaRPr lang="en-US" sz="1400" dirty="0"/>
           </a:p>
@@ -5784,7 +5895,7 @@
         <p:spPr>
           <a:xfrm>
             <a:off x="548640" y="960120"/>
-            <a:ext cx="10515600" cy="292608"/>
+            <a:ext cx="11091672" cy="292608"/>
           </a:xfrm>
           <a:prstGeom prst="rect">
             <a:avLst/>
@@ -5800,7 +5911,7 @@
               <a:buNone/>
             </a:pPr>
             <a:r>
-              <a:rPr lang="en-US" sz="1100" b="1" spc="150" kern="0" dirty="0">
+              <a:rPr lang="en-US" sz="1100" b="1" spc="50" kern="0" dirty="0">
                 <a:solidFill>
                   <a:srgbClr val="00D4AA"/>
                 </a:solidFill>
@@ -5808,7 +5919,7 @@
                 <a:ea typeface="Noto Sans KR" pitchFamily="34" charset="-122"/>
                 <a:cs typeface="Noto Sans KR" pitchFamily="34" charset="-120"/>
               </a:rPr>
-              <a:t>오늘 만든 결과물</a:t>
+              <a:t>💬 함께 볼 시연 프롬프트 — 따라 치지 않으셔도 됩니다</a:t>
             </a:r>
             <a:endParaRPr lang="en-US" sz="1100" dirty="0"/>
           </a:p>
@@ -5822,8 +5933,8 @@
         </p:nvSpPr>
         <p:spPr>
           <a:xfrm>
-            <a:off x="548640" y="1417320"/>
-            <a:ext cx="11091672" cy="640080"/>
+            <a:off x="548640" y="1508760"/>
+            <a:ext cx="11091672" cy="1005840"/>
           </a:xfrm>
           <a:prstGeom prst="rect">
             <a:avLst/>
@@ -5836,10 +5947,13 @@
           <a:lstStyle/>
           <a:p>
             <a:pPr indent="0" marL="0">
-              <a:buNone/>
-            </a:pPr>
-            <a:r>
-              <a:rPr lang="en-US" sz="2800" b="1" spc="-30" kern="0" dirty="0">
+              <a:lnSpc>
+                <a:spcPct val="115000"/>
+              </a:lnSpc>
+              <a:buNone/>
+            </a:pPr>
+            <a:r>
+              <a:rPr lang="en-US" sz="3400" b="1" spc="-50" kern="0" dirty="0">
                 <a:solidFill>
                   <a:srgbClr val="1A1F36"/>
                 </a:solidFill>
@@ -5847,9 +5961,9 @@
                 <a:ea typeface="Noto Sans KR" pitchFamily="34" charset="-122"/>
                 <a:cs typeface="Noto Sans KR" pitchFamily="34" charset="-120"/>
               </a:rPr>
-              <a:t>4단계 결과 — 언급량 결합</a:t>
-            </a:r>
-            <a:endParaRPr lang="en-US" sz="2800" dirty="0"/>
+              <a:t>4단계 — 사람들은 언제 검색하기 시작하나</a:t>
+            </a:r>
+            <a:endParaRPr lang="en-US" sz="3400" dirty="0"/>
           </a:p>
         </p:txBody>
       </p:sp>
@@ -5861,168 +5975,133 @@
         </p:nvSpPr>
         <p:spPr>
           <a:xfrm>
-            <a:off x="2194560" y="2240280"/>
-            <a:ext cx="7772400" cy="3657600"/>
+            <a:off x="548640" y="2606040"/>
+            <a:ext cx="1828800" cy="0"/>
+          </a:xfrm>
+          <a:prstGeom prst="line">
+            <a:avLst/>
+          </a:prstGeom>
+          <a:noFill/>
+          <a:ln w="25400">
+            <a:solidFill>
+              <a:srgbClr val="00D4AA"/>
+            </a:solidFill>
+            <a:prstDash val="solid"/>
+          </a:ln>
+        </p:spPr>
+      </p:sp>
+      <p:sp>
+        <p:nvSpPr>
+          <p:cNvPr id="7" name="Shape 5"/>
+          <p:cNvSpPr/>
+          <p:nvPr/>
+        </p:nvSpPr>
+        <p:spPr>
+          <a:xfrm>
+            <a:off x="548640" y="2926080"/>
+            <a:ext cx="11091672" cy="3200400"/>
           </a:xfrm>
           <a:prstGeom prst="roundRect">
             <a:avLst>
-              <a:gd name="adj" fmla="val 3000"/>
+              <a:gd name="adj" fmla="val 1714"/>
             </a:avLst>
           </a:prstGeom>
           <a:solidFill>
-            <a:srgbClr val="F5F7FA"/>
+            <a:srgbClr val="F1F5F9"/>
           </a:solidFill>
-          <a:ln w="12700">
+          <a:ln w="6350">
             <a:solidFill>
-              <a:srgbClr val="CBD5E0"/>
+              <a:srgbClr val="E2E8F0"/>
             </a:solidFill>
-            <a:prstDash val="dash"/>
+            <a:prstDash val="solid"/>
           </a:ln>
         </p:spPr>
       </p:sp>
       <p:sp>
         <p:nvSpPr>
-          <p:cNvPr id="7" name="Text 5"/>
-          <p:cNvSpPr/>
-          <p:nvPr/>
-        </p:nvSpPr>
-        <p:spPr>
-          <a:xfrm>
-            <a:off x="2194560" y="3703320"/>
-            <a:ext cx="7772400" cy="731520"/>
-          </a:xfrm>
-          <a:prstGeom prst="rect">
-            <a:avLst/>
-          </a:prstGeom>
-          <a:noFill/>
-          <a:ln/>
-        </p:spPr>
-        <p:txBody>
-          <a:bodyPr wrap="square" rtlCol="0" anchor="ctr"/>
-          <a:lstStyle/>
-          <a:p>
-            <a:pPr algn="ctr" indent="0" marL="0">
+          <p:cNvPr id="8" name="Text 6"/>
+          <p:cNvSpPr/>
+          <p:nvPr/>
+        </p:nvSpPr>
+        <p:spPr>
+          <a:xfrm>
+            <a:off x="713232" y="3035808"/>
+            <a:ext cx="10762488" cy="2980944"/>
+          </a:xfrm>
+          <a:prstGeom prst="rect">
+            <a:avLst/>
+          </a:prstGeom>
+          <a:noFill/>
+          <a:ln/>
+        </p:spPr>
+        <p:txBody>
+          <a:bodyPr wrap="square" rtlCol="0" anchor="t"/>
+          <a:lstStyle/>
+          <a:p>
+            <a:pPr indent="0" marL="0">
               <a:lnSpc>
                 <a:spcPct val="140000"/>
               </a:lnSpc>
               <a:buNone/>
             </a:pPr>
             <a:r>
-              <a:rPr lang="en-US" sz="1400" i="1" dirty="0">
-                <a:solidFill>
-                  <a:srgbClr val="718096"/>
-                </a:solidFill>
-                <a:latin typeface="Noto Sans KR" pitchFamily="34" charset="0"/>
-                <a:ea typeface="Noto Sans KR" pitchFamily="34" charset="-122"/>
-                <a:cs typeface="Noto Sans KR" pitchFamily="34" charset="-120"/>
-              </a:rPr>
-              <a:t>📷  결과 이미지 위치</a:t>
-            </a:r>
-            <a:endParaRPr lang="en-US" sz="1400" dirty="0"/>
-          </a:p>
-          <a:p>
-            <a:pPr algn="ctr" indent="0" marL="0">
+              <a:rPr lang="en-US" sz="1150" dirty="0">
+                <a:solidFill>
+                  <a:srgbClr val="1A1F36"/>
+                </a:solidFill>
+                <a:latin typeface="Roboto Mono" pitchFamily="34" charset="0"/>
+                <a:ea typeface="Roboto Mono" pitchFamily="34" charset="-122"/>
+                <a:cs typeface="Roboto Mono" pitchFamily="34" charset="-120"/>
+              </a:rPr>
+              <a:t>buzz_keywords.csv 의 "미세먼지" 검색량과 실제 PM2.5 일별 시계열을</a:t>
+            </a:r>
+            <a:endParaRPr lang="en-US" sz="1150" dirty="0"/>
+          </a:p>
+          <a:p>
+            <a:pPr indent="0" marL="0">
               <a:lnSpc>
                 <a:spcPct val="140000"/>
               </a:lnSpc>
               <a:buNone/>
             </a:pPr>
             <a:r>
-              <a:rPr lang="en-US" sz="1400" i="1" dirty="0">
-                <a:solidFill>
-                  <a:srgbClr val="718096"/>
-                </a:solidFill>
-                <a:latin typeface="Noto Sans KR" pitchFamily="34" charset="0"/>
-                <a:ea typeface="Noto Sans KR" pitchFamily="34" charset="-122"/>
-                <a:cs typeface="Noto Sans KR" pitchFamily="34" charset="-120"/>
-              </a:rPr>
-              <a:t>(강의 시연 캡처가 들어갈 자리)</a:t>
-            </a:r>
-            <a:endParaRPr lang="en-US" sz="1400" dirty="0"/>
-          </a:p>
-        </p:txBody>
-      </p:sp>
-      <p:sp>
-        <p:nvSpPr>
-          <p:cNvPr id="8" name="Text 6"/>
-          <p:cNvSpPr/>
-          <p:nvPr/>
-        </p:nvSpPr>
-        <p:spPr>
-          <a:xfrm>
-            <a:off x="2194560" y="4983480"/>
-            <a:ext cx="7772400" cy="365760"/>
-          </a:xfrm>
-          <a:prstGeom prst="rect">
-            <a:avLst/>
-          </a:prstGeom>
-          <a:noFill/>
-          <a:ln/>
-        </p:spPr>
-        <p:txBody>
-          <a:bodyPr wrap="square" rtlCol="0" anchor="ctr"/>
-          <a:lstStyle/>
-          <a:p>
-            <a:pPr algn="ctr" indent="0" marL="0">
-              <a:buNone/>
-            </a:pPr>
-            <a:r>
-              <a:rPr lang="en-US" sz="1000" i="1" dirty="0">
-                <a:solidFill>
-                  <a:srgbClr val="718096"/>
+              <a:rPr lang="en-US" sz="1150" dirty="0">
+                <a:solidFill>
+                  <a:srgbClr val="1A1F36"/>
                 </a:solidFill>
                 <a:latin typeface="Roboto Mono" pitchFamily="34" charset="0"/>
                 <a:ea typeface="Roboto Mono" pitchFamily="34" charset="-122"/>
                 <a:cs typeface="Roboto Mono" pitchFamily="34" charset="-120"/>
               </a:rPr>
-              <a:t>screenshots/day2/buzz_join.png</a:t>
-            </a:r>
-            <a:endParaRPr lang="en-US" sz="1000" dirty="0"/>
+              <a:t>같이 그려줘. 검색량이 PM 농도를 며칠 따라가는지(상관 lag) 알려주고,</a:t>
+            </a:r>
+            <a:endParaRPr lang="en-US" sz="1150" dirty="0"/>
+          </a:p>
+          <a:p>
+            <a:pPr indent="0" marL="0">
+              <a:lnSpc>
+                <a:spcPct val="140000"/>
+              </a:lnSpc>
+              <a:buNone/>
+            </a:pPr>
+            <a:r>
+              <a:rPr lang="en-US" sz="1150" dirty="0">
+                <a:solidFill>
+                  <a:srgbClr val="1A1F36"/>
+                </a:solidFill>
+                <a:latin typeface="Roboto Mono" pitchFamily="34" charset="0"/>
+                <a:ea typeface="Roboto Mono" pitchFamily="34" charset="-122"/>
+                <a:cs typeface="Roboto Mono" pitchFamily="34" charset="-120"/>
+              </a:rPr>
+              <a:t>사람들이 PM 몇 ㎍/㎥부터 검색하기 시작하는지 임계값 추정해줘.</a:t>
+            </a:r>
+            <a:endParaRPr lang="en-US" sz="1150" dirty="0"/>
           </a:p>
         </p:txBody>
       </p:sp>
       <p:sp>
         <p:nvSpPr>
           <p:cNvPr id="9" name="Text 7"/>
-          <p:cNvSpPr/>
-          <p:nvPr/>
-        </p:nvSpPr>
-        <p:spPr>
-          <a:xfrm>
-            <a:off x="548640" y="5989320"/>
-            <a:ext cx="11091672" cy="411480"/>
-          </a:xfrm>
-          <a:prstGeom prst="rect">
-            <a:avLst/>
-          </a:prstGeom>
-          <a:noFill/>
-          <a:ln/>
-        </p:spPr>
-        <p:txBody>
-          <a:bodyPr wrap="square" rtlCol="0" anchor="ctr"/>
-          <a:lstStyle/>
-          <a:p>
-            <a:pPr algn="ctr" indent="0" marL="0">
-              <a:buNone/>
-            </a:pPr>
-            <a:r>
-              <a:rPr lang="en-US" sz="1200" i="1" dirty="0">
-                <a:solidFill>
-                  <a:srgbClr val="718096"/>
-                </a:solidFill>
-                <a:latin typeface="Noto Sans KR" pitchFamily="34" charset="0"/>
-                <a:ea typeface="Noto Sans KR" pitchFamily="34" charset="-122"/>
-                <a:cs typeface="Noto Sans KR" pitchFamily="34" charset="-120"/>
-              </a:rPr>
-              <a:t>검색량-PM2.5 시계열 + lag 결과</a:t>
-            </a:r>
-            <a:endParaRPr lang="en-US" sz="1200" dirty="0"/>
-          </a:p>
-        </p:txBody>
-      </p:sp>
-      <p:sp>
-        <p:nvSpPr>
-          <p:cNvPr id="10" name="Text 8"/>
           <p:cNvSpPr/>
           <p:nvPr/>
         </p:nvSpPr>
@@ -6053,7 +6132,7 @@
                 <a:ea typeface="Noto Sans KR" pitchFamily="34" charset="-122"/>
                 <a:cs typeface="Noto Sans KR" pitchFamily="34" charset="-120"/>
               </a:rPr>
-              <a:t>17 / 26</a:t>
+              <a:t>17 / 27</a:t>
             </a:r>
             <a:endParaRPr lang="en-US" sz="900" dirty="0"/>
           </a:p>
@@ -6137,7 +6216,7 @@
                 <a:ea typeface="Noto Sans KR" pitchFamily="34" charset="-122"/>
                 <a:cs typeface="Noto Sans KR" pitchFamily="34" charset="-120"/>
               </a:rPr>
-              <a:t>파트 2. 분석 질문 던지기 + 결합 데이터 EDA</a:t>
+              <a:t>DAY 2 · STEP 4</a:t>
             </a:r>
             <a:endParaRPr lang="en-US" sz="1400" dirty="0"/>
           </a:p>
@@ -6176,7 +6255,7 @@
                 <a:ea typeface="Noto Sans KR" pitchFamily="34" charset="-122"/>
                 <a:cs typeface="Noto Sans KR" pitchFamily="34" charset="-120"/>
               </a:rPr>
-              <a:t>섹션 6 / 6</a:t>
+              <a:t>오늘 만든 결과물</a:t>
             </a:r>
             <a:endParaRPr lang="en-US" sz="1100" dirty="0"/>
           </a:p>
@@ -6190,8 +6269,8 @@
         </p:nvSpPr>
         <p:spPr>
           <a:xfrm>
-            <a:off x="548640" y="1508760"/>
-            <a:ext cx="11091672" cy="1371600"/>
+            <a:off x="548640" y="1417320"/>
+            <a:ext cx="11091672" cy="640080"/>
           </a:xfrm>
           <a:prstGeom prst="rect">
             <a:avLst/>
@@ -6204,134 +6283,193 @@
           <a:lstStyle/>
           <a:p>
             <a:pPr indent="0" marL="0">
+              <a:buNone/>
+            </a:pPr>
+            <a:r>
+              <a:rPr lang="en-US" sz="2800" b="1" spc="-30" kern="0" dirty="0">
+                <a:solidFill>
+                  <a:srgbClr val="1A1F36"/>
+                </a:solidFill>
+                <a:latin typeface="Noto Sans KR" pitchFamily="34" charset="0"/>
+                <a:ea typeface="Noto Sans KR" pitchFamily="34" charset="-122"/>
+                <a:cs typeface="Noto Sans KR" pitchFamily="34" charset="-120"/>
+              </a:rPr>
+              <a:t>4단계 결과 — 언급량 결합</a:t>
+            </a:r>
+            <a:endParaRPr lang="en-US" sz="2800" dirty="0"/>
+          </a:p>
+        </p:txBody>
+      </p:sp>
+      <p:sp>
+        <p:nvSpPr>
+          <p:cNvPr id="6" name="Shape 4"/>
+          <p:cNvSpPr/>
+          <p:nvPr/>
+        </p:nvSpPr>
+        <p:spPr>
+          <a:xfrm>
+            <a:off x="2194560" y="2240280"/>
+            <a:ext cx="7772400" cy="3657600"/>
+          </a:xfrm>
+          <a:prstGeom prst="roundRect">
+            <a:avLst>
+              <a:gd name="adj" fmla="val 3000"/>
+            </a:avLst>
+          </a:prstGeom>
+          <a:solidFill>
+            <a:srgbClr val="F5F7FA"/>
+          </a:solidFill>
+          <a:ln w="12700">
+            <a:solidFill>
+              <a:srgbClr val="CBD5E0"/>
+            </a:solidFill>
+            <a:prstDash val="dash"/>
+          </a:ln>
+        </p:spPr>
+      </p:sp>
+      <p:sp>
+        <p:nvSpPr>
+          <p:cNvPr id="7" name="Text 5"/>
+          <p:cNvSpPr/>
+          <p:nvPr/>
+        </p:nvSpPr>
+        <p:spPr>
+          <a:xfrm>
+            <a:off x="2194560" y="3703320"/>
+            <a:ext cx="7772400" cy="731520"/>
+          </a:xfrm>
+          <a:prstGeom prst="rect">
+            <a:avLst/>
+          </a:prstGeom>
+          <a:noFill/>
+          <a:ln/>
+        </p:spPr>
+        <p:txBody>
+          <a:bodyPr wrap="square" rtlCol="0" anchor="ctr"/>
+          <a:lstStyle/>
+          <a:p>
+            <a:pPr algn="ctr" indent="0" marL="0">
               <a:lnSpc>
-                <a:spcPct val="110000"/>
+                <a:spcPct val="140000"/>
               </a:lnSpc>
               <a:buNone/>
             </a:pPr>
             <a:r>
-              <a:rPr lang="en-US" sz="4200" b="1" spc="-50" kern="0" dirty="0">
-                <a:solidFill>
-                  <a:srgbClr val="1A1F36"/>
-                </a:solidFill>
-                <a:latin typeface="Noto Sans KR" pitchFamily="34" charset="0"/>
-                <a:ea typeface="Noto Sans KR" pitchFamily="34" charset="-122"/>
-                <a:cs typeface="Noto Sans KR" pitchFamily="34" charset="-120"/>
-              </a:rPr>
-              <a:t>답 안 되는 질문 — 분석가의 정직함</a:t>
-            </a:r>
-            <a:endParaRPr lang="en-US" sz="4200" dirty="0"/>
-          </a:p>
-        </p:txBody>
-      </p:sp>
-      <p:sp>
-        <p:nvSpPr>
-          <p:cNvPr id="6" name="Shape 4"/>
-          <p:cNvSpPr/>
-          <p:nvPr/>
-        </p:nvSpPr>
-        <p:spPr>
-          <a:xfrm>
-            <a:off x="548640" y="2971800"/>
-            <a:ext cx="1828800" cy="0"/>
-          </a:xfrm>
-          <a:prstGeom prst="line">
-            <a:avLst/>
-          </a:prstGeom>
-          <a:noFill/>
-          <a:ln w="25400">
-            <a:solidFill>
-              <a:srgbClr val="00D4AA"/>
-            </a:solidFill>
-            <a:prstDash val="solid"/>
-          </a:ln>
-        </p:spPr>
-      </p:sp>
-      <p:sp>
-        <p:nvSpPr>
-          <p:cNvPr id="7" name="Text 5"/>
-          <p:cNvSpPr/>
-          <p:nvPr/>
-        </p:nvSpPr>
-        <p:spPr>
-          <a:xfrm>
-            <a:off x="548640" y="3200400"/>
-            <a:ext cx="11091672" cy="2788920"/>
-          </a:xfrm>
-          <a:prstGeom prst="rect">
-            <a:avLst/>
-          </a:prstGeom>
-          <a:noFill/>
-          <a:ln/>
-        </p:spPr>
-        <p:txBody>
-          <a:bodyPr wrap="square" rtlCol="0" anchor="t"/>
-          <a:lstStyle/>
-          <a:p>
-            <a:pPr indent="0" marL="0">
+              <a:rPr lang="en-US" sz="1400" i="1" dirty="0">
+                <a:solidFill>
+                  <a:srgbClr val="718096"/>
+                </a:solidFill>
+                <a:latin typeface="Noto Sans KR" pitchFamily="34" charset="0"/>
+                <a:ea typeface="Noto Sans KR" pitchFamily="34" charset="-122"/>
+                <a:cs typeface="Noto Sans KR" pitchFamily="34" charset="-120"/>
+              </a:rPr>
+              <a:t>📷  결과 이미지 위치</a:t>
+            </a:r>
+            <a:endParaRPr lang="en-US" sz="1400" dirty="0"/>
+          </a:p>
+          <a:p>
+            <a:pPr algn="ctr" indent="0" marL="0">
               <a:lnSpc>
-                <a:spcPct val="155000"/>
+                <a:spcPct val="140000"/>
               </a:lnSpc>
               <a:buNone/>
             </a:pPr>
             <a:r>
-              <a:rPr lang="en-US" sz="1700" dirty="0">
-                <a:solidFill>
-                  <a:srgbClr val="4A5568"/>
-                </a:solidFill>
-                <a:latin typeface="Noto Sans KR" pitchFamily="34" charset="0"/>
-                <a:ea typeface="Noto Sans KR" pitchFamily="34" charset="-122"/>
-                <a:cs typeface="Noto Sans KR" pitchFamily="34" charset="-120"/>
-              </a:rPr>
-              <a:t>· "출근시간 7~9시 PM" → AQ 일별이라 답 불가 (에어코리아 시간별 API 또는 4일차 결합으로)</a:t>
-            </a:r>
-            <a:endParaRPr lang="en-US" sz="1700" dirty="0"/>
-          </a:p>
-          <a:p>
-            <a:pPr indent="0" marL="0">
-              <a:lnSpc>
-                <a:spcPct val="155000"/>
-              </a:lnSpc>
-              <a:buNone/>
-            </a:pPr>
-            <a:r>
-              <a:rPr lang="en-US" sz="1700" dirty="0">
-                <a:solidFill>
-                  <a:srgbClr val="4A5568"/>
-                </a:solidFill>
-                <a:latin typeface="Noto Sans KR" pitchFamily="34" charset="0"/>
-                <a:ea typeface="Noto Sans KR" pitchFamily="34" charset="-122"/>
-                <a:cs typeface="Noto Sans KR" pitchFamily="34" charset="-120"/>
-              </a:rPr>
-              <a:t>· "코로나 전후" → 배포본 2024~2025만 → 별도 다운로드 필요</a:t>
-            </a:r>
-            <a:endParaRPr lang="en-US" sz="1700" dirty="0"/>
-          </a:p>
-          <a:p>
-            <a:pPr indent="0" marL="0">
-              <a:lnSpc>
-                <a:spcPct val="155000"/>
-              </a:lnSpc>
-              <a:buNone/>
-            </a:pPr>
-            <a:r>
-              <a:rPr lang="en-US" sz="1700" dirty="0">
-                <a:solidFill>
-                  <a:srgbClr val="4A5568"/>
-                </a:solidFill>
-                <a:latin typeface="Noto Sans KR" pitchFamily="34" charset="0"/>
-                <a:ea typeface="Noto Sans KR" pitchFamily="34" charset="-122"/>
-                <a:cs typeface="Noto Sans KR" pitchFamily="34" charset="-120"/>
-              </a:rPr>
-              <a:t>· 답 못 하는 이유를 말로 설명할 수 있어야 분석가다</a:t>
-            </a:r>
-            <a:endParaRPr lang="en-US" sz="1700" dirty="0"/>
+              <a:rPr lang="en-US" sz="1400" i="1" dirty="0">
+                <a:solidFill>
+                  <a:srgbClr val="718096"/>
+                </a:solidFill>
+                <a:latin typeface="Noto Sans KR" pitchFamily="34" charset="0"/>
+                <a:ea typeface="Noto Sans KR" pitchFamily="34" charset="-122"/>
+                <a:cs typeface="Noto Sans KR" pitchFamily="34" charset="-120"/>
+              </a:rPr>
+              <a:t>(강의 시연 캡처가 들어갈 자리)</a:t>
+            </a:r>
+            <a:endParaRPr lang="en-US" sz="1400" dirty="0"/>
           </a:p>
         </p:txBody>
       </p:sp>
       <p:sp>
         <p:nvSpPr>
           <p:cNvPr id="8" name="Text 6"/>
+          <p:cNvSpPr/>
+          <p:nvPr/>
+        </p:nvSpPr>
+        <p:spPr>
+          <a:xfrm>
+            <a:off x="2194560" y="4983480"/>
+            <a:ext cx="7772400" cy="365760"/>
+          </a:xfrm>
+          <a:prstGeom prst="rect">
+            <a:avLst/>
+          </a:prstGeom>
+          <a:noFill/>
+          <a:ln/>
+        </p:spPr>
+        <p:txBody>
+          <a:bodyPr wrap="square" rtlCol="0" anchor="ctr"/>
+          <a:lstStyle/>
+          <a:p>
+            <a:pPr algn="ctr" indent="0" marL="0">
+              <a:buNone/>
+            </a:pPr>
+            <a:r>
+              <a:rPr lang="en-US" sz="1000" i="1" dirty="0">
+                <a:solidFill>
+                  <a:srgbClr val="718096"/>
+                </a:solidFill>
+                <a:latin typeface="Roboto Mono" pitchFamily="34" charset="0"/>
+                <a:ea typeface="Roboto Mono" pitchFamily="34" charset="-122"/>
+                <a:cs typeface="Roboto Mono" pitchFamily="34" charset="-120"/>
+              </a:rPr>
+              <a:t>screenshots/day2/buzz_join.png</a:t>
+            </a:r>
+            <a:endParaRPr lang="en-US" sz="1000" dirty="0"/>
+          </a:p>
+        </p:txBody>
+      </p:sp>
+      <p:sp>
+        <p:nvSpPr>
+          <p:cNvPr id="9" name="Text 7"/>
+          <p:cNvSpPr/>
+          <p:nvPr/>
+        </p:nvSpPr>
+        <p:spPr>
+          <a:xfrm>
+            <a:off x="548640" y="5989320"/>
+            <a:ext cx="11091672" cy="411480"/>
+          </a:xfrm>
+          <a:prstGeom prst="rect">
+            <a:avLst/>
+          </a:prstGeom>
+          <a:noFill/>
+          <a:ln/>
+        </p:spPr>
+        <p:txBody>
+          <a:bodyPr wrap="square" rtlCol="0" anchor="ctr"/>
+          <a:lstStyle/>
+          <a:p>
+            <a:pPr algn="ctr" indent="0" marL="0">
+              <a:buNone/>
+            </a:pPr>
+            <a:r>
+              <a:rPr lang="en-US" sz="1200" i="1" dirty="0">
+                <a:solidFill>
+                  <a:srgbClr val="718096"/>
+                </a:solidFill>
+                <a:latin typeface="Noto Sans KR" pitchFamily="34" charset="0"/>
+                <a:ea typeface="Noto Sans KR" pitchFamily="34" charset="-122"/>
+                <a:cs typeface="Noto Sans KR" pitchFamily="34" charset="-120"/>
+              </a:rPr>
+              <a:t>검색량-PM2.5 시계열 + lag 결과</a:t>
+            </a:r>
+            <a:endParaRPr lang="en-US" sz="1200" dirty="0"/>
+          </a:p>
+        </p:txBody>
+      </p:sp>
+      <p:sp>
+        <p:nvSpPr>
+          <p:cNvPr id="10" name="Text 8"/>
           <p:cNvSpPr/>
           <p:nvPr/>
         </p:nvSpPr>
@@ -6362,7 +6500,7 @@
                 <a:ea typeface="Noto Sans KR" pitchFamily="34" charset="-122"/>
                 <a:cs typeface="Noto Sans KR" pitchFamily="34" charset="-120"/>
               </a:rPr>
-              <a:t>18 / 26</a:t>
+              <a:t>18 / 27</a:t>
             </a:r>
             <a:endParaRPr lang="en-US" sz="900" dirty="0"/>
           </a:p>
@@ -6446,7 +6584,7 @@
                 <a:ea typeface="Noto Sans KR" pitchFamily="34" charset="-122"/>
                 <a:cs typeface="Noto Sans KR" pitchFamily="34" charset="-120"/>
               </a:rPr>
-              <a:t>파트 3. Colab 핸들링 + CLAUDE.md 누적</a:t>
+              <a:t>파트 2. 분석 질문 던지기 + 결합 데이터 EDA</a:t>
             </a:r>
             <a:endParaRPr lang="en-US" sz="1400" dirty="0"/>
           </a:p>
@@ -6485,7 +6623,7 @@
                 <a:ea typeface="Noto Sans KR" pitchFamily="34" charset="-122"/>
                 <a:cs typeface="Noto Sans KR" pitchFamily="34" charset="-120"/>
               </a:rPr>
-              <a:t>섹션 1 / 5</a:t>
+              <a:t>섹션 6 / 6</a:t>
             </a:r>
             <a:endParaRPr lang="en-US" sz="1100" dirty="0"/>
           </a:p>
@@ -6527,7 +6665,7 @@
                 <a:ea typeface="Noto Sans KR" pitchFamily="34" charset="-122"/>
                 <a:cs typeface="Noto Sans KR" pitchFamily="34" charset="-120"/>
               </a:rPr>
-              <a:t>Colab을 왜 끼우나</a:t>
+              <a:t>답 안 되는 질문 — 분석가의 정직함</a:t>
             </a:r>
             <a:endParaRPr lang="en-US" sz="4200" dirty="0"/>
           </a:p>
@@ -6592,7 +6730,7 @@
                 <a:ea typeface="Noto Sans KR" pitchFamily="34" charset="-122"/>
                 <a:cs typeface="Noto Sans KR" pitchFamily="34" charset="-120"/>
               </a:rPr>
-              <a:t>· Claude Code가 짠 코드를 눈으로 보고 직접 만지는 자리</a:t>
+              <a:t>· "출근시간 7~9시 PM" → AQ 일별이라 답 불가 (에어코리아 시간별 API 또는 4일차 결합으로)</a:t>
             </a:r>
             <a:endParaRPr lang="en-US" sz="1700" dirty="0"/>
           </a:p>
@@ -6612,7 +6750,7 @@
                 <a:ea typeface="Noto Sans KR" pitchFamily="34" charset="-122"/>
                 <a:cs typeface="Noto Sans KR" pitchFamily="34" charset="-120"/>
               </a:rPr>
-              <a:t>· 셀 단위로 결과 확인 → 변수명·임계값 바꿔보기 쉬움</a:t>
+              <a:t>· "코로나 전후" → 배포본 2024~2025만 → 별도 다운로드 필요</a:t>
             </a:r>
             <a:endParaRPr lang="en-US" sz="1700" dirty="0"/>
           </a:p>
@@ -6632,7 +6770,7 @@
                 <a:ea typeface="Noto Sans KR" pitchFamily="34" charset="-122"/>
                 <a:cs typeface="Noto Sans KR" pitchFamily="34" charset="-120"/>
               </a:rPr>
-              <a:t>· 회사 환경에서 Claude Code 못 쓸 때 백업 채널</a:t>
+              <a:t>· 답 못 하는 이유를 말로 설명할 수 있어야 분석가다</a:t>
             </a:r>
             <a:endParaRPr lang="en-US" sz="1700" dirty="0"/>
           </a:p>
@@ -6671,7 +6809,7 @@
                 <a:ea typeface="Noto Sans KR" pitchFamily="34" charset="-122"/>
                 <a:cs typeface="Noto Sans KR" pitchFamily="34" charset="-120"/>
               </a:rPr>
-              <a:t>19 / 26</a:t>
+              <a:t>19 / 27</a:t>
             </a:r>
             <a:endParaRPr lang="en-US" sz="900" dirty="0"/>
           </a:p>
@@ -7230,7 +7368,7 @@
                 <a:ea typeface="Noto Sans KR" pitchFamily="34" charset="-122"/>
                 <a:cs typeface="Noto Sans KR" pitchFamily="34" charset="-120"/>
               </a:rPr>
-              <a:t>2 / 26</a:t>
+              <a:t>2 / 27</a:t>
             </a:r>
             <a:endParaRPr lang="en-US" sz="900" dirty="0"/>
           </a:p>
@@ -7353,7 +7491,7 @@
                 <a:ea typeface="Noto Sans KR" pitchFamily="34" charset="-122"/>
                 <a:cs typeface="Noto Sans KR" pitchFamily="34" charset="-120"/>
               </a:rPr>
-              <a:t>섹션 2 / 5</a:t>
+              <a:t>섹션 1 / 5</a:t>
             </a:r>
             <a:endParaRPr lang="en-US" sz="1100" dirty="0"/>
           </a:p>
@@ -7395,7 +7533,7 @@
                 <a:ea typeface="Noto Sans KR" pitchFamily="34" charset="-122"/>
                 <a:cs typeface="Noto Sans KR" pitchFamily="34" charset="-120"/>
               </a:rPr>
-              <a:t>Colab 사용법 (간단)</a:t>
+              <a:t>Colab을 왜 끼우나</a:t>
             </a:r>
             <a:endParaRPr lang="en-US" sz="4200" dirty="0"/>
           </a:p>
@@ -7460,7 +7598,7 @@
                 <a:ea typeface="Noto Sans KR" pitchFamily="34" charset="-122"/>
                 <a:cs typeface="Noto Sans KR" pitchFamily="34" charset="-120"/>
               </a:rPr>
-              <a:t>1. colab.research.google.com → "새 노트"</a:t>
+              <a:t>· Claude Code가 짠 코드를 눈으로 보고 직접 만지는 자리</a:t>
             </a:r>
             <a:endParaRPr lang="en-US" sz="1700" dirty="0"/>
           </a:p>
@@ -7480,7 +7618,7 @@
                 <a:ea typeface="Noto Sans KR" pitchFamily="34" charset="-122"/>
                 <a:cs typeface="Noto Sans KR" pitchFamily="34" charset="-120"/>
               </a:rPr>
-              <a:t>2. 좌측 폴더 아이콘 → CSV 업로드 (또는 Drive 마운트)</a:t>
+              <a:t>· 셀 단위로 결과 확인 → 변수명·임계값 바꿔보기 쉬움</a:t>
             </a:r>
             <a:endParaRPr lang="en-US" sz="1700" dirty="0"/>
           </a:p>
@@ -7500,76 +7638,7 @@
                 <a:ea typeface="Noto Sans KR" pitchFamily="34" charset="-122"/>
                 <a:cs typeface="Noto Sans KR" pitchFamily="34" charset="-120"/>
               </a:rPr>
-              <a:t>3. 코드 셀에 Claude Code 결과 붙여넣고 ▶︎ 실행</a:t>
-            </a:r>
-            <a:endParaRPr lang="en-US" sz="1700" dirty="0"/>
-          </a:p>
-          <a:p>
-            <a:pPr indent="0" marL="0">
-              <a:lnSpc>
-                <a:spcPct val="155000"/>
-              </a:lnSpc>
-              <a:buNone/>
-            </a:pPr>
-            <a:r>
-              <a:rPr lang="en-US" sz="1700" dirty="0">
-                <a:solidFill>
-                  <a:srgbClr val="4A5568"/>
-                </a:solidFill>
-                <a:latin typeface="Noto Sans KR" pitchFamily="34" charset="0"/>
-                <a:ea typeface="Noto Sans KR" pitchFamily="34" charset="-122"/>
-                <a:cs typeface="Noto Sans KR" pitchFamily="34" charset="-120"/>
-              </a:rPr>
-              <a:t>4. 한글 폰트 깨짐 → 첫 셀에 !apt -qq install fonts-nanum</a:t>
-            </a:r>
-            <a:endParaRPr lang="en-US" sz="1700" dirty="0"/>
-          </a:p>
-          <a:p>
-            <a:pPr indent="0" marL="0">
-              <a:lnSpc>
-                <a:spcPct val="155000"/>
-              </a:lnSpc>
-              <a:buNone/>
-            </a:pPr>
-            <a:r>
-              <a:rPr lang="en-US" sz="1700" dirty="0">
-                <a:solidFill>
-                  <a:srgbClr val="4A5568"/>
-                </a:solidFill>
-                <a:latin typeface="Noto Sans KR" pitchFamily="34" charset="0"/>
-                <a:ea typeface="Noto Sans KR" pitchFamily="34" charset="-122"/>
-                <a:cs typeface="Noto Sans KR" pitchFamily="34" charset="-120"/>
-              </a:rPr>
-              <a:t>5. 차트 결과 확인 → 변수 바꿔서 ▶︎ 다시</a:t>
-            </a:r>
-            <a:endParaRPr lang="en-US" sz="1700" dirty="0"/>
-          </a:p>
-          <a:p>
-            <a:pPr indent="0" marL="0">
-              <a:lnSpc>
-                <a:spcPct val="155000"/>
-              </a:lnSpc>
-              <a:buNone/>
-            </a:pPr>
-            <a:endParaRPr lang="en-US" sz="1700" dirty="0"/>
-          </a:p>
-          <a:p>
-            <a:pPr indent="0" marL="0">
-              <a:lnSpc>
-                <a:spcPct val="155000"/>
-              </a:lnSpc>
-              <a:buNone/>
-            </a:pPr>
-            <a:r>
-              <a:rPr lang="en-US" sz="1700" dirty="0">
-                <a:solidFill>
-                  <a:srgbClr val="4A5568"/>
-                </a:solidFill>
-                <a:latin typeface="Noto Sans KR" pitchFamily="34" charset="0"/>
-                <a:ea typeface="Noto Sans KR" pitchFamily="34" charset="-122"/>
-                <a:cs typeface="Noto Sans KR" pitchFamily="34" charset="-120"/>
-              </a:rPr>
-              <a:t>· 강의 노트북 (사전 배포): b2g_day2_eda.ipynb</a:t>
+              <a:t>· 회사 환경에서 Claude Code 못 쓸 때 백업 채널</a:t>
             </a:r>
             <a:endParaRPr lang="en-US" sz="1700" dirty="0"/>
           </a:p>
@@ -7608,7 +7677,7 @@
                 <a:ea typeface="Noto Sans KR" pitchFamily="34" charset="-122"/>
                 <a:cs typeface="Noto Sans KR" pitchFamily="34" charset="-120"/>
               </a:rPr>
-              <a:t>20 / 26</a:t>
+              <a:t>20 / 27</a:t>
             </a:r>
             <a:endParaRPr lang="en-US" sz="900" dirty="0"/>
           </a:p>
@@ -7731,7 +7800,7 @@
                 <a:ea typeface="Noto Sans KR" pitchFamily="34" charset="-122"/>
                 <a:cs typeface="Noto Sans KR" pitchFamily="34" charset="-120"/>
               </a:rPr>
-              <a:t>섹션 3 / 5</a:t>
+              <a:t>섹션 2 / 5</a:t>
             </a:r>
             <a:endParaRPr lang="en-US" sz="1100" dirty="0"/>
           </a:p>
@@ -7773,7 +7842,7 @@
                 <a:ea typeface="Noto Sans KR" pitchFamily="34" charset="-122"/>
                 <a:cs typeface="Noto Sans KR" pitchFamily="34" charset="-120"/>
               </a:rPr>
-              <a:t>Colab 변형 실습</a:t>
+              <a:t>Colab 사용법 (간단)</a:t>
             </a:r>
             <a:endParaRPr lang="en-US" sz="4200" dirty="0"/>
           </a:p>
@@ -7838,7 +7907,7 @@
                 <a:ea typeface="Noto Sans KR" pitchFamily="34" charset="-122"/>
                 <a:cs typeface="Noto Sans KR" pitchFamily="34" charset="-120"/>
               </a:rPr>
-              <a:t>· A: PM2.5 → PM10 으로 같은 분석 (오염원 차이 — 황사는 PM10만 튄다)</a:t>
+              <a:t>1. colab.research.google.com → "새 노트"</a:t>
             </a:r>
             <a:endParaRPr lang="en-US" sz="1700" dirty="0"/>
           </a:p>
@@ -7858,7 +7927,7 @@
                 <a:ea typeface="Noto Sans KR" pitchFamily="34" charset="-122"/>
                 <a:cs typeface="Noto Sans KR" pitchFamily="34" charset="-120"/>
               </a:rPr>
-              <a:t>· B: 이상치 IQR 1.5배 → 3배</a:t>
+              <a:t>2. 좌측 폴더 아이콘 → CSV 업로드 (또는 Drive 마운트)</a:t>
             </a:r>
             <a:endParaRPr lang="en-US" sz="1700" dirty="0"/>
           </a:p>
@@ -7878,7 +7947,7 @@
                 <a:ea typeface="Noto Sans KR" pitchFamily="34" charset="-122"/>
                 <a:cs typeface="Noto Sans KR" pitchFamily="34" charset="-120"/>
               </a:rPr>
-              <a:t>· C: 결합 차트 등급 임계값 변경 (좋음/보통 vs 나쁨/매우나쁨 2분류)</a:t>
+              <a:t>3. 코드 셀에 Claude Code 결과 붙여넣고 ▶︎ 실행</a:t>
             </a:r>
             <a:endParaRPr lang="en-US" sz="1700" dirty="0"/>
           </a:p>
@@ -7898,7 +7967,56 @@
                 <a:ea typeface="Noto Sans KR" pitchFamily="34" charset="-122"/>
                 <a:cs typeface="Noto Sans KR" pitchFamily="34" charset="-120"/>
               </a:rPr>
-              <a:t>· D: 본인이 궁금한 변형</a:t>
+              <a:t>4. 한글 폰트 깨짐 → 첫 셀에 !apt -qq install fonts-nanum</a:t>
+            </a:r>
+            <a:endParaRPr lang="en-US" sz="1700" dirty="0"/>
+          </a:p>
+          <a:p>
+            <a:pPr indent="0" marL="0">
+              <a:lnSpc>
+                <a:spcPct val="155000"/>
+              </a:lnSpc>
+              <a:buNone/>
+            </a:pPr>
+            <a:r>
+              <a:rPr lang="en-US" sz="1700" dirty="0">
+                <a:solidFill>
+                  <a:srgbClr val="4A5568"/>
+                </a:solidFill>
+                <a:latin typeface="Noto Sans KR" pitchFamily="34" charset="0"/>
+                <a:ea typeface="Noto Sans KR" pitchFamily="34" charset="-122"/>
+                <a:cs typeface="Noto Sans KR" pitchFamily="34" charset="-120"/>
+              </a:rPr>
+              <a:t>5. 차트 결과 확인 → 변수 바꿔서 ▶︎ 다시</a:t>
+            </a:r>
+            <a:endParaRPr lang="en-US" sz="1700" dirty="0"/>
+          </a:p>
+          <a:p>
+            <a:pPr indent="0" marL="0">
+              <a:lnSpc>
+                <a:spcPct val="155000"/>
+              </a:lnSpc>
+              <a:buNone/>
+            </a:pPr>
+            <a:endParaRPr lang="en-US" sz="1700" dirty="0"/>
+          </a:p>
+          <a:p>
+            <a:pPr indent="0" marL="0">
+              <a:lnSpc>
+                <a:spcPct val="155000"/>
+              </a:lnSpc>
+              <a:buNone/>
+            </a:pPr>
+            <a:r>
+              <a:rPr lang="en-US" sz="1700" dirty="0">
+                <a:solidFill>
+                  <a:srgbClr val="4A5568"/>
+                </a:solidFill>
+                <a:latin typeface="Noto Sans KR" pitchFamily="34" charset="0"/>
+                <a:ea typeface="Noto Sans KR" pitchFamily="34" charset="-122"/>
+                <a:cs typeface="Noto Sans KR" pitchFamily="34" charset="-120"/>
+              </a:rPr>
+              <a:t>· 강의 노트북 (사전 배포): b2g_day2_eda.ipynb</a:t>
             </a:r>
             <a:endParaRPr lang="en-US" sz="1700" dirty="0"/>
           </a:p>
@@ -7937,7 +8055,7 @@
                 <a:ea typeface="Noto Sans KR" pitchFamily="34" charset="-122"/>
                 <a:cs typeface="Noto Sans KR" pitchFamily="34" charset="-120"/>
               </a:rPr>
-              <a:t>21 / 26</a:t>
+              <a:t>21 / 27</a:t>
             </a:r>
             <a:endParaRPr lang="en-US" sz="900" dirty="0"/>
           </a:p>
@@ -8060,7 +8178,7 @@
                 <a:ea typeface="Noto Sans KR" pitchFamily="34" charset="-122"/>
                 <a:cs typeface="Noto Sans KR" pitchFamily="34" charset="-120"/>
               </a:rPr>
-              <a:t>섹션 4 / 5</a:t>
+              <a:t>섹션 3 / 5</a:t>
             </a:r>
             <a:endParaRPr lang="en-US" sz="1100" dirty="0"/>
           </a:p>
@@ -8102,7 +8220,7 @@
                 <a:ea typeface="Noto Sans KR" pitchFamily="34" charset="-122"/>
                 <a:cs typeface="Noto Sans KR" pitchFamily="34" charset="-120"/>
               </a:rPr>
-              <a:t>자주 나오는 Colab 트러블</a:t>
+              <a:t>Colab 변형 실습</a:t>
             </a:r>
             <a:endParaRPr lang="en-US" sz="4200" dirty="0"/>
           </a:p>
@@ -8167,7 +8285,7 @@
                 <a:ea typeface="Noto Sans KR" pitchFamily="34" charset="-122"/>
                 <a:cs typeface="Noto Sans KR" pitchFamily="34" charset="-120"/>
               </a:rPr>
-              <a:t>· 한글 폰트 깨짐 → !apt -qq install fonts-nanum</a:t>
+              <a:t>· A: PM2.5 → PM10 으로 같은 분석 (오염원 차이 — 황사는 PM10만 튄다)</a:t>
             </a:r>
             <a:endParaRPr lang="en-US" sz="1700" dirty="0"/>
           </a:p>
@@ -8187,7 +8305,7 @@
                 <a:ea typeface="Noto Sans KR" pitchFamily="34" charset="-122"/>
                 <a:cs typeface="Noto Sans KR" pitchFamily="34" charset="-120"/>
               </a:rPr>
-              <a:t>· pd.to_datetime 에러 → format 명시 (format="%Y-%m-%d")</a:t>
+              <a:t>· B: 이상치 IQR 1.5배 → 3배</a:t>
             </a:r>
             <a:endParaRPr lang="en-US" sz="1700" dirty="0"/>
           </a:p>
@@ -8207,7 +8325,7 @@
                 <a:ea typeface="Noto Sans KR" pitchFamily="34" charset="-122"/>
                 <a:cs typeface="Noto Sans KR" pitchFamily="34" charset="-120"/>
               </a:rPr>
-              <a:t>· groupby 결과가 시리즈 → .reset_index() 추가</a:t>
+              <a:t>· C: 결합 차트 등급 임계값 변경 (좋음/보통 vs 나쁨/매우나쁨 2분류)</a:t>
             </a:r>
             <a:endParaRPr lang="en-US" sz="1700" dirty="0"/>
           </a:p>
@@ -8227,7 +8345,7 @@
                 <a:ea typeface="Noto Sans KR" pitchFamily="34" charset="-122"/>
                 <a:cs typeface="Noto Sans KR" pitchFamily="34" charset="-120"/>
               </a:rPr>
-              <a:t>· sns.set_theme()이 폰트 덮어씀 → set_theme 후 폰트 재지정</a:t>
+              <a:t>· D: 본인이 궁금한 변형</a:t>
             </a:r>
             <a:endParaRPr lang="en-US" sz="1700" dirty="0"/>
           </a:p>
@@ -8266,7 +8384,7 @@
                 <a:ea typeface="Noto Sans KR" pitchFamily="34" charset="-122"/>
                 <a:cs typeface="Noto Sans KR" pitchFamily="34" charset="-120"/>
               </a:rPr>
-              <a:t>22 / 26</a:t>
+              <a:t>22 / 27</a:t>
             </a:r>
             <a:endParaRPr lang="en-US" sz="900" dirty="0"/>
           </a:p>
@@ -8365,7 +8483,7 @@
         <p:spPr>
           <a:xfrm>
             <a:off x="548640" y="960120"/>
-            <a:ext cx="11091672" cy="292608"/>
+            <a:ext cx="10515600" cy="292608"/>
           </a:xfrm>
           <a:prstGeom prst="rect">
             <a:avLst/>
@@ -8381,7 +8499,7 @@
               <a:buNone/>
             </a:pPr>
             <a:r>
-              <a:rPr lang="en-US" sz="1100" b="1" spc="50" kern="0" dirty="0">
+              <a:rPr lang="en-US" sz="1100" b="1" spc="150" kern="0" dirty="0">
                 <a:solidFill>
                   <a:srgbClr val="00D4AA"/>
                 </a:solidFill>
@@ -8389,7 +8507,7 @@
                 <a:ea typeface="Noto Sans KR" pitchFamily="34" charset="-122"/>
                 <a:cs typeface="Noto Sans KR" pitchFamily="34" charset="-120"/>
               </a:rPr>
-              <a:t>💬 함께 볼 시연 프롬프트 — 따라 치지 않으셔도 됩니다</a:t>
+              <a:t>섹션 4 / 5</a:t>
             </a:r>
             <a:endParaRPr lang="en-US" sz="1100" dirty="0"/>
           </a:p>
@@ -8404,7 +8522,7 @@
         <p:spPr>
           <a:xfrm>
             <a:off x="548640" y="1508760"/>
-            <a:ext cx="11091672" cy="1005840"/>
+            <a:ext cx="11091672" cy="1371600"/>
           </a:xfrm>
           <a:prstGeom prst="rect">
             <a:avLst/>
@@ -8418,12 +8536,12 @@
           <a:p>
             <a:pPr indent="0" marL="0">
               <a:lnSpc>
-                <a:spcPct val="115000"/>
+                <a:spcPct val="110000"/>
               </a:lnSpc>
               <a:buNone/>
             </a:pPr>
             <a:r>
-              <a:rPr lang="en-US" sz="3400" b="1" spc="-50" kern="0" dirty="0">
+              <a:rPr lang="en-US" sz="4200" b="1" spc="-50" kern="0" dirty="0">
                 <a:solidFill>
                   <a:srgbClr val="1A1F36"/>
                 </a:solidFill>
@@ -8431,9 +8549,9 @@
                 <a:ea typeface="Noto Sans KR" pitchFamily="34" charset="-122"/>
                 <a:cs typeface="Noto Sans KR" pitchFamily="34" charset="-120"/>
               </a:rPr>
-              <a:t>CLAUDE.md 누적 — 자연어로 부탁</a:t>
-            </a:r>
-            <a:endParaRPr lang="en-US" sz="3400" dirty="0"/>
+              <a:t>자주 나오는 Colab 트러블</a:t>
+            </a:r>
+            <a:endParaRPr lang="en-US" sz="4200" dirty="0"/>
           </a:p>
         </p:txBody>
       </p:sp>
@@ -8445,7 +8563,7 @@
         </p:nvSpPr>
         <p:spPr>
           <a:xfrm>
-            <a:off x="548640" y="2606040"/>
+            <a:off x="548640" y="2971800"/>
             <a:ext cx="1828800" cy="0"/>
           </a:xfrm>
           <a:prstGeom prst="line">
@@ -8462,236 +8580,109 @@
       </p:sp>
       <p:sp>
         <p:nvSpPr>
-          <p:cNvPr id="7" name="Shape 5"/>
-          <p:cNvSpPr/>
-          <p:nvPr/>
-        </p:nvSpPr>
-        <p:spPr>
-          <a:xfrm>
-            <a:off x="548640" y="2926080"/>
-            <a:ext cx="11091672" cy="3200400"/>
-          </a:xfrm>
-          <a:prstGeom prst="roundRect">
-            <a:avLst>
-              <a:gd name="adj" fmla="val 1714"/>
-            </a:avLst>
-          </a:prstGeom>
-          <a:solidFill>
-            <a:srgbClr val="F1F5F9"/>
-          </a:solidFill>
-          <a:ln w="6350">
-            <a:solidFill>
-              <a:srgbClr val="E2E8F0"/>
-            </a:solidFill>
-            <a:prstDash val="solid"/>
-          </a:ln>
-        </p:spPr>
+          <p:cNvPr id="7" name="Text 5"/>
+          <p:cNvSpPr/>
+          <p:nvPr/>
+        </p:nvSpPr>
+        <p:spPr>
+          <a:xfrm>
+            <a:off x="548640" y="3200400"/>
+            <a:ext cx="11091672" cy="2788920"/>
+          </a:xfrm>
+          <a:prstGeom prst="rect">
+            <a:avLst/>
+          </a:prstGeom>
+          <a:noFill/>
+          <a:ln/>
+        </p:spPr>
+        <p:txBody>
+          <a:bodyPr wrap="square" rtlCol="0" anchor="t"/>
+          <a:lstStyle/>
+          <a:p>
+            <a:pPr indent="0" marL="0">
+              <a:lnSpc>
+                <a:spcPct val="155000"/>
+              </a:lnSpc>
+              <a:buNone/>
+            </a:pPr>
+            <a:r>
+              <a:rPr lang="en-US" sz="1700" dirty="0">
+                <a:solidFill>
+                  <a:srgbClr val="4A5568"/>
+                </a:solidFill>
+                <a:latin typeface="Noto Sans KR" pitchFamily="34" charset="0"/>
+                <a:ea typeface="Noto Sans KR" pitchFamily="34" charset="-122"/>
+                <a:cs typeface="Noto Sans KR" pitchFamily="34" charset="-120"/>
+              </a:rPr>
+              <a:t>· 한글 폰트 깨짐 → !apt -qq install fonts-nanum</a:t>
+            </a:r>
+            <a:endParaRPr lang="en-US" sz="1700" dirty="0"/>
+          </a:p>
+          <a:p>
+            <a:pPr indent="0" marL="0">
+              <a:lnSpc>
+                <a:spcPct val="155000"/>
+              </a:lnSpc>
+              <a:buNone/>
+            </a:pPr>
+            <a:r>
+              <a:rPr lang="en-US" sz="1700" dirty="0">
+                <a:solidFill>
+                  <a:srgbClr val="4A5568"/>
+                </a:solidFill>
+                <a:latin typeface="Noto Sans KR" pitchFamily="34" charset="0"/>
+                <a:ea typeface="Noto Sans KR" pitchFamily="34" charset="-122"/>
+                <a:cs typeface="Noto Sans KR" pitchFamily="34" charset="-120"/>
+              </a:rPr>
+              <a:t>· pd.to_datetime 에러 → format 명시 (format="%Y-%m-%d")</a:t>
+            </a:r>
+            <a:endParaRPr lang="en-US" sz="1700" dirty="0"/>
+          </a:p>
+          <a:p>
+            <a:pPr indent="0" marL="0">
+              <a:lnSpc>
+                <a:spcPct val="155000"/>
+              </a:lnSpc>
+              <a:buNone/>
+            </a:pPr>
+            <a:r>
+              <a:rPr lang="en-US" sz="1700" dirty="0">
+                <a:solidFill>
+                  <a:srgbClr val="4A5568"/>
+                </a:solidFill>
+                <a:latin typeface="Noto Sans KR" pitchFamily="34" charset="0"/>
+                <a:ea typeface="Noto Sans KR" pitchFamily="34" charset="-122"/>
+                <a:cs typeface="Noto Sans KR" pitchFamily="34" charset="-120"/>
+              </a:rPr>
+              <a:t>· groupby 결과가 시리즈 → .reset_index() 추가</a:t>
+            </a:r>
+            <a:endParaRPr lang="en-US" sz="1700" dirty="0"/>
+          </a:p>
+          <a:p>
+            <a:pPr indent="0" marL="0">
+              <a:lnSpc>
+                <a:spcPct val="155000"/>
+              </a:lnSpc>
+              <a:buNone/>
+            </a:pPr>
+            <a:r>
+              <a:rPr lang="en-US" sz="1700" dirty="0">
+                <a:solidFill>
+                  <a:srgbClr val="4A5568"/>
+                </a:solidFill>
+                <a:latin typeface="Noto Sans KR" pitchFamily="34" charset="0"/>
+                <a:ea typeface="Noto Sans KR" pitchFamily="34" charset="-122"/>
+                <a:cs typeface="Noto Sans KR" pitchFamily="34" charset="-120"/>
+              </a:rPr>
+              <a:t>· sns.set_theme()이 폰트 덮어씀 → set_theme 후 폰트 재지정</a:t>
+            </a:r>
+            <a:endParaRPr lang="en-US" sz="1700" dirty="0"/>
+          </a:p>
+        </p:txBody>
       </p:sp>
       <p:sp>
         <p:nvSpPr>
           <p:cNvPr id="8" name="Text 6"/>
-          <p:cNvSpPr/>
-          <p:nvPr/>
-        </p:nvSpPr>
-        <p:spPr>
-          <a:xfrm>
-            <a:off x="713232" y="3035808"/>
-            <a:ext cx="10762488" cy="2980944"/>
-          </a:xfrm>
-          <a:prstGeom prst="rect">
-            <a:avLst/>
-          </a:prstGeom>
-          <a:noFill/>
-          <a:ln/>
-        </p:spPr>
-        <p:txBody>
-          <a:bodyPr wrap="square" rtlCol="0" anchor="t"/>
-          <a:lstStyle/>
-          <a:p>
-            <a:pPr indent="0" marL="0">
-              <a:lnSpc>
-                <a:spcPct val="140000"/>
-              </a:lnSpc>
-              <a:buNone/>
-            </a:pPr>
-            <a:r>
-              <a:rPr lang="en-US" sz="1150" dirty="0">
-                <a:solidFill>
-                  <a:srgbClr val="1A1F36"/>
-                </a:solidFill>
-                <a:latin typeface="Roboto Mono" pitchFamily="34" charset="0"/>
-                <a:ea typeface="Roboto Mono" pitchFamily="34" charset="-122"/>
-                <a:cs typeface="Roboto Mono" pitchFamily="34" charset="-120"/>
-              </a:rPr>
-              <a:t>오늘 EDA에서 발견한 규칙을 CLAUDE.md에 추가해줘.</a:t>
-            </a:r>
-            <a:endParaRPr lang="en-US" sz="1150" dirty="0"/>
-          </a:p>
-          <a:p>
-            <a:pPr indent="0" marL="0">
-              <a:lnSpc>
-                <a:spcPct val="140000"/>
-              </a:lnSpc>
-              <a:buNone/>
-            </a:pPr>
-            <a:r>
-              <a:rPr lang="en-US" sz="1150" dirty="0">
-                <a:solidFill>
-                  <a:srgbClr val="1A1F36"/>
-                </a:solidFill>
-                <a:latin typeface="Roboto Mono" pitchFamily="34" charset="0"/>
-                <a:ea typeface="Roboto Mono" pitchFamily="34" charset="-122"/>
-                <a:cs typeface="Roboto Mono" pitchFamily="34" charset="-120"/>
-              </a:rPr>
-              <a:t>- 측정일시는 항상 datetime으로 파싱</a:t>
-            </a:r>
-            <a:endParaRPr lang="en-US" sz="1150" dirty="0"/>
-          </a:p>
-          <a:p>
-            <a:pPr indent="0" marL="0">
-              <a:lnSpc>
-                <a:spcPct val="140000"/>
-              </a:lnSpc>
-              <a:buNone/>
-            </a:pPr>
-            <a:r>
-              <a:rPr lang="en-US" sz="1150" dirty="0">
-                <a:solidFill>
-                  <a:srgbClr val="1A1F36"/>
-                </a:solidFill>
-                <a:latin typeface="Roboto Mono" pitchFamily="34" charset="0"/>
-                <a:ea typeface="Roboto Mono" pitchFamily="34" charset="-122"/>
-                <a:cs typeface="Roboto Mono" pitchFamily="34" charset="-120"/>
-              </a:rPr>
-              <a:t>- 결측 50% 이상 측정소는 분석에서 제외</a:t>
-            </a:r>
-            <a:endParaRPr lang="en-US" sz="1150" dirty="0"/>
-          </a:p>
-          <a:p>
-            <a:pPr indent="0" marL="0">
-              <a:lnSpc>
-                <a:spcPct val="140000"/>
-              </a:lnSpc>
-              <a:buNone/>
-            </a:pPr>
-            <a:r>
-              <a:rPr lang="en-US" sz="1150" dirty="0">
-                <a:solidFill>
-                  <a:srgbClr val="1A1F36"/>
-                </a:solidFill>
-                <a:latin typeface="Roboto Mono" pitchFamily="34" charset="0"/>
-                <a:ea typeface="Roboto Mono" pitchFamily="34" charset="-122"/>
-                <a:cs typeface="Roboto Mono" pitchFamily="34" charset="-120"/>
-              </a:rPr>
-              <a:t>- 이상치 기준은 IQR 3배 (황사 spike는 정상값으로 인정)</a:t>
-            </a:r>
-            <a:endParaRPr lang="en-US" sz="1150" dirty="0"/>
-          </a:p>
-          <a:p>
-            <a:pPr indent="0" marL="0">
-              <a:lnSpc>
-                <a:spcPct val="140000"/>
-              </a:lnSpc>
-              <a:buNone/>
-            </a:pPr>
-            <a:r>
-              <a:rPr lang="en-US" sz="1150" dirty="0">
-                <a:solidFill>
-                  <a:srgbClr val="1A1F36"/>
-                </a:solidFill>
-                <a:latin typeface="Roboto Mono" pitchFamily="34" charset="0"/>
-                <a:ea typeface="Roboto Mono" pitchFamily="34" charset="-122"/>
-                <a:cs typeface="Roboto Mono" pitchFamily="34" charset="-120"/>
-              </a:rPr>
-              <a:t>- 황사 시즌 = 3~5월</a:t>
-            </a:r>
-            <a:endParaRPr lang="en-US" sz="1150" dirty="0"/>
-          </a:p>
-          <a:p>
-            <a:pPr indent="0" marL="0">
-              <a:lnSpc>
-                <a:spcPct val="140000"/>
-              </a:lnSpc>
-              <a:buNone/>
-            </a:pPr>
-            <a:r>
-              <a:rPr lang="en-US" sz="1150" dirty="0">
-                <a:solidFill>
-                  <a:srgbClr val="1A1F36"/>
-                </a:solidFill>
-                <a:latin typeface="Roboto Mono" pitchFamily="34" charset="0"/>
-                <a:ea typeface="Roboto Mono" pitchFamily="34" charset="-122"/>
-                <a:cs typeface="Roboto Mono" pitchFamily="34" charset="-120"/>
-              </a:rPr>
-              <a:t>- 결합 데이터는 './data/' 하위, 날짜 컬럼은 'date'로 통일</a:t>
-            </a:r>
-            <a:endParaRPr lang="en-US" sz="1150" dirty="0"/>
-          </a:p>
-          <a:p>
-            <a:pPr indent="0" marL="0">
-              <a:lnSpc>
-                <a:spcPct val="140000"/>
-              </a:lnSpc>
-              <a:buNone/>
-            </a:pPr>
-            <a:r>
-              <a:rPr lang="en-US" sz="1150" dirty="0">
-                <a:solidFill>
-                  <a:srgbClr val="1A1F36"/>
-                </a:solidFill>
-                <a:latin typeface="Roboto Mono" pitchFamily="34" charset="0"/>
-                <a:ea typeface="Roboto Mono" pitchFamily="34" charset="-122"/>
-                <a:cs typeface="Roboto Mono" pitchFamily="34" charset="-120"/>
-              </a:rPr>
-              <a:t>- 시즌별 비교 시 4분위 컬러 팔레트 통일</a:t>
-            </a:r>
-            <a:endParaRPr lang="en-US" sz="1150" dirty="0"/>
-          </a:p>
-          <a:p>
-            <a:pPr indent="0" marL="0">
-              <a:lnSpc>
-                <a:spcPct val="140000"/>
-              </a:lnSpc>
-              <a:buNone/>
-            </a:pPr>
-            <a:r>
-              <a:rPr lang="en-US" sz="1150" dirty="0">
-                <a:solidFill>
-                  <a:srgbClr val="1A1F36"/>
-                </a:solidFill>
-                <a:latin typeface="Roboto Mono" pitchFamily="34" charset="0"/>
-                <a:ea typeface="Roboto Mono" pitchFamily="34" charset="-122"/>
-                <a:cs typeface="Roboto Mono" pitchFamily="34" charset="-120"/>
-              </a:rPr>
-              <a:t>- y축 단위 항상 명시 (PM은 ㎍/㎥, 따릉이는 건, 지하철은 명)</a:t>
-            </a:r>
-            <a:endParaRPr lang="en-US" sz="1150" dirty="0"/>
-          </a:p>
-          <a:p>
-            <a:pPr indent="0" marL="0">
-              <a:lnSpc>
-                <a:spcPct val="140000"/>
-              </a:lnSpc>
-              <a:buNone/>
-            </a:pPr>
-            <a:r>
-              <a:rPr lang="en-US" sz="1150" dirty="0">
-                <a:solidFill>
-                  <a:srgbClr val="1A1F36"/>
-                </a:solidFill>
-                <a:latin typeface="Roboto Mono" pitchFamily="34" charset="0"/>
-                <a:ea typeface="Roboto Mono" pitchFamily="34" charset="-122"/>
-                <a:cs typeface="Roboto Mono" pitchFamily="34" charset="-120"/>
-              </a:rPr>
-              <a:t>기존 규칙과 중복은 합치고, 어울리는 섹션 위치에 추가해줘.</a:t>
-            </a:r>
-            <a:endParaRPr lang="en-US" sz="1150" dirty="0"/>
-          </a:p>
-        </p:txBody>
-      </p:sp>
-      <p:sp>
-        <p:nvSpPr>
-          <p:cNvPr id="9" name="Text 7"/>
           <p:cNvSpPr/>
           <p:nvPr/>
         </p:nvSpPr>
@@ -8722,7 +8713,7 @@
                 <a:ea typeface="Noto Sans KR" pitchFamily="34" charset="-122"/>
                 <a:cs typeface="Noto Sans KR" pitchFamily="34" charset="-120"/>
               </a:rPr>
-              <a:t>23 / 26</a:t>
+              <a:t>23 / 27</a:t>
             </a:r>
             <a:endParaRPr lang="en-US" sz="900" dirty="0"/>
           </a:p>
@@ -8821,7 +8812,7 @@
         <p:spPr>
           <a:xfrm>
             <a:off x="548640" y="960120"/>
-            <a:ext cx="10515600" cy="292608"/>
+            <a:ext cx="11091672" cy="292608"/>
           </a:xfrm>
           <a:prstGeom prst="rect">
             <a:avLst/>
@@ -8837,7 +8828,7 @@
               <a:buNone/>
             </a:pPr>
             <a:r>
-              <a:rPr lang="en-US" sz="1100" b="1" spc="150" kern="0" dirty="0">
+              <a:rPr lang="en-US" sz="1100" b="1" spc="50" kern="0" dirty="0">
                 <a:solidFill>
                   <a:srgbClr val="00D4AA"/>
                 </a:solidFill>
@@ -8845,7 +8836,7 @@
                 <a:ea typeface="Noto Sans KR" pitchFamily="34" charset="-122"/>
                 <a:cs typeface="Noto Sans KR" pitchFamily="34" charset="-120"/>
               </a:rPr>
-              <a:t>섹션 5 / 5</a:t>
+              <a:t>💬 함께 볼 시연 프롬프트 — 따라 치지 않으셔도 됩니다</a:t>
             </a:r>
             <a:endParaRPr lang="en-US" sz="1100" dirty="0"/>
           </a:p>
@@ -8860,7 +8851,7 @@
         <p:spPr>
           <a:xfrm>
             <a:off x="548640" y="1508760"/>
-            <a:ext cx="11091672" cy="1371600"/>
+            <a:ext cx="11091672" cy="1005840"/>
           </a:xfrm>
           <a:prstGeom prst="rect">
             <a:avLst/>
@@ -8874,12 +8865,12 @@
           <a:p>
             <a:pPr indent="0" marL="0">
               <a:lnSpc>
-                <a:spcPct val="110000"/>
+                <a:spcPct val="115000"/>
               </a:lnSpc>
               <a:buNone/>
             </a:pPr>
             <a:r>
-              <a:rPr lang="en-US" sz="4200" b="1" spc="-50" kern="0" dirty="0">
+              <a:rPr lang="en-US" sz="3400" b="1" spc="-50" kern="0" dirty="0">
                 <a:solidFill>
                   <a:srgbClr val="1A1F36"/>
                 </a:solidFill>
@@ -8887,9 +8878,9 @@
                 <a:ea typeface="Noto Sans KR" pitchFamily="34" charset="-122"/>
                 <a:cs typeface="Noto Sans KR" pitchFamily="34" charset="-120"/>
               </a:rPr>
-              <a:t>산출물 정리 + 운영 채널 업로드</a:t>
-            </a:r>
-            <a:endParaRPr lang="en-US" sz="4200" dirty="0"/>
+              <a:t>CLAUDE.md 누적 — 자연어로 부탁</a:t>
+            </a:r>
+            <a:endParaRPr lang="en-US" sz="3400" dirty="0"/>
           </a:p>
         </p:txBody>
       </p:sp>
@@ -8901,7 +8892,7 @@
         </p:nvSpPr>
         <p:spPr>
           <a:xfrm>
-            <a:off x="548640" y="2971800"/>
+            <a:off x="548640" y="2606040"/>
             <a:ext cx="1828800" cy="0"/>
           </a:xfrm>
           <a:prstGeom prst="line">
@@ -8918,14 +8909,41 @@
       </p:sp>
       <p:sp>
         <p:nvSpPr>
-          <p:cNvPr id="7" name="Text 5"/>
-          <p:cNvSpPr/>
-          <p:nvPr/>
-        </p:nvSpPr>
-        <p:spPr>
-          <a:xfrm>
-            <a:off x="548640" y="3200400"/>
-            <a:ext cx="11091672" cy="2788920"/>
+          <p:cNvPr id="7" name="Shape 5"/>
+          <p:cNvSpPr/>
+          <p:nvPr/>
+        </p:nvSpPr>
+        <p:spPr>
+          <a:xfrm>
+            <a:off x="548640" y="2926080"/>
+            <a:ext cx="11091672" cy="3200400"/>
+          </a:xfrm>
+          <a:prstGeom prst="roundRect">
+            <a:avLst>
+              <a:gd name="adj" fmla="val 1714"/>
+            </a:avLst>
+          </a:prstGeom>
+          <a:solidFill>
+            <a:srgbClr val="F1F5F9"/>
+          </a:solidFill>
+          <a:ln w="6350">
+            <a:solidFill>
+              <a:srgbClr val="E2E8F0"/>
+            </a:solidFill>
+            <a:prstDash val="solid"/>
+          </a:ln>
+        </p:spPr>
+      </p:sp>
+      <p:sp>
+        <p:nvSpPr>
+          <p:cNvPr id="8" name="Text 6"/>
+          <p:cNvSpPr/>
+          <p:nvPr/>
+        </p:nvSpPr>
+        <p:spPr>
+          <a:xfrm>
+            <a:off x="713232" y="3035808"/>
+            <a:ext cx="10762488" cy="2980944"/>
           </a:xfrm>
           <a:prstGeom prst="rect">
             <a:avLst/>
@@ -8939,197 +8957,188 @@
           <a:p>
             <a:pPr indent="0" marL="0">
               <a:lnSpc>
-                <a:spcPct val="155000"/>
+                <a:spcPct val="140000"/>
               </a:lnSpc>
               <a:buNone/>
             </a:pPr>
             <a:r>
-              <a:rPr lang="en-US" sz="1700" dirty="0">
-                <a:solidFill>
-                  <a:srgbClr val="4A5568"/>
-                </a:solidFill>
-                <a:latin typeface="Noto Sans KR" pitchFamily="34" charset="0"/>
-                <a:ea typeface="Noto Sans KR" pitchFamily="34" charset="-122"/>
-                <a:cs typeface="Noto Sans KR" pitchFamily="34" charset="-120"/>
-              </a:rPr>
-              <a:t>inflearn_ccd_challenge/</a:t>
-            </a:r>
-            <a:endParaRPr lang="en-US" sz="1700" dirty="0"/>
+              <a:rPr lang="en-US" sz="1150" dirty="0">
+                <a:solidFill>
+                  <a:srgbClr val="1A1F36"/>
+                </a:solidFill>
+                <a:latin typeface="Roboto Mono" pitchFamily="34" charset="0"/>
+                <a:ea typeface="Roboto Mono" pitchFamily="34" charset="-122"/>
+                <a:cs typeface="Roboto Mono" pitchFamily="34" charset="-120"/>
+              </a:rPr>
+              <a:t>오늘 EDA에서 발견한 규칙을 CLAUDE.md에 추가해줘.</a:t>
+            </a:r>
+            <a:endParaRPr lang="en-US" sz="1150" dirty="0"/>
           </a:p>
           <a:p>
             <a:pPr indent="0" marL="0">
               <a:lnSpc>
-                <a:spcPct val="155000"/>
+                <a:spcPct val="140000"/>
               </a:lnSpc>
               <a:buNone/>
             </a:pPr>
             <a:r>
-              <a:rPr lang="en-US" sz="1700" dirty="0">
-                <a:solidFill>
-                  <a:srgbClr val="4A5568"/>
-                </a:solidFill>
-                <a:latin typeface="Noto Sans KR" pitchFamily="34" charset="0"/>
-                <a:ea typeface="Noto Sans KR" pitchFamily="34" charset="-122"/>
-                <a:cs typeface="Noto Sans KR" pitchFamily="34" charset="-120"/>
-              </a:rPr>
-              <a:t>├── CLAUDE.md   (1일차 그대로 + 자연어 누적 반영)</a:t>
-            </a:r>
-            <a:endParaRPr lang="en-US" sz="1700" dirty="0"/>
+              <a:rPr lang="en-US" sz="1150" dirty="0">
+                <a:solidFill>
+                  <a:srgbClr val="1A1F36"/>
+                </a:solidFill>
+                <a:latin typeface="Roboto Mono" pitchFamily="34" charset="0"/>
+                <a:ea typeface="Roboto Mono" pitchFamily="34" charset="-122"/>
+                <a:cs typeface="Roboto Mono" pitchFamily="34" charset="-120"/>
+              </a:rPr>
+              <a:t>- 측정일시는 항상 datetime으로 파싱</a:t>
+            </a:r>
+            <a:endParaRPr lang="en-US" sz="1150" dirty="0"/>
           </a:p>
           <a:p>
             <a:pPr indent="0" marL="0">
               <a:lnSpc>
-                <a:spcPct val="155000"/>
+                <a:spcPct val="140000"/>
               </a:lnSpc>
               <a:buNone/>
             </a:pPr>
             <a:r>
-              <a:rPr lang="en-US" sz="1700" dirty="0">
-                <a:solidFill>
-                  <a:srgbClr val="4A5568"/>
-                </a:solidFill>
-                <a:latin typeface="Noto Sans KR" pitchFamily="34" charset="0"/>
-                <a:ea typeface="Noto Sans KR" pitchFamily="34" charset="-122"/>
-                <a:cs typeface="Noto Sans KR" pitchFamily="34" charset="-120"/>
-              </a:rPr>
-              <a:t>├── outputs/</a:t>
-            </a:r>
-            <a:endParaRPr lang="en-US" sz="1700" dirty="0"/>
+              <a:rPr lang="en-US" sz="1150" dirty="0">
+                <a:solidFill>
+                  <a:srgbClr val="1A1F36"/>
+                </a:solidFill>
+                <a:latin typeface="Roboto Mono" pitchFamily="34" charset="0"/>
+                <a:ea typeface="Roboto Mono" pitchFamily="34" charset="-122"/>
+                <a:cs typeface="Roboto Mono" pitchFamily="34" charset="-120"/>
+              </a:rPr>
+              <a:t>- 결측 50% 이상 측정소는 분석에서 제외</a:t>
+            </a:r>
+            <a:endParaRPr lang="en-US" sz="1150" dirty="0"/>
           </a:p>
           <a:p>
             <a:pPr indent="0" marL="0">
               <a:lnSpc>
-                <a:spcPct val="155000"/>
+                <a:spcPct val="140000"/>
               </a:lnSpc>
               <a:buNone/>
             </a:pPr>
             <a:r>
-              <a:rPr lang="en-US" sz="1700" dirty="0">
-                <a:solidFill>
-                  <a:srgbClr val="4A5568"/>
-                </a:solidFill>
-                <a:latin typeface="Noto Sans KR" pitchFamily="34" charset="0"/>
-                <a:ea typeface="Noto Sans KR" pitchFamily="34" charset="-122"/>
-                <a:cs typeface="Noto Sans KR" pitchFamily="34" charset="-120"/>
-              </a:rPr>
-              <a:t>│   ├── eda_summary.png</a:t>
-            </a:r>
-            <a:endParaRPr lang="en-US" sz="1700" dirty="0"/>
+              <a:rPr lang="en-US" sz="1150" dirty="0">
+                <a:solidFill>
+                  <a:srgbClr val="1A1F36"/>
+                </a:solidFill>
+                <a:latin typeface="Roboto Mono" pitchFamily="34" charset="0"/>
+                <a:ea typeface="Roboto Mono" pitchFamily="34" charset="-122"/>
+                <a:cs typeface="Roboto Mono" pitchFamily="34" charset="-120"/>
+              </a:rPr>
+              <a:t>- 이상치 기준은 IQR 3배 (황사 spike는 정상값으로 인정)</a:t>
+            </a:r>
+            <a:endParaRPr lang="en-US" sz="1150" dirty="0"/>
           </a:p>
           <a:p>
             <a:pPr indent="0" marL="0">
               <a:lnSpc>
-                <a:spcPct val="155000"/>
+                <a:spcPct val="140000"/>
               </a:lnSpc>
               <a:buNone/>
             </a:pPr>
             <a:r>
-              <a:rPr lang="en-US" sz="1700" dirty="0">
-                <a:solidFill>
-                  <a:srgbClr val="4A5568"/>
-                </a:solidFill>
-                <a:latin typeface="Noto Sans KR" pitchFamily="34" charset="0"/>
-                <a:ea typeface="Noto Sans KR" pitchFamily="34" charset="-122"/>
-                <a:cs typeface="Noto Sans KR" pitchFamily="34" charset="-120"/>
-              </a:rPr>
-              <a:t>│   ├── joined_bike_vs_subway.png</a:t>
-            </a:r>
-            <a:endParaRPr lang="en-US" sz="1700" dirty="0"/>
+              <a:rPr lang="en-US" sz="1150" dirty="0">
+                <a:solidFill>
+                  <a:srgbClr val="1A1F36"/>
+                </a:solidFill>
+                <a:latin typeface="Roboto Mono" pitchFamily="34" charset="0"/>
+                <a:ea typeface="Roboto Mono" pitchFamily="34" charset="-122"/>
+                <a:cs typeface="Roboto Mono" pitchFamily="34" charset="-120"/>
+              </a:rPr>
+              <a:t>- 황사 시즌 = 3~5월</a:t>
+            </a:r>
+            <a:endParaRPr lang="en-US" sz="1150" dirty="0"/>
           </a:p>
           <a:p>
             <a:pPr indent="0" marL="0">
               <a:lnSpc>
-                <a:spcPct val="155000"/>
+                <a:spcPct val="140000"/>
               </a:lnSpc>
               <a:buNone/>
             </a:pPr>
             <a:r>
-              <a:rPr lang="en-US" sz="1700" dirty="0">
-                <a:solidFill>
-                  <a:srgbClr val="4A5568"/>
-                </a:solidFill>
-                <a:latin typeface="Noto Sans KR" pitchFamily="34" charset="0"/>
-                <a:ea typeface="Noto Sans KR" pitchFamily="34" charset="-122"/>
-                <a:cs typeface="Noto Sans KR" pitchFamily="34" charset="-120"/>
-              </a:rPr>
-              <a:t>│   ├── weather_corr.png</a:t>
-            </a:r>
-            <a:endParaRPr lang="en-US" sz="1700" dirty="0"/>
+              <a:rPr lang="en-US" sz="1150" dirty="0">
+                <a:solidFill>
+                  <a:srgbClr val="1A1F36"/>
+                </a:solidFill>
+                <a:latin typeface="Roboto Mono" pitchFamily="34" charset="0"/>
+                <a:ea typeface="Roboto Mono" pitchFamily="34" charset="-122"/>
+                <a:cs typeface="Roboto Mono" pitchFamily="34" charset="-120"/>
+              </a:rPr>
+              <a:t>- 결합 데이터는 './data/' 하위, 날짜 컬럼은 'date'로 통일</a:t>
+            </a:r>
+            <a:endParaRPr lang="en-US" sz="1150" dirty="0"/>
           </a:p>
           <a:p>
             <a:pPr indent="0" marL="0">
               <a:lnSpc>
-                <a:spcPct val="155000"/>
+                <a:spcPct val="140000"/>
               </a:lnSpc>
               <a:buNone/>
             </a:pPr>
             <a:r>
-              <a:rPr lang="en-US" sz="1700" dirty="0">
-                <a:solidFill>
-                  <a:srgbClr val="4A5568"/>
-                </a:solidFill>
-                <a:latin typeface="Noto Sans KR" pitchFamily="34" charset="0"/>
-                <a:ea typeface="Noto Sans KR" pitchFamily="34" charset="-122"/>
-                <a:cs typeface="Noto Sans KR" pitchFamily="34" charset="-120"/>
-              </a:rPr>
-              <a:t>│   └── buzz_lag.png</a:t>
-            </a:r>
-            <a:endParaRPr lang="en-US" sz="1700" dirty="0"/>
+              <a:rPr lang="en-US" sz="1150" dirty="0">
+                <a:solidFill>
+                  <a:srgbClr val="1A1F36"/>
+                </a:solidFill>
+                <a:latin typeface="Roboto Mono" pitchFamily="34" charset="0"/>
+                <a:ea typeface="Roboto Mono" pitchFamily="34" charset="-122"/>
+                <a:cs typeface="Roboto Mono" pitchFamily="34" charset="-120"/>
+              </a:rPr>
+              <a:t>- 시즌별 비교 시 4분위 컬러 팔레트 통일</a:t>
+            </a:r>
+            <a:endParaRPr lang="en-US" sz="1150" dirty="0"/>
           </a:p>
           <a:p>
             <a:pPr indent="0" marL="0">
               <a:lnSpc>
-                <a:spcPct val="155000"/>
+                <a:spcPct val="140000"/>
               </a:lnSpc>
               <a:buNone/>
             </a:pPr>
             <a:r>
-              <a:rPr lang="en-US" sz="1700" dirty="0">
-                <a:solidFill>
-                  <a:srgbClr val="4A5568"/>
-                </a:solidFill>
-                <a:latin typeface="Noto Sans KR" pitchFamily="34" charset="0"/>
-                <a:ea typeface="Noto Sans KR" pitchFamily="34" charset="-122"/>
-                <a:cs typeface="Noto Sans KR" pitchFamily="34" charset="-120"/>
-              </a:rPr>
-              <a:t>└── notebook.ipynb</a:t>
-            </a:r>
-            <a:endParaRPr lang="en-US" sz="1700" dirty="0"/>
+              <a:rPr lang="en-US" sz="1150" dirty="0">
+                <a:solidFill>
+                  <a:srgbClr val="1A1F36"/>
+                </a:solidFill>
+                <a:latin typeface="Roboto Mono" pitchFamily="34" charset="0"/>
+                <a:ea typeface="Roboto Mono" pitchFamily="34" charset="-122"/>
+                <a:cs typeface="Roboto Mono" pitchFamily="34" charset="-120"/>
+              </a:rPr>
+              <a:t>- y축 단위 항상 명시 (PM은 ㎍/㎥, 따릉이는 건, 지하철은 명)</a:t>
+            </a:r>
+            <a:endParaRPr lang="en-US" sz="1150" dirty="0"/>
           </a:p>
           <a:p>
             <a:pPr indent="0" marL="0">
               <a:lnSpc>
-                <a:spcPct val="155000"/>
+                <a:spcPct val="140000"/>
               </a:lnSpc>
               <a:buNone/>
             </a:pPr>
-            <a:endParaRPr lang="en-US" sz="1700" dirty="0"/>
-          </a:p>
-          <a:p>
-            <a:pPr indent="0" marL="0">
-              <a:lnSpc>
-                <a:spcPct val="155000"/>
-              </a:lnSpc>
-              <a:buNone/>
-            </a:pPr>
-            <a:r>
-              <a:rPr lang="en-US" sz="1700" dirty="0">
-                <a:solidFill>
-                  <a:srgbClr val="4A5568"/>
-                </a:solidFill>
-                <a:latin typeface="Noto Sans KR" pitchFamily="34" charset="0"/>
-                <a:ea typeface="Noto Sans KR" pitchFamily="34" charset="-122"/>
-                <a:cs typeface="Noto Sans KR" pitchFamily="34" charset="-120"/>
-              </a:rPr>
-              <a:t>→ outputs/ PNG · CLAUDE.md · notebook.ipynb 를 인프런/운영 채널에 업로드</a:t>
-            </a:r>
-            <a:endParaRPr lang="en-US" sz="1700" dirty="0"/>
-          </a:p>
-        </p:txBody>
-      </p:sp>
-      <p:sp>
-        <p:nvSpPr>
-          <p:cNvPr id="8" name="Text 6"/>
+            <a:r>
+              <a:rPr lang="en-US" sz="1150" dirty="0">
+                <a:solidFill>
+                  <a:srgbClr val="1A1F36"/>
+                </a:solidFill>
+                <a:latin typeface="Roboto Mono" pitchFamily="34" charset="0"/>
+                <a:ea typeface="Roboto Mono" pitchFamily="34" charset="-122"/>
+                <a:cs typeface="Roboto Mono" pitchFamily="34" charset="-120"/>
+              </a:rPr>
+              <a:t>기존 규칙과 중복은 합치고, 어울리는 섹션 위치에 추가해줘.</a:t>
+            </a:r>
+            <a:endParaRPr lang="en-US" sz="1150" dirty="0"/>
+          </a:p>
+        </p:txBody>
+      </p:sp>
+      <p:sp>
+        <p:nvSpPr>
+          <p:cNvPr id="9" name="Text 7"/>
           <p:cNvSpPr/>
           <p:nvPr/>
         </p:nvSpPr>
@@ -9160,7 +9169,7 @@
                 <a:ea typeface="Noto Sans KR" pitchFamily="34" charset="-122"/>
                 <a:cs typeface="Noto Sans KR" pitchFamily="34" charset="-120"/>
               </a:rPr>
-              <a:t>24 / 26</a:t>
+              <a:t>24 / 27</a:t>
             </a:r>
             <a:endParaRPr lang="en-US" sz="900" dirty="0"/>
           </a:p>
@@ -9220,7 +9229,7 @@
         <p:spPr>
           <a:xfrm>
             <a:off x="548640" y="530352"/>
-            <a:ext cx="10515600" cy="502920"/>
+            <a:ext cx="10515600" cy="411480"/>
           </a:xfrm>
           <a:prstGeom prst="rect">
             <a:avLst/>
@@ -9236,7 +9245,88 @@
               <a:buNone/>
             </a:pPr>
             <a:r>
-              <a:rPr lang="en-US" sz="2600" b="1" spc="-30" kern="0" dirty="0">
+              <a:rPr lang="en-US" sz="1400" b="1" spc="50" kern="0" dirty="0">
+                <a:solidFill>
+                  <a:srgbClr val="718096"/>
+                </a:solidFill>
+                <a:latin typeface="Noto Sans KR" pitchFamily="34" charset="0"/>
+                <a:ea typeface="Noto Sans KR" pitchFamily="34" charset="-122"/>
+                <a:cs typeface="Noto Sans KR" pitchFamily="34" charset="-120"/>
+              </a:rPr>
+              <a:t>파트 3. Colab 핸들링 + CLAUDE.md 누적</a:t>
+            </a:r>
+            <a:endParaRPr lang="en-US" sz="1400" dirty="0"/>
+          </a:p>
+        </p:txBody>
+      </p:sp>
+      <p:sp>
+        <p:nvSpPr>
+          <p:cNvPr id="4" name="Text 2"/>
+          <p:cNvSpPr/>
+          <p:nvPr/>
+        </p:nvSpPr>
+        <p:spPr>
+          <a:xfrm>
+            <a:off x="548640" y="960120"/>
+            <a:ext cx="10515600" cy="292608"/>
+          </a:xfrm>
+          <a:prstGeom prst="rect">
+            <a:avLst/>
+          </a:prstGeom>
+          <a:noFill/>
+          <a:ln/>
+        </p:spPr>
+        <p:txBody>
+          <a:bodyPr wrap="square" rtlCol="0" anchor="ctr"/>
+          <a:lstStyle/>
+          <a:p>
+            <a:pPr indent="0" marL="0">
+              <a:buNone/>
+            </a:pPr>
+            <a:r>
+              <a:rPr lang="en-US" sz="1100" b="1" spc="150" kern="0" dirty="0">
+                <a:solidFill>
+                  <a:srgbClr val="00D4AA"/>
+                </a:solidFill>
+                <a:latin typeface="Noto Sans KR" pitchFamily="34" charset="0"/>
+                <a:ea typeface="Noto Sans KR" pitchFamily="34" charset="-122"/>
+                <a:cs typeface="Noto Sans KR" pitchFamily="34" charset="-120"/>
+              </a:rPr>
+              <a:t>섹션 5 / 5</a:t>
+            </a:r>
+            <a:endParaRPr lang="en-US" sz="1100" dirty="0"/>
+          </a:p>
+        </p:txBody>
+      </p:sp>
+      <p:sp>
+        <p:nvSpPr>
+          <p:cNvPr id="5" name="Text 3"/>
+          <p:cNvSpPr/>
+          <p:nvPr/>
+        </p:nvSpPr>
+        <p:spPr>
+          <a:xfrm>
+            <a:off x="548640" y="1508760"/>
+            <a:ext cx="11091672" cy="1371600"/>
+          </a:xfrm>
+          <a:prstGeom prst="rect">
+            <a:avLst/>
+          </a:prstGeom>
+          <a:noFill/>
+          <a:ln/>
+        </p:spPr>
+        <p:txBody>
+          <a:bodyPr wrap="square" rtlCol="0" anchor="t"/>
+          <a:lstStyle/>
+          <a:p>
+            <a:pPr indent="0" marL="0">
+              <a:lnSpc>
+                <a:spcPct val="110000"/>
+              </a:lnSpc>
+              <a:buNone/>
+            </a:pPr>
+            <a:r>
+              <a:rPr lang="en-US" sz="4200" b="1" spc="-50" kern="0" dirty="0">
                 <a:solidFill>
                   <a:srgbClr val="1A1F36"/>
                 </a:solidFill>
@@ -9244,79 +9334,11 @@
                 <a:ea typeface="Noto Sans KR" pitchFamily="34" charset="-122"/>
                 <a:cs typeface="Noto Sans KR" pitchFamily="34" charset="-120"/>
               </a:rPr>
-              <a:t>🎯 미션 2 — EDA + 결합 + CLAUDE.md</a:t>
-            </a:r>
-            <a:endParaRPr lang="en-US" sz="2600" dirty="0"/>
-          </a:p>
-        </p:txBody>
-      </p:sp>
-      <p:sp>
-        <p:nvSpPr>
-          <p:cNvPr id="4" name="Text 2"/>
-          <p:cNvSpPr/>
-          <p:nvPr/>
-        </p:nvSpPr>
-        <p:spPr>
-          <a:xfrm>
-            <a:off x="548640" y="1051560"/>
-            <a:ext cx="10515600" cy="347472"/>
-          </a:xfrm>
-          <a:prstGeom prst="rect">
-            <a:avLst/>
-          </a:prstGeom>
-          <a:noFill/>
-          <a:ln/>
-        </p:spPr>
-        <p:txBody>
-          <a:bodyPr wrap="square" rtlCol="0" anchor="ctr"/>
-          <a:lstStyle/>
-          <a:p>
-            <a:pPr indent="0" marL="0">
-              <a:buNone/>
-            </a:pPr>
-            <a:r>
-              <a:rPr lang="en-US" sz="1400" dirty="0">
-                <a:solidFill>
-                  <a:srgbClr val="718096"/>
-                </a:solidFill>
-                <a:latin typeface="Noto Sans KR" pitchFamily="34" charset="0"/>
-                <a:ea typeface="Noto Sans KR" pitchFamily="34" charset="-122"/>
-                <a:cs typeface="Noto Sans KR" pitchFamily="34" charset="-120"/>
-              </a:rPr>
-              <a:t>질문 5개 (단독 3 + 결합 2) + Colab + CLAUDE.md → 인프런/운영 채널 업로드</a:t>
-            </a:r>
-            <a:endParaRPr lang="en-US" sz="1400" dirty="0"/>
-          </a:p>
-        </p:txBody>
-      </p:sp>
-      <p:sp>
-        <p:nvSpPr>
-          <p:cNvPr id="5" name="Shape 3"/>
-          <p:cNvSpPr/>
-          <p:nvPr/>
-        </p:nvSpPr>
-        <p:spPr>
-          <a:xfrm>
-            <a:off x="548640" y="1554480"/>
-            <a:ext cx="5669280" cy="4572000"/>
-          </a:xfrm>
-          <a:prstGeom prst="roundRect">
-            <a:avLst>
-              <a:gd name="adj" fmla="val 2000"/>
-            </a:avLst>
-          </a:prstGeom>
-          <a:solidFill>
-            <a:srgbClr val="FFFFFF"/>
-          </a:solidFill>
-          <a:ln/>
-          <a:effectLst>
-            <a:outerShdw sx="100000" sy="100000" kx="0" ky="0" algn="bl" rotWithShape="0" blurRad="76200" dist="25400" dir="16200000">
-              <a:srgbClr val="000000">
-                <a:alpha val="8000"/>
-              </a:srgbClr>
-            </a:outerShdw>
-          </a:effectLst>
-        </p:spPr>
+              <a:t>산출물 정리 + 운영 채널 업로드</a:t>
+            </a:r>
+            <a:endParaRPr lang="en-US" sz="4200" dirty="0"/>
+          </a:p>
+        </p:txBody>
       </p:sp>
       <p:sp>
         <p:nvSpPr>
@@ -9326,193 +9348,16 @@
         </p:nvSpPr>
         <p:spPr>
           <a:xfrm>
-            <a:off x="548640" y="1554480"/>
-            <a:ext cx="5669280" cy="64008"/>
-          </a:xfrm>
-          <a:prstGeom prst="rect">
-            <a:avLst/>
-          </a:prstGeom>
-          <a:solidFill>
-            <a:srgbClr val="00D4AA"/>
-          </a:solidFill>
-          <a:ln/>
-        </p:spPr>
-      </p:sp>
-      <p:sp>
-        <p:nvSpPr>
-          <p:cNvPr id="7" name="Text 5"/>
-          <p:cNvSpPr/>
-          <p:nvPr/>
-        </p:nvSpPr>
-        <p:spPr>
-          <a:xfrm>
-            <a:off x="777240" y="1691640"/>
-            <a:ext cx="5212080" cy="365760"/>
-          </a:xfrm>
-          <a:prstGeom prst="rect">
-            <a:avLst/>
-          </a:prstGeom>
-          <a:noFill/>
-          <a:ln/>
-        </p:spPr>
-        <p:txBody>
-          <a:bodyPr wrap="square" rtlCol="0" anchor="ctr"/>
-          <a:lstStyle/>
-          <a:p>
-            <a:pPr indent="0" marL="0">
-              <a:buNone/>
-            </a:pPr>
-            <a:r>
-              <a:rPr lang="en-US" sz="1500" b="1" dirty="0">
-                <a:solidFill>
-                  <a:srgbClr val="1A1F36"/>
-                </a:solidFill>
-                <a:latin typeface="Noto Sans KR" pitchFamily="34" charset="0"/>
-                <a:ea typeface="Noto Sans KR" pitchFamily="34" charset="-122"/>
-                <a:cs typeface="Noto Sans KR" pitchFamily="34" charset="-120"/>
-              </a:rPr>
-              <a:t>필수 제출</a:t>
-            </a:r>
-            <a:endParaRPr lang="en-US" sz="1500" dirty="0"/>
-          </a:p>
-        </p:txBody>
-      </p:sp>
-      <p:sp>
-        <p:nvSpPr>
-          <p:cNvPr id="8" name="Text 6"/>
-          <p:cNvSpPr/>
-          <p:nvPr/>
-        </p:nvSpPr>
-        <p:spPr>
-          <a:xfrm>
-            <a:off x="777240" y="2148840"/>
-            <a:ext cx="5212080" cy="3840480"/>
-          </a:xfrm>
-          <a:prstGeom prst="rect">
-            <a:avLst/>
-          </a:prstGeom>
-          <a:noFill/>
-          <a:ln/>
-        </p:spPr>
-        <p:txBody>
-          <a:bodyPr wrap="square" rtlCol="0" anchor="t"/>
-          <a:lstStyle/>
-          <a:p>
-            <a:pPr indent="0" marL="0">
-              <a:lnSpc>
-                <a:spcPct val="150000"/>
-              </a:lnSpc>
-              <a:spcAft>
-                <a:spcPts val="1000"/>
-              </a:spcAft>
-              <a:buNone/>
-            </a:pPr>
-            <a:r>
-              <a:rPr lang="en-US" sz="1300" dirty="0">
-                <a:solidFill>
-                  <a:srgbClr val="4A5568"/>
-                </a:solidFill>
-                <a:latin typeface="Noto Sans KR" pitchFamily="34" charset="0"/>
-                <a:ea typeface="Noto Sans KR" pitchFamily="34" charset="-122"/>
-                <a:cs typeface="Noto Sans KR" pitchFamily="34" charset="-120"/>
-              </a:rPr>
-              <a:t>✅ 분석 질문 5개 + 결과 캡처 (단독 3 + 결합 2 권장)</a:t>
-            </a:r>
-            <a:endParaRPr lang="en-US" sz="1300" dirty="0"/>
-          </a:p>
-          <a:p>
-            <a:pPr indent="0" marL="0">
-              <a:lnSpc>
-                <a:spcPct val="150000"/>
-              </a:lnSpc>
-              <a:spcAft>
-                <a:spcPts val="1000"/>
-              </a:spcAft>
-              <a:buNone/>
-            </a:pPr>
-            <a:r>
-              <a:rPr lang="en-US" sz="1300" dirty="0">
-                <a:solidFill>
-                  <a:srgbClr val="4A5568"/>
-                </a:solidFill>
-                <a:latin typeface="Noto Sans KR" pitchFamily="34" charset="0"/>
-                <a:ea typeface="Noto Sans KR" pitchFamily="34" charset="-122"/>
-                <a:cs typeface="Noto Sans KR" pitchFamily="34" charset="-120"/>
-              </a:rPr>
-              <a:t>✅ Colab 노트북 1개 (코드 변형 흔적 포함)</a:t>
-            </a:r>
-            <a:endParaRPr lang="en-US" sz="1300" dirty="0"/>
-          </a:p>
-          <a:p>
-            <a:pPr indent="0" marL="0">
-              <a:lnSpc>
-                <a:spcPct val="150000"/>
-              </a:lnSpc>
-              <a:spcAft>
-                <a:spcPts val="1000"/>
-              </a:spcAft>
-              <a:buNone/>
-            </a:pPr>
-            <a:r>
-              <a:rPr lang="en-US" sz="1300" dirty="0">
-                <a:solidFill>
-                  <a:srgbClr val="4A5568"/>
-                </a:solidFill>
-                <a:latin typeface="Noto Sans KR" pitchFamily="34" charset="0"/>
-                <a:ea typeface="Noto Sans KR" pitchFamily="34" charset="-122"/>
-                <a:cs typeface="Noto Sans KR" pitchFamily="34" charset="-120"/>
-              </a:rPr>
-              <a:t>✅ CLAUDE.md 누적분 (자연어로 추가, 1일차 대비 +5개 이상)</a:t>
-            </a:r>
-            <a:endParaRPr lang="en-US" sz="1300" dirty="0"/>
-          </a:p>
-          <a:p>
-            <a:pPr indent="0" marL="0">
-              <a:lnSpc>
-                <a:spcPct val="150000"/>
-              </a:lnSpc>
-              <a:spcAft>
-                <a:spcPts val="1000"/>
-              </a:spcAft>
-              <a:buNone/>
-            </a:pPr>
-            <a:r>
-              <a:rPr lang="en-US" sz="1300" dirty="0">
-                <a:solidFill>
-                  <a:srgbClr val="4A5568"/>
-                </a:solidFill>
-                <a:latin typeface="Noto Sans KR" pitchFamily="34" charset="0"/>
-                <a:ea typeface="Noto Sans KR" pitchFamily="34" charset="-122"/>
-                <a:cs typeface="Noto Sans KR" pitchFamily="34" charset="-120"/>
-              </a:rPr>
-              <a:t>✅ 운영 채널 업로드 (PNG · CLAUDE.md · notebook)</a:t>
-            </a:r>
-            <a:endParaRPr lang="en-US" sz="1300" dirty="0"/>
-          </a:p>
-        </p:txBody>
-      </p:sp>
-      <p:sp>
-        <p:nvSpPr>
-          <p:cNvPr id="9" name="Shape 7"/>
-          <p:cNvSpPr/>
-          <p:nvPr/>
-        </p:nvSpPr>
-        <p:spPr>
-          <a:xfrm>
-            <a:off x="6400800" y="1554480"/>
-            <a:ext cx="5212080" cy="4572000"/>
-          </a:xfrm>
-          <a:prstGeom prst="roundRect">
-            <a:avLst>
-              <a:gd name="adj" fmla="val 2000"/>
-            </a:avLst>
-          </a:prstGeom>
-          <a:solidFill>
-            <a:srgbClr val="F5F7FA"/>
-          </a:solidFill>
-          <a:ln w="6350">
+            <a:off x="548640" y="2971800"/>
+            <a:ext cx="1828800" cy="0"/>
+          </a:xfrm>
+          <a:prstGeom prst="line">
+            <a:avLst/>
+          </a:prstGeom>
+          <a:noFill/>
+          <a:ln w="25400">
             <a:solidFill>
-              <a:srgbClr val="E2E8F0"/>
+              <a:srgbClr val="00D4AA"/>
             </a:solidFill>
             <a:prstDash val="solid"/>
           </a:ln>
@@ -9520,73 +9365,14 @@
       </p:sp>
       <p:sp>
         <p:nvSpPr>
-          <p:cNvPr id="10" name="Shape 8"/>
-          <p:cNvSpPr/>
-          <p:nvPr/>
-        </p:nvSpPr>
-        <p:spPr>
-          <a:xfrm>
-            <a:off x="6400800" y="1554480"/>
-            <a:ext cx="5212080" cy="64008"/>
-          </a:xfrm>
-          <a:prstGeom prst="rect">
-            <a:avLst/>
-          </a:prstGeom>
-          <a:solidFill>
-            <a:srgbClr val="00D4AA"/>
-          </a:solidFill>
-          <a:ln/>
-        </p:spPr>
-      </p:sp>
-      <p:sp>
-        <p:nvSpPr>
-          <p:cNvPr id="11" name="Text 9"/>
-          <p:cNvSpPr/>
-          <p:nvPr/>
-        </p:nvSpPr>
-        <p:spPr>
-          <a:xfrm>
-            <a:off x="6629400" y="1691640"/>
-            <a:ext cx="4754880" cy="365760"/>
-          </a:xfrm>
-          <a:prstGeom prst="rect">
-            <a:avLst/>
-          </a:prstGeom>
-          <a:noFill/>
-          <a:ln/>
-        </p:spPr>
-        <p:txBody>
-          <a:bodyPr wrap="square" rtlCol="0" anchor="ctr"/>
-          <a:lstStyle/>
-          <a:p>
-            <a:pPr indent="0" marL="0">
-              <a:buNone/>
-            </a:pPr>
-            <a:r>
-              <a:rPr lang="en-US" sz="1500" b="1" dirty="0">
-                <a:solidFill>
-                  <a:srgbClr val="1A1F36"/>
-                </a:solidFill>
-                <a:latin typeface="Noto Sans KR" pitchFamily="34" charset="0"/>
-                <a:ea typeface="Noto Sans KR" pitchFamily="34" charset="-122"/>
-                <a:cs typeface="Noto Sans KR" pitchFamily="34" charset="-120"/>
-              </a:rPr>
-              <a:t>선택 (보너스)</a:t>
-            </a:r>
-            <a:endParaRPr lang="en-US" sz="1500" dirty="0"/>
-          </a:p>
-        </p:txBody>
-      </p:sp>
-      <p:sp>
-        <p:nvSpPr>
-          <p:cNvPr id="12" name="Text 10"/>
-          <p:cNvSpPr/>
-          <p:nvPr/>
-        </p:nvSpPr>
-        <p:spPr>
-          <a:xfrm>
-            <a:off x="6629400" y="2148840"/>
-            <a:ext cx="4754880" cy="3840480"/>
+          <p:cNvPr id="7" name="Text 5"/>
+          <p:cNvSpPr/>
+          <p:nvPr/>
+        </p:nvSpPr>
+        <p:spPr>
+          <a:xfrm>
+            <a:off x="548640" y="3200400"/>
+            <a:ext cx="11091672" cy="2788920"/>
           </a:xfrm>
           <a:prstGeom prst="rect">
             <a:avLst/>
@@ -9600,15 +9386,12 @@
           <a:p>
             <a:pPr indent="0" marL="0">
               <a:lnSpc>
-                <a:spcPct val="150000"/>
+                <a:spcPct val="155000"/>
               </a:lnSpc>
-              <a:spcAft>
-                <a:spcPts val="1000"/>
-              </a:spcAft>
-              <a:buNone/>
-            </a:pPr>
-            <a:r>
-              <a:rPr lang="en-US" sz="1300" dirty="0">
+              <a:buNone/>
+            </a:pPr>
+            <a:r>
+              <a:rPr lang="en-US" sz="1700" dirty="0">
                 <a:solidFill>
                   <a:srgbClr val="4A5568"/>
                 </a:solidFill>
@@ -9616,22 +9399,19 @@
                 <a:ea typeface="Noto Sans KR" pitchFamily="34" charset="-122"/>
                 <a:cs typeface="Noto Sans KR" pitchFamily="34" charset="-120"/>
               </a:rPr>
-              <a:t>⭐ 답 안 되는 질문 1개 + 왜 답 못 하는지 한 줄</a:t>
-            </a:r>
-            <a:endParaRPr lang="en-US" sz="1300" dirty="0"/>
+              <a:t>inflearn_ccd_challenge/</a:t>
+            </a:r>
+            <a:endParaRPr lang="en-US" sz="1700" dirty="0"/>
           </a:p>
           <a:p>
             <a:pPr indent="0" marL="0">
               <a:lnSpc>
-                <a:spcPct val="150000"/>
+                <a:spcPct val="155000"/>
               </a:lnSpc>
-              <a:spcAft>
-                <a:spcPts val="1000"/>
-              </a:spcAft>
-              <a:buNone/>
-            </a:pPr>
-            <a:r>
-              <a:rPr lang="en-US" sz="1300" dirty="0">
+              <a:buNone/>
+            </a:pPr>
+            <a:r>
+              <a:rPr lang="en-US" sz="1700" dirty="0">
                 <a:solidFill>
                   <a:srgbClr val="4A5568"/>
                 </a:solidFill>
@@ -9639,15 +9419,164 @@
                 <a:ea typeface="Noto Sans KR" pitchFamily="34" charset="-122"/>
                 <a:cs typeface="Noto Sans KR" pitchFamily="34" charset="-120"/>
               </a:rPr>
-              <a:t>⭐ 본인 회사 데이터 결합 시도</a:t>
-            </a:r>
-            <a:endParaRPr lang="en-US" sz="1300" dirty="0"/>
-          </a:p>
-        </p:txBody>
-      </p:sp>
-      <p:sp>
-        <p:nvSpPr>
-          <p:cNvPr id="13" name="Text 11"/>
+              <a:t>├── CLAUDE.md   (1일차 그대로 + 자연어 누적 반영)</a:t>
+            </a:r>
+            <a:endParaRPr lang="en-US" sz="1700" dirty="0"/>
+          </a:p>
+          <a:p>
+            <a:pPr indent="0" marL="0">
+              <a:lnSpc>
+                <a:spcPct val="155000"/>
+              </a:lnSpc>
+              <a:buNone/>
+            </a:pPr>
+            <a:r>
+              <a:rPr lang="en-US" sz="1700" dirty="0">
+                <a:solidFill>
+                  <a:srgbClr val="4A5568"/>
+                </a:solidFill>
+                <a:latin typeface="Noto Sans KR" pitchFamily="34" charset="0"/>
+                <a:ea typeface="Noto Sans KR" pitchFamily="34" charset="-122"/>
+                <a:cs typeface="Noto Sans KR" pitchFamily="34" charset="-120"/>
+              </a:rPr>
+              <a:t>├── outputs/</a:t>
+            </a:r>
+            <a:endParaRPr lang="en-US" sz="1700" dirty="0"/>
+          </a:p>
+          <a:p>
+            <a:pPr indent="0" marL="0">
+              <a:lnSpc>
+                <a:spcPct val="155000"/>
+              </a:lnSpc>
+              <a:buNone/>
+            </a:pPr>
+            <a:r>
+              <a:rPr lang="en-US" sz="1700" dirty="0">
+                <a:solidFill>
+                  <a:srgbClr val="4A5568"/>
+                </a:solidFill>
+                <a:latin typeface="Noto Sans KR" pitchFamily="34" charset="0"/>
+                <a:ea typeface="Noto Sans KR" pitchFamily="34" charset="-122"/>
+                <a:cs typeface="Noto Sans KR" pitchFamily="34" charset="-120"/>
+              </a:rPr>
+              <a:t>│   ├── eda_summary.png</a:t>
+            </a:r>
+            <a:endParaRPr lang="en-US" sz="1700" dirty="0"/>
+          </a:p>
+          <a:p>
+            <a:pPr indent="0" marL="0">
+              <a:lnSpc>
+                <a:spcPct val="155000"/>
+              </a:lnSpc>
+              <a:buNone/>
+            </a:pPr>
+            <a:r>
+              <a:rPr lang="en-US" sz="1700" dirty="0">
+                <a:solidFill>
+                  <a:srgbClr val="4A5568"/>
+                </a:solidFill>
+                <a:latin typeface="Noto Sans KR" pitchFamily="34" charset="0"/>
+                <a:ea typeface="Noto Sans KR" pitchFamily="34" charset="-122"/>
+                <a:cs typeface="Noto Sans KR" pitchFamily="34" charset="-120"/>
+              </a:rPr>
+              <a:t>│   ├── joined_bike_vs_subway.png</a:t>
+            </a:r>
+            <a:endParaRPr lang="en-US" sz="1700" dirty="0"/>
+          </a:p>
+          <a:p>
+            <a:pPr indent="0" marL="0">
+              <a:lnSpc>
+                <a:spcPct val="155000"/>
+              </a:lnSpc>
+              <a:buNone/>
+            </a:pPr>
+            <a:r>
+              <a:rPr lang="en-US" sz="1700" dirty="0">
+                <a:solidFill>
+                  <a:srgbClr val="4A5568"/>
+                </a:solidFill>
+                <a:latin typeface="Noto Sans KR" pitchFamily="34" charset="0"/>
+                <a:ea typeface="Noto Sans KR" pitchFamily="34" charset="-122"/>
+                <a:cs typeface="Noto Sans KR" pitchFamily="34" charset="-120"/>
+              </a:rPr>
+              <a:t>│   ├── weather_corr.png</a:t>
+            </a:r>
+            <a:endParaRPr lang="en-US" sz="1700" dirty="0"/>
+          </a:p>
+          <a:p>
+            <a:pPr indent="0" marL="0">
+              <a:lnSpc>
+                <a:spcPct val="155000"/>
+              </a:lnSpc>
+              <a:buNone/>
+            </a:pPr>
+            <a:r>
+              <a:rPr lang="en-US" sz="1700" dirty="0">
+                <a:solidFill>
+                  <a:srgbClr val="4A5568"/>
+                </a:solidFill>
+                <a:latin typeface="Noto Sans KR" pitchFamily="34" charset="0"/>
+                <a:ea typeface="Noto Sans KR" pitchFamily="34" charset="-122"/>
+                <a:cs typeface="Noto Sans KR" pitchFamily="34" charset="-120"/>
+              </a:rPr>
+              <a:t>│   └── buzz_lag.png</a:t>
+            </a:r>
+            <a:endParaRPr lang="en-US" sz="1700" dirty="0"/>
+          </a:p>
+          <a:p>
+            <a:pPr indent="0" marL="0">
+              <a:lnSpc>
+                <a:spcPct val="155000"/>
+              </a:lnSpc>
+              <a:buNone/>
+            </a:pPr>
+            <a:r>
+              <a:rPr lang="en-US" sz="1700" dirty="0">
+                <a:solidFill>
+                  <a:srgbClr val="4A5568"/>
+                </a:solidFill>
+                <a:latin typeface="Noto Sans KR" pitchFamily="34" charset="0"/>
+                <a:ea typeface="Noto Sans KR" pitchFamily="34" charset="-122"/>
+                <a:cs typeface="Noto Sans KR" pitchFamily="34" charset="-120"/>
+              </a:rPr>
+              <a:t>└── notebook.ipynb</a:t>
+            </a:r>
+            <a:endParaRPr lang="en-US" sz="1700" dirty="0"/>
+          </a:p>
+          <a:p>
+            <a:pPr indent="0" marL="0">
+              <a:lnSpc>
+                <a:spcPct val="155000"/>
+              </a:lnSpc>
+              <a:buNone/>
+            </a:pPr>
+            <a:endParaRPr lang="en-US" sz="1700" dirty="0"/>
+          </a:p>
+          <a:p>
+            <a:pPr indent="0" marL="0">
+              <a:lnSpc>
+                <a:spcPct val="155000"/>
+              </a:lnSpc>
+              <a:buNone/>
+            </a:pPr>
+            <a:r>
+              <a:rPr lang="en-US" sz="1700" dirty="0">
+                <a:solidFill>
+                  <a:srgbClr val="4A5568"/>
+                </a:solidFill>
+                <a:latin typeface="Noto Sans KR" pitchFamily="34" charset="0"/>
+                <a:ea typeface="Noto Sans KR" pitchFamily="34" charset="-122"/>
+                <a:cs typeface="Noto Sans KR" pitchFamily="34" charset="-120"/>
+              </a:rPr>
+              <a:t>→ outputs/ PNG · CLAUDE.md · notebook.ipynb 를 인프런/운영 채널에 업로드</a:t>
+            </a:r>
+            <a:endParaRPr lang="en-US" sz="1700" dirty="0"/>
+          </a:p>
+        </p:txBody>
+      </p:sp>
+      <p:sp>
+        <p:nvSpPr>
+          <p:cNvPr id="8" name="Text 6"/>
           <p:cNvSpPr/>
           <p:nvPr/>
         </p:nvSpPr>
@@ -9678,7 +9607,7 @@
                 <a:ea typeface="Noto Sans KR" pitchFamily="34" charset="-122"/>
                 <a:cs typeface="Noto Sans KR" pitchFamily="34" charset="-120"/>
               </a:rPr>
-              <a:t>25 / 26</a:t>
+              <a:t>25 / 27</a:t>
             </a:r>
             <a:endParaRPr lang="en-US" sz="900" dirty="0"/>
           </a:p>
@@ -9717,6 +9646,524 @@
         </p:nvSpPr>
         <p:spPr>
           <a:xfrm>
+            <a:off x="548640" y="384048"/>
+            <a:ext cx="914400" cy="54864"/>
+          </a:xfrm>
+          <a:prstGeom prst="rect">
+            <a:avLst/>
+          </a:prstGeom>
+          <a:solidFill>
+            <a:srgbClr val="00D4AA"/>
+          </a:solidFill>
+          <a:ln/>
+        </p:spPr>
+      </p:sp>
+      <p:sp>
+        <p:nvSpPr>
+          <p:cNvPr id="3" name="Text 1"/>
+          <p:cNvSpPr/>
+          <p:nvPr/>
+        </p:nvSpPr>
+        <p:spPr>
+          <a:xfrm>
+            <a:off x="548640" y="530352"/>
+            <a:ext cx="10515600" cy="502920"/>
+          </a:xfrm>
+          <a:prstGeom prst="rect">
+            <a:avLst/>
+          </a:prstGeom>
+          <a:noFill/>
+          <a:ln/>
+        </p:spPr>
+        <p:txBody>
+          <a:bodyPr wrap="square" rtlCol="0" anchor="ctr"/>
+          <a:lstStyle/>
+          <a:p>
+            <a:pPr indent="0" marL="0">
+              <a:buNone/>
+            </a:pPr>
+            <a:r>
+              <a:rPr lang="en-US" sz="2600" b="1" spc="-30" kern="0" dirty="0">
+                <a:solidFill>
+                  <a:srgbClr val="1A1F36"/>
+                </a:solidFill>
+                <a:latin typeface="Noto Sans KR" pitchFamily="34" charset="0"/>
+                <a:ea typeface="Noto Sans KR" pitchFamily="34" charset="-122"/>
+                <a:cs typeface="Noto Sans KR" pitchFamily="34" charset="-120"/>
+              </a:rPr>
+              <a:t>🎯 미션 2 — EDA + 결합 + CLAUDE.md</a:t>
+            </a:r>
+            <a:endParaRPr lang="en-US" sz="2600" dirty="0"/>
+          </a:p>
+        </p:txBody>
+      </p:sp>
+      <p:sp>
+        <p:nvSpPr>
+          <p:cNvPr id="4" name="Text 2"/>
+          <p:cNvSpPr/>
+          <p:nvPr/>
+        </p:nvSpPr>
+        <p:spPr>
+          <a:xfrm>
+            <a:off x="548640" y="1051560"/>
+            <a:ext cx="10515600" cy="347472"/>
+          </a:xfrm>
+          <a:prstGeom prst="rect">
+            <a:avLst/>
+          </a:prstGeom>
+          <a:noFill/>
+          <a:ln/>
+        </p:spPr>
+        <p:txBody>
+          <a:bodyPr wrap="square" rtlCol="0" anchor="ctr"/>
+          <a:lstStyle/>
+          <a:p>
+            <a:pPr indent="0" marL="0">
+              <a:buNone/>
+            </a:pPr>
+            <a:r>
+              <a:rPr lang="en-US" sz="1400" dirty="0">
+                <a:solidFill>
+                  <a:srgbClr val="718096"/>
+                </a:solidFill>
+                <a:latin typeface="Noto Sans KR" pitchFamily="34" charset="0"/>
+                <a:ea typeface="Noto Sans KR" pitchFamily="34" charset="-122"/>
+                <a:cs typeface="Noto Sans KR" pitchFamily="34" charset="-120"/>
+              </a:rPr>
+              <a:t>질문 5개 (단독 3 + 결합 2) + Colab + CLAUDE.md → 인프런/운영 채널 업로드</a:t>
+            </a:r>
+            <a:endParaRPr lang="en-US" sz="1400" dirty="0"/>
+          </a:p>
+        </p:txBody>
+      </p:sp>
+      <p:sp>
+        <p:nvSpPr>
+          <p:cNvPr id="5" name="Shape 3"/>
+          <p:cNvSpPr/>
+          <p:nvPr/>
+        </p:nvSpPr>
+        <p:spPr>
+          <a:xfrm>
+            <a:off x="548640" y="1554480"/>
+            <a:ext cx="5669280" cy="4572000"/>
+          </a:xfrm>
+          <a:prstGeom prst="roundRect">
+            <a:avLst>
+              <a:gd name="adj" fmla="val 2000"/>
+            </a:avLst>
+          </a:prstGeom>
+          <a:solidFill>
+            <a:srgbClr val="FFFFFF"/>
+          </a:solidFill>
+          <a:ln/>
+          <a:effectLst>
+            <a:outerShdw sx="100000" sy="100000" kx="0" ky="0" algn="bl" rotWithShape="0" blurRad="76200" dist="25400" dir="16200000">
+              <a:srgbClr val="000000">
+                <a:alpha val="8000"/>
+              </a:srgbClr>
+            </a:outerShdw>
+          </a:effectLst>
+        </p:spPr>
+      </p:sp>
+      <p:sp>
+        <p:nvSpPr>
+          <p:cNvPr id="6" name="Shape 4"/>
+          <p:cNvSpPr/>
+          <p:nvPr/>
+        </p:nvSpPr>
+        <p:spPr>
+          <a:xfrm>
+            <a:off x="548640" y="1554480"/>
+            <a:ext cx="5669280" cy="64008"/>
+          </a:xfrm>
+          <a:prstGeom prst="rect">
+            <a:avLst/>
+          </a:prstGeom>
+          <a:solidFill>
+            <a:srgbClr val="00D4AA"/>
+          </a:solidFill>
+          <a:ln/>
+        </p:spPr>
+      </p:sp>
+      <p:sp>
+        <p:nvSpPr>
+          <p:cNvPr id="7" name="Text 5"/>
+          <p:cNvSpPr/>
+          <p:nvPr/>
+        </p:nvSpPr>
+        <p:spPr>
+          <a:xfrm>
+            <a:off x="777240" y="1691640"/>
+            <a:ext cx="5212080" cy="365760"/>
+          </a:xfrm>
+          <a:prstGeom prst="rect">
+            <a:avLst/>
+          </a:prstGeom>
+          <a:noFill/>
+          <a:ln/>
+        </p:spPr>
+        <p:txBody>
+          <a:bodyPr wrap="square" rtlCol="0" anchor="ctr"/>
+          <a:lstStyle/>
+          <a:p>
+            <a:pPr indent="0" marL="0">
+              <a:buNone/>
+            </a:pPr>
+            <a:r>
+              <a:rPr lang="en-US" sz="1500" b="1" dirty="0">
+                <a:solidFill>
+                  <a:srgbClr val="1A1F36"/>
+                </a:solidFill>
+                <a:latin typeface="Noto Sans KR" pitchFamily="34" charset="0"/>
+                <a:ea typeface="Noto Sans KR" pitchFamily="34" charset="-122"/>
+                <a:cs typeface="Noto Sans KR" pitchFamily="34" charset="-120"/>
+              </a:rPr>
+              <a:t>필수 제출</a:t>
+            </a:r>
+            <a:endParaRPr lang="en-US" sz="1500" dirty="0"/>
+          </a:p>
+        </p:txBody>
+      </p:sp>
+      <p:sp>
+        <p:nvSpPr>
+          <p:cNvPr id="8" name="Text 6"/>
+          <p:cNvSpPr/>
+          <p:nvPr/>
+        </p:nvSpPr>
+        <p:spPr>
+          <a:xfrm>
+            <a:off x="777240" y="2148840"/>
+            <a:ext cx="5212080" cy="3840480"/>
+          </a:xfrm>
+          <a:prstGeom prst="rect">
+            <a:avLst/>
+          </a:prstGeom>
+          <a:noFill/>
+          <a:ln/>
+        </p:spPr>
+        <p:txBody>
+          <a:bodyPr wrap="square" rtlCol="0" anchor="t"/>
+          <a:lstStyle/>
+          <a:p>
+            <a:pPr indent="0" marL="0">
+              <a:lnSpc>
+                <a:spcPct val="150000"/>
+              </a:lnSpc>
+              <a:spcAft>
+                <a:spcPts val="1000"/>
+              </a:spcAft>
+              <a:buNone/>
+            </a:pPr>
+            <a:r>
+              <a:rPr lang="en-US" sz="1300" dirty="0">
+                <a:solidFill>
+                  <a:srgbClr val="4A5568"/>
+                </a:solidFill>
+                <a:latin typeface="Noto Sans KR" pitchFamily="34" charset="0"/>
+                <a:ea typeface="Noto Sans KR" pitchFamily="34" charset="-122"/>
+                <a:cs typeface="Noto Sans KR" pitchFamily="34" charset="-120"/>
+              </a:rPr>
+              <a:t>✅ 분석 질문 5개 + 결과 캡처 (단독 3 + 결합 2 권장)</a:t>
+            </a:r>
+            <a:endParaRPr lang="en-US" sz="1300" dirty="0"/>
+          </a:p>
+          <a:p>
+            <a:pPr indent="0" marL="0">
+              <a:lnSpc>
+                <a:spcPct val="150000"/>
+              </a:lnSpc>
+              <a:spcAft>
+                <a:spcPts val="1000"/>
+              </a:spcAft>
+              <a:buNone/>
+            </a:pPr>
+            <a:r>
+              <a:rPr lang="en-US" sz="1300" dirty="0">
+                <a:solidFill>
+                  <a:srgbClr val="4A5568"/>
+                </a:solidFill>
+                <a:latin typeface="Noto Sans KR" pitchFamily="34" charset="0"/>
+                <a:ea typeface="Noto Sans KR" pitchFamily="34" charset="-122"/>
+                <a:cs typeface="Noto Sans KR" pitchFamily="34" charset="-120"/>
+              </a:rPr>
+              <a:t>✅ Colab 노트북 1개 (코드 변형 흔적 포함)</a:t>
+            </a:r>
+            <a:endParaRPr lang="en-US" sz="1300" dirty="0"/>
+          </a:p>
+          <a:p>
+            <a:pPr indent="0" marL="0">
+              <a:lnSpc>
+                <a:spcPct val="150000"/>
+              </a:lnSpc>
+              <a:spcAft>
+                <a:spcPts val="1000"/>
+              </a:spcAft>
+              <a:buNone/>
+            </a:pPr>
+            <a:r>
+              <a:rPr lang="en-US" sz="1300" dirty="0">
+                <a:solidFill>
+                  <a:srgbClr val="4A5568"/>
+                </a:solidFill>
+                <a:latin typeface="Noto Sans KR" pitchFamily="34" charset="0"/>
+                <a:ea typeface="Noto Sans KR" pitchFamily="34" charset="-122"/>
+                <a:cs typeface="Noto Sans KR" pitchFamily="34" charset="-120"/>
+              </a:rPr>
+              <a:t>✅ CLAUDE.md 누적분 (자연어로 추가, 1일차 대비 +5개 이상)</a:t>
+            </a:r>
+            <a:endParaRPr lang="en-US" sz="1300" dirty="0"/>
+          </a:p>
+          <a:p>
+            <a:pPr indent="0" marL="0">
+              <a:lnSpc>
+                <a:spcPct val="150000"/>
+              </a:lnSpc>
+              <a:spcAft>
+                <a:spcPts val="1000"/>
+              </a:spcAft>
+              <a:buNone/>
+            </a:pPr>
+            <a:r>
+              <a:rPr lang="en-US" sz="1300" dirty="0">
+                <a:solidFill>
+                  <a:srgbClr val="4A5568"/>
+                </a:solidFill>
+                <a:latin typeface="Noto Sans KR" pitchFamily="34" charset="0"/>
+                <a:ea typeface="Noto Sans KR" pitchFamily="34" charset="-122"/>
+                <a:cs typeface="Noto Sans KR" pitchFamily="34" charset="-120"/>
+              </a:rPr>
+              <a:t>✅ 운영 채널 업로드 (PNG · CLAUDE.md · notebook)</a:t>
+            </a:r>
+            <a:endParaRPr lang="en-US" sz="1300" dirty="0"/>
+          </a:p>
+        </p:txBody>
+      </p:sp>
+      <p:sp>
+        <p:nvSpPr>
+          <p:cNvPr id="9" name="Shape 7"/>
+          <p:cNvSpPr/>
+          <p:nvPr/>
+        </p:nvSpPr>
+        <p:spPr>
+          <a:xfrm>
+            <a:off x="6400800" y="1554480"/>
+            <a:ext cx="5212080" cy="4572000"/>
+          </a:xfrm>
+          <a:prstGeom prst="roundRect">
+            <a:avLst>
+              <a:gd name="adj" fmla="val 2000"/>
+            </a:avLst>
+          </a:prstGeom>
+          <a:solidFill>
+            <a:srgbClr val="F5F7FA"/>
+          </a:solidFill>
+          <a:ln w="6350">
+            <a:solidFill>
+              <a:srgbClr val="E2E8F0"/>
+            </a:solidFill>
+            <a:prstDash val="solid"/>
+          </a:ln>
+        </p:spPr>
+      </p:sp>
+      <p:sp>
+        <p:nvSpPr>
+          <p:cNvPr id="10" name="Shape 8"/>
+          <p:cNvSpPr/>
+          <p:nvPr/>
+        </p:nvSpPr>
+        <p:spPr>
+          <a:xfrm>
+            <a:off x="6400800" y="1554480"/>
+            <a:ext cx="5212080" cy="64008"/>
+          </a:xfrm>
+          <a:prstGeom prst="rect">
+            <a:avLst/>
+          </a:prstGeom>
+          <a:solidFill>
+            <a:srgbClr val="00D4AA"/>
+          </a:solidFill>
+          <a:ln/>
+        </p:spPr>
+      </p:sp>
+      <p:sp>
+        <p:nvSpPr>
+          <p:cNvPr id="11" name="Text 9"/>
+          <p:cNvSpPr/>
+          <p:nvPr/>
+        </p:nvSpPr>
+        <p:spPr>
+          <a:xfrm>
+            <a:off x="6629400" y="1691640"/>
+            <a:ext cx="4754880" cy="365760"/>
+          </a:xfrm>
+          <a:prstGeom prst="rect">
+            <a:avLst/>
+          </a:prstGeom>
+          <a:noFill/>
+          <a:ln/>
+        </p:spPr>
+        <p:txBody>
+          <a:bodyPr wrap="square" rtlCol="0" anchor="ctr"/>
+          <a:lstStyle/>
+          <a:p>
+            <a:pPr indent="0" marL="0">
+              <a:buNone/>
+            </a:pPr>
+            <a:r>
+              <a:rPr lang="en-US" sz="1500" b="1" dirty="0">
+                <a:solidFill>
+                  <a:srgbClr val="1A1F36"/>
+                </a:solidFill>
+                <a:latin typeface="Noto Sans KR" pitchFamily="34" charset="0"/>
+                <a:ea typeface="Noto Sans KR" pitchFamily="34" charset="-122"/>
+                <a:cs typeface="Noto Sans KR" pitchFamily="34" charset="-120"/>
+              </a:rPr>
+              <a:t>선택 (보너스)</a:t>
+            </a:r>
+            <a:endParaRPr lang="en-US" sz="1500" dirty="0"/>
+          </a:p>
+        </p:txBody>
+      </p:sp>
+      <p:sp>
+        <p:nvSpPr>
+          <p:cNvPr id="12" name="Text 10"/>
+          <p:cNvSpPr/>
+          <p:nvPr/>
+        </p:nvSpPr>
+        <p:spPr>
+          <a:xfrm>
+            <a:off x="6629400" y="2148840"/>
+            <a:ext cx="4754880" cy="3840480"/>
+          </a:xfrm>
+          <a:prstGeom prst="rect">
+            <a:avLst/>
+          </a:prstGeom>
+          <a:noFill/>
+          <a:ln/>
+        </p:spPr>
+        <p:txBody>
+          <a:bodyPr wrap="square" rtlCol="0" anchor="t"/>
+          <a:lstStyle/>
+          <a:p>
+            <a:pPr indent="0" marL="0">
+              <a:lnSpc>
+                <a:spcPct val="150000"/>
+              </a:lnSpc>
+              <a:spcAft>
+                <a:spcPts val="1000"/>
+              </a:spcAft>
+              <a:buNone/>
+            </a:pPr>
+            <a:r>
+              <a:rPr lang="en-US" sz="1300" dirty="0">
+                <a:solidFill>
+                  <a:srgbClr val="4A5568"/>
+                </a:solidFill>
+                <a:latin typeface="Noto Sans KR" pitchFamily="34" charset="0"/>
+                <a:ea typeface="Noto Sans KR" pitchFamily="34" charset="-122"/>
+                <a:cs typeface="Noto Sans KR" pitchFamily="34" charset="-120"/>
+              </a:rPr>
+              <a:t>⭐ 답 안 되는 질문 1개 + 왜 답 못 하는지 한 줄</a:t>
+            </a:r>
+            <a:endParaRPr lang="en-US" sz="1300" dirty="0"/>
+          </a:p>
+          <a:p>
+            <a:pPr indent="0" marL="0">
+              <a:lnSpc>
+                <a:spcPct val="150000"/>
+              </a:lnSpc>
+              <a:spcAft>
+                <a:spcPts val="1000"/>
+              </a:spcAft>
+              <a:buNone/>
+            </a:pPr>
+            <a:r>
+              <a:rPr lang="en-US" sz="1300" dirty="0">
+                <a:solidFill>
+                  <a:srgbClr val="4A5568"/>
+                </a:solidFill>
+                <a:latin typeface="Noto Sans KR" pitchFamily="34" charset="0"/>
+                <a:ea typeface="Noto Sans KR" pitchFamily="34" charset="-122"/>
+                <a:cs typeface="Noto Sans KR" pitchFamily="34" charset="-120"/>
+              </a:rPr>
+              <a:t>⭐ 본인 회사 데이터 결합 시도</a:t>
+            </a:r>
+            <a:endParaRPr lang="en-US" sz="1300" dirty="0"/>
+          </a:p>
+        </p:txBody>
+      </p:sp>
+      <p:sp>
+        <p:nvSpPr>
+          <p:cNvPr id="13" name="Text 11"/>
+          <p:cNvSpPr/>
+          <p:nvPr/>
+        </p:nvSpPr>
+        <p:spPr>
+          <a:xfrm>
+            <a:off x="10972800" y="6446520"/>
+            <a:ext cx="1005840" cy="256032"/>
+          </a:xfrm>
+          <a:prstGeom prst="rect">
+            <a:avLst/>
+          </a:prstGeom>
+          <a:noFill/>
+          <a:ln/>
+        </p:spPr>
+        <p:txBody>
+          <a:bodyPr wrap="square" rtlCol="0" anchor="ctr"/>
+          <a:lstStyle/>
+          <a:p>
+            <a:pPr algn="r" indent="0" marL="0">
+              <a:buNone/>
+            </a:pPr>
+            <a:r>
+              <a:rPr lang="en-US" sz="900" dirty="0">
+                <a:solidFill>
+                  <a:srgbClr val="718096"/>
+                </a:solidFill>
+                <a:latin typeface="Noto Sans KR" pitchFamily="34" charset="0"/>
+                <a:ea typeface="Noto Sans KR" pitchFamily="34" charset="-122"/>
+                <a:cs typeface="Noto Sans KR" pitchFamily="34" charset="-120"/>
+              </a:rPr>
+              <a:t>26 / 27</a:t>
+            </a:r>
+            <a:endParaRPr lang="en-US" sz="900" dirty="0"/>
+          </a:p>
+        </p:txBody>
+      </p:sp>
+    </p:spTree>
+  </p:cSld>
+  <p:clrMapOvr>
+    <a:masterClrMapping/>
+  </p:clrMapOvr>
+</p:sld>
+</file>
+
+<file path=ppt/slides/slide27.xml><?xml version="1.0" encoding="utf-8"?>
+<p:sld xmlns:a="http://schemas.openxmlformats.org/drawingml/2006/main" xmlns:r="http://schemas.openxmlformats.org/officeDocument/2006/relationships" xmlns:p="http://schemas.openxmlformats.org/presentationml/2006/main">
+  <p:cSld name="Slide 27">
+    <p:spTree>
+      <p:nvGrpSpPr>
+        <p:cNvPr id="1" name=""/>
+        <p:cNvGrpSpPr/>
+        <p:nvPr/>
+      </p:nvGrpSpPr>
+      <p:grpSpPr>
+        <a:xfrm>
+          <a:off x="0" y="0"/>
+          <a:ext cx="0" cy="0"/>
+          <a:chOff x="0" y="0"/>
+          <a:chExt cx="0" cy="0"/>
+        </a:xfrm>
+      </p:grpSpPr>
+      <p:sp>
+        <p:nvSpPr>
+          <p:cNvPr id="2" name="Shape 0"/>
+          <p:cNvSpPr/>
+          <p:nvPr/>
+        </p:nvSpPr>
+        <p:spPr>
+          <a:xfrm>
             <a:off x="0" y="0"/>
             <a:ext cx="12192000" cy="6858000"/>
           </a:xfrm>
@@ -9945,7 +10392,7 @@
                 <a:ea typeface="Noto Sans KR" pitchFamily="34" charset="-122"/>
                 <a:cs typeface="Noto Sans KR" pitchFamily="34" charset="-120"/>
               </a:rPr>
-              <a:t>26 / 26</a:t>
+              <a:t>27 / 27</a:t>
             </a:r>
             <a:endParaRPr lang="en-US" sz="900" dirty="0"/>
           </a:p>
@@ -11063,7 +11510,7 @@
                 <a:ea typeface="Noto Sans KR" pitchFamily="34" charset="-122"/>
                 <a:cs typeface="Noto Sans KR" pitchFamily="34" charset="-120"/>
               </a:rPr>
-              <a:t>3 / 26</a:t>
+              <a:t>3 / 27</a:t>
             </a:r>
             <a:endParaRPr lang="en-US" sz="900" dirty="0"/>
           </a:p>
@@ -11186,7 +11633,7 @@
                 <a:ea typeface="Noto Sans KR" pitchFamily="34" charset="-122"/>
                 <a:cs typeface="Noto Sans KR" pitchFamily="34" charset="-120"/>
               </a:rPr>
-              <a:t>섹션 1 / 3</a:t>
+              <a:t>섹션 1 / 4</a:t>
             </a:r>
             <a:endParaRPr lang="en-US" sz="1100" dirty="0"/>
           </a:p>
@@ -11372,7 +11819,7 @@
                 <a:ea typeface="Noto Sans KR" pitchFamily="34" charset="-122"/>
                 <a:cs typeface="Noto Sans KR" pitchFamily="34" charset="-120"/>
               </a:rPr>
-              <a:t>4 / 26</a:t>
+              <a:t>4 / 27</a:t>
             </a:r>
             <a:endParaRPr lang="en-US" sz="900" dirty="0"/>
           </a:p>
@@ -11495,7 +11942,7 @@
                 <a:ea typeface="Noto Sans KR" pitchFamily="34" charset="-122"/>
                 <a:cs typeface="Noto Sans KR" pitchFamily="34" charset="-120"/>
               </a:rPr>
-              <a:t>섹션 2 / 3</a:t>
+              <a:t>섹션 2 / 4</a:t>
             </a:r>
             <a:endParaRPr lang="en-US" sz="1100" dirty="0"/>
           </a:p>
@@ -11537,7 +11984,7 @@
                 <a:ea typeface="Noto Sans KR" pitchFamily="34" charset="-122"/>
                 <a:cs typeface="Noto Sans KR" pitchFamily="34" charset="-120"/>
               </a:rPr>
-              <a:t>오늘 쓸 데이터 6종 (원칙 — 직접 다운로드)</a:t>
+              <a:t>오늘 쓸 데이터 6종 (한눈에)</a:t>
             </a:r>
             <a:endParaRPr lang="en-US" sz="4200" dirty="0"/>
           </a:p>
@@ -11602,7 +12049,7 @@
                 <a:ea typeface="Noto Sans KR" pitchFamily="34" charset="-122"/>
                 <a:cs typeface="Noto Sans KR" pitchFamily="34" charset="-120"/>
               </a:rPr>
-              <a:t>· AQ — 서울 미세먼지 일별 → 서울 열린데이터광장 OA-2218</a:t>
+              <a:t>· AQ — 서울 미세먼지 일별 (1일차에 받은 그대로)</a:t>
             </a:r>
             <a:endParaRPr lang="en-US" sz="1700" dirty="0"/>
           </a:p>
@@ -11622,7 +12069,7 @@
                 <a:ea typeface="Noto Sans KR" pitchFamily="34" charset="-122"/>
                 <a:cs typeface="Noto Sans KR" pitchFamily="34" charset="-120"/>
               </a:rPr>
-              <a:t>· BIKE — 따릉이 일별 대여 → 서울 열린데이터광장 ("따릉이 일별" 검색)</a:t>
+              <a:t>· BIKE — 서울 따릉이 일별 대여 건수</a:t>
             </a:r>
             <a:endParaRPr lang="en-US" sz="1700" dirty="0"/>
           </a:p>
@@ -11642,7 +12089,7 @@
                 <a:ea typeface="Noto Sans KR" pitchFamily="34" charset="-122"/>
                 <a:cs typeface="Noto Sans KR" pitchFamily="34" charset="-120"/>
               </a:rPr>
-              <a:t>· SUBWAY — 지하철 일별 총 승하차 → 서울 열린데이터광장</a:t>
+              <a:t>· SUBWAY — 서울 지하철 일별 총 승하차</a:t>
             </a:r>
             <a:endParaRPr lang="en-US" sz="1700" dirty="0"/>
           </a:p>
@@ -11662,7 +12109,7 @@
                 <a:ea typeface="Noto Sans KR" pitchFamily="34" charset="-122"/>
                 <a:cs typeface="Noto Sans KR" pitchFamily="34" charset="-120"/>
               </a:rPr>
-              <a:t>· WEATHER — 기상청 ASOS 서울 일자료 → data.kma.go.kr (회원가입 필요)</a:t>
+              <a:t>· WEATHER — 기상청 ASOS 서울 일자료</a:t>
             </a:r>
             <a:endParaRPr lang="en-US" sz="1700" dirty="0"/>
           </a:p>
@@ -11682,7 +12129,7 @@
                 <a:ea typeface="Noto Sans KR" pitchFamily="34" charset="-122"/>
                 <a:cs typeface="Noto Sans KR" pitchFamily="34" charset="-120"/>
               </a:rPr>
-              <a:t>· BUZZ — 검색량/언급량 → 네이버 데이터랩 + 구글 트렌드</a:t>
+              <a:t>· BUZZ — 검색량/언급량 (네이버 데이터랩 + 구글 트렌드)</a:t>
             </a:r>
             <a:endParaRPr lang="en-US" sz="1700" dirty="0"/>
           </a:p>
@@ -11702,7 +12149,7 @@
                 <a:ea typeface="Noto Sans KR" pitchFamily="34" charset="-122"/>
                 <a:cs typeface="Noto Sans KR" pitchFamily="34" charset="-120"/>
               </a:rPr>
-              <a:t>· SHOP — 4개 도메인 적재본 → 강사 자산 (4일차에 활용)</a:t>
+              <a:t>· SHOP — 4개 도메인 적재본 (다이소·올리브영·컬리·네이버쇼핑) — 4일차 결합용 강사 자산</a:t>
             </a:r>
             <a:endParaRPr lang="en-US" sz="1700" dirty="0"/>
           </a:p>
@@ -11731,7 +12178,7 @@
                 <a:ea typeface="Noto Sans KR" pitchFamily="34" charset="-122"/>
                 <a:cs typeface="Noto Sans KR" pitchFamily="34" charset="-120"/>
               </a:rPr>
-              <a:t>· 받기 어려운 분은 운영 채널로 강사에게 요청</a:t>
+              <a:t>다음 슬라이드에서 각 데이터 다운로드 방법 함께 봅니다</a:t>
             </a:r>
             <a:endParaRPr lang="en-US" sz="1700" dirty="0"/>
           </a:p>
@@ -11770,7 +12217,7 @@
                 <a:ea typeface="Noto Sans KR" pitchFamily="34" charset="-122"/>
                 <a:cs typeface="Noto Sans KR" pitchFamily="34" charset="-120"/>
               </a:rPr>
-              <a:t>5 / 26</a:t>
+              <a:t>5 / 27</a:t>
             </a:r>
             <a:endParaRPr lang="en-US" sz="900" dirty="0"/>
           </a:p>
@@ -11869,7 +12316,7 @@
         <p:spPr>
           <a:xfrm>
             <a:off x="548640" y="960120"/>
-            <a:ext cx="11091672" cy="292608"/>
+            <a:ext cx="10515600" cy="292608"/>
           </a:xfrm>
           <a:prstGeom prst="rect">
             <a:avLst/>
@@ -11885,7 +12332,7 @@
               <a:buNone/>
             </a:pPr>
             <a:r>
-              <a:rPr lang="en-US" sz="1100" b="1" spc="50" kern="0" dirty="0">
+              <a:rPr lang="en-US" sz="1100" b="1" spc="150" kern="0" dirty="0">
                 <a:solidFill>
                   <a:srgbClr val="00D4AA"/>
                 </a:solidFill>
@@ -11893,7 +12340,7 @@
                 <a:ea typeface="Noto Sans KR" pitchFamily="34" charset="-122"/>
                 <a:cs typeface="Noto Sans KR" pitchFamily="34" charset="-120"/>
               </a:rPr>
-              <a:t>💬 함께 볼 시연 프롬프트 — 따라 치지 않으셔도 됩니다</a:t>
+              <a:t>섹션 3 / 4</a:t>
             </a:r>
             <a:endParaRPr lang="en-US" sz="1100" dirty="0"/>
           </a:p>
@@ -11908,7 +12355,7 @@
         <p:spPr>
           <a:xfrm>
             <a:off x="548640" y="1508760"/>
-            <a:ext cx="11091672" cy="1005840"/>
+            <a:ext cx="11091672" cy="1371600"/>
           </a:xfrm>
           <a:prstGeom prst="rect">
             <a:avLst/>
@@ -11922,12 +12369,12 @@
           <a:p>
             <a:pPr indent="0" marL="0">
               <a:lnSpc>
-                <a:spcPct val="115000"/>
+                <a:spcPct val="110000"/>
               </a:lnSpc>
               <a:buNone/>
             </a:pPr>
             <a:r>
-              <a:rPr lang="en-US" sz="3400" b="1" spc="-50" kern="0" dirty="0">
+              <a:rPr lang="en-US" sz="4200" b="1" spc="-50" kern="0" dirty="0">
                 <a:solidFill>
                   <a:srgbClr val="1A1F36"/>
                 </a:solidFill>
@@ -11935,9 +12382,9 @@
                 <a:ea typeface="Noto Sans KR" pitchFamily="34" charset="-122"/>
                 <a:cs typeface="Noto Sans KR" pitchFamily="34" charset="-120"/>
               </a:rPr>
-              <a:t>2024+2025 통합 본격 EDA 시연</a:t>
-            </a:r>
-            <a:endParaRPr lang="en-US" sz="3400" dirty="0"/>
+              <a:t>데이터 다운로드 가이드 — 어디서, 어떻게, 어떤 파일명?</a:t>
+            </a:r>
+            <a:endParaRPr lang="en-US" sz="4200" dirty="0"/>
           </a:p>
         </p:txBody>
       </p:sp>
@@ -11949,7 +12396,7 @@
         </p:nvSpPr>
         <p:spPr>
           <a:xfrm>
-            <a:off x="548640" y="2606040"/>
+            <a:off x="548640" y="2971800"/>
             <a:ext cx="1828800" cy="0"/>
           </a:xfrm>
           <a:prstGeom prst="line">
@@ -11966,156 +12413,178 @@
       </p:sp>
       <p:sp>
         <p:nvSpPr>
-          <p:cNvPr id="7" name="Shape 5"/>
-          <p:cNvSpPr/>
-          <p:nvPr/>
-        </p:nvSpPr>
-        <p:spPr>
-          <a:xfrm>
-            <a:off x="548640" y="2926080"/>
-            <a:ext cx="11091672" cy="3200400"/>
-          </a:xfrm>
-          <a:prstGeom prst="roundRect">
-            <a:avLst>
-              <a:gd name="adj" fmla="val 1714"/>
-            </a:avLst>
-          </a:prstGeom>
-          <a:solidFill>
-            <a:srgbClr val="F1F5F9"/>
-          </a:solidFill>
-          <a:ln w="6350">
-            <a:solidFill>
-              <a:srgbClr val="E2E8F0"/>
-            </a:solidFill>
-            <a:prstDash val="solid"/>
-          </a:ln>
-        </p:spPr>
+          <p:cNvPr id="7" name="Text 5"/>
+          <p:cNvSpPr/>
+          <p:nvPr/>
+        </p:nvSpPr>
+        <p:spPr>
+          <a:xfrm>
+            <a:off x="548640" y="3200400"/>
+            <a:ext cx="11091672" cy="2788920"/>
+          </a:xfrm>
+          <a:prstGeom prst="rect">
+            <a:avLst/>
+          </a:prstGeom>
+          <a:noFill/>
+          <a:ln/>
+        </p:spPr>
+        <p:txBody>
+          <a:bodyPr wrap="square" rtlCol="0" anchor="t"/>
+          <a:lstStyle/>
+          <a:p>
+            <a:pPr indent="0" marL="0">
+              <a:lnSpc>
+                <a:spcPct val="155000"/>
+              </a:lnSpc>
+              <a:buNone/>
+            </a:pPr>
+            <a:r>
+              <a:rPr lang="en-US" sz="1700" dirty="0">
+                <a:solidFill>
+                  <a:srgbClr val="4A5568"/>
+                </a:solidFill>
+                <a:latin typeface="Noto Sans KR" pitchFamily="34" charset="0"/>
+                <a:ea typeface="Noto Sans KR" pitchFamily="34" charset="-122"/>
+                <a:cs typeface="Noto Sans KR" pitchFamily="34" charset="-120"/>
+              </a:rPr>
+              <a:t>· BIKE — data.seoul.go.kr → "따릉이 일별 대여" 검색 → "파일" 탭 → CSV</a:t>
+            </a:r>
+            <a:endParaRPr lang="en-US" sz="1700" dirty="0"/>
+          </a:p>
+          <a:p>
+            <a:pPr indent="0" marL="0">
+              <a:lnSpc>
+                <a:spcPct val="155000"/>
+              </a:lnSpc>
+              <a:buNone/>
+            </a:pPr>
+            <a:r>
+              <a:rPr lang="en-US" sz="1700" dirty="0">
+                <a:solidFill>
+                  <a:srgbClr val="4A5568"/>
+                </a:solidFill>
+                <a:latin typeface="Noto Sans KR" pitchFamily="34" charset="0"/>
+                <a:ea typeface="Noto Sans KR" pitchFamily="34" charset="-122"/>
+                <a:cs typeface="Noto Sans KR" pitchFamily="34" charset="-120"/>
+              </a:rPr>
+              <a:t>  파일명 예: 서울특별시_공공자전거_일별_대여건수_YYYY.csv</a:t>
+            </a:r>
+            <a:endParaRPr lang="en-US" sz="1700" dirty="0"/>
+          </a:p>
+          <a:p>
+            <a:pPr indent="0" marL="0">
+              <a:lnSpc>
+                <a:spcPct val="155000"/>
+              </a:lnSpc>
+              <a:buNone/>
+            </a:pPr>
+            <a:r>
+              <a:rPr lang="en-US" sz="1700" dirty="0">
+                <a:solidFill>
+                  <a:srgbClr val="4A5568"/>
+                </a:solidFill>
+                <a:latin typeface="Noto Sans KR" pitchFamily="34" charset="0"/>
+                <a:ea typeface="Noto Sans KR" pitchFamily="34" charset="-122"/>
+                <a:cs typeface="Noto Sans KR" pitchFamily="34" charset="-120"/>
+              </a:rPr>
+              <a:t>· SUBWAY — data.seoul.go.kr → "지하철 일별 승하차" 검색 → "파일" 탭 → CSV</a:t>
+            </a:r>
+            <a:endParaRPr lang="en-US" sz="1700" dirty="0"/>
+          </a:p>
+          <a:p>
+            <a:pPr indent="0" marL="0">
+              <a:lnSpc>
+                <a:spcPct val="155000"/>
+              </a:lnSpc>
+              <a:buNone/>
+            </a:pPr>
+            <a:r>
+              <a:rPr lang="en-US" sz="1700" dirty="0">
+                <a:solidFill>
+                  <a:srgbClr val="4A5568"/>
+                </a:solidFill>
+                <a:latin typeface="Noto Sans KR" pitchFamily="34" charset="0"/>
+                <a:ea typeface="Noto Sans KR" pitchFamily="34" charset="-122"/>
+                <a:cs typeface="Noto Sans KR" pitchFamily="34" charset="-120"/>
+              </a:rPr>
+              <a:t>  파일명 예: 서울교통공사_일별_지하철_승하차_YYYY.csv</a:t>
+            </a:r>
+            <a:endParaRPr lang="en-US" sz="1700" dirty="0"/>
+          </a:p>
+          <a:p>
+            <a:pPr indent="0" marL="0">
+              <a:lnSpc>
+                <a:spcPct val="155000"/>
+              </a:lnSpc>
+              <a:buNone/>
+            </a:pPr>
+            <a:r>
+              <a:rPr lang="en-US" sz="1700" dirty="0">
+                <a:solidFill>
+                  <a:srgbClr val="4A5568"/>
+                </a:solidFill>
+                <a:latin typeface="Noto Sans KR" pitchFamily="34" charset="0"/>
+                <a:ea typeface="Noto Sans KR" pitchFamily="34" charset="-122"/>
+                <a:cs typeface="Noto Sans KR" pitchFamily="34" charset="-120"/>
+              </a:rPr>
+              <a:t>· WEATHER — data.kma.go.kr 가입 → 기후통계분석 → 통계분석 → 지점 "서울(108)" → 일자료 → CSV</a:t>
+            </a:r>
+            <a:endParaRPr lang="en-US" sz="1700" dirty="0"/>
+          </a:p>
+          <a:p>
+            <a:pPr indent="0" marL="0">
+              <a:lnSpc>
+                <a:spcPct val="155000"/>
+              </a:lnSpc>
+              <a:buNone/>
+            </a:pPr>
+            <a:r>
+              <a:rPr lang="en-US" sz="1700" dirty="0">
+                <a:solidFill>
+                  <a:srgbClr val="4A5568"/>
+                </a:solidFill>
+                <a:latin typeface="Noto Sans KR" pitchFamily="34" charset="0"/>
+                <a:ea typeface="Noto Sans KR" pitchFamily="34" charset="-122"/>
+                <a:cs typeface="Noto Sans KR" pitchFamily="34" charset="-120"/>
+              </a:rPr>
+              <a:t>· BUZZ — datalab.naver.com (검색어트렌드) + trends.google.com (개별 키워드 다운로드)</a:t>
+            </a:r>
+            <a:endParaRPr lang="en-US" sz="1700" dirty="0"/>
+          </a:p>
+          <a:p>
+            <a:pPr indent="0" marL="0">
+              <a:lnSpc>
+                <a:spcPct val="155000"/>
+              </a:lnSpc>
+              <a:buNone/>
+            </a:pPr>
+            <a:endParaRPr lang="en-US" sz="1700" dirty="0"/>
+          </a:p>
+          <a:p>
+            <a:pPr indent="0" marL="0">
+              <a:lnSpc>
+                <a:spcPct val="155000"/>
+              </a:lnSpc>
+              <a:buNone/>
+            </a:pPr>
+            <a:r>
+              <a:rPr lang="en-US" sz="1700" dirty="0">
+                <a:solidFill>
+                  <a:srgbClr val="4A5568"/>
+                </a:solidFill>
+                <a:latin typeface="Noto Sans KR" pitchFamily="34" charset="0"/>
+                <a:ea typeface="Noto Sans KR" pitchFamily="34" charset="-122"/>
+                <a:cs typeface="Noto Sans KR" pitchFamily="34" charset="-120"/>
+              </a:rPr>
+              <a:t>· 파일명은 광장에서 받은 그대로 사용. 받기 정말 어려운 분만 강사에게 요청</a:t>
+            </a:r>
+            <a:endParaRPr lang="en-US" sz="1700" dirty="0"/>
+          </a:p>
+        </p:txBody>
       </p:sp>
       <p:sp>
         <p:nvSpPr>
           <p:cNvPr id="8" name="Text 6"/>
-          <p:cNvSpPr/>
-          <p:nvPr/>
-        </p:nvSpPr>
-        <p:spPr>
-          <a:xfrm>
-            <a:off x="713232" y="3035808"/>
-            <a:ext cx="10762488" cy="2980944"/>
-          </a:xfrm>
-          <a:prstGeom prst="rect">
-            <a:avLst/>
-          </a:prstGeom>
-          <a:noFill/>
-          <a:ln/>
-        </p:spPr>
-        <p:txBody>
-          <a:bodyPr wrap="square" rtlCol="0" anchor="t"/>
-          <a:lstStyle/>
-          <a:p>
-            <a:pPr indent="0" marL="0">
-              <a:lnSpc>
-                <a:spcPct val="140000"/>
-              </a:lnSpc>
-              <a:buNone/>
-            </a:pPr>
-            <a:r>
-              <a:rPr lang="en-US" sz="1150" dirty="0">
-                <a:solidFill>
-                  <a:srgbClr val="1A1F36"/>
-                </a:solidFill>
-                <a:latin typeface="Roboto Mono" pitchFamily="34" charset="0"/>
-                <a:ea typeface="Roboto Mono" pitchFamily="34" charset="-122"/>
-                <a:cs typeface="Roboto Mono" pitchFamily="34" charset="-120"/>
-              </a:rPr>
-              <a:t>기간별_일평균_대기환경_정보_2024년.csv + 기간별_일평균_대기환경_정보_2025년.csv 통합해서 EDA 해줘.</a:t>
-            </a:r>
-            <a:endParaRPr lang="en-US" sz="1150" dirty="0"/>
-          </a:p>
-          <a:p>
-            <a:pPr indent="0" marL="0">
-              <a:lnSpc>
-                <a:spcPct val="140000"/>
-              </a:lnSpc>
-              <a:buNone/>
-            </a:pPr>
-            <a:r>
-              <a:rPr lang="en-US" sz="1150" dirty="0">
-                <a:solidFill>
-                  <a:srgbClr val="1A1F36"/>
-                </a:solidFill>
-                <a:latin typeface="Roboto Mono" pitchFamily="34" charset="0"/>
-                <a:ea typeface="Roboto Mono" pitchFamily="34" charset="-122"/>
-                <a:cs typeface="Roboto Mono" pitchFamily="34" charset="-120"/>
-              </a:rPr>
-              <a:t>순서: shape → dtypes → 결측 비율 (연도별) →</a:t>
-            </a:r>
-            <a:endParaRPr lang="en-US" sz="1150" dirty="0"/>
-          </a:p>
-          <a:p>
-            <a:pPr indent="0" marL="0">
-              <a:lnSpc>
-                <a:spcPct val="140000"/>
-              </a:lnSpc>
-              <a:buNone/>
-            </a:pPr>
-            <a:r>
-              <a:rPr lang="en-US" sz="1150" dirty="0">
-                <a:solidFill>
-                  <a:srgbClr val="1A1F36"/>
-                </a:solidFill>
-                <a:latin typeface="Roboto Mono" pitchFamily="34" charset="0"/>
-                <a:ea typeface="Roboto Mono" pitchFamily="34" charset="-122"/>
-                <a:cs typeface="Roboto Mono" pitchFamily="34" charset="-120"/>
-              </a:rPr>
-              <a:t>자치구별 PM2.5 연평균 비교 (2024 vs 2025) →</a:t>
-            </a:r>
-            <a:endParaRPr lang="en-US" sz="1150" dirty="0"/>
-          </a:p>
-          <a:p>
-            <a:pPr indent="0" marL="0">
-              <a:lnSpc>
-                <a:spcPct val="140000"/>
-              </a:lnSpc>
-              <a:buNone/>
-            </a:pPr>
-            <a:r>
-              <a:rPr lang="en-US" sz="1150" dirty="0">
-                <a:solidFill>
-                  <a:srgbClr val="1A1F36"/>
-                </a:solidFill>
-                <a:latin typeface="Roboto Mono" pitchFamily="34" charset="0"/>
-                <a:ea typeface="Roboto Mono" pitchFamily="34" charset="-122"/>
-                <a:cs typeface="Roboto Mono" pitchFamily="34" charset="-120"/>
-              </a:rPr>
-              <a:t>월별·요일별 시즌성 → 이상치 후보 (연도별 spike Top 5) → 등급 분포 변화.</a:t>
-            </a:r>
-            <a:endParaRPr lang="en-US" sz="1150" dirty="0"/>
-          </a:p>
-          <a:p>
-            <a:pPr indent="0" marL="0">
-              <a:lnSpc>
-                <a:spcPct val="140000"/>
-              </a:lnSpc>
-              <a:buNone/>
-            </a:pPr>
-            <a:r>
-              <a:rPr lang="en-US" sz="1150" dirty="0">
-                <a:solidFill>
-                  <a:srgbClr val="1A1F36"/>
-                </a:solidFill>
-                <a:latin typeface="Roboto Mono" pitchFamily="34" charset="0"/>
-                <a:ea typeface="Roboto Mono" pitchFamily="34" charset="-122"/>
-                <a:cs typeface="Roboto Mono" pitchFamily="34" charset="-120"/>
-              </a:rPr>
-              <a:t>차트 다 그려서 ./outputs/ 에 저장하고, 핵심 인사이트 5줄로 요약.</a:t>
-            </a:r>
-            <a:endParaRPr lang="en-US" sz="1150" dirty="0"/>
-          </a:p>
-        </p:txBody>
-      </p:sp>
-      <p:sp>
-        <p:nvSpPr>
-          <p:cNvPr id="9" name="Text 7"/>
           <p:cNvSpPr/>
           <p:nvPr/>
         </p:nvSpPr>
@@ -12146,7 +12615,7 @@
                 <a:ea typeface="Noto Sans KR" pitchFamily="34" charset="-122"/>
                 <a:cs typeface="Noto Sans KR" pitchFamily="34" charset="-120"/>
               </a:rPr>
-              <a:t>6 / 26</a:t>
+              <a:t>6 / 27</a:t>
             </a:r>
             <a:endParaRPr lang="en-US" sz="900" dirty="0"/>
           </a:p>
@@ -12230,7 +12699,7 @@
                 <a:ea typeface="Noto Sans KR" pitchFamily="34" charset="-122"/>
                 <a:cs typeface="Noto Sans KR" pitchFamily="34" charset="-120"/>
               </a:rPr>
-              <a:t>DAY 2 · EDA DEMO</a:t>
+              <a:t>파트 1. 오프닝 + EDA 라이브 시연</a:t>
             </a:r>
             <a:endParaRPr lang="en-US" sz="1400" dirty="0"/>
           </a:p>
@@ -12245,7 +12714,7 @@
         <p:spPr>
           <a:xfrm>
             <a:off x="548640" y="960120"/>
-            <a:ext cx="10515600" cy="292608"/>
+            <a:ext cx="11091672" cy="292608"/>
           </a:xfrm>
           <a:prstGeom prst="rect">
             <a:avLst/>
@@ -12261,7 +12730,7 @@
               <a:buNone/>
             </a:pPr>
             <a:r>
-              <a:rPr lang="en-US" sz="1100" b="1" spc="150" kern="0" dirty="0">
+              <a:rPr lang="en-US" sz="1100" b="1" spc="50" kern="0" dirty="0">
                 <a:solidFill>
                   <a:srgbClr val="00D4AA"/>
                 </a:solidFill>
@@ -12269,7 +12738,7 @@
                 <a:ea typeface="Noto Sans KR" pitchFamily="34" charset="-122"/>
                 <a:cs typeface="Noto Sans KR" pitchFamily="34" charset="-120"/>
               </a:rPr>
-              <a:t>오늘 만든 결과물</a:t>
+              <a:t>💬 함께 볼 시연 프롬프트 — 따라 치지 않으셔도 됩니다</a:t>
             </a:r>
             <a:endParaRPr lang="en-US" sz="1100" dirty="0"/>
           </a:p>
@@ -12283,8 +12752,8 @@
         </p:nvSpPr>
         <p:spPr>
           <a:xfrm>
-            <a:off x="548640" y="1417320"/>
-            <a:ext cx="11091672" cy="640080"/>
+            <a:off x="548640" y="1508760"/>
+            <a:ext cx="11091672" cy="1005840"/>
           </a:xfrm>
           <a:prstGeom prst="rect">
             <a:avLst/>
@@ -12297,10 +12766,13 @@
           <a:lstStyle/>
           <a:p>
             <a:pPr indent="0" marL="0">
-              <a:buNone/>
-            </a:pPr>
-            <a:r>
-              <a:rPr lang="en-US" sz="2800" b="1" spc="-30" kern="0" dirty="0">
+              <a:lnSpc>
+                <a:spcPct val="115000"/>
+              </a:lnSpc>
+              <a:buNone/>
+            </a:pPr>
+            <a:r>
+              <a:rPr lang="en-US" sz="3400" b="1" spc="-50" kern="0" dirty="0">
                 <a:solidFill>
                   <a:srgbClr val="1A1F36"/>
                 </a:solidFill>
@@ -12308,77 +12780,187 @@
                 <a:ea typeface="Noto Sans KR" pitchFamily="34" charset="-122"/>
                 <a:cs typeface="Noto Sans KR" pitchFamily="34" charset="-120"/>
               </a:rPr>
-              <a:t>EDA 시연 결과 — shape · 시즌성 · spike</a:t>
-            </a:r>
-            <a:endParaRPr lang="en-US" sz="2800" dirty="0"/>
-          </a:p>
-        </p:txBody>
-      </p:sp>
-      <p:pic>
-        <p:nvPicPr>
-          <p:cNvPr id="6" name="Image 0" descr="/Users/sujinpark/b2b-lecture-note/20260512_inflearn_B2G_dataanalysis/assets/screenshots/day2/eda_demo.png">    </p:cNvPr>
-          <p:cNvPicPr>
-            <a:picLocks noChangeAspect="1"/>
-          </p:cNvPicPr>
-          <p:nvPr/>
-        </p:nvPicPr>
-        <p:blipFill>
-          <a:blip r:embed="rId1"/>
-          <a:srcRect l="0" r="0" t="0" b="0"/>
-          <a:stretch/>
-        </p:blipFill>
-        <p:spPr>
-          <a:xfrm>
-            <a:off x="2194560" y="2240280"/>
-            <a:ext cx="7772400" cy="3657600"/>
-          </a:xfrm>
-          <a:prstGeom prst="rect">
-            <a:avLst/>
-          </a:prstGeom>
-        </p:spPr>
-      </p:pic>
-      <p:sp>
-        <p:nvSpPr>
-          <p:cNvPr id="7" name="Text 4"/>
-          <p:cNvSpPr/>
-          <p:nvPr/>
-        </p:nvSpPr>
-        <p:spPr>
-          <a:xfrm>
-            <a:off x="548640" y="5989320"/>
-            <a:ext cx="11091672" cy="411480"/>
-          </a:xfrm>
-          <a:prstGeom prst="rect">
-            <a:avLst/>
-          </a:prstGeom>
-          <a:noFill/>
-          <a:ln/>
-        </p:spPr>
-        <p:txBody>
-          <a:bodyPr wrap="square" rtlCol="0" anchor="ctr"/>
-          <a:lstStyle/>
-          <a:p>
-            <a:pPr algn="ctr" indent="0" marL="0">
-              <a:buNone/>
-            </a:pPr>
-            <a:r>
-              <a:rPr lang="en-US" sz="1200" i="1" dirty="0">
-                <a:solidFill>
-                  <a:srgbClr val="718096"/>
-                </a:solidFill>
-                <a:latin typeface="Noto Sans KR" pitchFamily="34" charset="0"/>
-                <a:ea typeface="Noto Sans KR" pitchFamily="34" charset="-122"/>
-                <a:cs typeface="Noto Sans KR" pitchFamily="34" charset="-120"/>
-              </a:rPr>
-              <a:t>통합 EDA 결과 한눈에</a:t>
-            </a:r>
-            <a:endParaRPr lang="en-US" sz="1200" dirty="0"/>
-          </a:p>
-        </p:txBody>
-      </p:sp>
-      <p:sp>
-        <p:nvSpPr>
-          <p:cNvPr id="8" name="Text 5"/>
+              <a:t>2024+2025 통합 본격 EDA 시연</a:t>
+            </a:r>
+            <a:endParaRPr lang="en-US" sz="3400" dirty="0"/>
+          </a:p>
+        </p:txBody>
+      </p:sp>
+      <p:sp>
+        <p:nvSpPr>
+          <p:cNvPr id="6" name="Shape 4"/>
+          <p:cNvSpPr/>
+          <p:nvPr/>
+        </p:nvSpPr>
+        <p:spPr>
+          <a:xfrm>
+            <a:off x="548640" y="2606040"/>
+            <a:ext cx="1828800" cy="0"/>
+          </a:xfrm>
+          <a:prstGeom prst="line">
+            <a:avLst/>
+          </a:prstGeom>
+          <a:noFill/>
+          <a:ln w="25400">
+            <a:solidFill>
+              <a:srgbClr val="00D4AA"/>
+            </a:solidFill>
+            <a:prstDash val="solid"/>
+          </a:ln>
+        </p:spPr>
+      </p:sp>
+      <p:sp>
+        <p:nvSpPr>
+          <p:cNvPr id="7" name="Shape 5"/>
+          <p:cNvSpPr/>
+          <p:nvPr/>
+        </p:nvSpPr>
+        <p:spPr>
+          <a:xfrm>
+            <a:off x="548640" y="2926080"/>
+            <a:ext cx="11091672" cy="3200400"/>
+          </a:xfrm>
+          <a:prstGeom prst="roundRect">
+            <a:avLst>
+              <a:gd name="adj" fmla="val 1714"/>
+            </a:avLst>
+          </a:prstGeom>
+          <a:solidFill>
+            <a:srgbClr val="F1F5F9"/>
+          </a:solidFill>
+          <a:ln w="6350">
+            <a:solidFill>
+              <a:srgbClr val="E2E8F0"/>
+            </a:solidFill>
+            <a:prstDash val="solid"/>
+          </a:ln>
+        </p:spPr>
+      </p:sp>
+      <p:sp>
+        <p:nvSpPr>
+          <p:cNvPr id="8" name="Text 6"/>
+          <p:cNvSpPr/>
+          <p:nvPr/>
+        </p:nvSpPr>
+        <p:spPr>
+          <a:xfrm>
+            <a:off x="713232" y="3035808"/>
+            <a:ext cx="10762488" cy="2980944"/>
+          </a:xfrm>
+          <a:prstGeom prst="rect">
+            <a:avLst/>
+          </a:prstGeom>
+          <a:noFill/>
+          <a:ln/>
+        </p:spPr>
+        <p:txBody>
+          <a:bodyPr wrap="square" rtlCol="0" anchor="t"/>
+          <a:lstStyle/>
+          <a:p>
+            <a:pPr indent="0" marL="0">
+              <a:lnSpc>
+                <a:spcPct val="140000"/>
+              </a:lnSpc>
+              <a:buNone/>
+            </a:pPr>
+            <a:r>
+              <a:rPr lang="en-US" sz="1150" dirty="0">
+                <a:solidFill>
+                  <a:srgbClr val="1A1F36"/>
+                </a:solidFill>
+                <a:latin typeface="Roboto Mono" pitchFamily="34" charset="0"/>
+                <a:ea typeface="Roboto Mono" pitchFamily="34" charset="-122"/>
+                <a:cs typeface="Roboto Mono" pitchFamily="34" charset="-120"/>
+              </a:rPr>
+              <a:t>기간별_일평균_대기환경_정보_2024년.csv + 기간별_일평균_대기환경_정보_2025년.csv 통합해서 EDA 해줘.</a:t>
+            </a:r>
+            <a:endParaRPr lang="en-US" sz="1150" dirty="0"/>
+          </a:p>
+          <a:p>
+            <a:pPr indent="0" marL="0">
+              <a:lnSpc>
+                <a:spcPct val="140000"/>
+              </a:lnSpc>
+              <a:buNone/>
+            </a:pPr>
+            <a:r>
+              <a:rPr lang="en-US" sz="1150" dirty="0">
+                <a:solidFill>
+                  <a:srgbClr val="1A1F36"/>
+                </a:solidFill>
+                <a:latin typeface="Roboto Mono" pitchFamily="34" charset="0"/>
+                <a:ea typeface="Roboto Mono" pitchFamily="34" charset="-122"/>
+                <a:cs typeface="Roboto Mono" pitchFamily="34" charset="-120"/>
+              </a:rPr>
+              <a:t>순서: shape → dtypes → 결측 비율 (연도별) →</a:t>
+            </a:r>
+            <a:endParaRPr lang="en-US" sz="1150" dirty="0"/>
+          </a:p>
+          <a:p>
+            <a:pPr indent="0" marL="0">
+              <a:lnSpc>
+                <a:spcPct val="140000"/>
+              </a:lnSpc>
+              <a:buNone/>
+            </a:pPr>
+            <a:r>
+              <a:rPr lang="en-US" sz="1150" dirty="0">
+                <a:solidFill>
+                  <a:srgbClr val="1A1F36"/>
+                </a:solidFill>
+                <a:latin typeface="Roboto Mono" pitchFamily="34" charset="0"/>
+                <a:ea typeface="Roboto Mono" pitchFamily="34" charset="-122"/>
+                <a:cs typeface="Roboto Mono" pitchFamily="34" charset="-120"/>
+              </a:rPr>
+              <a:t>자치구별 PM2.5 연평균 비교 (2024 vs 2025) →</a:t>
+            </a:r>
+            <a:endParaRPr lang="en-US" sz="1150" dirty="0"/>
+          </a:p>
+          <a:p>
+            <a:pPr indent="0" marL="0">
+              <a:lnSpc>
+                <a:spcPct val="140000"/>
+              </a:lnSpc>
+              <a:buNone/>
+            </a:pPr>
+            <a:r>
+              <a:rPr lang="en-US" sz="1150" dirty="0">
+                <a:solidFill>
+                  <a:srgbClr val="1A1F36"/>
+                </a:solidFill>
+                <a:latin typeface="Roboto Mono" pitchFamily="34" charset="0"/>
+                <a:ea typeface="Roboto Mono" pitchFamily="34" charset="-122"/>
+                <a:cs typeface="Roboto Mono" pitchFamily="34" charset="-120"/>
+              </a:rPr>
+              <a:t>월별·요일별 시즌성 → 이상치 후보 (연도별 spike Top 5) → 등급 분포 변화.</a:t>
+            </a:r>
+            <a:endParaRPr lang="en-US" sz="1150" dirty="0"/>
+          </a:p>
+          <a:p>
+            <a:pPr indent="0" marL="0">
+              <a:lnSpc>
+                <a:spcPct val="140000"/>
+              </a:lnSpc>
+              <a:buNone/>
+            </a:pPr>
+            <a:r>
+              <a:rPr lang="en-US" sz="1150" dirty="0">
+                <a:solidFill>
+                  <a:srgbClr val="1A1F36"/>
+                </a:solidFill>
+                <a:latin typeface="Roboto Mono" pitchFamily="34" charset="0"/>
+                <a:ea typeface="Roboto Mono" pitchFamily="34" charset="-122"/>
+                <a:cs typeface="Roboto Mono" pitchFamily="34" charset="-120"/>
+              </a:rPr>
+              <a:t>차트 다 그려서 ./outputs/ 에 저장하고, 핵심 인사이트 5줄로 요약.</a:t>
+            </a:r>
+            <a:endParaRPr lang="en-US" sz="1150" dirty="0"/>
+          </a:p>
+        </p:txBody>
+      </p:sp>
+      <p:sp>
+        <p:nvSpPr>
+          <p:cNvPr id="9" name="Text 7"/>
           <p:cNvSpPr/>
           <p:nvPr/>
         </p:nvSpPr>
@@ -12409,7 +12991,7 @@
                 <a:ea typeface="Noto Sans KR" pitchFamily="34" charset="-122"/>
                 <a:cs typeface="Noto Sans KR" pitchFamily="34" charset="-120"/>
               </a:rPr>
-              <a:t>7 / 26</a:t>
+              <a:t>7 / 27</a:t>
             </a:r>
             <a:endParaRPr lang="en-US" sz="900" dirty="0"/>
           </a:p>
@@ -12493,7 +13075,7 @@
                 <a:ea typeface="Noto Sans KR" pitchFamily="34" charset="-122"/>
                 <a:cs typeface="Noto Sans KR" pitchFamily="34" charset="-120"/>
               </a:rPr>
-              <a:t>파트 1. 오프닝 + EDA 라이브 시연</a:t>
+              <a:t>DAY 2 · EDA DEMO</a:t>
             </a:r>
             <a:endParaRPr lang="en-US" sz="1400" dirty="0"/>
           </a:p>
@@ -12532,7 +13114,7 @@
                 <a:ea typeface="Noto Sans KR" pitchFamily="34" charset="-122"/>
                 <a:cs typeface="Noto Sans KR" pitchFamily="34" charset="-120"/>
               </a:rPr>
-              <a:t>섹션 3 / 3</a:t>
+              <a:t>오늘 만든 결과물</a:t>
             </a:r>
             <a:endParaRPr lang="en-US" sz="1100" dirty="0"/>
           </a:p>
@@ -12546,8 +13128,8 @@
         </p:nvSpPr>
         <p:spPr>
           <a:xfrm>
-            <a:off x="548640" y="1508760"/>
-            <a:ext cx="11091672" cy="1371600"/>
+            <a:off x="548640" y="1417320"/>
+            <a:ext cx="11091672" cy="640080"/>
           </a:xfrm>
           <a:prstGeom prst="rect">
             <a:avLst/>
@@ -12560,13 +13142,10 @@
           <a:lstStyle/>
           <a:p>
             <a:pPr indent="0" marL="0">
-              <a:lnSpc>
-                <a:spcPct val="110000"/>
-              </a:lnSpc>
-              <a:buNone/>
-            </a:pPr>
-            <a:r>
-              <a:rPr lang="en-US" sz="4200" b="1" spc="-50" kern="0" dirty="0">
+              <a:buNone/>
+            </a:pPr>
+            <a:r>
+              <a:rPr lang="en-US" sz="2800" b="1" spc="-30" kern="0" dirty="0">
                 <a:solidFill>
                   <a:srgbClr val="1A1F36"/>
                 </a:solidFill>
@@ -12574,140 +13153,77 @@
                 <a:ea typeface="Noto Sans KR" pitchFamily="34" charset="-122"/>
                 <a:cs typeface="Noto Sans KR" pitchFamily="34" charset="-120"/>
               </a:rPr>
-              <a:t>이상치인가, 황사 spike인가?</a:t>
-            </a:r>
-            <a:endParaRPr lang="en-US" sz="4200" dirty="0"/>
-          </a:p>
-        </p:txBody>
-      </p:sp>
-      <p:sp>
-        <p:nvSpPr>
-          <p:cNvPr id="6" name="Shape 4"/>
-          <p:cNvSpPr/>
-          <p:nvPr/>
-        </p:nvSpPr>
-        <p:spPr>
-          <a:xfrm>
-            <a:off x="548640" y="2971800"/>
-            <a:ext cx="1828800" cy="0"/>
-          </a:xfrm>
-          <a:prstGeom prst="line">
-            <a:avLst/>
-          </a:prstGeom>
-          <a:noFill/>
-          <a:ln w="25400">
-            <a:solidFill>
-              <a:srgbClr val="00D4AA"/>
-            </a:solidFill>
-            <a:prstDash val="solid"/>
-          </a:ln>
-        </p:spPr>
-      </p:sp>
-      <p:sp>
-        <p:nvSpPr>
-          <p:cNvPr id="7" name="Text 5"/>
-          <p:cNvSpPr/>
-          <p:nvPr/>
-        </p:nvSpPr>
-        <p:spPr>
-          <a:xfrm>
-            <a:off x="548640" y="3200400"/>
-            <a:ext cx="11091672" cy="2788920"/>
-          </a:xfrm>
-          <a:prstGeom prst="rect">
-            <a:avLst/>
-          </a:prstGeom>
-          <a:noFill/>
-          <a:ln/>
-        </p:spPr>
-        <p:txBody>
-          <a:bodyPr wrap="square" rtlCol="0" anchor="t"/>
-          <a:lstStyle/>
-          <a:p>
-            <a:pPr indent="0" marL="0">
-              <a:lnSpc>
-                <a:spcPct val="155000"/>
-              </a:lnSpc>
-              <a:buNone/>
-            </a:pPr>
-            <a:r>
-              <a:rPr lang="en-US" sz="1700" dirty="0">
-                <a:solidFill>
-                  <a:srgbClr val="4A5568"/>
-                </a:solidFill>
-                <a:latin typeface="Noto Sans KR" pitchFamily="34" charset="0"/>
-                <a:ea typeface="Noto Sans KR" pitchFamily="34" charset="-122"/>
-                <a:cs typeface="Noto Sans KR" pitchFamily="34" charset="-120"/>
-              </a:rPr>
-              <a:t>· spike 1건 의심 → "이거 진짜 오류일까, 황사 이벤트일까?" 한 번 더 질문</a:t>
-            </a:r>
-            <a:endParaRPr lang="en-US" sz="1700" dirty="0"/>
-          </a:p>
-          <a:p>
-            <a:pPr indent="0" marL="0">
-              <a:lnSpc>
-                <a:spcPct val="155000"/>
-              </a:lnSpc>
-              <a:buNone/>
-            </a:pPr>
-            <a:r>
-              <a:rPr lang="en-US" sz="1700" dirty="0">
-                <a:solidFill>
-                  <a:srgbClr val="4A5568"/>
-                </a:solidFill>
-                <a:latin typeface="Noto Sans KR" pitchFamily="34" charset="0"/>
-                <a:ea typeface="Noto Sans KR" pitchFamily="34" charset="-122"/>
-                <a:cs typeface="Noto Sans KR" pitchFamily="34" charset="-120"/>
-              </a:rPr>
-              <a:t>· 분석가의 판단이 필요한 지점</a:t>
-            </a:r>
-            <a:endParaRPr lang="en-US" sz="1700" dirty="0"/>
-          </a:p>
-          <a:p>
-            <a:pPr indent="0" marL="0">
-              <a:lnSpc>
-                <a:spcPct val="155000"/>
-              </a:lnSpc>
-              <a:buNone/>
-            </a:pPr>
-            <a:r>
-              <a:rPr lang="en-US" sz="1700" dirty="0">
-                <a:solidFill>
-                  <a:srgbClr val="4A5568"/>
-                </a:solidFill>
-                <a:latin typeface="Noto Sans KR" pitchFamily="34" charset="0"/>
-                <a:ea typeface="Noto Sans KR" pitchFamily="34" charset="-122"/>
-                <a:cs typeface="Noto Sans KR" pitchFamily="34" charset="-120"/>
-              </a:rPr>
-              <a:t>· AI는 코드를 짜지만 도메인 해석은 사람의 일</a:t>
-            </a:r>
-            <a:endParaRPr lang="en-US" sz="1700" dirty="0"/>
-          </a:p>
-          <a:p>
-            <a:pPr indent="0" marL="0">
-              <a:lnSpc>
-                <a:spcPct val="155000"/>
-              </a:lnSpc>
-              <a:buNone/>
-            </a:pPr>
-            <a:r>
-              <a:rPr lang="en-US" sz="1700" dirty="0">
-                <a:solidFill>
-                  <a:srgbClr val="4A5568"/>
-                </a:solidFill>
-                <a:latin typeface="Noto Sans KR" pitchFamily="34" charset="0"/>
-                <a:ea typeface="Noto Sans KR" pitchFamily="34" charset="-122"/>
-                <a:cs typeface="Noto Sans KR" pitchFamily="34" charset="-120"/>
-              </a:rPr>
-              <a:t>· "AI가 짠 코드를 그냥 쓰면 도메인 모르는 결과가 나온다 — 손대야 한다"</a:t>
-            </a:r>
-            <a:endParaRPr lang="en-US" sz="1700" dirty="0"/>
-          </a:p>
-        </p:txBody>
-      </p:sp>
-      <p:sp>
-        <p:nvSpPr>
-          <p:cNvPr id="8" name="Text 6"/>
+              <a:t>EDA 시연 결과 — shape · 시즌성 · spike</a:t>
+            </a:r>
+            <a:endParaRPr lang="en-US" sz="2800" dirty="0"/>
+          </a:p>
+        </p:txBody>
+      </p:sp>
+      <p:pic>
+        <p:nvPicPr>
+          <p:cNvPr id="6" name="Image 0" descr="/Users/sujinpark/b2b-lecture-note/20260512_inflearn_B2G_dataanalysis/assets/screenshots/day2/eda_demo.png">    </p:cNvPr>
+          <p:cNvPicPr>
+            <a:picLocks noChangeAspect="1"/>
+          </p:cNvPicPr>
+          <p:nvPr/>
+        </p:nvPicPr>
+        <p:blipFill>
+          <a:blip r:embed="rId1"/>
+          <a:srcRect l="0" r="0" t="0" b="0"/>
+          <a:stretch/>
+        </p:blipFill>
+        <p:spPr>
+          <a:xfrm>
+            <a:off x="2194560" y="2240280"/>
+            <a:ext cx="7772400" cy="3657600"/>
+          </a:xfrm>
+          <a:prstGeom prst="rect">
+            <a:avLst/>
+          </a:prstGeom>
+        </p:spPr>
+      </p:pic>
+      <p:sp>
+        <p:nvSpPr>
+          <p:cNvPr id="7" name="Text 4"/>
+          <p:cNvSpPr/>
+          <p:nvPr/>
+        </p:nvSpPr>
+        <p:spPr>
+          <a:xfrm>
+            <a:off x="548640" y="5989320"/>
+            <a:ext cx="11091672" cy="411480"/>
+          </a:xfrm>
+          <a:prstGeom prst="rect">
+            <a:avLst/>
+          </a:prstGeom>
+          <a:noFill/>
+          <a:ln/>
+        </p:spPr>
+        <p:txBody>
+          <a:bodyPr wrap="square" rtlCol="0" anchor="ctr"/>
+          <a:lstStyle/>
+          <a:p>
+            <a:pPr algn="ctr" indent="0" marL="0">
+              <a:buNone/>
+            </a:pPr>
+            <a:r>
+              <a:rPr lang="en-US" sz="1200" i="1" dirty="0">
+                <a:solidFill>
+                  <a:srgbClr val="718096"/>
+                </a:solidFill>
+                <a:latin typeface="Noto Sans KR" pitchFamily="34" charset="0"/>
+                <a:ea typeface="Noto Sans KR" pitchFamily="34" charset="-122"/>
+                <a:cs typeface="Noto Sans KR" pitchFamily="34" charset="-120"/>
+              </a:rPr>
+              <a:t>통합 EDA 결과 한눈에</a:t>
+            </a:r>
+            <a:endParaRPr lang="en-US" sz="1200" dirty="0"/>
+          </a:p>
+        </p:txBody>
+      </p:sp>
+      <p:sp>
+        <p:nvSpPr>
+          <p:cNvPr id="8" name="Text 5"/>
           <p:cNvSpPr/>
           <p:nvPr/>
         </p:nvSpPr>
@@ -12738,7 +13254,7 @@
                 <a:ea typeface="Noto Sans KR" pitchFamily="34" charset="-122"/>
                 <a:cs typeface="Noto Sans KR" pitchFamily="34" charset="-120"/>
               </a:rPr>
-              <a:t>8 / 26</a:t>
+              <a:t>8 / 27</a:t>
             </a:r>
             <a:endParaRPr lang="en-US" sz="900" dirty="0"/>
           </a:p>
@@ -12822,7 +13338,7 @@
                 <a:ea typeface="Noto Sans KR" pitchFamily="34" charset="-122"/>
                 <a:cs typeface="Noto Sans KR" pitchFamily="34" charset="-120"/>
               </a:rPr>
-              <a:t>파트 2. 분석 질문 던지기 + 결합 데이터 EDA</a:t>
+              <a:t>파트 1. 오프닝 + EDA 라이브 시연</a:t>
             </a:r>
             <a:endParaRPr lang="en-US" sz="1400" dirty="0"/>
           </a:p>
@@ -12861,7 +13377,7 @@
                 <a:ea typeface="Noto Sans KR" pitchFamily="34" charset="-122"/>
                 <a:cs typeface="Noto Sans KR" pitchFamily="34" charset="-120"/>
               </a:rPr>
-              <a:t>섹션 1 / 6</a:t>
+              <a:t>섹션 4 / 4</a:t>
             </a:r>
             <a:endParaRPr lang="en-US" sz="1100" dirty="0"/>
           </a:p>
@@ -12903,7 +13419,7 @@
                 <a:ea typeface="Noto Sans KR" pitchFamily="34" charset="-122"/>
                 <a:cs typeface="Noto Sans KR" pitchFamily="34" charset="-120"/>
               </a:rPr>
-              <a:t>분석 질문 뱅크 — 50개</a:t>
+              <a:t>이상치인가, 황사 spike인가?</a:t>
             </a:r>
             <a:endParaRPr lang="en-US" sz="4200" dirty="0"/>
           </a:p>
@@ -12968,7 +13484,7 @@
                 <a:ea typeface="Noto Sans KR" pitchFamily="34" charset="-122"/>
                 <a:cs typeface="Noto Sans KR" pitchFamily="34" charset="-120"/>
               </a:rPr>
-              <a:t>· A. 미세먼지 단독 (10) / B. + 따릉이 (5) / C. + 지하철 (5)</a:t>
+              <a:t>· spike 1건 의심 → "이거 진짜 오류일까, 황사 이벤트일까?" 한 번 더 질문</a:t>
             </a:r>
             <a:endParaRPr lang="en-US" sz="1700" dirty="0"/>
           </a:p>
@@ -12988,7 +13504,7 @@
                 <a:ea typeface="Noto Sans KR" pitchFamily="34" charset="-122"/>
                 <a:cs typeface="Noto Sans KR" pitchFamily="34" charset="-120"/>
               </a:rPr>
-              <a:t>· D. + 날씨 (8) / E. + 언급량 (4) / F. + 쇼핑 적재본 (8)</a:t>
+              <a:t>· 분석가의 판단이 필요한 지점</a:t>
             </a:r>
             <a:endParaRPr lang="en-US" sz="1700" dirty="0"/>
           </a:p>
@@ -13008,7 +13524,7 @@
                 <a:ea typeface="Noto Sans KR" pitchFamily="34" charset="-122"/>
                 <a:cs typeface="Noto Sans KR" pitchFamily="34" charset="-120"/>
               </a:rPr>
-              <a:t>· G. 답 안 되는 질문 (5) — 일별 한계 인식</a:t>
+              <a:t>· AI는 코드를 짜지만 도메인 해석은 사람의 일</a:t>
             </a:r>
             <a:endParaRPr lang="en-US" sz="1700" dirty="0"/>
           </a:p>
@@ -13028,36 +13544,7 @@
                 <a:ea typeface="Noto Sans KR" pitchFamily="34" charset="-122"/>
                 <a:cs typeface="Noto Sans KR" pitchFamily="34" charset="-120"/>
               </a:rPr>
-              <a:t>· H. 워밍업 (5) — 본인 자치구 / "가장 깨끗했던 하루" 등</a:t>
-            </a:r>
-            <a:endParaRPr lang="en-US" sz="1700" dirty="0"/>
-          </a:p>
-          <a:p>
-            <a:pPr indent="0" marL="0">
-              <a:lnSpc>
-                <a:spcPct val="155000"/>
-              </a:lnSpc>
-              <a:buNone/>
-            </a:pPr>
-            <a:endParaRPr lang="en-US" sz="1700" dirty="0"/>
-          </a:p>
-          <a:p>
-            <a:pPr indent="0" marL="0">
-              <a:lnSpc>
-                <a:spcPct val="155000"/>
-              </a:lnSpc>
-              <a:buNone/>
-            </a:pPr>
-            <a:r>
-              <a:rPr lang="en-US" sz="1700" dirty="0">
-                <a:solidFill>
-                  <a:srgbClr val="4A5568"/>
-                </a:solidFill>
-                <a:latin typeface="Noto Sans KR" pitchFamily="34" charset="0"/>
-                <a:ea typeface="Noto Sans KR" pitchFamily="34" charset="-122"/>
-                <a:cs typeface="Noto Sans KR" pitchFamily="34" charset="-120"/>
-              </a:rPr>
-              <a:t>· 5분 시간 → 본인 관심사 5개 픽</a:t>
+              <a:t>· "AI가 짠 코드를 그냥 쓰면 도메인 모르는 결과가 나온다 — 손대야 한다"</a:t>
             </a:r>
             <a:endParaRPr lang="en-US" sz="1700" dirty="0"/>
           </a:p>
@@ -13096,7 +13583,7 @@
                 <a:ea typeface="Noto Sans KR" pitchFamily="34" charset="-122"/>
                 <a:cs typeface="Noto Sans KR" pitchFamily="34" charset="-120"/>
               </a:rPr>
-              <a:t>9 / 26</a:t>
+              <a:t>9 / 27</a:t>
             </a:r>
             <a:endParaRPr lang="en-US" sz="900" dirty="0"/>
           </a:p>

--- a/ppt/b2g_day2_eda.pptx
+++ b/ppt/b2g_day2_eda.pptx
@@ -3977,7 +3977,7 @@
                 <a:ea typeface="Noto Sans KR" pitchFamily="34" charset="-122"/>
                 <a:cs typeface="Noto Sans KR" pitchFamily="34" charset="-120"/>
               </a:rPr>
-              <a:t>💬 함께 볼 시연 프롬프트 — 따라 치지 않으셔도 됩니다</a:t>
+              <a:t>👉 직접 따라쳐보세요 — 본인 Claude Code에 그대로 붙여넣기</a:t>
             </a:r>
             <a:endParaRPr lang="en-US" sz="1100" dirty="0"/>
           </a:p>
@@ -4576,7 +4576,7 @@
                 <a:ea typeface="Noto Sans KR" pitchFamily="34" charset="-122"/>
                 <a:cs typeface="Noto Sans KR" pitchFamily="34" charset="-120"/>
               </a:rPr>
-              <a:t>💬 함께 볼 시연 프롬프트 — 따라 치지 않으셔도 됩니다</a:t>
+              <a:t>👉 직접 따라쳐보세요 — 본인 Claude Code에 그대로 붙여넣기</a:t>
             </a:r>
             <a:endParaRPr lang="en-US" sz="1100" dirty="0"/>
           </a:p>
@@ -5195,7 +5195,7 @@
                 <a:ea typeface="Noto Sans KR" pitchFamily="34" charset="-122"/>
                 <a:cs typeface="Noto Sans KR" pitchFamily="34" charset="-120"/>
               </a:rPr>
-              <a:t>💬 함께 볼 시연 프롬프트 — 따라 치지 않으셔도 됩니다</a:t>
+              <a:t>👉 직접 따라쳐보세요 — 본인 Claude Code에 그대로 붙여넣기</a:t>
             </a:r>
             <a:endParaRPr lang="en-US" sz="1100" dirty="0"/>
           </a:p>
@@ -5919,7 +5919,7 @@
                 <a:ea typeface="Noto Sans KR" pitchFamily="34" charset="-122"/>
                 <a:cs typeface="Noto Sans KR" pitchFamily="34" charset="-120"/>
               </a:rPr>
-              <a:t>💬 함께 볼 시연 프롬프트 — 따라 치지 않으셔도 됩니다</a:t>
+              <a:t>👉 직접 따라쳐보세요 — 본인 Claude Code에 그대로 붙여넣기</a:t>
             </a:r>
             <a:endParaRPr lang="en-US" sz="1100" dirty="0"/>
           </a:p>
@@ -8836,7 +8836,7 @@
                 <a:ea typeface="Noto Sans KR" pitchFamily="34" charset="-122"/>
                 <a:cs typeface="Noto Sans KR" pitchFamily="34" charset="-120"/>
               </a:rPr>
-              <a:t>💬 함께 볼 시연 프롬프트 — 따라 치지 않으셔도 됩니다</a:t>
+              <a:t>👉 직접 따라쳐보세요 — 본인 Claude Code에 그대로 붙여넣기</a:t>
             </a:r>
             <a:endParaRPr lang="en-US" sz="1100" dirty="0"/>
           </a:p>
@@ -12738,7 +12738,7 @@
                 <a:ea typeface="Noto Sans KR" pitchFamily="34" charset="-122"/>
                 <a:cs typeface="Noto Sans KR" pitchFamily="34" charset="-120"/>
               </a:rPr>
-              <a:t>💬 함께 볼 시연 프롬프트 — 따라 치지 않으셔도 됩니다</a:t>
+              <a:t>💬 함께 볼 시연 프롬프트 — 안 따라쳐도 OK (보기만 해도 됩니다)</a:t>
             </a:r>
             <a:endParaRPr lang="en-US" sz="1100" dirty="0"/>
           </a:p>

--- a/ppt/b2g_day2_eda.pptx
+++ b/ppt/b2g_day2_eda.pptx
@@ -32,9 +32,12 @@
     <p:sldId id="280" r:id="rId26"/>
     <p:sldId id="281" r:id="rId27"/>
     <p:sldId id="282" r:id="rId28"/>
+    <p:sldId id="283" r:id="rId29"/>
+    <p:sldId id="284" r:id="rId30"/>
+    <p:sldId id="285" r:id="rId31"/>
   </p:sldIdLst>
   <p:notesMasterIdLst>
-    <p:notesMasterId r:id="rId29"/>
+    <p:notesMasterId r:id="rId32"/>
   </p:notesMasterIdLst>
   <p:sldSz cx="12192000" cy="6858000"/>
   <p:notesSz cx="6858000" cy="12192000"/>
@@ -2242,6 +2245,182 @@
 </p:notes>
 </file>
 
+<file path=ppt/notesSlides/notesSlide28.xml><?xml version="1.0" encoding="utf-8"?>
+<p:notes xmlns:a="http://schemas.openxmlformats.org/drawingml/2006/main" xmlns:r="http://schemas.openxmlformats.org/officeDocument/2006/relationships" xmlns:p="http://schemas.openxmlformats.org/presentationml/2006/main">
+  <p:cSld>
+    <p:spTree>
+      <p:nvGrpSpPr>
+        <p:cNvPr id="1" name=""/>
+        <p:cNvGrpSpPr/>
+        <p:nvPr/>
+      </p:nvGrpSpPr>
+      <p:grpSpPr>
+        <a:xfrm>
+          <a:off x="0" y="0"/>
+          <a:ext cx="0" cy="0"/>
+          <a:chOff x="0" y="0"/>
+          <a:chExt cx="0" cy="0"/>
+        </a:xfrm>
+      </p:grpSpPr>
+      <p:sp>
+        <p:nvSpPr>
+          <p:cNvPr id="2" name="Slide Image Placeholder 1"/>
+          <p:cNvSpPr>
+            <a:spLocks noGrp="1" noRot="1" noChangeAspect="1"/>
+          </p:cNvSpPr>
+          <p:nvPr>
+            <p:ph type="sldImg"/>
+          </p:nvPr>
+        </p:nvSpPr>
+        <p:spPr/>
+      </p:sp>
+      <p:sp>
+        <p:nvSpPr>
+          <p:cNvPr id="3" name="Notes Placeholder 2"/>
+          <p:cNvSpPr>
+            <a:spLocks noGrp="1"/>
+          </p:cNvSpPr>
+          <p:nvPr>
+            <p:ph type="body" idx="1"/>
+          </p:nvPr>
+        </p:nvSpPr>
+        <p:spPr/>
+        <p:txBody>
+          <a:bodyPr/>
+          <a:lstStyle/>
+          <a:p>
+            <a:r>
+              <a:rPr lang="en-US" dirty="0"/>
+              <a:t/>
+            </a:r>
+            <a:endParaRPr lang="en-US" dirty="0"/>
+          </a:p>
+        </p:txBody>
+      </p:sp>
+      <p:sp>
+        <p:nvSpPr>
+          <p:cNvPr id="4" name="Slide Number Placeholder 3"/>
+          <p:cNvSpPr>
+            <a:spLocks noGrp="1"/>
+          </p:cNvSpPr>
+          <p:nvPr>
+            <p:ph type="sldNum" sz="quarter" idx="10"/>
+          </p:nvPr>
+        </p:nvSpPr>
+        <p:spPr/>
+        <p:txBody>
+          <a:bodyPr/>
+          <a:lstStyle/>
+          <a:p>
+            <a:fld id="{F7021451-1387-4CA6-816F-3879F97B5CBC}" type="slidenum">
+              <a:rPr lang="en-US"/>
+              <a:t>28</a:t>
+            </a:fld>
+            <a:endParaRPr lang="en-US"/>
+          </a:p>
+        </p:txBody>
+      </p:sp>
+    </p:spTree>
+    <p:extLst>
+      <p:ext uri="{BB962C8B-B14F-4D97-AF65-F5344CB8AC3E}">
+        <p14:creationId xmlns:p14="http://schemas.microsoft.com/office/powerpoint/2010/main" val="1024086991"/>
+      </p:ext>
+    </p:extLst>
+  </p:cSld>
+  <p:clrMapOvr>
+    <a:masterClrMapping/>
+  </p:clrMapOvr>
+</p:notes>
+</file>
+
+<file path=ppt/notesSlides/notesSlide29.xml><?xml version="1.0" encoding="utf-8"?>
+<p:notes xmlns:a="http://schemas.openxmlformats.org/drawingml/2006/main" xmlns:r="http://schemas.openxmlformats.org/officeDocument/2006/relationships" xmlns:p="http://schemas.openxmlformats.org/presentationml/2006/main">
+  <p:cSld>
+    <p:spTree>
+      <p:nvGrpSpPr>
+        <p:cNvPr id="1" name=""/>
+        <p:cNvGrpSpPr/>
+        <p:nvPr/>
+      </p:nvGrpSpPr>
+      <p:grpSpPr>
+        <a:xfrm>
+          <a:off x="0" y="0"/>
+          <a:ext cx="0" cy="0"/>
+          <a:chOff x="0" y="0"/>
+          <a:chExt cx="0" cy="0"/>
+        </a:xfrm>
+      </p:grpSpPr>
+      <p:sp>
+        <p:nvSpPr>
+          <p:cNvPr id="2" name="Slide Image Placeholder 1"/>
+          <p:cNvSpPr>
+            <a:spLocks noGrp="1" noRot="1" noChangeAspect="1"/>
+          </p:cNvSpPr>
+          <p:nvPr>
+            <p:ph type="sldImg"/>
+          </p:nvPr>
+        </p:nvSpPr>
+        <p:spPr/>
+      </p:sp>
+      <p:sp>
+        <p:nvSpPr>
+          <p:cNvPr id="3" name="Notes Placeholder 2"/>
+          <p:cNvSpPr>
+            <a:spLocks noGrp="1"/>
+          </p:cNvSpPr>
+          <p:nvPr>
+            <p:ph type="body" idx="1"/>
+          </p:nvPr>
+        </p:nvSpPr>
+        <p:spPr/>
+        <p:txBody>
+          <a:bodyPr/>
+          <a:lstStyle/>
+          <a:p>
+            <a:r>
+              <a:rPr lang="en-US" dirty="0"/>
+              <a:t/>
+            </a:r>
+            <a:endParaRPr lang="en-US" dirty="0"/>
+          </a:p>
+        </p:txBody>
+      </p:sp>
+      <p:sp>
+        <p:nvSpPr>
+          <p:cNvPr id="4" name="Slide Number Placeholder 3"/>
+          <p:cNvSpPr>
+            <a:spLocks noGrp="1"/>
+          </p:cNvSpPr>
+          <p:nvPr>
+            <p:ph type="sldNum" sz="quarter" idx="10"/>
+          </p:nvPr>
+        </p:nvSpPr>
+        <p:spPr/>
+        <p:txBody>
+          <a:bodyPr/>
+          <a:lstStyle/>
+          <a:p>
+            <a:fld id="{F7021451-1387-4CA6-816F-3879F97B5CBC}" type="slidenum">
+              <a:rPr lang="en-US"/>
+              <a:t>29</a:t>
+            </a:fld>
+            <a:endParaRPr lang="en-US"/>
+          </a:p>
+        </p:txBody>
+      </p:sp>
+    </p:spTree>
+    <p:extLst>
+      <p:ext uri="{BB962C8B-B14F-4D97-AF65-F5344CB8AC3E}">
+        <p14:creationId xmlns:p14="http://schemas.microsoft.com/office/powerpoint/2010/main" val="1024086991"/>
+      </p:ext>
+    </p:extLst>
+  </p:cSld>
+  <p:clrMapOvr>
+    <a:masterClrMapping/>
+  </p:clrMapOvr>
+</p:notes>
+</file>
+
 <file path=ppt/notesSlides/notesSlide3.xml><?xml version="1.0" encoding="utf-8"?>
 <p:notes xmlns:a="http://schemas.openxmlformats.org/drawingml/2006/main" xmlns:r="http://schemas.openxmlformats.org/officeDocument/2006/relationships" xmlns:p="http://schemas.openxmlformats.org/presentationml/2006/main">
   <p:cSld>
@@ -2312,6 +2491,94 @@
             <a:fld id="{F7021451-1387-4CA6-816F-3879F97B5CBC}" type="slidenum">
               <a:rPr lang="en-US"/>
               <a:t>3</a:t>
+            </a:fld>
+            <a:endParaRPr lang="en-US"/>
+          </a:p>
+        </p:txBody>
+      </p:sp>
+    </p:spTree>
+    <p:extLst>
+      <p:ext uri="{BB962C8B-B14F-4D97-AF65-F5344CB8AC3E}">
+        <p14:creationId xmlns:p14="http://schemas.microsoft.com/office/powerpoint/2010/main" val="1024086991"/>
+      </p:ext>
+    </p:extLst>
+  </p:cSld>
+  <p:clrMapOvr>
+    <a:masterClrMapping/>
+  </p:clrMapOvr>
+</p:notes>
+</file>
+
+<file path=ppt/notesSlides/notesSlide30.xml><?xml version="1.0" encoding="utf-8"?>
+<p:notes xmlns:a="http://schemas.openxmlformats.org/drawingml/2006/main" xmlns:r="http://schemas.openxmlformats.org/officeDocument/2006/relationships" xmlns:p="http://schemas.openxmlformats.org/presentationml/2006/main">
+  <p:cSld>
+    <p:spTree>
+      <p:nvGrpSpPr>
+        <p:cNvPr id="1" name=""/>
+        <p:cNvGrpSpPr/>
+        <p:nvPr/>
+      </p:nvGrpSpPr>
+      <p:grpSpPr>
+        <a:xfrm>
+          <a:off x="0" y="0"/>
+          <a:ext cx="0" cy="0"/>
+          <a:chOff x="0" y="0"/>
+          <a:chExt cx="0" cy="0"/>
+        </a:xfrm>
+      </p:grpSpPr>
+      <p:sp>
+        <p:nvSpPr>
+          <p:cNvPr id="2" name="Slide Image Placeholder 1"/>
+          <p:cNvSpPr>
+            <a:spLocks noGrp="1" noRot="1" noChangeAspect="1"/>
+          </p:cNvSpPr>
+          <p:nvPr>
+            <p:ph type="sldImg"/>
+          </p:nvPr>
+        </p:nvSpPr>
+        <p:spPr/>
+      </p:sp>
+      <p:sp>
+        <p:nvSpPr>
+          <p:cNvPr id="3" name="Notes Placeholder 2"/>
+          <p:cNvSpPr>
+            <a:spLocks noGrp="1"/>
+          </p:cNvSpPr>
+          <p:nvPr>
+            <p:ph type="body" idx="1"/>
+          </p:nvPr>
+        </p:nvSpPr>
+        <p:spPr/>
+        <p:txBody>
+          <a:bodyPr/>
+          <a:lstStyle/>
+          <a:p>
+            <a:r>
+              <a:rPr lang="en-US" dirty="0"/>
+              <a:t/>
+            </a:r>
+            <a:endParaRPr lang="en-US" dirty="0"/>
+          </a:p>
+        </p:txBody>
+      </p:sp>
+      <p:sp>
+        <p:nvSpPr>
+          <p:cNvPr id="4" name="Slide Number Placeholder 3"/>
+          <p:cNvSpPr>
+            <a:spLocks noGrp="1"/>
+          </p:cNvSpPr>
+          <p:nvPr>
+            <p:ph type="sldNum" sz="quarter" idx="10"/>
+          </p:nvPr>
+        </p:nvSpPr>
+        <p:spPr/>
+        <p:txBody>
+          <a:bodyPr/>
+          <a:lstStyle/>
+          <a:p>
+            <a:fld id="{F7021451-1387-4CA6-816F-3879F97B5CBC}" type="slidenum">
+              <a:rPr lang="en-US"/>
+              <a:t>30</a:t>
             </a:fld>
             <a:endParaRPr lang="en-US"/>
           </a:p>
@@ -3580,7 +3847,7 @@
                 <a:ea typeface="Noto Sans KR" pitchFamily="34" charset="-122"/>
                 <a:cs typeface="Noto Sans KR" pitchFamily="34" charset="-120"/>
               </a:rPr>
-              <a:t>파트 2. 분석 질문 던지기 + 결합 데이터 EDA</a:t>
+              <a:t>파트 1. 오프닝 + EDA 라이브 시연</a:t>
             </a:r>
             <a:endParaRPr lang="en-US" sz="1400" dirty="0"/>
           </a:p>
@@ -3619,7 +3886,7 @@
                 <a:ea typeface="Noto Sans KR" pitchFamily="34" charset="-122"/>
                 <a:cs typeface="Noto Sans KR" pitchFamily="34" charset="-120"/>
               </a:rPr>
-              <a:t>섹션 1 / 6</a:t>
+              <a:t>섹션 4 / 4</a:t>
             </a:r>
             <a:endParaRPr lang="en-US" sz="1100" dirty="0"/>
           </a:p>
@@ -3661,7 +3928,7 @@
                 <a:ea typeface="Noto Sans KR" pitchFamily="34" charset="-122"/>
                 <a:cs typeface="Noto Sans KR" pitchFamily="34" charset="-120"/>
               </a:rPr>
-              <a:t>분석 질문 뱅크 — 50개</a:t>
+              <a:t>이상치인가, 황사 spike인가?</a:t>
             </a:r>
             <a:endParaRPr lang="en-US" sz="4200" dirty="0"/>
           </a:p>
@@ -3726,7 +3993,7 @@
                 <a:ea typeface="Noto Sans KR" pitchFamily="34" charset="-122"/>
                 <a:cs typeface="Noto Sans KR" pitchFamily="34" charset="-120"/>
               </a:rPr>
-              <a:t>· A. 미세먼지 단독 (10) / B. + 따릉이 (5) / C. + 지하철 (5)</a:t>
+              <a:t>· spike 1건 의심 → "이거 진짜 오류일까, 황사 이벤트일까?" 한 번 더 질문</a:t>
             </a:r>
             <a:endParaRPr lang="en-US" sz="1700" dirty="0"/>
           </a:p>
@@ -3746,7 +4013,7 @@
                 <a:ea typeface="Noto Sans KR" pitchFamily="34" charset="-122"/>
                 <a:cs typeface="Noto Sans KR" pitchFamily="34" charset="-120"/>
               </a:rPr>
-              <a:t>· D. + 날씨 (8) / E. + 언급량 (4) / F. + 쇼핑 적재본 (8)</a:t>
+              <a:t>· 분석가의 판단이 필요한 지점</a:t>
             </a:r>
             <a:endParaRPr lang="en-US" sz="1700" dirty="0"/>
           </a:p>
@@ -3766,7 +4033,7 @@
                 <a:ea typeface="Noto Sans KR" pitchFamily="34" charset="-122"/>
                 <a:cs typeface="Noto Sans KR" pitchFamily="34" charset="-120"/>
               </a:rPr>
-              <a:t>· G. 답 안 되는 질문 (5) — 일별 한계 인식</a:t>
+              <a:t>· AI는 코드를 짜지만 도메인 해석은 사람의 일</a:t>
             </a:r>
             <a:endParaRPr lang="en-US" sz="1700" dirty="0"/>
           </a:p>
@@ -3786,36 +4053,7 @@
                 <a:ea typeface="Noto Sans KR" pitchFamily="34" charset="-122"/>
                 <a:cs typeface="Noto Sans KR" pitchFamily="34" charset="-120"/>
               </a:rPr>
-              <a:t>· H. 워밍업 (5) — 본인 자치구 / "가장 깨끗했던 하루" 등</a:t>
-            </a:r>
-            <a:endParaRPr lang="en-US" sz="1700" dirty="0"/>
-          </a:p>
-          <a:p>
-            <a:pPr indent="0" marL="0">
-              <a:lnSpc>
-                <a:spcPct val="155000"/>
-              </a:lnSpc>
-              <a:buNone/>
-            </a:pPr>
-            <a:endParaRPr lang="en-US" sz="1700" dirty="0"/>
-          </a:p>
-          <a:p>
-            <a:pPr indent="0" marL="0">
-              <a:lnSpc>
-                <a:spcPct val="155000"/>
-              </a:lnSpc>
-              <a:buNone/>
-            </a:pPr>
-            <a:r>
-              <a:rPr lang="en-US" sz="1700" dirty="0">
-                <a:solidFill>
-                  <a:srgbClr val="4A5568"/>
-                </a:solidFill>
-                <a:latin typeface="Noto Sans KR" pitchFamily="34" charset="0"/>
-                <a:ea typeface="Noto Sans KR" pitchFamily="34" charset="-122"/>
-                <a:cs typeface="Noto Sans KR" pitchFamily="34" charset="-120"/>
-              </a:rPr>
-              <a:t>· 5분 시간 → 본인 관심사 5개 픽</a:t>
+              <a:t>· "AI가 짠 코드를 그냥 쓰면 도메인 모르는 결과가 나온다 — 손대야 한다"</a:t>
             </a:r>
             <a:endParaRPr lang="en-US" sz="1700" dirty="0"/>
           </a:p>
@@ -3854,7 +4092,7 @@
                 <a:ea typeface="Noto Sans KR" pitchFamily="34" charset="-122"/>
                 <a:cs typeface="Noto Sans KR" pitchFamily="34" charset="-120"/>
               </a:rPr>
-              <a:t>10 / 27</a:t>
+              <a:t>10 / 30</a:t>
             </a:r>
             <a:endParaRPr lang="en-US" sz="900" dirty="0"/>
           </a:p>
@@ -3893,8 +4131,28 @@
         </p:nvSpPr>
         <p:spPr>
           <a:xfrm>
-            <a:off x="548640" y="384048"/>
-            <a:ext cx="914400" cy="54864"/>
+            <a:off x="0" y="0"/>
+            <a:ext cx="12192000" cy="6858000"/>
+          </a:xfrm>
+          <a:prstGeom prst="rect">
+            <a:avLst/>
+          </a:prstGeom>
+          <a:solidFill>
+            <a:srgbClr val="1A1F36"/>
+          </a:solidFill>
+          <a:ln/>
+        </p:spPr>
+      </p:sp>
+      <p:sp>
+        <p:nvSpPr>
+          <p:cNvPr id="3" name="Shape 1"/>
+          <p:cNvSpPr/>
+          <p:nvPr/>
+        </p:nvSpPr>
+        <p:spPr>
+          <a:xfrm>
+            <a:off x="9875520" y="0"/>
+            <a:ext cx="2313432" cy="6858000"/>
           </a:xfrm>
           <a:prstGeom prst="rect">
             <a:avLst/>
@@ -3907,14 +4165,14 @@
       </p:sp>
       <p:sp>
         <p:nvSpPr>
-          <p:cNvPr id="3" name="Text 1"/>
-          <p:cNvSpPr/>
-          <p:nvPr/>
-        </p:nvSpPr>
-        <p:spPr>
-          <a:xfrm>
-            <a:off x="548640" y="530352"/>
-            <a:ext cx="10515600" cy="411480"/>
+          <p:cNvPr id="4" name="Text 2"/>
+          <p:cNvSpPr/>
+          <p:nvPr/>
+        </p:nvSpPr>
+        <p:spPr>
+          <a:xfrm>
+            <a:off x="731520" y="1828800"/>
+            <a:ext cx="10515600" cy="457200"/>
           </a:xfrm>
           <a:prstGeom prst="rect">
             <a:avLst/>
@@ -3930,15 +4188,15 @@
               <a:buNone/>
             </a:pPr>
             <a:r>
-              <a:rPr lang="en-US" sz="1400" b="1" spc="50" kern="0" dirty="0">
-                <a:solidFill>
-                  <a:srgbClr val="718096"/>
-                </a:solidFill>
-                <a:latin typeface="Noto Sans KR" pitchFamily="34" charset="0"/>
-                <a:ea typeface="Noto Sans KR" pitchFamily="34" charset="-122"/>
-                <a:cs typeface="Noto Sans KR" pitchFamily="34" charset="-120"/>
-              </a:rPr>
-              <a:t>파트 2. 분석 질문 던지기 + 결합 데이터 EDA</a:t>
+              <a:rPr lang="en-US" sz="1400" b="1" spc="500" kern="0" dirty="0">
+                <a:solidFill>
+                  <a:srgbClr val="00D4AA"/>
+                </a:solidFill>
+                <a:latin typeface="Noto Sans KR" pitchFamily="34" charset="0"/>
+                <a:ea typeface="Noto Sans KR" pitchFamily="34" charset="-122"/>
+                <a:cs typeface="Noto Sans KR" pitchFamily="34" charset="-120"/>
+              </a:rPr>
+              <a:t>PART 2</a:t>
             </a:r>
             <a:endParaRPr lang="en-US" sz="1400" dirty="0"/>
           </a:p>
@@ -3946,14 +4204,14 @@
       </p:sp>
       <p:sp>
         <p:nvSpPr>
-          <p:cNvPr id="4" name="Text 2"/>
-          <p:cNvSpPr/>
-          <p:nvPr/>
-        </p:nvSpPr>
-        <p:spPr>
-          <a:xfrm>
-            <a:off x="548640" y="960120"/>
-            <a:ext cx="11091672" cy="292608"/>
+          <p:cNvPr id="5" name="Text 3"/>
+          <p:cNvSpPr/>
+          <p:nvPr/>
+        </p:nvSpPr>
+        <p:spPr>
+          <a:xfrm>
+            <a:off x="731520" y="2468880"/>
+            <a:ext cx="10515600" cy="1645920"/>
           </a:xfrm>
           <a:prstGeom prst="rect">
             <a:avLst/>
@@ -3963,45 +4221,6 @@
         </p:spPr>
         <p:txBody>
           <a:bodyPr wrap="square" rtlCol="0" anchor="ctr"/>
-          <a:lstStyle/>
-          <a:p>
-            <a:pPr indent="0" marL="0">
-              <a:buNone/>
-            </a:pPr>
-            <a:r>
-              <a:rPr lang="en-US" sz="1100" b="1" spc="50" kern="0" dirty="0">
-                <a:solidFill>
-                  <a:srgbClr val="00D4AA"/>
-                </a:solidFill>
-                <a:latin typeface="Noto Sans KR" pitchFamily="34" charset="0"/>
-                <a:ea typeface="Noto Sans KR" pitchFamily="34" charset="-122"/>
-                <a:cs typeface="Noto Sans KR" pitchFamily="34" charset="-120"/>
-              </a:rPr>
-              <a:t>👉 직접 따라쳐보세요 — 본인 Claude Code에 그대로 붙여넣기</a:t>
-            </a:r>
-            <a:endParaRPr lang="en-US" sz="1100" dirty="0"/>
-          </a:p>
-        </p:txBody>
-      </p:sp>
-      <p:sp>
-        <p:nvSpPr>
-          <p:cNvPr id="5" name="Text 3"/>
-          <p:cNvSpPr/>
-          <p:nvPr/>
-        </p:nvSpPr>
-        <p:spPr>
-          <a:xfrm>
-            <a:off x="548640" y="1508760"/>
-            <a:ext cx="11091672" cy="1005840"/>
-          </a:xfrm>
-          <a:prstGeom prst="rect">
-            <a:avLst/>
-          </a:prstGeom>
-          <a:noFill/>
-          <a:ln/>
-        </p:spPr>
-        <p:txBody>
-          <a:bodyPr wrap="square" rtlCol="0" anchor="t"/>
           <a:lstStyle/>
           <a:p>
             <a:pPr indent="0" marL="0">
@@ -4011,17 +4230,37 @@
               <a:buNone/>
             </a:pPr>
             <a:r>
-              <a:rPr lang="en-US" sz="3400" b="1" spc="-50" kern="0" dirty="0">
-                <a:solidFill>
-                  <a:srgbClr val="1A1F36"/>
-                </a:solidFill>
-                <a:latin typeface="Noto Sans KR" pitchFamily="34" charset="0"/>
-                <a:ea typeface="Noto Sans KR" pitchFamily="34" charset="-122"/>
-                <a:cs typeface="Noto Sans KR" pitchFamily="34" charset="-120"/>
-              </a:rPr>
-              <a:t>1단계 — 본인 관심사 1개부터 단독 분석</a:t>
-            </a:r>
-            <a:endParaRPr lang="en-US" sz="3400" dirty="0"/>
+              <a:rPr lang="en-US" sz="5400" b="1" spc="-50" kern="0" dirty="0">
+                <a:solidFill>
+                  <a:srgbClr val="FFFFFF"/>
+                </a:solidFill>
+                <a:latin typeface="Noto Sans KR" pitchFamily="34" charset="0"/>
+                <a:ea typeface="Noto Sans KR" pitchFamily="34" charset="-122"/>
+                <a:cs typeface="Noto Sans KR" pitchFamily="34" charset="-120"/>
+              </a:rPr>
+              <a:t>분석 질문 던지기 +</a:t>
+            </a:r>
+            <a:endParaRPr lang="en-US" sz="5400" dirty="0"/>
+          </a:p>
+          <a:p>
+            <a:pPr indent="0" marL="0">
+              <a:lnSpc>
+                <a:spcPct val="115000"/>
+              </a:lnSpc>
+              <a:buNone/>
+            </a:pPr>
+            <a:r>
+              <a:rPr lang="en-US" sz="5400" b="1" spc="-50" kern="0" dirty="0">
+                <a:solidFill>
+                  <a:srgbClr val="FFFFFF"/>
+                </a:solidFill>
+                <a:latin typeface="Noto Sans KR" pitchFamily="34" charset="0"/>
+                <a:ea typeface="Noto Sans KR" pitchFamily="34" charset="-122"/>
+                <a:cs typeface="Noto Sans KR" pitchFamily="34" charset="-120"/>
+              </a:rPr>
+              <a:t>결합 데이터 EDA</a:t>
+            </a:r>
+            <a:endParaRPr lang="en-US" sz="5400" dirty="0"/>
           </a:p>
         </p:txBody>
       </p:sp>
@@ -4033,14 +4272,14 @@
         </p:nvSpPr>
         <p:spPr>
           <a:xfrm>
-            <a:off x="548640" y="2606040"/>
-            <a:ext cx="1828800" cy="0"/>
+            <a:off x="731520" y="4297680"/>
+            <a:ext cx="3200400" cy="0"/>
           </a:xfrm>
           <a:prstGeom prst="line">
             <a:avLst/>
           </a:prstGeom>
           <a:noFill/>
-          <a:ln w="25400">
+          <a:ln w="19050">
             <a:solidFill>
               <a:srgbClr val="00D4AA"/>
             </a:solidFill>
@@ -4050,116 +4289,49 @@
       </p:sp>
       <p:sp>
         <p:nvSpPr>
-          <p:cNvPr id="7" name="Shape 5"/>
-          <p:cNvSpPr/>
-          <p:nvPr/>
-        </p:nvSpPr>
-        <p:spPr>
-          <a:xfrm>
-            <a:off x="548640" y="2926080"/>
-            <a:ext cx="11091672" cy="3200400"/>
-          </a:xfrm>
-          <a:prstGeom prst="roundRect">
-            <a:avLst>
-              <a:gd name="adj" fmla="val 1714"/>
-            </a:avLst>
-          </a:prstGeom>
-          <a:solidFill>
-            <a:srgbClr val="F1F5F9"/>
-          </a:solidFill>
-          <a:ln w="6350">
-            <a:solidFill>
-              <a:srgbClr val="E2E8F0"/>
-            </a:solidFill>
-            <a:prstDash val="solid"/>
-          </a:ln>
-        </p:spPr>
+          <p:cNvPr id="7" name="Text 5"/>
+          <p:cNvSpPr/>
+          <p:nvPr/>
+        </p:nvSpPr>
+        <p:spPr>
+          <a:xfrm>
+            <a:off x="731520" y="4526280"/>
+            <a:ext cx="10515600" cy="548640"/>
+          </a:xfrm>
+          <a:prstGeom prst="rect">
+            <a:avLst/>
+          </a:prstGeom>
+          <a:noFill/>
+          <a:ln/>
+        </p:spPr>
+        <p:txBody>
+          <a:bodyPr wrap="square" rtlCol="0" anchor="ctr"/>
+          <a:lstStyle/>
+          <a:p>
+            <a:pPr indent="0" marL="0">
+              <a:lnSpc>
+                <a:spcPct val="150000"/>
+              </a:lnSpc>
+              <a:buNone/>
+            </a:pPr>
+            <a:r>
+              <a:rPr lang="en-US" sz="1600" dirty="0">
+                <a:solidFill>
+                  <a:srgbClr val="A0AEC0"/>
+                </a:solidFill>
+                <a:latin typeface="Noto Sans KR" pitchFamily="34" charset="0"/>
+                <a:ea typeface="Noto Sans KR" pitchFamily="34" charset="-122"/>
+                <a:cs typeface="Noto Sans KR" pitchFamily="34" charset="-120"/>
+              </a:rPr>
+              <a:t>질문 50개 중 5개 픽 → 단독 → 결합으로 확장</a:t>
+            </a:r>
+            <a:endParaRPr lang="en-US" sz="1600" dirty="0"/>
+          </a:p>
+        </p:txBody>
       </p:sp>
       <p:sp>
         <p:nvSpPr>
           <p:cNvPr id="8" name="Text 6"/>
-          <p:cNvSpPr/>
-          <p:nvPr/>
-        </p:nvSpPr>
-        <p:spPr>
-          <a:xfrm>
-            <a:off x="713232" y="3035808"/>
-            <a:ext cx="10762488" cy="2980944"/>
-          </a:xfrm>
-          <a:prstGeom prst="rect">
-            <a:avLst/>
-          </a:prstGeom>
-          <a:noFill/>
-          <a:ln/>
-        </p:spPr>
-        <p:txBody>
-          <a:bodyPr wrap="square" rtlCol="0" anchor="t"/>
-          <a:lstStyle/>
-          <a:p>
-            <a:pPr indent="0" marL="0">
-              <a:lnSpc>
-                <a:spcPct val="140000"/>
-              </a:lnSpc>
-              <a:buNone/>
-            </a:pPr>
-            <a:r>
-              <a:rPr lang="en-US" sz="1150" dirty="0">
-                <a:solidFill>
-                  <a:srgbClr val="1A1F36"/>
-                </a:solidFill>
-                <a:latin typeface="Roboto Mono" pitchFamily="34" charset="0"/>
-                <a:ea typeface="Roboto Mono" pitchFamily="34" charset="-122"/>
-                <a:cs typeface="Roboto Mono" pitchFamily="34" charset="-120"/>
-              </a:rPr>
-              <a:t>"내가 사는 자치구의 2025 PM2.5 평균은?" 같은 식으로</a:t>
-            </a:r>
-            <a:endParaRPr lang="en-US" sz="1150" dirty="0"/>
-          </a:p>
-          <a:p>
-            <a:pPr indent="0" marL="0">
-              <a:lnSpc>
-                <a:spcPct val="140000"/>
-              </a:lnSpc>
-              <a:buNone/>
-            </a:pPr>
-            <a:r>
-              <a:rPr lang="en-US" sz="1150" dirty="0">
-                <a:solidFill>
-                  <a:srgbClr val="1A1F36"/>
-                </a:solidFill>
-                <a:latin typeface="Roboto Mono" pitchFamily="34" charset="0"/>
-                <a:ea typeface="Roboto Mono" pitchFamily="34" charset="-122"/>
-                <a:cs typeface="Roboto Mono" pitchFamily="34" charset="-120"/>
-              </a:rPr>
-              <a:t>본인이 고른 질문 1개를 그대로 던져봐.</a:t>
-            </a:r>
-            <a:endParaRPr lang="en-US" sz="1150" dirty="0"/>
-          </a:p>
-          <a:p>
-            <a:pPr indent="0" marL="0">
-              <a:lnSpc>
-                <a:spcPct val="140000"/>
-              </a:lnSpc>
-              <a:buNone/>
-            </a:pPr>
-            <a:r>
-              <a:rPr lang="en-US" sz="1150" dirty="0">
-                <a:solidFill>
-                  <a:srgbClr val="1A1F36"/>
-                </a:solidFill>
-                <a:latin typeface="Roboto Mono" pitchFamily="34" charset="0"/>
-                <a:ea typeface="Roboto Mono" pitchFamily="34" charset="-122"/>
-                <a:cs typeface="Roboto Mono" pitchFamily="34" charset="-120"/>
-              </a:rPr>
-              <a:t>결과는 표 + 한 줄 인사이트로.</a:t>
-            </a:r>
-            <a:endParaRPr lang="en-US" sz="1150" dirty="0"/>
-          </a:p>
-        </p:txBody>
-      </p:sp>
-      <p:sp>
-        <p:nvSpPr>
-          <p:cNvPr id="9" name="Text 7"/>
           <p:cNvSpPr/>
           <p:nvPr/>
         </p:nvSpPr>
@@ -4190,7 +4362,7 @@
                 <a:ea typeface="Noto Sans KR" pitchFamily="34" charset="-122"/>
                 <a:cs typeface="Noto Sans KR" pitchFamily="34" charset="-120"/>
               </a:rPr>
-              <a:t>11 / 27</a:t>
+              <a:t>11 / 30</a:t>
             </a:r>
             <a:endParaRPr lang="en-US" sz="900" dirty="0"/>
           </a:p>
@@ -4274,7 +4446,7 @@
                 <a:ea typeface="Noto Sans KR" pitchFamily="34" charset="-122"/>
                 <a:cs typeface="Noto Sans KR" pitchFamily="34" charset="-120"/>
               </a:rPr>
-              <a:t>DAY 2 · STEP 1</a:t>
+              <a:t>파트 2. 분석 질문 던지기 + 결합 데이터 EDA</a:t>
             </a:r>
             <a:endParaRPr lang="en-US" sz="1400" dirty="0"/>
           </a:p>
@@ -4313,7 +4485,7 @@
                 <a:ea typeface="Noto Sans KR" pitchFamily="34" charset="-122"/>
                 <a:cs typeface="Noto Sans KR" pitchFamily="34" charset="-120"/>
               </a:rPr>
-              <a:t>오늘 만든 결과물</a:t>
+              <a:t>섹션 1 / 6</a:t>
             </a:r>
             <a:endParaRPr lang="en-US" sz="1100" dirty="0"/>
           </a:p>
@@ -4327,8 +4499,8 @@
         </p:nvSpPr>
         <p:spPr>
           <a:xfrm>
-            <a:off x="548640" y="1417320"/>
-            <a:ext cx="11091672" cy="640080"/>
+            <a:off x="548640" y="1508760"/>
+            <a:ext cx="11091672" cy="1371600"/>
           </a:xfrm>
           <a:prstGeom prst="rect">
             <a:avLst/>
@@ -4341,10 +4513,13 @@
           <a:lstStyle/>
           <a:p>
             <a:pPr indent="0" marL="0">
-              <a:buNone/>
-            </a:pPr>
-            <a:r>
-              <a:rPr lang="en-US" sz="2800" b="1" spc="-30" kern="0" dirty="0">
+              <a:lnSpc>
+                <a:spcPct val="110000"/>
+              </a:lnSpc>
+              <a:buNone/>
+            </a:pPr>
+            <a:r>
+              <a:rPr lang="en-US" sz="4200" b="1" spc="-50" kern="0" dirty="0">
                 <a:solidFill>
                   <a:srgbClr val="1A1F36"/>
                 </a:solidFill>
@@ -4352,77 +4527,169 @@
                 <a:ea typeface="Noto Sans KR" pitchFamily="34" charset="-122"/>
                 <a:cs typeface="Noto Sans KR" pitchFamily="34" charset="-120"/>
               </a:rPr>
-              <a:t>1단계 결과 — 단독 분석</a:t>
-            </a:r>
-            <a:endParaRPr lang="en-US" sz="2800" dirty="0"/>
-          </a:p>
-        </p:txBody>
-      </p:sp>
-      <p:pic>
-        <p:nvPicPr>
-          <p:cNvPr id="6" name="Image 0" descr="/Users/sujinpark/b2b-lecture-note/20260512_inflearn_B2G_dataanalysis/assets/screenshots/day2/single_data_result.png">    </p:cNvPr>
-          <p:cNvPicPr>
-            <a:picLocks noChangeAspect="1"/>
-          </p:cNvPicPr>
-          <p:nvPr/>
-        </p:nvPicPr>
-        <p:blipFill>
-          <a:blip r:embed="rId1"/>
-          <a:srcRect l="0" r="0" t="0" b="0"/>
-          <a:stretch/>
-        </p:blipFill>
-        <p:spPr>
-          <a:xfrm>
-            <a:off x="2194560" y="2240280"/>
-            <a:ext cx="7772400" cy="3657600"/>
-          </a:xfrm>
-          <a:prstGeom prst="rect">
-            <a:avLst/>
-          </a:prstGeom>
-        </p:spPr>
-      </p:pic>
-      <p:sp>
-        <p:nvSpPr>
-          <p:cNvPr id="7" name="Text 4"/>
-          <p:cNvSpPr/>
-          <p:nvPr/>
-        </p:nvSpPr>
-        <p:spPr>
-          <a:xfrm>
-            <a:off x="548640" y="5989320"/>
-            <a:ext cx="11091672" cy="411480"/>
-          </a:xfrm>
-          <a:prstGeom prst="rect">
-            <a:avLst/>
-          </a:prstGeom>
-          <a:noFill/>
-          <a:ln/>
-        </p:spPr>
-        <p:txBody>
-          <a:bodyPr wrap="square" rtlCol="0" anchor="ctr"/>
-          <a:lstStyle/>
-          <a:p>
-            <a:pPr algn="ctr" indent="0" marL="0">
-              <a:buNone/>
-            </a:pPr>
-            <a:r>
-              <a:rPr lang="en-US" sz="1200" i="1" dirty="0">
-                <a:solidFill>
-                  <a:srgbClr val="718096"/>
-                </a:solidFill>
-                <a:latin typeface="Noto Sans KR" pitchFamily="34" charset="0"/>
-                <a:ea typeface="Noto Sans KR" pitchFamily="34" charset="-122"/>
-                <a:cs typeface="Noto Sans KR" pitchFamily="34" charset="-120"/>
-              </a:rPr>
-              <a:t>수강생이 고른 질문 1개의 답</a:t>
-            </a:r>
-            <a:endParaRPr lang="en-US" sz="1200" dirty="0"/>
-          </a:p>
-        </p:txBody>
-      </p:sp>
-      <p:sp>
-        <p:nvSpPr>
-          <p:cNvPr id="8" name="Text 5"/>
+              <a:t>분석 질문 뱅크 — 50개</a:t>
+            </a:r>
+            <a:endParaRPr lang="en-US" sz="4200" dirty="0"/>
+          </a:p>
+        </p:txBody>
+      </p:sp>
+      <p:sp>
+        <p:nvSpPr>
+          <p:cNvPr id="6" name="Shape 4"/>
+          <p:cNvSpPr/>
+          <p:nvPr/>
+        </p:nvSpPr>
+        <p:spPr>
+          <a:xfrm>
+            <a:off x="548640" y="2971800"/>
+            <a:ext cx="1828800" cy="0"/>
+          </a:xfrm>
+          <a:prstGeom prst="line">
+            <a:avLst/>
+          </a:prstGeom>
+          <a:noFill/>
+          <a:ln w="25400">
+            <a:solidFill>
+              <a:srgbClr val="00D4AA"/>
+            </a:solidFill>
+            <a:prstDash val="solid"/>
+          </a:ln>
+        </p:spPr>
+      </p:sp>
+      <p:sp>
+        <p:nvSpPr>
+          <p:cNvPr id="7" name="Text 5"/>
+          <p:cNvSpPr/>
+          <p:nvPr/>
+        </p:nvSpPr>
+        <p:spPr>
+          <a:xfrm>
+            <a:off x="548640" y="3200400"/>
+            <a:ext cx="11091672" cy="2788920"/>
+          </a:xfrm>
+          <a:prstGeom prst="rect">
+            <a:avLst/>
+          </a:prstGeom>
+          <a:noFill/>
+          <a:ln/>
+        </p:spPr>
+        <p:txBody>
+          <a:bodyPr wrap="square" rtlCol="0" anchor="t"/>
+          <a:lstStyle/>
+          <a:p>
+            <a:pPr indent="0" marL="0">
+              <a:lnSpc>
+                <a:spcPct val="155000"/>
+              </a:lnSpc>
+              <a:buNone/>
+            </a:pPr>
+            <a:r>
+              <a:rPr lang="en-US" sz="1700" dirty="0">
+                <a:solidFill>
+                  <a:srgbClr val="4A5568"/>
+                </a:solidFill>
+                <a:latin typeface="Noto Sans KR" pitchFamily="34" charset="0"/>
+                <a:ea typeface="Noto Sans KR" pitchFamily="34" charset="-122"/>
+                <a:cs typeface="Noto Sans KR" pitchFamily="34" charset="-120"/>
+              </a:rPr>
+              <a:t>· A. 미세먼지 단독 (10) / B. + 따릉이 (5) / C. + 지하철 (5)</a:t>
+            </a:r>
+            <a:endParaRPr lang="en-US" sz="1700" dirty="0"/>
+          </a:p>
+          <a:p>
+            <a:pPr indent="0" marL="0">
+              <a:lnSpc>
+                <a:spcPct val="155000"/>
+              </a:lnSpc>
+              <a:buNone/>
+            </a:pPr>
+            <a:r>
+              <a:rPr lang="en-US" sz="1700" dirty="0">
+                <a:solidFill>
+                  <a:srgbClr val="4A5568"/>
+                </a:solidFill>
+                <a:latin typeface="Noto Sans KR" pitchFamily="34" charset="0"/>
+                <a:ea typeface="Noto Sans KR" pitchFamily="34" charset="-122"/>
+                <a:cs typeface="Noto Sans KR" pitchFamily="34" charset="-120"/>
+              </a:rPr>
+              <a:t>· D. + 날씨 (8) / E. + 언급량 (4) / F. + 쇼핑 적재본 (8)</a:t>
+            </a:r>
+            <a:endParaRPr lang="en-US" sz="1700" dirty="0"/>
+          </a:p>
+          <a:p>
+            <a:pPr indent="0" marL="0">
+              <a:lnSpc>
+                <a:spcPct val="155000"/>
+              </a:lnSpc>
+              <a:buNone/>
+            </a:pPr>
+            <a:r>
+              <a:rPr lang="en-US" sz="1700" dirty="0">
+                <a:solidFill>
+                  <a:srgbClr val="4A5568"/>
+                </a:solidFill>
+                <a:latin typeface="Noto Sans KR" pitchFamily="34" charset="0"/>
+                <a:ea typeface="Noto Sans KR" pitchFamily="34" charset="-122"/>
+                <a:cs typeface="Noto Sans KR" pitchFamily="34" charset="-120"/>
+              </a:rPr>
+              <a:t>· G. 답 안 되는 질문 (5) — 일별 한계 인식</a:t>
+            </a:r>
+            <a:endParaRPr lang="en-US" sz="1700" dirty="0"/>
+          </a:p>
+          <a:p>
+            <a:pPr indent="0" marL="0">
+              <a:lnSpc>
+                <a:spcPct val="155000"/>
+              </a:lnSpc>
+              <a:buNone/>
+            </a:pPr>
+            <a:r>
+              <a:rPr lang="en-US" sz="1700" dirty="0">
+                <a:solidFill>
+                  <a:srgbClr val="4A5568"/>
+                </a:solidFill>
+                <a:latin typeface="Noto Sans KR" pitchFamily="34" charset="0"/>
+                <a:ea typeface="Noto Sans KR" pitchFamily="34" charset="-122"/>
+                <a:cs typeface="Noto Sans KR" pitchFamily="34" charset="-120"/>
+              </a:rPr>
+              <a:t>· H. 워밍업 (5) — 본인 자치구 / "가장 깨끗했던 하루" 등</a:t>
+            </a:r>
+            <a:endParaRPr lang="en-US" sz="1700" dirty="0"/>
+          </a:p>
+          <a:p>
+            <a:pPr indent="0" marL="0">
+              <a:lnSpc>
+                <a:spcPct val="155000"/>
+              </a:lnSpc>
+              <a:buNone/>
+            </a:pPr>
+            <a:endParaRPr lang="en-US" sz="1700" dirty="0"/>
+          </a:p>
+          <a:p>
+            <a:pPr indent="0" marL="0">
+              <a:lnSpc>
+                <a:spcPct val="155000"/>
+              </a:lnSpc>
+              <a:buNone/>
+            </a:pPr>
+            <a:r>
+              <a:rPr lang="en-US" sz="1700" dirty="0">
+                <a:solidFill>
+                  <a:srgbClr val="4A5568"/>
+                </a:solidFill>
+                <a:latin typeface="Noto Sans KR" pitchFamily="34" charset="0"/>
+                <a:ea typeface="Noto Sans KR" pitchFamily="34" charset="-122"/>
+                <a:cs typeface="Noto Sans KR" pitchFamily="34" charset="-120"/>
+              </a:rPr>
+              <a:t>· 5분 시간 → 본인 관심사 5개 픽</a:t>
+            </a:r>
+            <a:endParaRPr lang="en-US" sz="1700" dirty="0"/>
+          </a:p>
+        </p:txBody>
+      </p:sp>
+      <p:sp>
+        <p:nvSpPr>
+          <p:cNvPr id="8" name="Text 6"/>
           <p:cNvSpPr/>
           <p:nvPr/>
         </p:nvSpPr>
@@ -4453,7 +4720,7 @@
                 <a:ea typeface="Noto Sans KR" pitchFamily="34" charset="-122"/>
                 <a:cs typeface="Noto Sans KR" pitchFamily="34" charset="-120"/>
               </a:rPr>
-              <a:t>12 / 27</a:t>
+              <a:t>12 / 30</a:t>
             </a:r>
             <a:endParaRPr lang="en-US" sz="900" dirty="0"/>
           </a:p>
@@ -4618,7 +4885,7 @@
                 <a:ea typeface="Noto Sans KR" pitchFamily="34" charset="-122"/>
                 <a:cs typeface="Noto Sans KR" pitchFamily="34" charset="-120"/>
               </a:rPr>
-              <a:t>2단계 — 환경에 민감한 교통수단 비교</a:t>
+              <a:t>1단계 — 본인 관심사 1개부터 단독 분석</a:t>
             </a:r>
             <a:endParaRPr lang="en-US" sz="3400" dirty="0"/>
           </a:p>
@@ -4710,7 +4977,7 @@
                 <a:ea typeface="Roboto Mono" pitchFamily="34" charset="-122"/>
                 <a:cs typeface="Roboto Mono" pitchFamily="34" charset="-120"/>
               </a:rPr>
-              <a:t>미세먼지 등급(좋음/보통/나쁨/매우나쁨)별 따릉이 일평균 대여 건수 보여줘.</a:t>
+              <a:t>"내가 사는 자치구의 2025 PM2.5 평균은?" 같은 식으로</a:t>
             </a:r>
             <a:endParaRPr lang="en-US" sz="1150" dirty="0"/>
           </a:p>
@@ -4730,7 +4997,7 @@
                 <a:ea typeface="Roboto Mono" pitchFamily="34" charset="-122"/>
                 <a:cs typeface="Roboto Mono" pitchFamily="34" charset="-120"/>
               </a:rPr>
-              <a:t>같은 분석을 지하철 일별 총 승하차로도 한 번 더.</a:t>
+              <a:t>본인이 고른 질문 1개를 그대로 던져봐.</a:t>
             </a:r>
             <a:endParaRPr lang="en-US" sz="1150" dirty="0"/>
           </a:p>
@@ -4750,27 +5017,7 @@
                 <a:ea typeface="Roboto Mono" pitchFamily="34" charset="-122"/>
                 <a:cs typeface="Roboto Mono" pitchFamily="34" charset="-120"/>
               </a:rPr>
-              <a:t>두 결과를 한 화면에 나란히 그려서</a:t>
-            </a:r>
-            <a:endParaRPr lang="en-US" sz="1150" dirty="0"/>
-          </a:p>
-          <a:p>
-            <a:pPr indent="0" marL="0">
-              <a:lnSpc>
-                <a:spcPct val="140000"/>
-              </a:lnSpc>
-              <a:buNone/>
-            </a:pPr>
-            <a:r>
-              <a:rPr lang="en-US" sz="1150" dirty="0">
-                <a:solidFill>
-                  <a:srgbClr val="1A1F36"/>
-                </a:solidFill>
-                <a:latin typeface="Roboto Mono" pitchFamily="34" charset="0"/>
-                <a:ea typeface="Roboto Mono" pitchFamily="34" charset="-122"/>
-                <a:cs typeface="Roboto Mono" pitchFamily="34" charset="-120"/>
-              </a:rPr>
-              <a:t>"환경에 민감한 교통수단" 비교 메시지가 나오게.</a:t>
+              <a:t>결과는 표 + 한 줄 인사이트로.</a:t>
             </a:r>
             <a:endParaRPr lang="en-US" sz="1150" dirty="0"/>
           </a:p>
@@ -4809,7 +5056,7 @@
                 <a:ea typeface="Noto Sans KR" pitchFamily="34" charset="-122"/>
                 <a:cs typeface="Noto Sans KR" pitchFamily="34" charset="-120"/>
               </a:rPr>
-              <a:t>13 / 27</a:t>
+              <a:t>13 / 30</a:t>
             </a:r>
             <a:endParaRPr lang="en-US" sz="900" dirty="0"/>
           </a:p>
@@ -4893,7 +5140,7 @@
                 <a:ea typeface="Noto Sans KR" pitchFamily="34" charset="-122"/>
                 <a:cs typeface="Noto Sans KR" pitchFamily="34" charset="-120"/>
               </a:rPr>
-              <a:t>DAY 2 · STEP 2</a:t>
+              <a:t>DAY 2 · STEP 1</a:t>
             </a:r>
             <a:endParaRPr lang="en-US" sz="1400" dirty="0"/>
           </a:p>
@@ -4971,7 +5218,7 @@
                 <a:ea typeface="Noto Sans KR" pitchFamily="34" charset="-122"/>
                 <a:cs typeface="Noto Sans KR" pitchFamily="34" charset="-120"/>
               </a:rPr>
-              <a:t>2단계 결과 — 따릉이 vs 지하철</a:t>
+              <a:t>1단계 결과 — 단독 분석</a:t>
             </a:r>
             <a:endParaRPr lang="en-US" sz="2800" dirty="0"/>
           </a:p>
@@ -4979,7 +5226,7 @@
       </p:sp>
       <p:pic>
         <p:nvPicPr>
-          <p:cNvPr id="6" name="Image 0" descr="/Users/sujinpark/b2b-lecture-note/20260512_inflearn_B2G_dataanalysis/assets/screenshots/day2/joined_bike_vs_subway.png">    </p:cNvPr>
+          <p:cNvPr id="6" name="Image 0" descr="/Users/sujinpark/b2b-lecture-note/20260512_inflearn_B2G_dataanalysis/assets/screenshots/day2/single_data_result.png">    </p:cNvPr>
           <p:cNvPicPr>
             <a:picLocks noChangeAspect="1"/>
           </p:cNvPicPr>
@@ -5033,7 +5280,7 @@
                 <a:ea typeface="Noto Sans KR" pitchFamily="34" charset="-122"/>
                 <a:cs typeface="Noto Sans KR" pitchFamily="34" charset="-120"/>
               </a:rPr>
-              <a:t>미세먼지 등급별 두 교통수단 이용량</a:t>
+              <a:t>수강생이 고른 질문 1개의 답</a:t>
             </a:r>
             <a:endParaRPr lang="en-US" sz="1200" dirty="0"/>
           </a:p>
@@ -5072,7 +5319,7 @@
                 <a:ea typeface="Noto Sans KR" pitchFamily="34" charset="-122"/>
                 <a:cs typeface="Noto Sans KR" pitchFamily="34" charset="-120"/>
               </a:rPr>
-              <a:t>14 / 27</a:t>
+              <a:t>14 / 30</a:t>
             </a:r>
             <a:endParaRPr lang="en-US" sz="900" dirty="0"/>
           </a:p>
@@ -5237,7 +5484,7 @@
                 <a:ea typeface="Noto Sans KR" pitchFamily="34" charset="-122"/>
                 <a:cs typeface="Noto Sans KR" pitchFamily="34" charset="-120"/>
               </a:rPr>
-              <a:t>3단계 — 날씨와 결합 (풍속·강수·기온)</a:t>
+              <a:t>2단계 — 환경에 민감한 교통수단 비교</a:t>
             </a:r>
             <a:endParaRPr lang="en-US" sz="3400" dirty="0"/>
           </a:p>
@@ -5329,7 +5576,7 @@
                 <a:ea typeface="Roboto Mono" pitchFamily="34" charset="-122"/>
                 <a:cs typeface="Roboto Mono" pitchFamily="34" charset="-120"/>
               </a:rPr>
-              <a:t>weather_seoul_daily.csv 도 같이 읽어서,</a:t>
+              <a:t>미세먼지 등급(좋음/보통/나쁨/매우나쁨)별 따릉이 일평균 대여 건수 보여줘.</a:t>
             </a:r>
             <a:endParaRPr lang="en-US" sz="1150" dirty="0"/>
           </a:p>
@@ -5349,7 +5596,7 @@
                 <a:ea typeface="Roboto Mono" pitchFamily="34" charset="-122"/>
                 <a:cs typeface="Roboto Mono" pitchFamily="34" charset="-120"/>
               </a:rPr>
-              <a:t>PM2.5와 풍속·강수·기온의 상관계수를 표로 만들고,</a:t>
+              <a:t>같은 분석을 지하철 일별 총 승하차로도 한 번 더.</a:t>
             </a:r>
             <a:endParaRPr lang="en-US" sz="1150" dirty="0"/>
           </a:p>
@@ -5369,7 +5616,7 @@
                 <a:ea typeface="Roboto Mono" pitchFamily="34" charset="-122"/>
                 <a:cs typeface="Roboto Mono" pitchFamily="34" charset="-120"/>
               </a:rPr>
-              <a:t>풍속이 셀수록 PM2.5가 떨어지는지 산점도로 검증해줘.</a:t>
+              <a:t>두 결과를 한 화면에 나란히 그려서</a:t>
             </a:r>
             <a:endParaRPr lang="en-US" sz="1150" dirty="0"/>
           </a:p>
@@ -5389,7 +5636,7 @@
                 <a:ea typeface="Roboto Mono" pitchFamily="34" charset="-122"/>
                 <a:cs typeface="Roboto Mono" pitchFamily="34" charset="-120"/>
               </a:rPr>
-              <a:t>황사 시즌·비황사 시즌 따로 봐줘.</a:t>
+              <a:t>"환경에 민감한 교통수단" 비교 메시지가 나오게.</a:t>
             </a:r>
             <a:endParaRPr lang="en-US" sz="1150" dirty="0"/>
           </a:p>
@@ -5428,7 +5675,7 @@
                 <a:ea typeface="Noto Sans KR" pitchFamily="34" charset="-122"/>
                 <a:cs typeface="Noto Sans KR" pitchFamily="34" charset="-120"/>
               </a:rPr>
-              <a:t>15 / 27</a:t>
+              <a:t>15 / 30</a:t>
             </a:r>
             <a:endParaRPr lang="en-US" sz="900" dirty="0"/>
           </a:p>
@@ -5512,7 +5759,7 @@
                 <a:ea typeface="Noto Sans KR" pitchFamily="34" charset="-122"/>
                 <a:cs typeface="Noto Sans KR" pitchFamily="34" charset="-120"/>
               </a:rPr>
-              <a:t>DAY 2 · STEP 3</a:t>
+              <a:t>DAY 2 · STEP 2</a:t>
             </a:r>
             <a:endParaRPr lang="en-US" sz="1400" dirty="0"/>
           </a:p>
@@ -5590,143 +5837,38 @@
                 <a:ea typeface="Noto Sans KR" pitchFamily="34" charset="-122"/>
                 <a:cs typeface="Noto Sans KR" pitchFamily="34" charset="-120"/>
               </a:rPr>
-              <a:t>3단계 결과 — 날씨 결합</a:t>
+              <a:t>2단계 결과 — 따릉이 vs 지하철</a:t>
             </a:r>
             <a:endParaRPr lang="en-US" sz="2800" dirty="0"/>
           </a:p>
         </p:txBody>
       </p:sp>
-      <p:sp>
-        <p:nvSpPr>
-          <p:cNvPr id="6" name="Shape 4"/>
-          <p:cNvSpPr/>
-          <p:nvPr/>
-        </p:nvSpPr>
+      <p:pic>
+        <p:nvPicPr>
+          <p:cNvPr id="6" name="Image 0" descr="/Users/sujinpark/b2b-lecture-note/20260512_inflearn_B2G_dataanalysis/assets/screenshots/day2/joined_bike_vs_subway.png">    </p:cNvPr>
+          <p:cNvPicPr>
+            <a:picLocks noChangeAspect="1"/>
+          </p:cNvPicPr>
+          <p:nvPr/>
+        </p:nvPicPr>
+        <p:blipFill>
+          <a:blip r:embed="rId1"/>
+          <a:srcRect l="0" r="0" t="0" b="0"/>
+          <a:stretch/>
+        </p:blipFill>
         <p:spPr>
           <a:xfrm>
             <a:off x="2194560" y="2240280"/>
             <a:ext cx="7772400" cy="3657600"/>
           </a:xfrm>
-          <a:prstGeom prst="roundRect">
-            <a:avLst>
-              <a:gd name="adj" fmla="val 3000"/>
-            </a:avLst>
-          </a:prstGeom>
-          <a:solidFill>
-            <a:srgbClr val="F5F7FA"/>
-          </a:solidFill>
-          <a:ln w="12700">
-            <a:solidFill>
-              <a:srgbClr val="CBD5E0"/>
-            </a:solidFill>
-            <a:prstDash val="dash"/>
-          </a:ln>
-        </p:spPr>
-      </p:sp>
-      <p:sp>
-        <p:nvSpPr>
-          <p:cNvPr id="7" name="Text 5"/>
-          <p:cNvSpPr/>
-          <p:nvPr/>
-        </p:nvSpPr>
-        <p:spPr>
-          <a:xfrm>
-            <a:off x="2194560" y="3703320"/>
-            <a:ext cx="7772400" cy="731520"/>
-          </a:xfrm>
-          <a:prstGeom prst="rect">
-            <a:avLst/>
-          </a:prstGeom>
-          <a:noFill/>
-          <a:ln/>
-        </p:spPr>
-        <p:txBody>
-          <a:bodyPr wrap="square" rtlCol="0" anchor="ctr"/>
-          <a:lstStyle/>
-          <a:p>
-            <a:pPr algn="ctr" indent="0" marL="0">
-              <a:lnSpc>
-                <a:spcPct val="140000"/>
-              </a:lnSpc>
-              <a:buNone/>
-            </a:pPr>
-            <a:r>
-              <a:rPr lang="en-US" sz="1400" i="1" dirty="0">
-                <a:solidFill>
-                  <a:srgbClr val="718096"/>
-                </a:solidFill>
-                <a:latin typeface="Noto Sans KR" pitchFamily="34" charset="0"/>
-                <a:ea typeface="Noto Sans KR" pitchFamily="34" charset="-122"/>
-                <a:cs typeface="Noto Sans KR" pitchFamily="34" charset="-120"/>
-              </a:rPr>
-              <a:t>📷  결과 이미지 위치</a:t>
-            </a:r>
-            <a:endParaRPr lang="en-US" sz="1400" dirty="0"/>
-          </a:p>
-          <a:p>
-            <a:pPr algn="ctr" indent="0" marL="0">
-              <a:lnSpc>
-                <a:spcPct val="140000"/>
-              </a:lnSpc>
-              <a:buNone/>
-            </a:pPr>
-            <a:r>
-              <a:rPr lang="en-US" sz="1400" i="1" dirty="0">
-                <a:solidFill>
-                  <a:srgbClr val="718096"/>
-                </a:solidFill>
-                <a:latin typeface="Noto Sans KR" pitchFamily="34" charset="0"/>
-                <a:ea typeface="Noto Sans KR" pitchFamily="34" charset="-122"/>
-                <a:cs typeface="Noto Sans KR" pitchFamily="34" charset="-120"/>
-              </a:rPr>
-              <a:t>(강의 시연 캡처가 들어갈 자리)</a:t>
-            </a:r>
-            <a:endParaRPr lang="en-US" sz="1400" dirty="0"/>
-          </a:p>
-        </p:txBody>
-      </p:sp>
-      <p:sp>
-        <p:nvSpPr>
-          <p:cNvPr id="8" name="Text 6"/>
-          <p:cNvSpPr/>
-          <p:nvPr/>
-        </p:nvSpPr>
-        <p:spPr>
-          <a:xfrm>
-            <a:off x="2194560" y="4983480"/>
-            <a:ext cx="7772400" cy="365760"/>
-          </a:xfrm>
-          <a:prstGeom prst="rect">
-            <a:avLst/>
-          </a:prstGeom>
-          <a:noFill/>
-          <a:ln/>
-        </p:spPr>
-        <p:txBody>
-          <a:bodyPr wrap="square" rtlCol="0" anchor="ctr"/>
-          <a:lstStyle/>
-          <a:p>
-            <a:pPr algn="ctr" indent="0" marL="0">
-              <a:buNone/>
-            </a:pPr>
-            <a:r>
-              <a:rPr lang="en-US" sz="1000" i="1" dirty="0">
-                <a:solidFill>
-                  <a:srgbClr val="718096"/>
-                </a:solidFill>
-                <a:latin typeface="Roboto Mono" pitchFamily="34" charset="0"/>
-                <a:ea typeface="Roboto Mono" pitchFamily="34" charset="-122"/>
-                <a:cs typeface="Roboto Mono" pitchFamily="34" charset="-120"/>
-              </a:rPr>
-              <a:t>screenshots/day2/weather_join.png</a:t>
-            </a:r>
-            <a:endParaRPr lang="en-US" sz="1000" dirty="0"/>
-          </a:p>
-        </p:txBody>
-      </p:sp>
-      <p:sp>
-        <p:nvSpPr>
-          <p:cNvPr id="9" name="Text 7"/>
+          <a:prstGeom prst="rect">
+            <a:avLst/>
+          </a:prstGeom>
+        </p:spPr>
+      </p:pic>
+      <p:sp>
+        <p:nvSpPr>
+          <p:cNvPr id="7" name="Text 4"/>
           <p:cNvSpPr/>
           <p:nvPr/>
         </p:nvSpPr>
@@ -5757,7 +5899,7 @@
                 <a:ea typeface="Noto Sans KR" pitchFamily="34" charset="-122"/>
                 <a:cs typeface="Noto Sans KR" pitchFamily="34" charset="-120"/>
               </a:rPr>
-              <a:t>풍속-PM2.5 산점도 + 시즌별 분리</a:t>
+              <a:t>미세먼지 등급별 두 교통수단 이용량</a:t>
             </a:r>
             <a:endParaRPr lang="en-US" sz="1200" dirty="0"/>
           </a:p>
@@ -5765,7 +5907,7 @@
       </p:sp>
       <p:sp>
         <p:nvSpPr>
-          <p:cNvPr id="10" name="Text 8"/>
+          <p:cNvPr id="8" name="Text 5"/>
           <p:cNvSpPr/>
           <p:nvPr/>
         </p:nvSpPr>
@@ -5796,7 +5938,7 @@
                 <a:ea typeface="Noto Sans KR" pitchFamily="34" charset="-122"/>
                 <a:cs typeface="Noto Sans KR" pitchFamily="34" charset="-120"/>
               </a:rPr>
-              <a:t>16 / 27</a:t>
+              <a:t>16 / 30</a:t>
             </a:r>
             <a:endParaRPr lang="en-US" sz="900" dirty="0"/>
           </a:p>
@@ -5961,7 +6103,7 @@
                 <a:ea typeface="Noto Sans KR" pitchFamily="34" charset="-122"/>
                 <a:cs typeface="Noto Sans KR" pitchFamily="34" charset="-120"/>
               </a:rPr>
-              <a:t>4단계 — 사람들은 언제 검색하기 시작하나</a:t>
+              <a:t>3단계 — 날씨와 결합 (풍속·강수·기온)</a:t>
             </a:r>
             <a:endParaRPr lang="en-US" sz="3400" dirty="0"/>
           </a:p>
@@ -6053,7 +6195,7 @@
                 <a:ea typeface="Roboto Mono" pitchFamily="34" charset="-122"/>
                 <a:cs typeface="Roboto Mono" pitchFamily="34" charset="-120"/>
               </a:rPr>
-              <a:t>buzz_keywords.csv 의 "미세먼지" 검색량과 실제 PM2.5 일별 시계열을</a:t>
+              <a:t>weather_seoul_daily.csv 도 같이 읽어서,</a:t>
             </a:r>
             <a:endParaRPr lang="en-US" sz="1150" dirty="0"/>
           </a:p>
@@ -6073,7 +6215,7 @@
                 <a:ea typeface="Roboto Mono" pitchFamily="34" charset="-122"/>
                 <a:cs typeface="Roboto Mono" pitchFamily="34" charset="-120"/>
               </a:rPr>
-              <a:t>같이 그려줘. 검색량이 PM 농도를 며칠 따라가는지(상관 lag) 알려주고,</a:t>
+              <a:t>PM2.5와 풍속·강수·기온의 상관계수를 표로 만들고,</a:t>
             </a:r>
             <a:endParaRPr lang="en-US" sz="1150" dirty="0"/>
           </a:p>
@@ -6093,7 +6235,27 @@
                 <a:ea typeface="Roboto Mono" pitchFamily="34" charset="-122"/>
                 <a:cs typeface="Roboto Mono" pitchFamily="34" charset="-120"/>
               </a:rPr>
-              <a:t>사람들이 PM 몇 ㎍/㎥부터 검색하기 시작하는지 임계값 추정해줘.</a:t>
+              <a:t>풍속이 셀수록 PM2.5가 떨어지는지 산점도로 검증해줘.</a:t>
+            </a:r>
+            <a:endParaRPr lang="en-US" sz="1150" dirty="0"/>
+          </a:p>
+          <a:p>
+            <a:pPr indent="0" marL="0">
+              <a:lnSpc>
+                <a:spcPct val="140000"/>
+              </a:lnSpc>
+              <a:buNone/>
+            </a:pPr>
+            <a:r>
+              <a:rPr lang="en-US" sz="1150" dirty="0">
+                <a:solidFill>
+                  <a:srgbClr val="1A1F36"/>
+                </a:solidFill>
+                <a:latin typeface="Roboto Mono" pitchFamily="34" charset="0"/>
+                <a:ea typeface="Roboto Mono" pitchFamily="34" charset="-122"/>
+                <a:cs typeface="Roboto Mono" pitchFamily="34" charset="-120"/>
+              </a:rPr>
+              <a:t>황사 시즌·비황사 시즌 따로 봐줘.</a:t>
             </a:r>
             <a:endParaRPr lang="en-US" sz="1150" dirty="0"/>
           </a:p>
@@ -6132,7 +6294,7 @@
                 <a:ea typeface="Noto Sans KR" pitchFamily="34" charset="-122"/>
                 <a:cs typeface="Noto Sans KR" pitchFamily="34" charset="-120"/>
               </a:rPr>
-              <a:t>17 / 27</a:t>
+              <a:t>17 / 30</a:t>
             </a:r>
             <a:endParaRPr lang="en-US" sz="900" dirty="0"/>
           </a:p>
@@ -6216,7 +6378,7 @@
                 <a:ea typeface="Noto Sans KR" pitchFamily="34" charset="-122"/>
                 <a:cs typeface="Noto Sans KR" pitchFamily="34" charset="-120"/>
               </a:rPr>
-              <a:t>DAY 2 · STEP 4</a:t>
+              <a:t>DAY 2 · STEP 3</a:t>
             </a:r>
             <a:endParaRPr lang="en-US" sz="1400" dirty="0"/>
           </a:p>
@@ -6294,7 +6456,7 @@
                 <a:ea typeface="Noto Sans KR" pitchFamily="34" charset="-122"/>
                 <a:cs typeface="Noto Sans KR" pitchFamily="34" charset="-120"/>
               </a:rPr>
-              <a:t>4단계 결과 — 언급량 결합</a:t>
+              <a:t>3단계 결과 — 날씨 결합</a:t>
             </a:r>
             <a:endParaRPr lang="en-US" sz="2800" dirty="0"/>
           </a:p>
@@ -6422,7 +6584,7 @@
                 <a:ea typeface="Roboto Mono" pitchFamily="34" charset="-122"/>
                 <a:cs typeface="Roboto Mono" pitchFamily="34" charset="-120"/>
               </a:rPr>
-              <a:t>screenshots/day2/buzz_join.png</a:t>
+              <a:t>screenshots/day2/weather_join.png</a:t>
             </a:r>
             <a:endParaRPr lang="en-US" sz="1000" dirty="0"/>
           </a:p>
@@ -6461,7 +6623,7 @@
                 <a:ea typeface="Noto Sans KR" pitchFamily="34" charset="-122"/>
                 <a:cs typeface="Noto Sans KR" pitchFamily="34" charset="-120"/>
               </a:rPr>
-              <a:t>검색량-PM2.5 시계열 + lag 결과</a:t>
+              <a:t>풍속-PM2.5 산점도 + 시즌별 분리</a:t>
             </a:r>
             <a:endParaRPr lang="en-US" sz="1200" dirty="0"/>
           </a:p>
@@ -6500,7 +6662,7 @@
                 <a:ea typeface="Noto Sans KR" pitchFamily="34" charset="-122"/>
                 <a:cs typeface="Noto Sans KR" pitchFamily="34" charset="-120"/>
               </a:rPr>
-              <a:t>18 / 27</a:t>
+              <a:t>18 / 30</a:t>
             </a:r>
             <a:endParaRPr lang="en-US" sz="900" dirty="0"/>
           </a:p>
@@ -6599,7 +6761,7 @@
         <p:spPr>
           <a:xfrm>
             <a:off x="548640" y="960120"/>
-            <a:ext cx="10515600" cy="292608"/>
+            <a:ext cx="11091672" cy="292608"/>
           </a:xfrm>
           <a:prstGeom prst="rect">
             <a:avLst/>
@@ -6615,7 +6777,7 @@
               <a:buNone/>
             </a:pPr>
             <a:r>
-              <a:rPr lang="en-US" sz="1100" b="1" spc="150" kern="0" dirty="0">
+              <a:rPr lang="en-US" sz="1100" b="1" spc="50" kern="0" dirty="0">
                 <a:solidFill>
                   <a:srgbClr val="00D4AA"/>
                 </a:solidFill>
@@ -6623,7 +6785,7 @@
                 <a:ea typeface="Noto Sans KR" pitchFamily="34" charset="-122"/>
                 <a:cs typeface="Noto Sans KR" pitchFamily="34" charset="-120"/>
               </a:rPr>
-              <a:t>섹션 6 / 6</a:t>
+              <a:t>👉 직접 따라쳐보세요 — 본인 Claude Code에 그대로 붙여넣기</a:t>
             </a:r>
             <a:endParaRPr lang="en-US" sz="1100" dirty="0"/>
           </a:p>
@@ -6638,7 +6800,7 @@
         <p:spPr>
           <a:xfrm>
             <a:off x="548640" y="1508760"/>
-            <a:ext cx="11091672" cy="1371600"/>
+            <a:ext cx="11091672" cy="1005840"/>
           </a:xfrm>
           <a:prstGeom prst="rect">
             <a:avLst/>
@@ -6652,12 +6814,12 @@
           <a:p>
             <a:pPr indent="0" marL="0">
               <a:lnSpc>
-                <a:spcPct val="110000"/>
+                <a:spcPct val="115000"/>
               </a:lnSpc>
               <a:buNone/>
             </a:pPr>
             <a:r>
-              <a:rPr lang="en-US" sz="4200" b="1" spc="-50" kern="0" dirty="0">
+              <a:rPr lang="en-US" sz="3400" b="1" spc="-50" kern="0" dirty="0">
                 <a:solidFill>
                   <a:srgbClr val="1A1F36"/>
                 </a:solidFill>
@@ -6665,9 +6827,9 @@
                 <a:ea typeface="Noto Sans KR" pitchFamily="34" charset="-122"/>
                 <a:cs typeface="Noto Sans KR" pitchFamily="34" charset="-120"/>
               </a:rPr>
-              <a:t>답 안 되는 질문 — 분석가의 정직함</a:t>
-            </a:r>
-            <a:endParaRPr lang="en-US" sz="4200" dirty="0"/>
+              <a:t>4단계 — 사람들은 언제 검색하기 시작하나</a:t>
+            </a:r>
+            <a:endParaRPr lang="en-US" sz="3400" dirty="0"/>
           </a:p>
         </p:txBody>
       </p:sp>
@@ -6679,7 +6841,7 @@
         </p:nvSpPr>
         <p:spPr>
           <a:xfrm>
-            <a:off x="548640" y="2971800"/>
+            <a:off x="548640" y="2606040"/>
             <a:ext cx="1828800" cy="0"/>
           </a:xfrm>
           <a:prstGeom prst="line">
@@ -6696,14 +6858,41 @@
       </p:sp>
       <p:sp>
         <p:nvSpPr>
-          <p:cNvPr id="7" name="Text 5"/>
-          <p:cNvSpPr/>
-          <p:nvPr/>
-        </p:nvSpPr>
-        <p:spPr>
-          <a:xfrm>
-            <a:off x="548640" y="3200400"/>
-            <a:ext cx="11091672" cy="2788920"/>
+          <p:cNvPr id="7" name="Shape 5"/>
+          <p:cNvSpPr/>
+          <p:nvPr/>
+        </p:nvSpPr>
+        <p:spPr>
+          <a:xfrm>
+            <a:off x="548640" y="2926080"/>
+            <a:ext cx="11091672" cy="3200400"/>
+          </a:xfrm>
+          <a:prstGeom prst="roundRect">
+            <a:avLst>
+              <a:gd name="adj" fmla="val 1714"/>
+            </a:avLst>
+          </a:prstGeom>
+          <a:solidFill>
+            <a:srgbClr val="F1F5F9"/>
+          </a:solidFill>
+          <a:ln w="6350">
+            <a:solidFill>
+              <a:srgbClr val="E2E8F0"/>
+            </a:solidFill>
+            <a:prstDash val="solid"/>
+          </a:ln>
+        </p:spPr>
+      </p:sp>
+      <p:sp>
+        <p:nvSpPr>
+          <p:cNvPr id="8" name="Text 6"/>
+          <p:cNvSpPr/>
+          <p:nvPr/>
+        </p:nvSpPr>
+        <p:spPr>
+          <a:xfrm>
+            <a:off x="713232" y="3035808"/>
+            <a:ext cx="10762488" cy="2980944"/>
           </a:xfrm>
           <a:prstGeom prst="rect">
             <a:avLst/>
@@ -6717,68 +6906,68 @@
           <a:p>
             <a:pPr indent="0" marL="0">
               <a:lnSpc>
-                <a:spcPct val="155000"/>
+                <a:spcPct val="140000"/>
               </a:lnSpc>
               <a:buNone/>
             </a:pPr>
             <a:r>
-              <a:rPr lang="en-US" sz="1700" dirty="0">
-                <a:solidFill>
-                  <a:srgbClr val="4A5568"/>
-                </a:solidFill>
-                <a:latin typeface="Noto Sans KR" pitchFamily="34" charset="0"/>
-                <a:ea typeface="Noto Sans KR" pitchFamily="34" charset="-122"/>
-                <a:cs typeface="Noto Sans KR" pitchFamily="34" charset="-120"/>
-              </a:rPr>
-              <a:t>· "출근시간 7~9시 PM" → AQ 일별이라 답 불가 (에어코리아 시간별 API 또는 4일차 결합으로)</a:t>
-            </a:r>
-            <a:endParaRPr lang="en-US" sz="1700" dirty="0"/>
+              <a:rPr lang="en-US" sz="1150" dirty="0">
+                <a:solidFill>
+                  <a:srgbClr val="1A1F36"/>
+                </a:solidFill>
+                <a:latin typeface="Roboto Mono" pitchFamily="34" charset="0"/>
+                <a:ea typeface="Roboto Mono" pitchFamily="34" charset="-122"/>
+                <a:cs typeface="Roboto Mono" pitchFamily="34" charset="-120"/>
+              </a:rPr>
+              <a:t>buzz_keywords.csv 의 "미세먼지" 검색량과 실제 PM2.5 일별 시계열을</a:t>
+            </a:r>
+            <a:endParaRPr lang="en-US" sz="1150" dirty="0"/>
           </a:p>
           <a:p>
             <a:pPr indent="0" marL="0">
               <a:lnSpc>
-                <a:spcPct val="155000"/>
+                <a:spcPct val="140000"/>
               </a:lnSpc>
               <a:buNone/>
             </a:pPr>
             <a:r>
-              <a:rPr lang="en-US" sz="1700" dirty="0">
-                <a:solidFill>
-                  <a:srgbClr val="4A5568"/>
-                </a:solidFill>
-                <a:latin typeface="Noto Sans KR" pitchFamily="34" charset="0"/>
-                <a:ea typeface="Noto Sans KR" pitchFamily="34" charset="-122"/>
-                <a:cs typeface="Noto Sans KR" pitchFamily="34" charset="-120"/>
-              </a:rPr>
-              <a:t>· "코로나 전후" → 배포본 2024~2025만 → 별도 다운로드 필요</a:t>
-            </a:r>
-            <a:endParaRPr lang="en-US" sz="1700" dirty="0"/>
+              <a:rPr lang="en-US" sz="1150" dirty="0">
+                <a:solidFill>
+                  <a:srgbClr val="1A1F36"/>
+                </a:solidFill>
+                <a:latin typeface="Roboto Mono" pitchFamily="34" charset="0"/>
+                <a:ea typeface="Roboto Mono" pitchFamily="34" charset="-122"/>
+                <a:cs typeface="Roboto Mono" pitchFamily="34" charset="-120"/>
+              </a:rPr>
+              <a:t>같이 그려줘. 검색량이 PM 농도를 며칠 따라가는지(상관 lag) 알려주고,</a:t>
+            </a:r>
+            <a:endParaRPr lang="en-US" sz="1150" dirty="0"/>
           </a:p>
           <a:p>
             <a:pPr indent="0" marL="0">
               <a:lnSpc>
-                <a:spcPct val="155000"/>
+                <a:spcPct val="140000"/>
               </a:lnSpc>
               <a:buNone/>
             </a:pPr>
             <a:r>
-              <a:rPr lang="en-US" sz="1700" dirty="0">
-                <a:solidFill>
-                  <a:srgbClr val="4A5568"/>
-                </a:solidFill>
-                <a:latin typeface="Noto Sans KR" pitchFamily="34" charset="0"/>
-                <a:ea typeface="Noto Sans KR" pitchFamily="34" charset="-122"/>
-                <a:cs typeface="Noto Sans KR" pitchFamily="34" charset="-120"/>
-              </a:rPr>
-              <a:t>· 답 못 하는 이유를 말로 설명할 수 있어야 분석가다</a:t>
-            </a:r>
-            <a:endParaRPr lang="en-US" sz="1700" dirty="0"/>
-          </a:p>
-        </p:txBody>
-      </p:sp>
-      <p:sp>
-        <p:nvSpPr>
-          <p:cNvPr id="8" name="Text 6"/>
+              <a:rPr lang="en-US" sz="1150" dirty="0">
+                <a:solidFill>
+                  <a:srgbClr val="1A1F36"/>
+                </a:solidFill>
+                <a:latin typeface="Roboto Mono" pitchFamily="34" charset="0"/>
+                <a:ea typeface="Roboto Mono" pitchFamily="34" charset="-122"/>
+                <a:cs typeface="Roboto Mono" pitchFamily="34" charset="-120"/>
+              </a:rPr>
+              <a:t>사람들이 PM 몇 ㎍/㎥부터 검색하기 시작하는지 임계값 추정해줘.</a:t>
+            </a:r>
+            <a:endParaRPr lang="en-US" sz="1150" dirty="0"/>
+          </a:p>
+        </p:txBody>
+      </p:sp>
+      <p:sp>
+        <p:nvSpPr>
+          <p:cNvPr id="9" name="Text 7"/>
           <p:cNvSpPr/>
           <p:nvPr/>
         </p:nvSpPr>
@@ -6809,7 +6998,7 @@
                 <a:ea typeface="Noto Sans KR" pitchFamily="34" charset="-122"/>
                 <a:cs typeface="Noto Sans KR" pitchFamily="34" charset="-120"/>
               </a:rPr>
-              <a:t>19 / 27</a:t>
+              <a:t>19 / 30</a:t>
             </a:r>
             <a:endParaRPr lang="en-US" sz="900" dirty="0"/>
           </a:p>
@@ -7368,7 +7557,7 @@
                 <a:ea typeface="Noto Sans KR" pitchFamily="34" charset="-122"/>
                 <a:cs typeface="Noto Sans KR" pitchFamily="34" charset="-120"/>
               </a:rPr>
-              <a:t>2 / 27</a:t>
+              <a:t>2 / 30</a:t>
             </a:r>
             <a:endParaRPr lang="en-US" sz="900" dirty="0"/>
           </a:p>
@@ -7452,7 +7641,7 @@
                 <a:ea typeface="Noto Sans KR" pitchFamily="34" charset="-122"/>
                 <a:cs typeface="Noto Sans KR" pitchFamily="34" charset="-120"/>
               </a:rPr>
-              <a:t>파트 3. Colab 핸들링 + CLAUDE.md 누적</a:t>
+              <a:t>DAY 2 · STEP 4</a:t>
             </a:r>
             <a:endParaRPr lang="en-US" sz="1400" dirty="0"/>
           </a:p>
@@ -7491,7 +7680,7 @@
                 <a:ea typeface="Noto Sans KR" pitchFamily="34" charset="-122"/>
                 <a:cs typeface="Noto Sans KR" pitchFamily="34" charset="-120"/>
               </a:rPr>
-              <a:t>섹션 1 / 5</a:t>
+              <a:t>오늘 만든 결과물</a:t>
             </a:r>
             <a:endParaRPr lang="en-US" sz="1100" dirty="0"/>
           </a:p>
@@ -7505,8 +7694,8 @@
         </p:nvSpPr>
         <p:spPr>
           <a:xfrm>
-            <a:off x="548640" y="1508760"/>
-            <a:ext cx="11091672" cy="1371600"/>
+            <a:off x="548640" y="1417320"/>
+            <a:ext cx="11091672" cy="640080"/>
           </a:xfrm>
           <a:prstGeom prst="rect">
             <a:avLst/>
@@ -7519,134 +7708,193 @@
           <a:lstStyle/>
           <a:p>
             <a:pPr indent="0" marL="0">
+              <a:buNone/>
+            </a:pPr>
+            <a:r>
+              <a:rPr lang="en-US" sz="2800" b="1" spc="-30" kern="0" dirty="0">
+                <a:solidFill>
+                  <a:srgbClr val="1A1F36"/>
+                </a:solidFill>
+                <a:latin typeface="Noto Sans KR" pitchFamily="34" charset="0"/>
+                <a:ea typeface="Noto Sans KR" pitchFamily="34" charset="-122"/>
+                <a:cs typeface="Noto Sans KR" pitchFamily="34" charset="-120"/>
+              </a:rPr>
+              <a:t>4단계 결과 — 언급량 결합</a:t>
+            </a:r>
+            <a:endParaRPr lang="en-US" sz="2800" dirty="0"/>
+          </a:p>
+        </p:txBody>
+      </p:sp>
+      <p:sp>
+        <p:nvSpPr>
+          <p:cNvPr id="6" name="Shape 4"/>
+          <p:cNvSpPr/>
+          <p:nvPr/>
+        </p:nvSpPr>
+        <p:spPr>
+          <a:xfrm>
+            <a:off x="2194560" y="2240280"/>
+            <a:ext cx="7772400" cy="3657600"/>
+          </a:xfrm>
+          <a:prstGeom prst="roundRect">
+            <a:avLst>
+              <a:gd name="adj" fmla="val 3000"/>
+            </a:avLst>
+          </a:prstGeom>
+          <a:solidFill>
+            <a:srgbClr val="F5F7FA"/>
+          </a:solidFill>
+          <a:ln w="12700">
+            <a:solidFill>
+              <a:srgbClr val="CBD5E0"/>
+            </a:solidFill>
+            <a:prstDash val="dash"/>
+          </a:ln>
+        </p:spPr>
+      </p:sp>
+      <p:sp>
+        <p:nvSpPr>
+          <p:cNvPr id="7" name="Text 5"/>
+          <p:cNvSpPr/>
+          <p:nvPr/>
+        </p:nvSpPr>
+        <p:spPr>
+          <a:xfrm>
+            <a:off x="2194560" y="3703320"/>
+            <a:ext cx="7772400" cy="731520"/>
+          </a:xfrm>
+          <a:prstGeom prst="rect">
+            <a:avLst/>
+          </a:prstGeom>
+          <a:noFill/>
+          <a:ln/>
+        </p:spPr>
+        <p:txBody>
+          <a:bodyPr wrap="square" rtlCol="0" anchor="ctr"/>
+          <a:lstStyle/>
+          <a:p>
+            <a:pPr algn="ctr" indent="0" marL="0">
               <a:lnSpc>
-                <a:spcPct val="110000"/>
+                <a:spcPct val="140000"/>
               </a:lnSpc>
               <a:buNone/>
             </a:pPr>
             <a:r>
-              <a:rPr lang="en-US" sz="4200" b="1" spc="-50" kern="0" dirty="0">
-                <a:solidFill>
-                  <a:srgbClr val="1A1F36"/>
-                </a:solidFill>
-                <a:latin typeface="Noto Sans KR" pitchFamily="34" charset="0"/>
-                <a:ea typeface="Noto Sans KR" pitchFamily="34" charset="-122"/>
-                <a:cs typeface="Noto Sans KR" pitchFamily="34" charset="-120"/>
-              </a:rPr>
-              <a:t>Colab을 왜 끼우나</a:t>
-            </a:r>
-            <a:endParaRPr lang="en-US" sz="4200" dirty="0"/>
-          </a:p>
-        </p:txBody>
-      </p:sp>
-      <p:sp>
-        <p:nvSpPr>
-          <p:cNvPr id="6" name="Shape 4"/>
-          <p:cNvSpPr/>
-          <p:nvPr/>
-        </p:nvSpPr>
-        <p:spPr>
-          <a:xfrm>
-            <a:off x="548640" y="2971800"/>
-            <a:ext cx="1828800" cy="0"/>
-          </a:xfrm>
-          <a:prstGeom prst="line">
-            <a:avLst/>
-          </a:prstGeom>
-          <a:noFill/>
-          <a:ln w="25400">
-            <a:solidFill>
-              <a:srgbClr val="00D4AA"/>
-            </a:solidFill>
-            <a:prstDash val="solid"/>
-          </a:ln>
-        </p:spPr>
-      </p:sp>
-      <p:sp>
-        <p:nvSpPr>
-          <p:cNvPr id="7" name="Text 5"/>
-          <p:cNvSpPr/>
-          <p:nvPr/>
-        </p:nvSpPr>
-        <p:spPr>
-          <a:xfrm>
-            <a:off x="548640" y="3200400"/>
-            <a:ext cx="11091672" cy="2788920"/>
-          </a:xfrm>
-          <a:prstGeom prst="rect">
-            <a:avLst/>
-          </a:prstGeom>
-          <a:noFill/>
-          <a:ln/>
-        </p:spPr>
-        <p:txBody>
-          <a:bodyPr wrap="square" rtlCol="0" anchor="t"/>
-          <a:lstStyle/>
-          <a:p>
-            <a:pPr indent="0" marL="0">
+              <a:rPr lang="en-US" sz="1400" i="1" dirty="0">
+                <a:solidFill>
+                  <a:srgbClr val="718096"/>
+                </a:solidFill>
+                <a:latin typeface="Noto Sans KR" pitchFamily="34" charset="0"/>
+                <a:ea typeface="Noto Sans KR" pitchFamily="34" charset="-122"/>
+                <a:cs typeface="Noto Sans KR" pitchFamily="34" charset="-120"/>
+              </a:rPr>
+              <a:t>📷  결과 이미지 위치</a:t>
+            </a:r>
+            <a:endParaRPr lang="en-US" sz="1400" dirty="0"/>
+          </a:p>
+          <a:p>
+            <a:pPr algn="ctr" indent="0" marL="0">
               <a:lnSpc>
-                <a:spcPct val="155000"/>
+                <a:spcPct val="140000"/>
               </a:lnSpc>
               <a:buNone/>
             </a:pPr>
             <a:r>
-              <a:rPr lang="en-US" sz="1700" dirty="0">
-                <a:solidFill>
-                  <a:srgbClr val="4A5568"/>
-                </a:solidFill>
-                <a:latin typeface="Noto Sans KR" pitchFamily="34" charset="0"/>
-                <a:ea typeface="Noto Sans KR" pitchFamily="34" charset="-122"/>
-                <a:cs typeface="Noto Sans KR" pitchFamily="34" charset="-120"/>
-              </a:rPr>
-              <a:t>· Claude Code가 짠 코드를 눈으로 보고 직접 만지는 자리</a:t>
-            </a:r>
-            <a:endParaRPr lang="en-US" sz="1700" dirty="0"/>
-          </a:p>
-          <a:p>
-            <a:pPr indent="0" marL="0">
-              <a:lnSpc>
-                <a:spcPct val="155000"/>
-              </a:lnSpc>
-              <a:buNone/>
-            </a:pPr>
-            <a:r>
-              <a:rPr lang="en-US" sz="1700" dirty="0">
-                <a:solidFill>
-                  <a:srgbClr val="4A5568"/>
-                </a:solidFill>
-                <a:latin typeface="Noto Sans KR" pitchFamily="34" charset="0"/>
-                <a:ea typeface="Noto Sans KR" pitchFamily="34" charset="-122"/>
-                <a:cs typeface="Noto Sans KR" pitchFamily="34" charset="-120"/>
-              </a:rPr>
-              <a:t>· 셀 단위로 결과 확인 → 변수명·임계값 바꿔보기 쉬움</a:t>
-            </a:r>
-            <a:endParaRPr lang="en-US" sz="1700" dirty="0"/>
-          </a:p>
-          <a:p>
-            <a:pPr indent="0" marL="0">
-              <a:lnSpc>
-                <a:spcPct val="155000"/>
-              </a:lnSpc>
-              <a:buNone/>
-            </a:pPr>
-            <a:r>
-              <a:rPr lang="en-US" sz="1700" dirty="0">
-                <a:solidFill>
-                  <a:srgbClr val="4A5568"/>
-                </a:solidFill>
-                <a:latin typeface="Noto Sans KR" pitchFamily="34" charset="0"/>
-                <a:ea typeface="Noto Sans KR" pitchFamily="34" charset="-122"/>
-                <a:cs typeface="Noto Sans KR" pitchFamily="34" charset="-120"/>
-              </a:rPr>
-              <a:t>· 회사 환경에서 Claude Code 못 쓸 때 백업 채널</a:t>
-            </a:r>
-            <a:endParaRPr lang="en-US" sz="1700" dirty="0"/>
+              <a:rPr lang="en-US" sz="1400" i="1" dirty="0">
+                <a:solidFill>
+                  <a:srgbClr val="718096"/>
+                </a:solidFill>
+                <a:latin typeface="Noto Sans KR" pitchFamily="34" charset="0"/>
+                <a:ea typeface="Noto Sans KR" pitchFamily="34" charset="-122"/>
+                <a:cs typeface="Noto Sans KR" pitchFamily="34" charset="-120"/>
+              </a:rPr>
+              <a:t>(강의 시연 캡처가 들어갈 자리)</a:t>
+            </a:r>
+            <a:endParaRPr lang="en-US" sz="1400" dirty="0"/>
           </a:p>
         </p:txBody>
       </p:sp>
       <p:sp>
         <p:nvSpPr>
           <p:cNvPr id="8" name="Text 6"/>
+          <p:cNvSpPr/>
+          <p:nvPr/>
+        </p:nvSpPr>
+        <p:spPr>
+          <a:xfrm>
+            <a:off x="2194560" y="4983480"/>
+            <a:ext cx="7772400" cy="365760"/>
+          </a:xfrm>
+          <a:prstGeom prst="rect">
+            <a:avLst/>
+          </a:prstGeom>
+          <a:noFill/>
+          <a:ln/>
+        </p:spPr>
+        <p:txBody>
+          <a:bodyPr wrap="square" rtlCol="0" anchor="ctr"/>
+          <a:lstStyle/>
+          <a:p>
+            <a:pPr algn="ctr" indent="0" marL="0">
+              <a:buNone/>
+            </a:pPr>
+            <a:r>
+              <a:rPr lang="en-US" sz="1000" i="1" dirty="0">
+                <a:solidFill>
+                  <a:srgbClr val="718096"/>
+                </a:solidFill>
+                <a:latin typeface="Roboto Mono" pitchFamily="34" charset="0"/>
+                <a:ea typeface="Roboto Mono" pitchFamily="34" charset="-122"/>
+                <a:cs typeface="Roboto Mono" pitchFamily="34" charset="-120"/>
+              </a:rPr>
+              <a:t>screenshots/day2/buzz_join.png</a:t>
+            </a:r>
+            <a:endParaRPr lang="en-US" sz="1000" dirty="0"/>
+          </a:p>
+        </p:txBody>
+      </p:sp>
+      <p:sp>
+        <p:nvSpPr>
+          <p:cNvPr id="9" name="Text 7"/>
+          <p:cNvSpPr/>
+          <p:nvPr/>
+        </p:nvSpPr>
+        <p:spPr>
+          <a:xfrm>
+            <a:off x="548640" y="5989320"/>
+            <a:ext cx="11091672" cy="411480"/>
+          </a:xfrm>
+          <a:prstGeom prst="rect">
+            <a:avLst/>
+          </a:prstGeom>
+          <a:noFill/>
+          <a:ln/>
+        </p:spPr>
+        <p:txBody>
+          <a:bodyPr wrap="square" rtlCol="0" anchor="ctr"/>
+          <a:lstStyle/>
+          <a:p>
+            <a:pPr algn="ctr" indent="0" marL="0">
+              <a:buNone/>
+            </a:pPr>
+            <a:r>
+              <a:rPr lang="en-US" sz="1200" i="1" dirty="0">
+                <a:solidFill>
+                  <a:srgbClr val="718096"/>
+                </a:solidFill>
+                <a:latin typeface="Noto Sans KR" pitchFamily="34" charset="0"/>
+                <a:ea typeface="Noto Sans KR" pitchFamily="34" charset="-122"/>
+                <a:cs typeface="Noto Sans KR" pitchFamily="34" charset="-120"/>
+              </a:rPr>
+              <a:t>검색량-PM2.5 시계열 + lag 결과</a:t>
+            </a:r>
+            <a:endParaRPr lang="en-US" sz="1200" dirty="0"/>
+          </a:p>
+        </p:txBody>
+      </p:sp>
+      <p:sp>
+        <p:nvSpPr>
+          <p:cNvPr id="10" name="Text 8"/>
           <p:cNvSpPr/>
           <p:nvPr/>
         </p:nvSpPr>
@@ -7677,7 +7925,7 @@
                 <a:ea typeface="Noto Sans KR" pitchFamily="34" charset="-122"/>
                 <a:cs typeface="Noto Sans KR" pitchFamily="34" charset="-120"/>
               </a:rPr>
-              <a:t>20 / 27</a:t>
+              <a:t>20 / 30</a:t>
             </a:r>
             <a:endParaRPr lang="en-US" sz="900" dirty="0"/>
           </a:p>
@@ -7761,7 +8009,7 @@
                 <a:ea typeface="Noto Sans KR" pitchFamily="34" charset="-122"/>
                 <a:cs typeface="Noto Sans KR" pitchFamily="34" charset="-120"/>
               </a:rPr>
-              <a:t>파트 3. Colab 핸들링 + CLAUDE.md 누적</a:t>
+              <a:t>파트 2. 분석 질문 던지기 + 결합 데이터 EDA</a:t>
             </a:r>
             <a:endParaRPr lang="en-US" sz="1400" dirty="0"/>
           </a:p>
@@ -7800,7 +8048,7 @@
                 <a:ea typeface="Noto Sans KR" pitchFamily="34" charset="-122"/>
                 <a:cs typeface="Noto Sans KR" pitchFamily="34" charset="-120"/>
               </a:rPr>
-              <a:t>섹션 2 / 5</a:t>
+              <a:t>섹션 6 / 6</a:t>
             </a:r>
             <a:endParaRPr lang="en-US" sz="1100" dirty="0"/>
           </a:p>
@@ -7842,7 +8090,7 @@
                 <a:ea typeface="Noto Sans KR" pitchFamily="34" charset="-122"/>
                 <a:cs typeface="Noto Sans KR" pitchFamily="34" charset="-120"/>
               </a:rPr>
-              <a:t>Colab 사용법 (간단)</a:t>
+              <a:t>답 안 되는 질문 — 분석가의 정직함</a:t>
             </a:r>
             <a:endParaRPr lang="en-US" sz="4200" dirty="0"/>
           </a:p>
@@ -7907,7 +8155,7 @@
                 <a:ea typeface="Noto Sans KR" pitchFamily="34" charset="-122"/>
                 <a:cs typeface="Noto Sans KR" pitchFamily="34" charset="-120"/>
               </a:rPr>
-              <a:t>1. colab.research.google.com → "새 노트"</a:t>
+              <a:t>· "출근시간 7~9시 PM" → AQ 일별이라 답 불가 (에어코리아 시간별 API 또는 4일차 결합으로)</a:t>
             </a:r>
             <a:endParaRPr lang="en-US" sz="1700" dirty="0"/>
           </a:p>
@@ -7927,7 +8175,7 @@
                 <a:ea typeface="Noto Sans KR" pitchFamily="34" charset="-122"/>
                 <a:cs typeface="Noto Sans KR" pitchFamily="34" charset="-120"/>
               </a:rPr>
-              <a:t>2. 좌측 폴더 아이콘 → CSV 업로드 (또는 Drive 마운트)</a:t>
+              <a:t>· "코로나 전후" → 배포본 2024~2025만 → 별도 다운로드 필요</a:t>
             </a:r>
             <a:endParaRPr lang="en-US" sz="1700" dirty="0"/>
           </a:p>
@@ -7947,76 +8195,7 @@
                 <a:ea typeface="Noto Sans KR" pitchFamily="34" charset="-122"/>
                 <a:cs typeface="Noto Sans KR" pitchFamily="34" charset="-120"/>
               </a:rPr>
-              <a:t>3. 코드 셀에 Claude Code 결과 붙여넣고 ▶︎ 실행</a:t>
-            </a:r>
-            <a:endParaRPr lang="en-US" sz="1700" dirty="0"/>
-          </a:p>
-          <a:p>
-            <a:pPr indent="0" marL="0">
-              <a:lnSpc>
-                <a:spcPct val="155000"/>
-              </a:lnSpc>
-              <a:buNone/>
-            </a:pPr>
-            <a:r>
-              <a:rPr lang="en-US" sz="1700" dirty="0">
-                <a:solidFill>
-                  <a:srgbClr val="4A5568"/>
-                </a:solidFill>
-                <a:latin typeface="Noto Sans KR" pitchFamily="34" charset="0"/>
-                <a:ea typeface="Noto Sans KR" pitchFamily="34" charset="-122"/>
-                <a:cs typeface="Noto Sans KR" pitchFamily="34" charset="-120"/>
-              </a:rPr>
-              <a:t>4. 한글 폰트 깨짐 → 첫 셀에 !apt -qq install fonts-nanum</a:t>
-            </a:r>
-            <a:endParaRPr lang="en-US" sz="1700" dirty="0"/>
-          </a:p>
-          <a:p>
-            <a:pPr indent="0" marL="0">
-              <a:lnSpc>
-                <a:spcPct val="155000"/>
-              </a:lnSpc>
-              <a:buNone/>
-            </a:pPr>
-            <a:r>
-              <a:rPr lang="en-US" sz="1700" dirty="0">
-                <a:solidFill>
-                  <a:srgbClr val="4A5568"/>
-                </a:solidFill>
-                <a:latin typeface="Noto Sans KR" pitchFamily="34" charset="0"/>
-                <a:ea typeface="Noto Sans KR" pitchFamily="34" charset="-122"/>
-                <a:cs typeface="Noto Sans KR" pitchFamily="34" charset="-120"/>
-              </a:rPr>
-              <a:t>5. 차트 결과 확인 → 변수 바꿔서 ▶︎ 다시</a:t>
-            </a:r>
-            <a:endParaRPr lang="en-US" sz="1700" dirty="0"/>
-          </a:p>
-          <a:p>
-            <a:pPr indent="0" marL="0">
-              <a:lnSpc>
-                <a:spcPct val="155000"/>
-              </a:lnSpc>
-              <a:buNone/>
-            </a:pPr>
-            <a:endParaRPr lang="en-US" sz="1700" dirty="0"/>
-          </a:p>
-          <a:p>
-            <a:pPr indent="0" marL="0">
-              <a:lnSpc>
-                <a:spcPct val="155000"/>
-              </a:lnSpc>
-              <a:buNone/>
-            </a:pPr>
-            <a:r>
-              <a:rPr lang="en-US" sz="1700" dirty="0">
-                <a:solidFill>
-                  <a:srgbClr val="4A5568"/>
-                </a:solidFill>
-                <a:latin typeface="Noto Sans KR" pitchFamily="34" charset="0"/>
-                <a:ea typeface="Noto Sans KR" pitchFamily="34" charset="-122"/>
-                <a:cs typeface="Noto Sans KR" pitchFamily="34" charset="-120"/>
-              </a:rPr>
-              <a:t>· 강의 노트북 (사전 배포): b2g_day2_eda.ipynb</a:t>
+              <a:t>· 답 못 하는 이유를 말로 설명할 수 있어야 분석가다</a:t>
             </a:r>
             <a:endParaRPr lang="en-US" sz="1700" dirty="0"/>
           </a:p>
@@ -8055,7 +8234,7 @@
                 <a:ea typeface="Noto Sans KR" pitchFamily="34" charset="-122"/>
                 <a:cs typeface="Noto Sans KR" pitchFamily="34" charset="-120"/>
               </a:rPr>
-              <a:t>21 / 27</a:t>
+              <a:t>21 / 30</a:t>
             </a:r>
             <a:endParaRPr lang="en-US" sz="900" dirty="0"/>
           </a:p>
@@ -8094,8 +8273,28 @@
         </p:nvSpPr>
         <p:spPr>
           <a:xfrm>
-            <a:off x="548640" y="384048"/>
-            <a:ext cx="914400" cy="54864"/>
+            <a:off x="0" y="0"/>
+            <a:ext cx="12192000" cy="6858000"/>
+          </a:xfrm>
+          <a:prstGeom prst="rect">
+            <a:avLst/>
+          </a:prstGeom>
+          <a:solidFill>
+            <a:srgbClr val="1A1F36"/>
+          </a:solidFill>
+          <a:ln/>
+        </p:spPr>
+      </p:sp>
+      <p:sp>
+        <p:nvSpPr>
+          <p:cNvPr id="3" name="Shape 1"/>
+          <p:cNvSpPr/>
+          <p:nvPr/>
+        </p:nvSpPr>
+        <p:spPr>
+          <a:xfrm>
+            <a:off x="9875520" y="0"/>
+            <a:ext cx="2313432" cy="6858000"/>
           </a:xfrm>
           <a:prstGeom prst="rect">
             <a:avLst/>
@@ -8108,14 +8307,14 @@
       </p:sp>
       <p:sp>
         <p:nvSpPr>
-          <p:cNvPr id="3" name="Text 1"/>
-          <p:cNvSpPr/>
-          <p:nvPr/>
-        </p:nvSpPr>
-        <p:spPr>
-          <a:xfrm>
-            <a:off x="548640" y="530352"/>
-            <a:ext cx="10515600" cy="411480"/>
+          <p:cNvPr id="4" name="Text 2"/>
+          <p:cNvSpPr/>
+          <p:nvPr/>
+        </p:nvSpPr>
+        <p:spPr>
+          <a:xfrm>
+            <a:off x="731520" y="1828800"/>
+            <a:ext cx="10515600" cy="457200"/>
           </a:xfrm>
           <a:prstGeom prst="rect">
             <a:avLst/>
@@ -8131,15 +8330,15 @@
               <a:buNone/>
             </a:pPr>
             <a:r>
-              <a:rPr lang="en-US" sz="1400" b="1" spc="50" kern="0" dirty="0">
-                <a:solidFill>
-                  <a:srgbClr val="718096"/>
-                </a:solidFill>
-                <a:latin typeface="Noto Sans KR" pitchFamily="34" charset="0"/>
-                <a:ea typeface="Noto Sans KR" pitchFamily="34" charset="-122"/>
-                <a:cs typeface="Noto Sans KR" pitchFamily="34" charset="-120"/>
-              </a:rPr>
-              <a:t>파트 3. Colab 핸들링 + CLAUDE.md 누적</a:t>
+              <a:rPr lang="en-US" sz="1400" b="1" spc="500" kern="0" dirty="0">
+                <a:solidFill>
+                  <a:srgbClr val="00D4AA"/>
+                </a:solidFill>
+                <a:latin typeface="Noto Sans KR" pitchFamily="34" charset="0"/>
+                <a:ea typeface="Noto Sans KR" pitchFamily="34" charset="-122"/>
+                <a:cs typeface="Noto Sans KR" pitchFamily="34" charset="-120"/>
+              </a:rPr>
+              <a:t>PART 3</a:t>
             </a:r>
             <a:endParaRPr lang="en-US" sz="1400" dirty="0"/>
           </a:p>
@@ -8147,14 +8346,14 @@
       </p:sp>
       <p:sp>
         <p:nvSpPr>
-          <p:cNvPr id="4" name="Text 2"/>
-          <p:cNvSpPr/>
-          <p:nvPr/>
-        </p:nvSpPr>
-        <p:spPr>
-          <a:xfrm>
-            <a:off x="548640" y="960120"/>
-            <a:ext cx="10515600" cy="292608"/>
+          <p:cNvPr id="5" name="Text 3"/>
+          <p:cNvSpPr/>
+          <p:nvPr/>
+        </p:nvSpPr>
+        <p:spPr>
+          <a:xfrm>
+            <a:off x="731520" y="2468880"/>
+            <a:ext cx="10515600" cy="1645920"/>
           </a:xfrm>
           <a:prstGeom prst="rect">
             <a:avLst/>
@@ -8167,62 +8366,43 @@
           <a:lstStyle/>
           <a:p>
             <a:pPr indent="0" marL="0">
-              <a:buNone/>
-            </a:pPr>
-            <a:r>
-              <a:rPr lang="en-US" sz="1100" b="1" spc="150" kern="0" dirty="0">
-                <a:solidFill>
-                  <a:srgbClr val="00D4AA"/>
-                </a:solidFill>
-                <a:latin typeface="Noto Sans KR" pitchFamily="34" charset="0"/>
-                <a:ea typeface="Noto Sans KR" pitchFamily="34" charset="-122"/>
-                <a:cs typeface="Noto Sans KR" pitchFamily="34" charset="-120"/>
-              </a:rPr>
-              <a:t>섹션 3 / 5</a:t>
-            </a:r>
-            <a:endParaRPr lang="en-US" sz="1100" dirty="0"/>
-          </a:p>
-        </p:txBody>
-      </p:sp>
-      <p:sp>
-        <p:nvSpPr>
-          <p:cNvPr id="5" name="Text 3"/>
-          <p:cNvSpPr/>
-          <p:nvPr/>
-        </p:nvSpPr>
-        <p:spPr>
-          <a:xfrm>
-            <a:off x="548640" y="1508760"/>
-            <a:ext cx="11091672" cy="1371600"/>
-          </a:xfrm>
-          <a:prstGeom prst="rect">
-            <a:avLst/>
-          </a:prstGeom>
-          <a:noFill/>
-          <a:ln/>
-        </p:spPr>
-        <p:txBody>
-          <a:bodyPr wrap="square" rtlCol="0" anchor="t"/>
-          <a:lstStyle/>
-          <a:p>
-            <a:pPr indent="0" marL="0">
               <a:lnSpc>
-                <a:spcPct val="110000"/>
+                <a:spcPct val="115000"/>
               </a:lnSpc>
               <a:buNone/>
             </a:pPr>
             <a:r>
-              <a:rPr lang="en-US" sz="4200" b="1" spc="-50" kern="0" dirty="0">
-                <a:solidFill>
-                  <a:srgbClr val="1A1F36"/>
-                </a:solidFill>
-                <a:latin typeface="Noto Sans KR" pitchFamily="34" charset="0"/>
-                <a:ea typeface="Noto Sans KR" pitchFamily="34" charset="-122"/>
-                <a:cs typeface="Noto Sans KR" pitchFamily="34" charset="-120"/>
-              </a:rPr>
-              <a:t>Colab 변형 실습</a:t>
-            </a:r>
-            <a:endParaRPr lang="en-US" sz="4200" dirty="0"/>
+              <a:rPr lang="en-US" sz="5400" b="1" spc="-50" kern="0" dirty="0">
+                <a:solidFill>
+                  <a:srgbClr val="FFFFFF"/>
+                </a:solidFill>
+                <a:latin typeface="Noto Sans KR" pitchFamily="34" charset="0"/>
+                <a:ea typeface="Noto Sans KR" pitchFamily="34" charset="-122"/>
+                <a:cs typeface="Noto Sans KR" pitchFamily="34" charset="-120"/>
+              </a:rPr>
+              <a:t>Colab 핸들링 +</a:t>
+            </a:r>
+            <a:endParaRPr lang="en-US" sz="5400" dirty="0"/>
+          </a:p>
+          <a:p>
+            <a:pPr indent="0" marL="0">
+              <a:lnSpc>
+                <a:spcPct val="115000"/>
+              </a:lnSpc>
+              <a:buNone/>
+            </a:pPr>
+            <a:r>
+              <a:rPr lang="en-US" sz="5400" b="1" spc="-50" kern="0" dirty="0">
+                <a:solidFill>
+                  <a:srgbClr val="FFFFFF"/>
+                </a:solidFill>
+                <a:latin typeface="Noto Sans KR" pitchFamily="34" charset="0"/>
+                <a:ea typeface="Noto Sans KR" pitchFamily="34" charset="-122"/>
+                <a:cs typeface="Noto Sans KR" pitchFamily="34" charset="-120"/>
+              </a:rPr>
+              <a:t>CLAUDE.md 누적</a:t>
+            </a:r>
+            <a:endParaRPr lang="en-US" sz="5400" dirty="0"/>
           </a:p>
         </p:txBody>
       </p:sp>
@@ -8234,14 +8414,14 @@
         </p:nvSpPr>
         <p:spPr>
           <a:xfrm>
-            <a:off x="548640" y="2971800"/>
-            <a:ext cx="1828800" cy="0"/>
+            <a:off x="731520" y="4297680"/>
+            <a:ext cx="3200400" cy="0"/>
           </a:xfrm>
           <a:prstGeom prst="line">
             <a:avLst/>
           </a:prstGeom>
           <a:noFill/>
-          <a:ln w="25400">
+          <a:ln w="19050">
             <a:solidFill>
               <a:srgbClr val="00D4AA"/>
             </a:solidFill>
@@ -8257,97 +8437,37 @@
         </p:nvSpPr>
         <p:spPr>
           <a:xfrm>
-            <a:off x="548640" y="3200400"/>
-            <a:ext cx="11091672" cy="2788920"/>
-          </a:xfrm>
-          <a:prstGeom prst="rect">
-            <a:avLst/>
-          </a:prstGeom>
-          <a:noFill/>
-          <a:ln/>
-        </p:spPr>
-        <p:txBody>
-          <a:bodyPr wrap="square" rtlCol="0" anchor="t"/>
+            <a:off x="731520" y="4526280"/>
+            <a:ext cx="10515600" cy="548640"/>
+          </a:xfrm>
+          <a:prstGeom prst="rect">
+            <a:avLst/>
+          </a:prstGeom>
+          <a:noFill/>
+          <a:ln/>
+        </p:spPr>
+        <p:txBody>
+          <a:bodyPr wrap="square" rtlCol="0" anchor="ctr"/>
           <a:lstStyle/>
           <a:p>
             <a:pPr indent="0" marL="0">
               <a:lnSpc>
-                <a:spcPct val="155000"/>
+                <a:spcPct val="150000"/>
               </a:lnSpc>
               <a:buNone/>
             </a:pPr>
             <a:r>
-              <a:rPr lang="en-US" sz="1700" dirty="0">
-                <a:solidFill>
-                  <a:srgbClr val="4A5568"/>
-                </a:solidFill>
-                <a:latin typeface="Noto Sans KR" pitchFamily="34" charset="0"/>
-                <a:ea typeface="Noto Sans KR" pitchFamily="34" charset="-122"/>
-                <a:cs typeface="Noto Sans KR" pitchFamily="34" charset="-120"/>
-              </a:rPr>
-              <a:t>· A: PM2.5 → PM10 으로 같은 분석 (오염원 차이 — 황사는 PM10만 튄다)</a:t>
-            </a:r>
-            <a:endParaRPr lang="en-US" sz="1700" dirty="0"/>
-          </a:p>
-          <a:p>
-            <a:pPr indent="0" marL="0">
-              <a:lnSpc>
-                <a:spcPct val="155000"/>
-              </a:lnSpc>
-              <a:buNone/>
-            </a:pPr>
-            <a:r>
-              <a:rPr lang="en-US" sz="1700" dirty="0">
-                <a:solidFill>
-                  <a:srgbClr val="4A5568"/>
-                </a:solidFill>
-                <a:latin typeface="Noto Sans KR" pitchFamily="34" charset="0"/>
-                <a:ea typeface="Noto Sans KR" pitchFamily="34" charset="-122"/>
-                <a:cs typeface="Noto Sans KR" pitchFamily="34" charset="-120"/>
-              </a:rPr>
-              <a:t>· B: 이상치 IQR 1.5배 → 3배</a:t>
-            </a:r>
-            <a:endParaRPr lang="en-US" sz="1700" dirty="0"/>
-          </a:p>
-          <a:p>
-            <a:pPr indent="0" marL="0">
-              <a:lnSpc>
-                <a:spcPct val="155000"/>
-              </a:lnSpc>
-              <a:buNone/>
-            </a:pPr>
-            <a:r>
-              <a:rPr lang="en-US" sz="1700" dirty="0">
-                <a:solidFill>
-                  <a:srgbClr val="4A5568"/>
-                </a:solidFill>
-                <a:latin typeface="Noto Sans KR" pitchFamily="34" charset="0"/>
-                <a:ea typeface="Noto Sans KR" pitchFamily="34" charset="-122"/>
-                <a:cs typeface="Noto Sans KR" pitchFamily="34" charset="-120"/>
-              </a:rPr>
-              <a:t>· C: 결합 차트 등급 임계값 변경 (좋음/보통 vs 나쁨/매우나쁨 2분류)</a:t>
-            </a:r>
-            <a:endParaRPr lang="en-US" sz="1700" dirty="0"/>
-          </a:p>
-          <a:p>
-            <a:pPr indent="0" marL="0">
-              <a:lnSpc>
-                <a:spcPct val="155000"/>
-              </a:lnSpc>
-              <a:buNone/>
-            </a:pPr>
-            <a:r>
-              <a:rPr lang="en-US" sz="1700" dirty="0">
-                <a:solidFill>
-                  <a:srgbClr val="4A5568"/>
-                </a:solidFill>
-                <a:latin typeface="Noto Sans KR" pitchFamily="34" charset="0"/>
-                <a:ea typeface="Noto Sans KR" pitchFamily="34" charset="-122"/>
-                <a:cs typeface="Noto Sans KR" pitchFamily="34" charset="-120"/>
-              </a:rPr>
-              <a:t>· D: 본인이 궁금한 변형</a:t>
-            </a:r>
-            <a:endParaRPr lang="en-US" sz="1700" dirty="0"/>
+              <a:rPr lang="en-US" sz="1600" dirty="0">
+                <a:solidFill>
+                  <a:srgbClr val="A0AEC0"/>
+                </a:solidFill>
+                <a:latin typeface="Noto Sans KR" pitchFamily="34" charset="0"/>
+                <a:ea typeface="Noto Sans KR" pitchFamily="34" charset="-122"/>
+                <a:cs typeface="Noto Sans KR" pitchFamily="34" charset="-120"/>
+              </a:rPr>
+              <a:t>AI가 짠 코드를 직접 만지고, 규칙을 자연어로 누적</a:t>
+            </a:r>
+            <a:endParaRPr lang="en-US" sz="1600" dirty="0"/>
           </a:p>
         </p:txBody>
       </p:sp>
@@ -8384,7 +8504,7 @@
                 <a:ea typeface="Noto Sans KR" pitchFamily="34" charset="-122"/>
                 <a:cs typeface="Noto Sans KR" pitchFamily="34" charset="-120"/>
               </a:rPr>
-              <a:t>22 / 27</a:t>
+              <a:t>22 / 30</a:t>
             </a:r>
             <a:endParaRPr lang="en-US" sz="900" dirty="0"/>
           </a:p>
@@ -8507,7 +8627,7 @@
                 <a:ea typeface="Noto Sans KR" pitchFamily="34" charset="-122"/>
                 <a:cs typeface="Noto Sans KR" pitchFamily="34" charset="-120"/>
               </a:rPr>
-              <a:t>섹션 4 / 5</a:t>
+              <a:t>섹션 1 / 5</a:t>
             </a:r>
             <a:endParaRPr lang="en-US" sz="1100" dirty="0"/>
           </a:p>
@@ -8549,7 +8669,7 @@
                 <a:ea typeface="Noto Sans KR" pitchFamily="34" charset="-122"/>
                 <a:cs typeface="Noto Sans KR" pitchFamily="34" charset="-120"/>
               </a:rPr>
-              <a:t>자주 나오는 Colab 트러블</a:t>
+              <a:t>Colab을 왜 끼우나</a:t>
             </a:r>
             <a:endParaRPr lang="en-US" sz="4200" dirty="0"/>
           </a:p>
@@ -8614,7 +8734,7 @@
                 <a:ea typeface="Noto Sans KR" pitchFamily="34" charset="-122"/>
                 <a:cs typeface="Noto Sans KR" pitchFamily="34" charset="-120"/>
               </a:rPr>
-              <a:t>· 한글 폰트 깨짐 → !apt -qq install fonts-nanum</a:t>
+              <a:t>· Claude Code가 짠 코드를 눈으로 보고 직접 만지는 자리</a:t>
             </a:r>
             <a:endParaRPr lang="en-US" sz="1700" dirty="0"/>
           </a:p>
@@ -8634,7 +8754,7 @@
                 <a:ea typeface="Noto Sans KR" pitchFamily="34" charset="-122"/>
                 <a:cs typeface="Noto Sans KR" pitchFamily="34" charset="-120"/>
               </a:rPr>
-              <a:t>· pd.to_datetime 에러 → format 명시 (format="%Y-%m-%d")</a:t>
+              <a:t>· 셀 단위로 결과 확인 → 변수명·임계값 바꿔보기 쉬움</a:t>
             </a:r>
             <a:endParaRPr lang="en-US" sz="1700" dirty="0"/>
           </a:p>
@@ -8654,27 +8774,7 @@
                 <a:ea typeface="Noto Sans KR" pitchFamily="34" charset="-122"/>
                 <a:cs typeface="Noto Sans KR" pitchFamily="34" charset="-120"/>
               </a:rPr>
-              <a:t>· groupby 결과가 시리즈 → .reset_index() 추가</a:t>
-            </a:r>
-            <a:endParaRPr lang="en-US" sz="1700" dirty="0"/>
-          </a:p>
-          <a:p>
-            <a:pPr indent="0" marL="0">
-              <a:lnSpc>
-                <a:spcPct val="155000"/>
-              </a:lnSpc>
-              <a:buNone/>
-            </a:pPr>
-            <a:r>
-              <a:rPr lang="en-US" sz="1700" dirty="0">
-                <a:solidFill>
-                  <a:srgbClr val="4A5568"/>
-                </a:solidFill>
-                <a:latin typeface="Noto Sans KR" pitchFamily="34" charset="0"/>
-                <a:ea typeface="Noto Sans KR" pitchFamily="34" charset="-122"/>
-                <a:cs typeface="Noto Sans KR" pitchFamily="34" charset="-120"/>
-              </a:rPr>
-              <a:t>· sns.set_theme()이 폰트 덮어씀 → set_theme 후 폰트 재지정</a:t>
+              <a:t>· 회사 환경에서 Claude Code 못 쓸 때 백업 채널</a:t>
             </a:r>
             <a:endParaRPr lang="en-US" sz="1700" dirty="0"/>
           </a:p>
@@ -8713,7 +8813,7 @@
                 <a:ea typeface="Noto Sans KR" pitchFamily="34" charset="-122"/>
                 <a:cs typeface="Noto Sans KR" pitchFamily="34" charset="-120"/>
               </a:rPr>
-              <a:t>23 / 27</a:t>
+              <a:t>23 / 30</a:t>
             </a:r>
             <a:endParaRPr lang="en-US" sz="900" dirty="0"/>
           </a:p>
@@ -8812,7 +8912,7 @@
         <p:spPr>
           <a:xfrm>
             <a:off x="548640" y="960120"/>
-            <a:ext cx="11091672" cy="292608"/>
+            <a:ext cx="10515600" cy="292608"/>
           </a:xfrm>
           <a:prstGeom prst="rect">
             <a:avLst/>
@@ -8828,7 +8928,7 @@
               <a:buNone/>
             </a:pPr>
             <a:r>
-              <a:rPr lang="en-US" sz="1100" b="1" spc="50" kern="0" dirty="0">
+              <a:rPr lang="en-US" sz="1100" b="1" spc="150" kern="0" dirty="0">
                 <a:solidFill>
                   <a:srgbClr val="00D4AA"/>
                 </a:solidFill>
@@ -8836,7 +8936,7 @@
                 <a:ea typeface="Noto Sans KR" pitchFamily="34" charset="-122"/>
                 <a:cs typeface="Noto Sans KR" pitchFamily="34" charset="-120"/>
               </a:rPr>
-              <a:t>👉 직접 따라쳐보세요 — 본인 Claude Code에 그대로 붙여넣기</a:t>
+              <a:t>섹션 2 / 5</a:t>
             </a:r>
             <a:endParaRPr lang="en-US" sz="1100" dirty="0"/>
           </a:p>
@@ -8851,7 +8951,7 @@
         <p:spPr>
           <a:xfrm>
             <a:off x="548640" y="1508760"/>
-            <a:ext cx="11091672" cy="1005840"/>
+            <a:ext cx="11091672" cy="1371600"/>
           </a:xfrm>
           <a:prstGeom prst="rect">
             <a:avLst/>
@@ -8865,12 +8965,12 @@
           <a:p>
             <a:pPr indent="0" marL="0">
               <a:lnSpc>
-                <a:spcPct val="115000"/>
+                <a:spcPct val="110000"/>
               </a:lnSpc>
               <a:buNone/>
             </a:pPr>
             <a:r>
-              <a:rPr lang="en-US" sz="3400" b="1" spc="-50" kern="0" dirty="0">
+              <a:rPr lang="en-US" sz="4200" b="1" spc="-50" kern="0" dirty="0">
                 <a:solidFill>
                   <a:srgbClr val="1A1F36"/>
                 </a:solidFill>
@@ -8878,9 +8978,9 @@
                 <a:ea typeface="Noto Sans KR" pitchFamily="34" charset="-122"/>
                 <a:cs typeface="Noto Sans KR" pitchFamily="34" charset="-120"/>
               </a:rPr>
-              <a:t>CLAUDE.md 누적 — 자연어로 부탁</a:t>
-            </a:r>
-            <a:endParaRPr lang="en-US" sz="3400" dirty="0"/>
+              <a:t>Colab 사용법 (간단)</a:t>
+            </a:r>
+            <a:endParaRPr lang="en-US" sz="4200" dirty="0"/>
           </a:p>
         </p:txBody>
       </p:sp>
@@ -8892,7 +8992,7 @@
         </p:nvSpPr>
         <p:spPr>
           <a:xfrm>
-            <a:off x="548640" y="2606040"/>
+            <a:off x="548640" y="2971800"/>
             <a:ext cx="1828800" cy="0"/>
           </a:xfrm>
           <a:prstGeom prst="line">
@@ -8909,236 +9009,158 @@
       </p:sp>
       <p:sp>
         <p:nvSpPr>
-          <p:cNvPr id="7" name="Shape 5"/>
-          <p:cNvSpPr/>
-          <p:nvPr/>
-        </p:nvSpPr>
-        <p:spPr>
-          <a:xfrm>
-            <a:off x="548640" y="2926080"/>
-            <a:ext cx="11091672" cy="3200400"/>
-          </a:xfrm>
-          <a:prstGeom prst="roundRect">
-            <a:avLst>
-              <a:gd name="adj" fmla="val 1714"/>
-            </a:avLst>
-          </a:prstGeom>
-          <a:solidFill>
-            <a:srgbClr val="F1F5F9"/>
-          </a:solidFill>
-          <a:ln w="6350">
-            <a:solidFill>
-              <a:srgbClr val="E2E8F0"/>
-            </a:solidFill>
-            <a:prstDash val="solid"/>
-          </a:ln>
-        </p:spPr>
+          <p:cNvPr id="7" name="Text 5"/>
+          <p:cNvSpPr/>
+          <p:nvPr/>
+        </p:nvSpPr>
+        <p:spPr>
+          <a:xfrm>
+            <a:off x="548640" y="3200400"/>
+            <a:ext cx="11091672" cy="2788920"/>
+          </a:xfrm>
+          <a:prstGeom prst="rect">
+            <a:avLst/>
+          </a:prstGeom>
+          <a:noFill/>
+          <a:ln/>
+        </p:spPr>
+        <p:txBody>
+          <a:bodyPr wrap="square" rtlCol="0" anchor="t"/>
+          <a:lstStyle/>
+          <a:p>
+            <a:pPr indent="0" marL="0">
+              <a:lnSpc>
+                <a:spcPct val="155000"/>
+              </a:lnSpc>
+              <a:buNone/>
+            </a:pPr>
+            <a:r>
+              <a:rPr lang="en-US" sz="1700" dirty="0">
+                <a:solidFill>
+                  <a:srgbClr val="4A5568"/>
+                </a:solidFill>
+                <a:latin typeface="Noto Sans KR" pitchFamily="34" charset="0"/>
+                <a:ea typeface="Noto Sans KR" pitchFamily="34" charset="-122"/>
+                <a:cs typeface="Noto Sans KR" pitchFamily="34" charset="-120"/>
+              </a:rPr>
+              <a:t>1. colab.research.google.com → "새 노트"</a:t>
+            </a:r>
+            <a:endParaRPr lang="en-US" sz="1700" dirty="0"/>
+          </a:p>
+          <a:p>
+            <a:pPr indent="0" marL="0">
+              <a:lnSpc>
+                <a:spcPct val="155000"/>
+              </a:lnSpc>
+              <a:buNone/>
+            </a:pPr>
+            <a:r>
+              <a:rPr lang="en-US" sz="1700" dirty="0">
+                <a:solidFill>
+                  <a:srgbClr val="4A5568"/>
+                </a:solidFill>
+                <a:latin typeface="Noto Sans KR" pitchFamily="34" charset="0"/>
+                <a:ea typeface="Noto Sans KR" pitchFamily="34" charset="-122"/>
+                <a:cs typeface="Noto Sans KR" pitchFamily="34" charset="-120"/>
+              </a:rPr>
+              <a:t>2. 좌측 폴더 아이콘 → CSV 업로드 (또는 Drive 마운트)</a:t>
+            </a:r>
+            <a:endParaRPr lang="en-US" sz="1700" dirty="0"/>
+          </a:p>
+          <a:p>
+            <a:pPr indent="0" marL="0">
+              <a:lnSpc>
+                <a:spcPct val="155000"/>
+              </a:lnSpc>
+              <a:buNone/>
+            </a:pPr>
+            <a:r>
+              <a:rPr lang="en-US" sz="1700" dirty="0">
+                <a:solidFill>
+                  <a:srgbClr val="4A5568"/>
+                </a:solidFill>
+                <a:latin typeface="Noto Sans KR" pitchFamily="34" charset="0"/>
+                <a:ea typeface="Noto Sans KR" pitchFamily="34" charset="-122"/>
+                <a:cs typeface="Noto Sans KR" pitchFamily="34" charset="-120"/>
+              </a:rPr>
+              <a:t>3. 코드 셀에 Claude Code 결과 붙여넣고 ▶︎ 실행</a:t>
+            </a:r>
+            <a:endParaRPr lang="en-US" sz="1700" dirty="0"/>
+          </a:p>
+          <a:p>
+            <a:pPr indent="0" marL="0">
+              <a:lnSpc>
+                <a:spcPct val="155000"/>
+              </a:lnSpc>
+              <a:buNone/>
+            </a:pPr>
+            <a:r>
+              <a:rPr lang="en-US" sz="1700" dirty="0">
+                <a:solidFill>
+                  <a:srgbClr val="4A5568"/>
+                </a:solidFill>
+                <a:latin typeface="Noto Sans KR" pitchFamily="34" charset="0"/>
+                <a:ea typeface="Noto Sans KR" pitchFamily="34" charset="-122"/>
+                <a:cs typeface="Noto Sans KR" pitchFamily="34" charset="-120"/>
+              </a:rPr>
+              <a:t>4. 한글 폰트 깨짐 → 첫 셀에 !apt -qq install fonts-nanum</a:t>
+            </a:r>
+            <a:endParaRPr lang="en-US" sz="1700" dirty="0"/>
+          </a:p>
+          <a:p>
+            <a:pPr indent="0" marL="0">
+              <a:lnSpc>
+                <a:spcPct val="155000"/>
+              </a:lnSpc>
+              <a:buNone/>
+            </a:pPr>
+            <a:r>
+              <a:rPr lang="en-US" sz="1700" dirty="0">
+                <a:solidFill>
+                  <a:srgbClr val="4A5568"/>
+                </a:solidFill>
+                <a:latin typeface="Noto Sans KR" pitchFamily="34" charset="0"/>
+                <a:ea typeface="Noto Sans KR" pitchFamily="34" charset="-122"/>
+                <a:cs typeface="Noto Sans KR" pitchFamily="34" charset="-120"/>
+              </a:rPr>
+              <a:t>5. 차트 결과 확인 → 변수 바꿔서 ▶︎ 다시</a:t>
+            </a:r>
+            <a:endParaRPr lang="en-US" sz="1700" dirty="0"/>
+          </a:p>
+          <a:p>
+            <a:pPr indent="0" marL="0">
+              <a:lnSpc>
+                <a:spcPct val="155000"/>
+              </a:lnSpc>
+              <a:buNone/>
+            </a:pPr>
+            <a:endParaRPr lang="en-US" sz="1700" dirty="0"/>
+          </a:p>
+          <a:p>
+            <a:pPr indent="0" marL="0">
+              <a:lnSpc>
+                <a:spcPct val="155000"/>
+              </a:lnSpc>
+              <a:buNone/>
+            </a:pPr>
+            <a:r>
+              <a:rPr lang="en-US" sz="1700" dirty="0">
+                <a:solidFill>
+                  <a:srgbClr val="4A5568"/>
+                </a:solidFill>
+                <a:latin typeface="Noto Sans KR" pitchFamily="34" charset="0"/>
+                <a:ea typeface="Noto Sans KR" pitchFamily="34" charset="-122"/>
+                <a:cs typeface="Noto Sans KR" pitchFamily="34" charset="-120"/>
+              </a:rPr>
+              <a:t>· 강의 노트북 (사전 배포): b2g_day2_eda.ipynb</a:t>
+            </a:r>
+            <a:endParaRPr lang="en-US" sz="1700" dirty="0"/>
+          </a:p>
+        </p:txBody>
       </p:sp>
       <p:sp>
         <p:nvSpPr>
           <p:cNvPr id="8" name="Text 6"/>
-          <p:cNvSpPr/>
-          <p:nvPr/>
-        </p:nvSpPr>
-        <p:spPr>
-          <a:xfrm>
-            <a:off x="713232" y="3035808"/>
-            <a:ext cx="10762488" cy="2980944"/>
-          </a:xfrm>
-          <a:prstGeom prst="rect">
-            <a:avLst/>
-          </a:prstGeom>
-          <a:noFill/>
-          <a:ln/>
-        </p:spPr>
-        <p:txBody>
-          <a:bodyPr wrap="square" rtlCol="0" anchor="t"/>
-          <a:lstStyle/>
-          <a:p>
-            <a:pPr indent="0" marL="0">
-              <a:lnSpc>
-                <a:spcPct val="140000"/>
-              </a:lnSpc>
-              <a:buNone/>
-            </a:pPr>
-            <a:r>
-              <a:rPr lang="en-US" sz="1150" dirty="0">
-                <a:solidFill>
-                  <a:srgbClr val="1A1F36"/>
-                </a:solidFill>
-                <a:latin typeface="Roboto Mono" pitchFamily="34" charset="0"/>
-                <a:ea typeface="Roboto Mono" pitchFamily="34" charset="-122"/>
-                <a:cs typeface="Roboto Mono" pitchFamily="34" charset="-120"/>
-              </a:rPr>
-              <a:t>오늘 EDA에서 발견한 규칙을 CLAUDE.md에 추가해줘.</a:t>
-            </a:r>
-            <a:endParaRPr lang="en-US" sz="1150" dirty="0"/>
-          </a:p>
-          <a:p>
-            <a:pPr indent="0" marL="0">
-              <a:lnSpc>
-                <a:spcPct val="140000"/>
-              </a:lnSpc>
-              <a:buNone/>
-            </a:pPr>
-            <a:r>
-              <a:rPr lang="en-US" sz="1150" dirty="0">
-                <a:solidFill>
-                  <a:srgbClr val="1A1F36"/>
-                </a:solidFill>
-                <a:latin typeface="Roboto Mono" pitchFamily="34" charset="0"/>
-                <a:ea typeface="Roboto Mono" pitchFamily="34" charset="-122"/>
-                <a:cs typeface="Roboto Mono" pitchFamily="34" charset="-120"/>
-              </a:rPr>
-              <a:t>- 측정일시는 항상 datetime으로 파싱</a:t>
-            </a:r>
-            <a:endParaRPr lang="en-US" sz="1150" dirty="0"/>
-          </a:p>
-          <a:p>
-            <a:pPr indent="0" marL="0">
-              <a:lnSpc>
-                <a:spcPct val="140000"/>
-              </a:lnSpc>
-              <a:buNone/>
-            </a:pPr>
-            <a:r>
-              <a:rPr lang="en-US" sz="1150" dirty="0">
-                <a:solidFill>
-                  <a:srgbClr val="1A1F36"/>
-                </a:solidFill>
-                <a:latin typeface="Roboto Mono" pitchFamily="34" charset="0"/>
-                <a:ea typeface="Roboto Mono" pitchFamily="34" charset="-122"/>
-                <a:cs typeface="Roboto Mono" pitchFamily="34" charset="-120"/>
-              </a:rPr>
-              <a:t>- 결측 50% 이상 측정소는 분석에서 제외</a:t>
-            </a:r>
-            <a:endParaRPr lang="en-US" sz="1150" dirty="0"/>
-          </a:p>
-          <a:p>
-            <a:pPr indent="0" marL="0">
-              <a:lnSpc>
-                <a:spcPct val="140000"/>
-              </a:lnSpc>
-              <a:buNone/>
-            </a:pPr>
-            <a:r>
-              <a:rPr lang="en-US" sz="1150" dirty="0">
-                <a:solidFill>
-                  <a:srgbClr val="1A1F36"/>
-                </a:solidFill>
-                <a:latin typeface="Roboto Mono" pitchFamily="34" charset="0"/>
-                <a:ea typeface="Roboto Mono" pitchFamily="34" charset="-122"/>
-                <a:cs typeface="Roboto Mono" pitchFamily="34" charset="-120"/>
-              </a:rPr>
-              <a:t>- 이상치 기준은 IQR 3배 (황사 spike는 정상값으로 인정)</a:t>
-            </a:r>
-            <a:endParaRPr lang="en-US" sz="1150" dirty="0"/>
-          </a:p>
-          <a:p>
-            <a:pPr indent="0" marL="0">
-              <a:lnSpc>
-                <a:spcPct val="140000"/>
-              </a:lnSpc>
-              <a:buNone/>
-            </a:pPr>
-            <a:r>
-              <a:rPr lang="en-US" sz="1150" dirty="0">
-                <a:solidFill>
-                  <a:srgbClr val="1A1F36"/>
-                </a:solidFill>
-                <a:latin typeface="Roboto Mono" pitchFamily="34" charset="0"/>
-                <a:ea typeface="Roboto Mono" pitchFamily="34" charset="-122"/>
-                <a:cs typeface="Roboto Mono" pitchFamily="34" charset="-120"/>
-              </a:rPr>
-              <a:t>- 황사 시즌 = 3~5월</a:t>
-            </a:r>
-            <a:endParaRPr lang="en-US" sz="1150" dirty="0"/>
-          </a:p>
-          <a:p>
-            <a:pPr indent="0" marL="0">
-              <a:lnSpc>
-                <a:spcPct val="140000"/>
-              </a:lnSpc>
-              <a:buNone/>
-            </a:pPr>
-            <a:r>
-              <a:rPr lang="en-US" sz="1150" dirty="0">
-                <a:solidFill>
-                  <a:srgbClr val="1A1F36"/>
-                </a:solidFill>
-                <a:latin typeface="Roboto Mono" pitchFamily="34" charset="0"/>
-                <a:ea typeface="Roboto Mono" pitchFamily="34" charset="-122"/>
-                <a:cs typeface="Roboto Mono" pitchFamily="34" charset="-120"/>
-              </a:rPr>
-              <a:t>- 결합 데이터는 './data/' 하위, 날짜 컬럼은 'date'로 통일</a:t>
-            </a:r>
-            <a:endParaRPr lang="en-US" sz="1150" dirty="0"/>
-          </a:p>
-          <a:p>
-            <a:pPr indent="0" marL="0">
-              <a:lnSpc>
-                <a:spcPct val="140000"/>
-              </a:lnSpc>
-              <a:buNone/>
-            </a:pPr>
-            <a:r>
-              <a:rPr lang="en-US" sz="1150" dirty="0">
-                <a:solidFill>
-                  <a:srgbClr val="1A1F36"/>
-                </a:solidFill>
-                <a:latin typeface="Roboto Mono" pitchFamily="34" charset="0"/>
-                <a:ea typeface="Roboto Mono" pitchFamily="34" charset="-122"/>
-                <a:cs typeface="Roboto Mono" pitchFamily="34" charset="-120"/>
-              </a:rPr>
-              <a:t>- 시즌별 비교 시 4분위 컬러 팔레트 통일</a:t>
-            </a:r>
-            <a:endParaRPr lang="en-US" sz="1150" dirty="0"/>
-          </a:p>
-          <a:p>
-            <a:pPr indent="0" marL="0">
-              <a:lnSpc>
-                <a:spcPct val="140000"/>
-              </a:lnSpc>
-              <a:buNone/>
-            </a:pPr>
-            <a:r>
-              <a:rPr lang="en-US" sz="1150" dirty="0">
-                <a:solidFill>
-                  <a:srgbClr val="1A1F36"/>
-                </a:solidFill>
-                <a:latin typeface="Roboto Mono" pitchFamily="34" charset="0"/>
-                <a:ea typeface="Roboto Mono" pitchFamily="34" charset="-122"/>
-                <a:cs typeface="Roboto Mono" pitchFamily="34" charset="-120"/>
-              </a:rPr>
-              <a:t>- y축 단위 항상 명시 (PM은 ㎍/㎥, 따릉이는 건, 지하철은 명)</a:t>
-            </a:r>
-            <a:endParaRPr lang="en-US" sz="1150" dirty="0"/>
-          </a:p>
-          <a:p>
-            <a:pPr indent="0" marL="0">
-              <a:lnSpc>
-                <a:spcPct val="140000"/>
-              </a:lnSpc>
-              <a:buNone/>
-            </a:pPr>
-            <a:r>
-              <a:rPr lang="en-US" sz="1150" dirty="0">
-                <a:solidFill>
-                  <a:srgbClr val="1A1F36"/>
-                </a:solidFill>
-                <a:latin typeface="Roboto Mono" pitchFamily="34" charset="0"/>
-                <a:ea typeface="Roboto Mono" pitchFamily="34" charset="-122"/>
-                <a:cs typeface="Roboto Mono" pitchFamily="34" charset="-120"/>
-              </a:rPr>
-              <a:t>기존 규칙과 중복은 합치고, 어울리는 섹션 위치에 추가해줘.</a:t>
-            </a:r>
-            <a:endParaRPr lang="en-US" sz="1150" dirty="0"/>
-          </a:p>
-        </p:txBody>
-      </p:sp>
-      <p:sp>
-        <p:nvSpPr>
-          <p:cNvPr id="9" name="Text 7"/>
           <p:cNvSpPr/>
           <p:nvPr/>
         </p:nvSpPr>
@@ -9169,7 +9191,7 @@
                 <a:ea typeface="Noto Sans KR" pitchFamily="34" charset="-122"/>
                 <a:cs typeface="Noto Sans KR" pitchFamily="34" charset="-120"/>
               </a:rPr>
-              <a:t>24 / 27</a:t>
+              <a:t>24 / 30</a:t>
             </a:r>
             <a:endParaRPr lang="en-US" sz="900" dirty="0"/>
           </a:p>
@@ -9292,7 +9314,7 @@
                 <a:ea typeface="Noto Sans KR" pitchFamily="34" charset="-122"/>
                 <a:cs typeface="Noto Sans KR" pitchFamily="34" charset="-120"/>
               </a:rPr>
-              <a:t>섹션 5 / 5</a:t>
+              <a:t>섹션 3 / 5</a:t>
             </a:r>
             <a:endParaRPr lang="en-US" sz="1100" dirty="0"/>
           </a:p>
@@ -9334,7 +9356,7 @@
                 <a:ea typeface="Noto Sans KR" pitchFamily="34" charset="-122"/>
                 <a:cs typeface="Noto Sans KR" pitchFamily="34" charset="-120"/>
               </a:rPr>
-              <a:t>산출물 정리 + 운영 채널 업로드</a:t>
+              <a:t>Colab 변형 실습</a:t>
             </a:r>
             <a:endParaRPr lang="en-US" sz="4200" dirty="0"/>
           </a:p>
@@ -9399,7 +9421,7 @@
                 <a:ea typeface="Noto Sans KR" pitchFamily="34" charset="-122"/>
                 <a:cs typeface="Noto Sans KR" pitchFamily="34" charset="-120"/>
               </a:rPr>
-              <a:t>inflearn_ccd_challenge/</a:t>
+              <a:t>· A: PM2.5 → PM10 으로 같은 분석 (오염원 차이 — 황사는 PM10만 튄다)</a:t>
             </a:r>
             <a:endParaRPr lang="en-US" sz="1700" dirty="0"/>
           </a:p>
@@ -9419,7 +9441,7 @@
                 <a:ea typeface="Noto Sans KR" pitchFamily="34" charset="-122"/>
                 <a:cs typeface="Noto Sans KR" pitchFamily="34" charset="-120"/>
               </a:rPr>
-              <a:t>├── CLAUDE.md   (1일차 그대로 + 자연어 누적 반영)</a:t>
+              <a:t>· B: 이상치 IQR 1.5배 → 3배</a:t>
             </a:r>
             <a:endParaRPr lang="en-US" sz="1700" dirty="0"/>
           </a:p>
@@ -9439,7 +9461,7 @@
                 <a:ea typeface="Noto Sans KR" pitchFamily="34" charset="-122"/>
                 <a:cs typeface="Noto Sans KR" pitchFamily="34" charset="-120"/>
               </a:rPr>
-              <a:t>├── outputs/</a:t>
+              <a:t>· C: 결합 차트 등급 임계값 변경 (좋음/보통 vs 나쁨/매우나쁨 2분류)</a:t>
             </a:r>
             <a:endParaRPr lang="en-US" sz="1700" dirty="0"/>
           </a:p>
@@ -9459,116 +9481,7 @@
                 <a:ea typeface="Noto Sans KR" pitchFamily="34" charset="-122"/>
                 <a:cs typeface="Noto Sans KR" pitchFamily="34" charset="-120"/>
               </a:rPr>
-              <a:t>│   ├── eda_summary.png</a:t>
-            </a:r>
-            <a:endParaRPr lang="en-US" sz="1700" dirty="0"/>
-          </a:p>
-          <a:p>
-            <a:pPr indent="0" marL="0">
-              <a:lnSpc>
-                <a:spcPct val="155000"/>
-              </a:lnSpc>
-              <a:buNone/>
-            </a:pPr>
-            <a:r>
-              <a:rPr lang="en-US" sz="1700" dirty="0">
-                <a:solidFill>
-                  <a:srgbClr val="4A5568"/>
-                </a:solidFill>
-                <a:latin typeface="Noto Sans KR" pitchFamily="34" charset="0"/>
-                <a:ea typeface="Noto Sans KR" pitchFamily="34" charset="-122"/>
-                <a:cs typeface="Noto Sans KR" pitchFamily="34" charset="-120"/>
-              </a:rPr>
-              <a:t>│   ├── joined_bike_vs_subway.png</a:t>
-            </a:r>
-            <a:endParaRPr lang="en-US" sz="1700" dirty="0"/>
-          </a:p>
-          <a:p>
-            <a:pPr indent="0" marL="0">
-              <a:lnSpc>
-                <a:spcPct val="155000"/>
-              </a:lnSpc>
-              <a:buNone/>
-            </a:pPr>
-            <a:r>
-              <a:rPr lang="en-US" sz="1700" dirty="0">
-                <a:solidFill>
-                  <a:srgbClr val="4A5568"/>
-                </a:solidFill>
-                <a:latin typeface="Noto Sans KR" pitchFamily="34" charset="0"/>
-                <a:ea typeface="Noto Sans KR" pitchFamily="34" charset="-122"/>
-                <a:cs typeface="Noto Sans KR" pitchFamily="34" charset="-120"/>
-              </a:rPr>
-              <a:t>│   ├── weather_corr.png</a:t>
-            </a:r>
-            <a:endParaRPr lang="en-US" sz="1700" dirty="0"/>
-          </a:p>
-          <a:p>
-            <a:pPr indent="0" marL="0">
-              <a:lnSpc>
-                <a:spcPct val="155000"/>
-              </a:lnSpc>
-              <a:buNone/>
-            </a:pPr>
-            <a:r>
-              <a:rPr lang="en-US" sz="1700" dirty="0">
-                <a:solidFill>
-                  <a:srgbClr val="4A5568"/>
-                </a:solidFill>
-                <a:latin typeface="Noto Sans KR" pitchFamily="34" charset="0"/>
-                <a:ea typeface="Noto Sans KR" pitchFamily="34" charset="-122"/>
-                <a:cs typeface="Noto Sans KR" pitchFamily="34" charset="-120"/>
-              </a:rPr>
-              <a:t>│   └── buzz_lag.png</a:t>
-            </a:r>
-            <a:endParaRPr lang="en-US" sz="1700" dirty="0"/>
-          </a:p>
-          <a:p>
-            <a:pPr indent="0" marL="0">
-              <a:lnSpc>
-                <a:spcPct val="155000"/>
-              </a:lnSpc>
-              <a:buNone/>
-            </a:pPr>
-            <a:r>
-              <a:rPr lang="en-US" sz="1700" dirty="0">
-                <a:solidFill>
-                  <a:srgbClr val="4A5568"/>
-                </a:solidFill>
-                <a:latin typeface="Noto Sans KR" pitchFamily="34" charset="0"/>
-                <a:ea typeface="Noto Sans KR" pitchFamily="34" charset="-122"/>
-                <a:cs typeface="Noto Sans KR" pitchFamily="34" charset="-120"/>
-              </a:rPr>
-              <a:t>└── notebook.ipynb</a:t>
-            </a:r>
-            <a:endParaRPr lang="en-US" sz="1700" dirty="0"/>
-          </a:p>
-          <a:p>
-            <a:pPr indent="0" marL="0">
-              <a:lnSpc>
-                <a:spcPct val="155000"/>
-              </a:lnSpc>
-              <a:buNone/>
-            </a:pPr>
-            <a:endParaRPr lang="en-US" sz="1700" dirty="0"/>
-          </a:p>
-          <a:p>
-            <a:pPr indent="0" marL="0">
-              <a:lnSpc>
-                <a:spcPct val="155000"/>
-              </a:lnSpc>
-              <a:buNone/>
-            </a:pPr>
-            <a:r>
-              <a:rPr lang="en-US" sz="1700" dirty="0">
-                <a:solidFill>
-                  <a:srgbClr val="4A5568"/>
-                </a:solidFill>
-                <a:latin typeface="Noto Sans KR" pitchFamily="34" charset="0"/>
-                <a:ea typeface="Noto Sans KR" pitchFamily="34" charset="-122"/>
-                <a:cs typeface="Noto Sans KR" pitchFamily="34" charset="-120"/>
-              </a:rPr>
-              <a:t>→ outputs/ PNG · CLAUDE.md · notebook.ipynb 를 인프런/운영 채널에 업로드</a:t>
+              <a:t>· D: 본인이 궁금한 변형</a:t>
             </a:r>
             <a:endParaRPr lang="en-US" sz="1700" dirty="0"/>
           </a:p>
@@ -9607,7 +9520,7 @@
                 <a:ea typeface="Noto Sans KR" pitchFamily="34" charset="-122"/>
                 <a:cs typeface="Noto Sans KR" pitchFamily="34" charset="-120"/>
               </a:rPr>
-              <a:t>25 / 27</a:t>
+              <a:t>25 / 30</a:t>
             </a:r>
             <a:endParaRPr lang="en-US" sz="900" dirty="0"/>
           </a:p>
@@ -9667,7 +9580,7 @@
         <p:spPr>
           <a:xfrm>
             <a:off x="548640" y="530352"/>
-            <a:ext cx="10515600" cy="502920"/>
+            <a:ext cx="10515600" cy="411480"/>
           </a:xfrm>
           <a:prstGeom prst="rect">
             <a:avLst/>
@@ -9683,7 +9596,88 @@
               <a:buNone/>
             </a:pPr>
             <a:r>
-              <a:rPr lang="en-US" sz="2600" b="1" spc="-30" kern="0" dirty="0">
+              <a:rPr lang="en-US" sz="1400" b="1" spc="50" kern="0" dirty="0">
+                <a:solidFill>
+                  <a:srgbClr val="718096"/>
+                </a:solidFill>
+                <a:latin typeface="Noto Sans KR" pitchFamily="34" charset="0"/>
+                <a:ea typeface="Noto Sans KR" pitchFamily="34" charset="-122"/>
+                <a:cs typeface="Noto Sans KR" pitchFamily="34" charset="-120"/>
+              </a:rPr>
+              <a:t>파트 3. Colab 핸들링 + CLAUDE.md 누적</a:t>
+            </a:r>
+            <a:endParaRPr lang="en-US" sz="1400" dirty="0"/>
+          </a:p>
+        </p:txBody>
+      </p:sp>
+      <p:sp>
+        <p:nvSpPr>
+          <p:cNvPr id="4" name="Text 2"/>
+          <p:cNvSpPr/>
+          <p:nvPr/>
+        </p:nvSpPr>
+        <p:spPr>
+          <a:xfrm>
+            <a:off x="548640" y="960120"/>
+            <a:ext cx="10515600" cy="292608"/>
+          </a:xfrm>
+          <a:prstGeom prst="rect">
+            <a:avLst/>
+          </a:prstGeom>
+          <a:noFill/>
+          <a:ln/>
+        </p:spPr>
+        <p:txBody>
+          <a:bodyPr wrap="square" rtlCol="0" anchor="ctr"/>
+          <a:lstStyle/>
+          <a:p>
+            <a:pPr indent="0" marL="0">
+              <a:buNone/>
+            </a:pPr>
+            <a:r>
+              <a:rPr lang="en-US" sz="1100" b="1" spc="150" kern="0" dirty="0">
+                <a:solidFill>
+                  <a:srgbClr val="00D4AA"/>
+                </a:solidFill>
+                <a:latin typeface="Noto Sans KR" pitchFamily="34" charset="0"/>
+                <a:ea typeface="Noto Sans KR" pitchFamily="34" charset="-122"/>
+                <a:cs typeface="Noto Sans KR" pitchFamily="34" charset="-120"/>
+              </a:rPr>
+              <a:t>섹션 4 / 5</a:t>
+            </a:r>
+            <a:endParaRPr lang="en-US" sz="1100" dirty="0"/>
+          </a:p>
+        </p:txBody>
+      </p:sp>
+      <p:sp>
+        <p:nvSpPr>
+          <p:cNvPr id="5" name="Text 3"/>
+          <p:cNvSpPr/>
+          <p:nvPr/>
+        </p:nvSpPr>
+        <p:spPr>
+          <a:xfrm>
+            <a:off x="548640" y="1508760"/>
+            <a:ext cx="11091672" cy="1371600"/>
+          </a:xfrm>
+          <a:prstGeom prst="rect">
+            <a:avLst/>
+          </a:prstGeom>
+          <a:noFill/>
+          <a:ln/>
+        </p:spPr>
+        <p:txBody>
+          <a:bodyPr wrap="square" rtlCol="0" anchor="t"/>
+          <a:lstStyle/>
+          <a:p>
+            <a:pPr indent="0" marL="0">
+              <a:lnSpc>
+                <a:spcPct val="110000"/>
+              </a:lnSpc>
+              <a:buNone/>
+            </a:pPr>
+            <a:r>
+              <a:rPr lang="en-US" sz="4200" b="1" spc="-50" kern="0" dirty="0">
                 <a:solidFill>
                   <a:srgbClr val="1A1F36"/>
                 </a:solidFill>
@@ -9691,79 +9685,11 @@
                 <a:ea typeface="Noto Sans KR" pitchFamily="34" charset="-122"/>
                 <a:cs typeface="Noto Sans KR" pitchFamily="34" charset="-120"/>
               </a:rPr>
-              <a:t>🎯 미션 2 — EDA + 결합 + CLAUDE.md</a:t>
-            </a:r>
-            <a:endParaRPr lang="en-US" sz="2600" dirty="0"/>
-          </a:p>
-        </p:txBody>
-      </p:sp>
-      <p:sp>
-        <p:nvSpPr>
-          <p:cNvPr id="4" name="Text 2"/>
-          <p:cNvSpPr/>
-          <p:nvPr/>
-        </p:nvSpPr>
-        <p:spPr>
-          <a:xfrm>
-            <a:off x="548640" y="1051560"/>
-            <a:ext cx="10515600" cy="347472"/>
-          </a:xfrm>
-          <a:prstGeom prst="rect">
-            <a:avLst/>
-          </a:prstGeom>
-          <a:noFill/>
-          <a:ln/>
-        </p:spPr>
-        <p:txBody>
-          <a:bodyPr wrap="square" rtlCol="0" anchor="ctr"/>
-          <a:lstStyle/>
-          <a:p>
-            <a:pPr indent="0" marL="0">
-              <a:buNone/>
-            </a:pPr>
-            <a:r>
-              <a:rPr lang="en-US" sz="1400" dirty="0">
-                <a:solidFill>
-                  <a:srgbClr val="718096"/>
-                </a:solidFill>
-                <a:latin typeface="Noto Sans KR" pitchFamily="34" charset="0"/>
-                <a:ea typeface="Noto Sans KR" pitchFamily="34" charset="-122"/>
-                <a:cs typeface="Noto Sans KR" pitchFamily="34" charset="-120"/>
-              </a:rPr>
-              <a:t>질문 5개 (단독 3 + 결합 2) + Colab + CLAUDE.md → 인프런/운영 채널 업로드</a:t>
-            </a:r>
-            <a:endParaRPr lang="en-US" sz="1400" dirty="0"/>
-          </a:p>
-        </p:txBody>
-      </p:sp>
-      <p:sp>
-        <p:nvSpPr>
-          <p:cNvPr id="5" name="Shape 3"/>
-          <p:cNvSpPr/>
-          <p:nvPr/>
-        </p:nvSpPr>
-        <p:spPr>
-          <a:xfrm>
-            <a:off x="548640" y="1554480"/>
-            <a:ext cx="5669280" cy="4572000"/>
-          </a:xfrm>
-          <a:prstGeom prst="roundRect">
-            <a:avLst>
-              <a:gd name="adj" fmla="val 2000"/>
-            </a:avLst>
-          </a:prstGeom>
-          <a:solidFill>
-            <a:srgbClr val="FFFFFF"/>
-          </a:solidFill>
-          <a:ln/>
-          <a:effectLst>
-            <a:outerShdw sx="100000" sy="100000" kx="0" ky="0" algn="bl" rotWithShape="0" blurRad="76200" dist="25400" dir="16200000">
-              <a:srgbClr val="000000">
-                <a:alpha val="8000"/>
-              </a:srgbClr>
-            </a:outerShdw>
-          </a:effectLst>
-        </p:spPr>
+              <a:t>자주 나오는 Colab 트러블</a:t>
+            </a:r>
+            <a:endParaRPr lang="en-US" sz="4200" dirty="0"/>
+          </a:p>
+        </p:txBody>
       </p:sp>
       <p:sp>
         <p:nvSpPr>
@@ -9773,193 +9699,16 @@
         </p:nvSpPr>
         <p:spPr>
           <a:xfrm>
-            <a:off x="548640" y="1554480"/>
-            <a:ext cx="5669280" cy="64008"/>
-          </a:xfrm>
-          <a:prstGeom prst="rect">
-            <a:avLst/>
-          </a:prstGeom>
-          <a:solidFill>
-            <a:srgbClr val="00D4AA"/>
-          </a:solidFill>
-          <a:ln/>
-        </p:spPr>
-      </p:sp>
-      <p:sp>
-        <p:nvSpPr>
-          <p:cNvPr id="7" name="Text 5"/>
-          <p:cNvSpPr/>
-          <p:nvPr/>
-        </p:nvSpPr>
-        <p:spPr>
-          <a:xfrm>
-            <a:off x="777240" y="1691640"/>
-            <a:ext cx="5212080" cy="365760"/>
-          </a:xfrm>
-          <a:prstGeom prst="rect">
-            <a:avLst/>
-          </a:prstGeom>
-          <a:noFill/>
-          <a:ln/>
-        </p:spPr>
-        <p:txBody>
-          <a:bodyPr wrap="square" rtlCol="0" anchor="ctr"/>
-          <a:lstStyle/>
-          <a:p>
-            <a:pPr indent="0" marL="0">
-              <a:buNone/>
-            </a:pPr>
-            <a:r>
-              <a:rPr lang="en-US" sz="1500" b="1" dirty="0">
-                <a:solidFill>
-                  <a:srgbClr val="1A1F36"/>
-                </a:solidFill>
-                <a:latin typeface="Noto Sans KR" pitchFamily="34" charset="0"/>
-                <a:ea typeface="Noto Sans KR" pitchFamily="34" charset="-122"/>
-                <a:cs typeface="Noto Sans KR" pitchFamily="34" charset="-120"/>
-              </a:rPr>
-              <a:t>필수 제출</a:t>
-            </a:r>
-            <a:endParaRPr lang="en-US" sz="1500" dirty="0"/>
-          </a:p>
-        </p:txBody>
-      </p:sp>
-      <p:sp>
-        <p:nvSpPr>
-          <p:cNvPr id="8" name="Text 6"/>
-          <p:cNvSpPr/>
-          <p:nvPr/>
-        </p:nvSpPr>
-        <p:spPr>
-          <a:xfrm>
-            <a:off x="777240" y="2148840"/>
-            <a:ext cx="5212080" cy="3840480"/>
-          </a:xfrm>
-          <a:prstGeom prst="rect">
-            <a:avLst/>
-          </a:prstGeom>
-          <a:noFill/>
-          <a:ln/>
-        </p:spPr>
-        <p:txBody>
-          <a:bodyPr wrap="square" rtlCol="0" anchor="t"/>
-          <a:lstStyle/>
-          <a:p>
-            <a:pPr indent="0" marL="0">
-              <a:lnSpc>
-                <a:spcPct val="150000"/>
-              </a:lnSpc>
-              <a:spcAft>
-                <a:spcPts val="1000"/>
-              </a:spcAft>
-              <a:buNone/>
-            </a:pPr>
-            <a:r>
-              <a:rPr lang="en-US" sz="1300" dirty="0">
-                <a:solidFill>
-                  <a:srgbClr val="4A5568"/>
-                </a:solidFill>
-                <a:latin typeface="Noto Sans KR" pitchFamily="34" charset="0"/>
-                <a:ea typeface="Noto Sans KR" pitchFamily="34" charset="-122"/>
-                <a:cs typeface="Noto Sans KR" pitchFamily="34" charset="-120"/>
-              </a:rPr>
-              <a:t>✅ 분석 질문 5개 + 결과 캡처 (단독 3 + 결합 2 권장)</a:t>
-            </a:r>
-            <a:endParaRPr lang="en-US" sz="1300" dirty="0"/>
-          </a:p>
-          <a:p>
-            <a:pPr indent="0" marL="0">
-              <a:lnSpc>
-                <a:spcPct val="150000"/>
-              </a:lnSpc>
-              <a:spcAft>
-                <a:spcPts val="1000"/>
-              </a:spcAft>
-              <a:buNone/>
-            </a:pPr>
-            <a:r>
-              <a:rPr lang="en-US" sz="1300" dirty="0">
-                <a:solidFill>
-                  <a:srgbClr val="4A5568"/>
-                </a:solidFill>
-                <a:latin typeface="Noto Sans KR" pitchFamily="34" charset="0"/>
-                <a:ea typeface="Noto Sans KR" pitchFamily="34" charset="-122"/>
-                <a:cs typeface="Noto Sans KR" pitchFamily="34" charset="-120"/>
-              </a:rPr>
-              <a:t>✅ Colab 노트북 1개 (코드 변형 흔적 포함)</a:t>
-            </a:r>
-            <a:endParaRPr lang="en-US" sz="1300" dirty="0"/>
-          </a:p>
-          <a:p>
-            <a:pPr indent="0" marL="0">
-              <a:lnSpc>
-                <a:spcPct val="150000"/>
-              </a:lnSpc>
-              <a:spcAft>
-                <a:spcPts val="1000"/>
-              </a:spcAft>
-              <a:buNone/>
-            </a:pPr>
-            <a:r>
-              <a:rPr lang="en-US" sz="1300" dirty="0">
-                <a:solidFill>
-                  <a:srgbClr val="4A5568"/>
-                </a:solidFill>
-                <a:latin typeface="Noto Sans KR" pitchFamily="34" charset="0"/>
-                <a:ea typeface="Noto Sans KR" pitchFamily="34" charset="-122"/>
-                <a:cs typeface="Noto Sans KR" pitchFamily="34" charset="-120"/>
-              </a:rPr>
-              <a:t>✅ CLAUDE.md 누적분 (자연어로 추가, 1일차 대비 +5개 이상)</a:t>
-            </a:r>
-            <a:endParaRPr lang="en-US" sz="1300" dirty="0"/>
-          </a:p>
-          <a:p>
-            <a:pPr indent="0" marL="0">
-              <a:lnSpc>
-                <a:spcPct val="150000"/>
-              </a:lnSpc>
-              <a:spcAft>
-                <a:spcPts val="1000"/>
-              </a:spcAft>
-              <a:buNone/>
-            </a:pPr>
-            <a:r>
-              <a:rPr lang="en-US" sz="1300" dirty="0">
-                <a:solidFill>
-                  <a:srgbClr val="4A5568"/>
-                </a:solidFill>
-                <a:latin typeface="Noto Sans KR" pitchFamily="34" charset="0"/>
-                <a:ea typeface="Noto Sans KR" pitchFamily="34" charset="-122"/>
-                <a:cs typeface="Noto Sans KR" pitchFamily="34" charset="-120"/>
-              </a:rPr>
-              <a:t>✅ 운영 채널 업로드 (PNG · CLAUDE.md · notebook)</a:t>
-            </a:r>
-            <a:endParaRPr lang="en-US" sz="1300" dirty="0"/>
-          </a:p>
-        </p:txBody>
-      </p:sp>
-      <p:sp>
-        <p:nvSpPr>
-          <p:cNvPr id="9" name="Shape 7"/>
-          <p:cNvSpPr/>
-          <p:nvPr/>
-        </p:nvSpPr>
-        <p:spPr>
-          <a:xfrm>
-            <a:off x="6400800" y="1554480"/>
-            <a:ext cx="5212080" cy="4572000"/>
-          </a:xfrm>
-          <a:prstGeom prst="roundRect">
-            <a:avLst>
-              <a:gd name="adj" fmla="val 2000"/>
-            </a:avLst>
-          </a:prstGeom>
-          <a:solidFill>
-            <a:srgbClr val="F5F7FA"/>
-          </a:solidFill>
-          <a:ln w="6350">
+            <a:off x="548640" y="2971800"/>
+            <a:ext cx="1828800" cy="0"/>
+          </a:xfrm>
+          <a:prstGeom prst="line">
+            <a:avLst/>
+          </a:prstGeom>
+          <a:noFill/>
+          <a:ln w="25400">
             <a:solidFill>
-              <a:srgbClr val="E2E8F0"/>
+              <a:srgbClr val="00D4AA"/>
             </a:solidFill>
             <a:prstDash val="solid"/>
           </a:ln>
@@ -9967,73 +9716,14 @@
       </p:sp>
       <p:sp>
         <p:nvSpPr>
-          <p:cNvPr id="10" name="Shape 8"/>
-          <p:cNvSpPr/>
-          <p:nvPr/>
-        </p:nvSpPr>
-        <p:spPr>
-          <a:xfrm>
-            <a:off x="6400800" y="1554480"/>
-            <a:ext cx="5212080" cy="64008"/>
-          </a:xfrm>
-          <a:prstGeom prst="rect">
-            <a:avLst/>
-          </a:prstGeom>
-          <a:solidFill>
-            <a:srgbClr val="00D4AA"/>
-          </a:solidFill>
-          <a:ln/>
-        </p:spPr>
-      </p:sp>
-      <p:sp>
-        <p:nvSpPr>
-          <p:cNvPr id="11" name="Text 9"/>
-          <p:cNvSpPr/>
-          <p:nvPr/>
-        </p:nvSpPr>
-        <p:spPr>
-          <a:xfrm>
-            <a:off x="6629400" y="1691640"/>
-            <a:ext cx="4754880" cy="365760"/>
-          </a:xfrm>
-          <a:prstGeom prst="rect">
-            <a:avLst/>
-          </a:prstGeom>
-          <a:noFill/>
-          <a:ln/>
-        </p:spPr>
-        <p:txBody>
-          <a:bodyPr wrap="square" rtlCol="0" anchor="ctr"/>
-          <a:lstStyle/>
-          <a:p>
-            <a:pPr indent="0" marL="0">
-              <a:buNone/>
-            </a:pPr>
-            <a:r>
-              <a:rPr lang="en-US" sz="1500" b="1" dirty="0">
-                <a:solidFill>
-                  <a:srgbClr val="1A1F36"/>
-                </a:solidFill>
-                <a:latin typeface="Noto Sans KR" pitchFamily="34" charset="0"/>
-                <a:ea typeface="Noto Sans KR" pitchFamily="34" charset="-122"/>
-                <a:cs typeface="Noto Sans KR" pitchFamily="34" charset="-120"/>
-              </a:rPr>
-              <a:t>선택 (보너스)</a:t>
-            </a:r>
-            <a:endParaRPr lang="en-US" sz="1500" dirty="0"/>
-          </a:p>
-        </p:txBody>
-      </p:sp>
-      <p:sp>
-        <p:nvSpPr>
-          <p:cNvPr id="12" name="Text 10"/>
-          <p:cNvSpPr/>
-          <p:nvPr/>
-        </p:nvSpPr>
-        <p:spPr>
-          <a:xfrm>
-            <a:off x="6629400" y="2148840"/>
-            <a:ext cx="4754880" cy="3840480"/>
+          <p:cNvPr id="7" name="Text 5"/>
+          <p:cNvSpPr/>
+          <p:nvPr/>
+        </p:nvSpPr>
+        <p:spPr>
+          <a:xfrm>
+            <a:off x="548640" y="3200400"/>
+            <a:ext cx="11091672" cy="2788920"/>
           </a:xfrm>
           <a:prstGeom prst="rect">
             <a:avLst/>
@@ -10047,15 +9737,12 @@
           <a:p>
             <a:pPr indent="0" marL="0">
               <a:lnSpc>
-                <a:spcPct val="150000"/>
+                <a:spcPct val="155000"/>
               </a:lnSpc>
-              <a:spcAft>
-                <a:spcPts val="1000"/>
-              </a:spcAft>
-              <a:buNone/>
-            </a:pPr>
-            <a:r>
-              <a:rPr lang="en-US" sz="1300" dirty="0">
+              <a:buNone/>
+            </a:pPr>
+            <a:r>
+              <a:rPr lang="en-US" sz="1700" dirty="0">
                 <a:solidFill>
                   <a:srgbClr val="4A5568"/>
                 </a:solidFill>
@@ -10063,22 +9750,19 @@
                 <a:ea typeface="Noto Sans KR" pitchFamily="34" charset="-122"/>
                 <a:cs typeface="Noto Sans KR" pitchFamily="34" charset="-120"/>
               </a:rPr>
-              <a:t>⭐ 답 안 되는 질문 1개 + 왜 답 못 하는지 한 줄</a:t>
-            </a:r>
-            <a:endParaRPr lang="en-US" sz="1300" dirty="0"/>
+              <a:t>· 한글 폰트 깨짐 → !apt -qq install fonts-nanum</a:t>
+            </a:r>
+            <a:endParaRPr lang="en-US" sz="1700" dirty="0"/>
           </a:p>
           <a:p>
             <a:pPr indent="0" marL="0">
               <a:lnSpc>
-                <a:spcPct val="150000"/>
+                <a:spcPct val="155000"/>
               </a:lnSpc>
-              <a:spcAft>
-                <a:spcPts val="1000"/>
-              </a:spcAft>
-              <a:buNone/>
-            </a:pPr>
-            <a:r>
-              <a:rPr lang="en-US" sz="1300" dirty="0">
+              <a:buNone/>
+            </a:pPr>
+            <a:r>
+              <a:rPr lang="en-US" sz="1700" dirty="0">
                 <a:solidFill>
                   <a:srgbClr val="4A5568"/>
                 </a:solidFill>
@@ -10086,15 +9770,55 @@
                 <a:ea typeface="Noto Sans KR" pitchFamily="34" charset="-122"/>
                 <a:cs typeface="Noto Sans KR" pitchFamily="34" charset="-120"/>
               </a:rPr>
-              <a:t>⭐ 본인 회사 데이터 결합 시도</a:t>
-            </a:r>
-            <a:endParaRPr lang="en-US" sz="1300" dirty="0"/>
-          </a:p>
-        </p:txBody>
-      </p:sp>
-      <p:sp>
-        <p:nvSpPr>
-          <p:cNvPr id="13" name="Text 11"/>
+              <a:t>· pd.to_datetime 에러 → format 명시 (format="%Y-%m-%d")</a:t>
+            </a:r>
+            <a:endParaRPr lang="en-US" sz="1700" dirty="0"/>
+          </a:p>
+          <a:p>
+            <a:pPr indent="0" marL="0">
+              <a:lnSpc>
+                <a:spcPct val="155000"/>
+              </a:lnSpc>
+              <a:buNone/>
+            </a:pPr>
+            <a:r>
+              <a:rPr lang="en-US" sz="1700" dirty="0">
+                <a:solidFill>
+                  <a:srgbClr val="4A5568"/>
+                </a:solidFill>
+                <a:latin typeface="Noto Sans KR" pitchFamily="34" charset="0"/>
+                <a:ea typeface="Noto Sans KR" pitchFamily="34" charset="-122"/>
+                <a:cs typeface="Noto Sans KR" pitchFamily="34" charset="-120"/>
+              </a:rPr>
+              <a:t>· groupby 결과가 시리즈 → .reset_index() 추가</a:t>
+            </a:r>
+            <a:endParaRPr lang="en-US" sz="1700" dirty="0"/>
+          </a:p>
+          <a:p>
+            <a:pPr indent="0" marL="0">
+              <a:lnSpc>
+                <a:spcPct val="155000"/>
+              </a:lnSpc>
+              <a:buNone/>
+            </a:pPr>
+            <a:r>
+              <a:rPr lang="en-US" sz="1700" dirty="0">
+                <a:solidFill>
+                  <a:srgbClr val="4A5568"/>
+                </a:solidFill>
+                <a:latin typeface="Noto Sans KR" pitchFamily="34" charset="0"/>
+                <a:ea typeface="Noto Sans KR" pitchFamily="34" charset="-122"/>
+                <a:cs typeface="Noto Sans KR" pitchFamily="34" charset="-120"/>
+              </a:rPr>
+              <a:t>· sns.set_theme()이 폰트 덮어씀 → set_theme 후 폰트 재지정</a:t>
+            </a:r>
+            <a:endParaRPr lang="en-US" sz="1700" dirty="0"/>
+          </a:p>
+        </p:txBody>
+      </p:sp>
+      <p:sp>
+        <p:nvSpPr>
+          <p:cNvPr id="8" name="Text 6"/>
           <p:cNvSpPr/>
           <p:nvPr/>
         </p:nvSpPr>
@@ -10125,7 +9849,7 @@
                 <a:ea typeface="Noto Sans KR" pitchFamily="34" charset="-122"/>
                 <a:cs typeface="Noto Sans KR" pitchFamily="34" charset="-120"/>
               </a:rPr>
-              <a:t>26 / 27</a:t>
+              <a:t>26 / 30</a:t>
             </a:r>
             <a:endParaRPr lang="en-US" sz="900" dirty="0"/>
           </a:p>
@@ -10164,28 +9888,8 @@
         </p:nvSpPr>
         <p:spPr>
           <a:xfrm>
-            <a:off x="0" y="0"/>
-            <a:ext cx="12192000" cy="6858000"/>
-          </a:xfrm>
-          <a:prstGeom prst="rect">
-            <a:avLst/>
-          </a:prstGeom>
-          <a:solidFill>
-            <a:srgbClr val="1A1F36"/>
-          </a:solidFill>
-          <a:ln/>
-        </p:spPr>
-      </p:sp>
-      <p:sp>
-        <p:nvSpPr>
-          <p:cNvPr id="3" name="Shape 1"/>
-          <p:cNvSpPr/>
-          <p:nvPr/>
-        </p:nvSpPr>
-        <p:spPr>
-          <a:xfrm>
-            <a:off x="0" y="0"/>
-            <a:ext cx="12192000" cy="548640"/>
+            <a:off x="548640" y="384048"/>
+            <a:ext cx="914400" cy="54864"/>
           </a:xfrm>
           <a:prstGeom prst="rect">
             <a:avLst/>
@@ -10198,14 +9902,53 @@
       </p:sp>
       <p:sp>
         <p:nvSpPr>
+          <p:cNvPr id="3" name="Text 1"/>
+          <p:cNvSpPr/>
+          <p:nvPr/>
+        </p:nvSpPr>
+        <p:spPr>
+          <a:xfrm>
+            <a:off x="548640" y="530352"/>
+            <a:ext cx="10515600" cy="411480"/>
+          </a:xfrm>
+          <a:prstGeom prst="rect">
+            <a:avLst/>
+          </a:prstGeom>
+          <a:noFill/>
+          <a:ln/>
+        </p:spPr>
+        <p:txBody>
+          <a:bodyPr wrap="square" rtlCol="0" anchor="ctr"/>
+          <a:lstStyle/>
+          <a:p>
+            <a:pPr indent="0" marL="0">
+              <a:buNone/>
+            </a:pPr>
+            <a:r>
+              <a:rPr lang="en-US" sz="1400" b="1" spc="50" kern="0" dirty="0">
+                <a:solidFill>
+                  <a:srgbClr val="718096"/>
+                </a:solidFill>
+                <a:latin typeface="Noto Sans KR" pitchFamily="34" charset="0"/>
+                <a:ea typeface="Noto Sans KR" pitchFamily="34" charset="-122"/>
+                <a:cs typeface="Noto Sans KR" pitchFamily="34" charset="-120"/>
+              </a:rPr>
+              <a:t>파트 3. Colab 핸들링 + CLAUDE.md 누적</a:t>
+            </a:r>
+            <a:endParaRPr lang="en-US" sz="1400" dirty="0"/>
+          </a:p>
+        </p:txBody>
+      </p:sp>
+      <p:sp>
+        <p:nvSpPr>
           <p:cNvPr id="4" name="Text 2"/>
           <p:cNvSpPr/>
           <p:nvPr/>
         </p:nvSpPr>
         <p:spPr>
           <a:xfrm>
-            <a:off x="731520" y="1645920"/>
-            <a:ext cx="10515600" cy="457200"/>
+            <a:off x="548640" y="960120"/>
+            <a:ext cx="11091672" cy="292608"/>
           </a:xfrm>
           <a:prstGeom prst="rect">
             <a:avLst/>
@@ -10221,7 +9964,7 @@
               <a:buNone/>
             </a:pPr>
             <a:r>
-              <a:rPr lang="en-US" sz="1400" b="1" spc="250" kern="0" dirty="0">
+              <a:rPr lang="en-US" sz="1100" b="1" spc="50" kern="0" dirty="0">
                 <a:solidFill>
                   <a:srgbClr val="00D4AA"/>
                 </a:solidFill>
@@ -10229,9 +9972,9 @@
                 <a:ea typeface="Noto Sans KR" pitchFamily="34" charset="-122"/>
                 <a:cs typeface="Noto Sans KR" pitchFamily="34" charset="-120"/>
               </a:rPr>
-              <a:t>다음 회차 사전 안내</a:t>
-            </a:r>
-            <a:endParaRPr lang="en-US" sz="1400" dirty="0"/>
+              <a:t>👉 직접 따라쳐보세요 — 본인 Claude Code에 그대로 붙여넣기</a:t>
+            </a:r>
+            <a:endParaRPr lang="en-US" sz="1100" dirty="0"/>
           </a:p>
         </p:txBody>
       </p:sp>
@@ -10243,17 +9986,17 @@
         </p:nvSpPr>
         <p:spPr>
           <a:xfrm>
-            <a:off x="731520" y="2194560"/>
-            <a:ext cx="10515600" cy="1371600"/>
-          </a:xfrm>
-          <a:prstGeom prst="rect">
-            <a:avLst/>
-          </a:prstGeom>
-          <a:noFill/>
-          <a:ln/>
-        </p:spPr>
-        <p:txBody>
-          <a:bodyPr wrap="square" rtlCol="0" anchor="ctr"/>
+            <a:off x="548640" y="1508760"/>
+            <a:ext cx="11091672" cy="1005840"/>
+          </a:xfrm>
+          <a:prstGeom prst="rect">
+            <a:avLst/>
+          </a:prstGeom>
+          <a:noFill/>
+          <a:ln/>
+        </p:spPr>
+        <p:txBody>
+          <a:bodyPr wrap="square" rtlCol="0" anchor="t"/>
           <a:lstStyle/>
           <a:p>
             <a:pPr indent="0" marL="0">
@@ -10263,105 +10006,275 @@
               <a:buNone/>
             </a:pPr>
             <a:r>
-              <a:rPr lang="en-US" sz="3800" b="1" spc="-50" kern="0" dirty="0">
-                <a:solidFill>
-                  <a:srgbClr val="FFFFFF"/>
-                </a:solidFill>
-                <a:latin typeface="Noto Sans KR" pitchFamily="34" charset="0"/>
-                <a:ea typeface="Noto Sans KR" pitchFamily="34" charset="-122"/>
-                <a:cs typeface="Noto Sans KR" pitchFamily="34" charset="-120"/>
-              </a:rPr>
-              <a:t>Day 3 — 대시보드 만들기</a:t>
-            </a:r>
-            <a:endParaRPr lang="en-US" sz="3800" dirty="0"/>
-          </a:p>
-        </p:txBody>
-      </p:sp>
-      <p:sp>
-        <p:nvSpPr>
-          <p:cNvPr id="6" name="Text 4"/>
-          <p:cNvSpPr/>
-          <p:nvPr/>
-        </p:nvSpPr>
-        <p:spPr>
-          <a:xfrm>
-            <a:off x="731520" y="4114800"/>
-            <a:ext cx="10515600" cy="1828800"/>
-          </a:xfrm>
-          <a:prstGeom prst="rect">
-            <a:avLst/>
-          </a:prstGeom>
-          <a:noFill/>
-          <a:ln/>
-        </p:spPr>
-        <p:txBody>
-          <a:bodyPr wrap="square" rtlCol="0" anchor="ctr"/>
+              <a:rPr lang="en-US" sz="3400" b="1" spc="-50" kern="0" dirty="0">
+                <a:solidFill>
+                  <a:srgbClr val="1A1F36"/>
+                </a:solidFill>
+                <a:latin typeface="Noto Sans KR" pitchFamily="34" charset="0"/>
+                <a:ea typeface="Noto Sans KR" pitchFamily="34" charset="-122"/>
+                <a:cs typeface="Noto Sans KR" pitchFamily="34" charset="-120"/>
+              </a:rPr>
+              <a:t>CLAUDE.md 누적 — 자연어로 부탁</a:t>
+            </a:r>
+            <a:endParaRPr lang="en-US" sz="3400" dirty="0"/>
+          </a:p>
+        </p:txBody>
+      </p:sp>
+      <p:sp>
+        <p:nvSpPr>
+          <p:cNvPr id="6" name="Shape 4"/>
+          <p:cNvSpPr/>
+          <p:nvPr/>
+        </p:nvSpPr>
+        <p:spPr>
+          <a:xfrm>
+            <a:off x="548640" y="2606040"/>
+            <a:ext cx="1828800" cy="0"/>
+          </a:xfrm>
+          <a:prstGeom prst="line">
+            <a:avLst/>
+          </a:prstGeom>
+          <a:noFill/>
+          <a:ln w="25400">
+            <a:solidFill>
+              <a:srgbClr val="00D4AA"/>
+            </a:solidFill>
+            <a:prstDash val="solid"/>
+          </a:ln>
+        </p:spPr>
+      </p:sp>
+      <p:sp>
+        <p:nvSpPr>
+          <p:cNvPr id="7" name="Shape 5"/>
+          <p:cNvSpPr/>
+          <p:nvPr/>
+        </p:nvSpPr>
+        <p:spPr>
+          <a:xfrm>
+            <a:off x="548640" y="2926080"/>
+            <a:ext cx="11091672" cy="3200400"/>
+          </a:xfrm>
+          <a:prstGeom prst="roundRect">
+            <a:avLst>
+              <a:gd name="adj" fmla="val 1714"/>
+            </a:avLst>
+          </a:prstGeom>
+          <a:solidFill>
+            <a:srgbClr val="F1F5F9"/>
+          </a:solidFill>
+          <a:ln w="6350">
+            <a:solidFill>
+              <a:srgbClr val="E2E8F0"/>
+            </a:solidFill>
+            <a:prstDash val="solid"/>
+          </a:ln>
+        </p:spPr>
+      </p:sp>
+      <p:sp>
+        <p:nvSpPr>
+          <p:cNvPr id="8" name="Text 6"/>
+          <p:cNvSpPr/>
+          <p:nvPr/>
+        </p:nvSpPr>
+        <p:spPr>
+          <a:xfrm>
+            <a:off x="713232" y="3035808"/>
+            <a:ext cx="10762488" cy="2980944"/>
+          </a:xfrm>
+          <a:prstGeom prst="rect">
+            <a:avLst/>
+          </a:prstGeom>
+          <a:noFill/>
+          <a:ln/>
+        </p:spPr>
+        <p:txBody>
+          <a:bodyPr wrap="square" rtlCol="0" anchor="t"/>
           <a:lstStyle/>
           <a:p>
             <a:pPr indent="0" marL="0">
               <a:lnSpc>
-                <a:spcPct val="170000"/>
+                <a:spcPct val="140000"/>
               </a:lnSpc>
               <a:buNone/>
             </a:pPr>
             <a:r>
-              <a:rPr lang="en-US" sz="1500" dirty="0">
-                <a:solidFill>
-                  <a:srgbClr val="A0AEC0"/>
-                </a:solidFill>
-                <a:latin typeface="Noto Sans KR" pitchFamily="34" charset="0"/>
-                <a:ea typeface="Noto Sans KR" pitchFamily="34" charset="-122"/>
-                <a:cs typeface="Noto Sans KR" pitchFamily="34" charset="-120"/>
-              </a:rPr>
-              <a:t>· 정적 HTML 리포트(매거진 톤) + 인터랙티브 Streamlit 둘 다</a:t>
-            </a:r>
-            <a:endParaRPr lang="en-US" sz="1500" dirty="0"/>
+              <a:rPr lang="en-US" sz="1150" dirty="0">
+                <a:solidFill>
+                  <a:srgbClr val="1A1F36"/>
+                </a:solidFill>
+                <a:latin typeface="Roboto Mono" pitchFamily="34" charset="0"/>
+                <a:ea typeface="Roboto Mono" pitchFamily="34" charset="-122"/>
+                <a:cs typeface="Roboto Mono" pitchFamily="34" charset="-120"/>
+              </a:rPr>
+              <a:t>오늘 EDA에서 발견한 규칙을 CLAUDE.md에 추가해줘.</a:t>
+            </a:r>
+            <a:endParaRPr lang="en-US" sz="1150" dirty="0"/>
           </a:p>
           <a:p>
             <a:pPr indent="0" marL="0">
               <a:lnSpc>
-                <a:spcPct val="170000"/>
+                <a:spcPct val="140000"/>
               </a:lnSpc>
               <a:buNone/>
             </a:pPr>
             <a:r>
-              <a:rPr lang="en-US" sz="1500" dirty="0">
-                <a:solidFill>
-                  <a:srgbClr val="A0AEC0"/>
-                </a:solidFill>
-                <a:latin typeface="Noto Sans KR" pitchFamily="34" charset="0"/>
-                <a:ea typeface="Noto Sans KR" pitchFamily="34" charset="-122"/>
-                <a:cs typeface="Noto Sans KR" pitchFamily="34" charset="-120"/>
-              </a:rPr>
-              <a:t>· 본인 인사이트 한 줄 메모해 오기 — "강조할 메시지가 있어야 디자인이 산다"</a:t>
-            </a:r>
-            <a:endParaRPr lang="en-US" sz="1500" dirty="0"/>
+              <a:rPr lang="en-US" sz="1150" dirty="0">
+                <a:solidFill>
+                  <a:srgbClr val="1A1F36"/>
+                </a:solidFill>
+                <a:latin typeface="Roboto Mono" pitchFamily="34" charset="0"/>
+                <a:ea typeface="Roboto Mono" pitchFamily="34" charset="-122"/>
+                <a:cs typeface="Roboto Mono" pitchFamily="34" charset="-120"/>
+              </a:rPr>
+              <a:t>- 측정일시는 항상 datetime으로 파싱</a:t>
+            </a:r>
+            <a:endParaRPr lang="en-US" sz="1150" dirty="0"/>
           </a:p>
           <a:p>
             <a:pPr indent="0" marL="0">
               <a:lnSpc>
-                <a:spcPct val="170000"/>
+                <a:spcPct val="140000"/>
               </a:lnSpc>
               <a:buNone/>
             </a:pPr>
             <a:r>
-              <a:rPr lang="en-US" sz="1500" dirty="0">
-                <a:solidFill>
-                  <a:srgbClr val="A0AEC0"/>
-                </a:solidFill>
-                <a:latin typeface="Noto Sans KR" pitchFamily="34" charset="0"/>
-                <a:ea typeface="Noto Sans KR" pitchFamily="34" charset="-122"/>
-                <a:cs typeface="Noto Sans KR" pitchFamily="34" charset="-120"/>
-              </a:rPr>
-              <a:t>· report.html 산출물이 4일차 의사결정 리포트로 이어짐</a:t>
-            </a:r>
-            <a:endParaRPr lang="en-US" sz="1500" dirty="0"/>
-          </a:p>
-        </p:txBody>
-      </p:sp>
-      <p:sp>
-        <p:nvSpPr>
-          <p:cNvPr id="7" name="Text 5"/>
+              <a:rPr lang="en-US" sz="1150" dirty="0">
+                <a:solidFill>
+                  <a:srgbClr val="1A1F36"/>
+                </a:solidFill>
+                <a:latin typeface="Roboto Mono" pitchFamily="34" charset="0"/>
+                <a:ea typeface="Roboto Mono" pitchFamily="34" charset="-122"/>
+                <a:cs typeface="Roboto Mono" pitchFamily="34" charset="-120"/>
+              </a:rPr>
+              <a:t>- 결측 50% 이상 측정소는 분석에서 제외</a:t>
+            </a:r>
+            <a:endParaRPr lang="en-US" sz="1150" dirty="0"/>
+          </a:p>
+          <a:p>
+            <a:pPr indent="0" marL="0">
+              <a:lnSpc>
+                <a:spcPct val="140000"/>
+              </a:lnSpc>
+              <a:buNone/>
+            </a:pPr>
+            <a:r>
+              <a:rPr lang="en-US" sz="1150" dirty="0">
+                <a:solidFill>
+                  <a:srgbClr val="1A1F36"/>
+                </a:solidFill>
+                <a:latin typeface="Roboto Mono" pitchFamily="34" charset="0"/>
+                <a:ea typeface="Roboto Mono" pitchFamily="34" charset="-122"/>
+                <a:cs typeface="Roboto Mono" pitchFamily="34" charset="-120"/>
+              </a:rPr>
+              <a:t>- 이상치 기준은 IQR 3배 (황사 spike는 정상값으로 인정)</a:t>
+            </a:r>
+            <a:endParaRPr lang="en-US" sz="1150" dirty="0"/>
+          </a:p>
+          <a:p>
+            <a:pPr indent="0" marL="0">
+              <a:lnSpc>
+                <a:spcPct val="140000"/>
+              </a:lnSpc>
+              <a:buNone/>
+            </a:pPr>
+            <a:r>
+              <a:rPr lang="en-US" sz="1150" dirty="0">
+                <a:solidFill>
+                  <a:srgbClr val="1A1F36"/>
+                </a:solidFill>
+                <a:latin typeface="Roboto Mono" pitchFamily="34" charset="0"/>
+                <a:ea typeface="Roboto Mono" pitchFamily="34" charset="-122"/>
+                <a:cs typeface="Roboto Mono" pitchFamily="34" charset="-120"/>
+              </a:rPr>
+              <a:t>- 황사 시즌 = 3~5월</a:t>
+            </a:r>
+            <a:endParaRPr lang="en-US" sz="1150" dirty="0"/>
+          </a:p>
+          <a:p>
+            <a:pPr indent="0" marL="0">
+              <a:lnSpc>
+                <a:spcPct val="140000"/>
+              </a:lnSpc>
+              <a:buNone/>
+            </a:pPr>
+            <a:r>
+              <a:rPr lang="en-US" sz="1150" dirty="0">
+                <a:solidFill>
+                  <a:srgbClr val="1A1F36"/>
+                </a:solidFill>
+                <a:latin typeface="Roboto Mono" pitchFamily="34" charset="0"/>
+                <a:ea typeface="Roboto Mono" pitchFamily="34" charset="-122"/>
+                <a:cs typeface="Roboto Mono" pitchFamily="34" charset="-120"/>
+              </a:rPr>
+              <a:t>- 결합 데이터는 './data/' 하위, 날짜 컬럼은 'date'로 통일</a:t>
+            </a:r>
+            <a:endParaRPr lang="en-US" sz="1150" dirty="0"/>
+          </a:p>
+          <a:p>
+            <a:pPr indent="0" marL="0">
+              <a:lnSpc>
+                <a:spcPct val="140000"/>
+              </a:lnSpc>
+              <a:buNone/>
+            </a:pPr>
+            <a:r>
+              <a:rPr lang="en-US" sz="1150" dirty="0">
+                <a:solidFill>
+                  <a:srgbClr val="1A1F36"/>
+                </a:solidFill>
+                <a:latin typeface="Roboto Mono" pitchFamily="34" charset="0"/>
+                <a:ea typeface="Roboto Mono" pitchFamily="34" charset="-122"/>
+                <a:cs typeface="Roboto Mono" pitchFamily="34" charset="-120"/>
+              </a:rPr>
+              <a:t>- 시즌별 비교 시 4분위 컬러 팔레트 통일</a:t>
+            </a:r>
+            <a:endParaRPr lang="en-US" sz="1150" dirty="0"/>
+          </a:p>
+          <a:p>
+            <a:pPr indent="0" marL="0">
+              <a:lnSpc>
+                <a:spcPct val="140000"/>
+              </a:lnSpc>
+              <a:buNone/>
+            </a:pPr>
+            <a:r>
+              <a:rPr lang="en-US" sz="1150" dirty="0">
+                <a:solidFill>
+                  <a:srgbClr val="1A1F36"/>
+                </a:solidFill>
+                <a:latin typeface="Roboto Mono" pitchFamily="34" charset="0"/>
+                <a:ea typeface="Roboto Mono" pitchFamily="34" charset="-122"/>
+                <a:cs typeface="Roboto Mono" pitchFamily="34" charset="-120"/>
+              </a:rPr>
+              <a:t>- y축 단위 항상 명시 (PM은 ㎍/㎥, 따릉이는 건, 지하철은 명)</a:t>
+            </a:r>
+            <a:endParaRPr lang="en-US" sz="1150" dirty="0"/>
+          </a:p>
+          <a:p>
+            <a:pPr indent="0" marL="0">
+              <a:lnSpc>
+                <a:spcPct val="140000"/>
+              </a:lnSpc>
+              <a:buNone/>
+            </a:pPr>
+            <a:r>
+              <a:rPr lang="en-US" sz="1150" dirty="0">
+                <a:solidFill>
+                  <a:srgbClr val="1A1F36"/>
+                </a:solidFill>
+                <a:latin typeface="Roboto Mono" pitchFamily="34" charset="0"/>
+                <a:ea typeface="Roboto Mono" pitchFamily="34" charset="-122"/>
+                <a:cs typeface="Roboto Mono" pitchFamily="34" charset="-120"/>
+              </a:rPr>
+              <a:t>기존 규칙과 중복은 합치고, 어울리는 섹션 위치에 추가해줘.</a:t>
+            </a:r>
+            <a:endParaRPr lang="en-US" sz="1150" dirty="0"/>
+          </a:p>
+        </p:txBody>
+      </p:sp>
+      <p:sp>
+        <p:nvSpPr>
+          <p:cNvPr id="9" name="Text 7"/>
           <p:cNvSpPr/>
           <p:nvPr/>
         </p:nvSpPr>
@@ -10392,7 +10305,963 @@
                 <a:ea typeface="Noto Sans KR" pitchFamily="34" charset="-122"/>
                 <a:cs typeface="Noto Sans KR" pitchFamily="34" charset="-120"/>
               </a:rPr>
-              <a:t>27 / 27</a:t>
+              <a:t>27 / 30</a:t>
+            </a:r>
+            <a:endParaRPr lang="en-US" sz="900" dirty="0"/>
+          </a:p>
+        </p:txBody>
+      </p:sp>
+    </p:spTree>
+  </p:cSld>
+  <p:clrMapOvr>
+    <a:masterClrMapping/>
+  </p:clrMapOvr>
+</p:sld>
+</file>
+
+<file path=ppt/slides/slide28.xml><?xml version="1.0" encoding="utf-8"?>
+<p:sld xmlns:a="http://schemas.openxmlformats.org/drawingml/2006/main" xmlns:r="http://schemas.openxmlformats.org/officeDocument/2006/relationships" xmlns:p="http://schemas.openxmlformats.org/presentationml/2006/main">
+  <p:cSld name="Slide 28">
+    <p:spTree>
+      <p:nvGrpSpPr>
+        <p:cNvPr id="1" name=""/>
+        <p:cNvGrpSpPr/>
+        <p:nvPr/>
+      </p:nvGrpSpPr>
+      <p:grpSpPr>
+        <a:xfrm>
+          <a:off x="0" y="0"/>
+          <a:ext cx="0" cy="0"/>
+          <a:chOff x="0" y="0"/>
+          <a:chExt cx="0" cy="0"/>
+        </a:xfrm>
+      </p:grpSpPr>
+      <p:sp>
+        <p:nvSpPr>
+          <p:cNvPr id="2" name="Shape 0"/>
+          <p:cNvSpPr/>
+          <p:nvPr/>
+        </p:nvSpPr>
+        <p:spPr>
+          <a:xfrm>
+            <a:off x="548640" y="384048"/>
+            <a:ext cx="914400" cy="54864"/>
+          </a:xfrm>
+          <a:prstGeom prst="rect">
+            <a:avLst/>
+          </a:prstGeom>
+          <a:solidFill>
+            <a:srgbClr val="00D4AA"/>
+          </a:solidFill>
+          <a:ln/>
+        </p:spPr>
+      </p:sp>
+      <p:sp>
+        <p:nvSpPr>
+          <p:cNvPr id="3" name="Text 1"/>
+          <p:cNvSpPr/>
+          <p:nvPr/>
+        </p:nvSpPr>
+        <p:spPr>
+          <a:xfrm>
+            <a:off x="548640" y="530352"/>
+            <a:ext cx="10515600" cy="411480"/>
+          </a:xfrm>
+          <a:prstGeom prst="rect">
+            <a:avLst/>
+          </a:prstGeom>
+          <a:noFill/>
+          <a:ln/>
+        </p:spPr>
+        <p:txBody>
+          <a:bodyPr wrap="square" rtlCol="0" anchor="ctr"/>
+          <a:lstStyle/>
+          <a:p>
+            <a:pPr indent="0" marL="0">
+              <a:buNone/>
+            </a:pPr>
+            <a:r>
+              <a:rPr lang="en-US" sz="1400" b="1" spc="50" kern="0" dirty="0">
+                <a:solidFill>
+                  <a:srgbClr val="718096"/>
+                </a:solidFill>
+                <a:latin typeface="Noto Sans KR" pitchFamily="34" charset="0"/>
+                <a:ea typeface="Noto Sans KR" pitchFamily="34" charset="-122"/>
+                <a:cs typeface="Noto Sans KR" pitchFamily="34" charset="-120"/>
+              </a:rPr>
+              <a:t>파트 3. Colab 핸들링 + CLAUDE.md 누적</a:t>
+            </a:r>
+            <a:endParaRPr lang="en-US" sz="1400" dirty="0"/>
+          </a:p>
+        </p:txBody>
+      </p:sp>
+      <p:sp>
+        <p:nvSpPr>
+          <p:cNvPr id="4" name="Text 2"/>
+          <p:cNvSpPr/>
+          <p:nvPr/>
+        </p:nvSpPr>
+        <p:spPr>
+          <a:xfrm>
+            <a:off x="548640" y="960120"/>
+            <a:ext cx="10515600" cy="292608"/>
+          </a:xfrm>
+          <a:prstGeom prst="rect">
+            <a:avLst/>
+          </a:prstGeom>
+          <a:noFill/>
+          <a:ln/>
+        </p:spPr>
+        <p:txBody>
+          <a:bodyPr wrap="square" rtlCol="0" anchor="ctr"/>
+          <a:lstStyle/>
+          <a:p>
+            <a:pPr indent="0" marL="0">
+              <a:buNone/>
+            </a:pPr>
+            <a:r>
+              <a:rPr lang="en-US" sz="1100" b="1" spc="150" kern="0" dirty="0">
+                <a:solidFill>
+                  <a:srgbClr val="00D4AA"/>
+                </a:solidFill>
+                <a:latin typeface="Noto Sans KR" pitchFamily="34" charset="0"/>
+                <a:ea typeface="Noto Sans KR" pitchFamily="34" charset="-122"/>
+                <a:cs typeface="Noto Sans KR" pitchFamily="34" charset="-120"/>
+              </a:rPr>
+              <a:t>섹션 5 / 5</a:t>
+            </a:r>
+            <a:endParaRPr lang="en-US" sz="1100" dirty="0"/>
+          </a:p>
+        </p:txBody>
+      </p:sp>
+      <p:sp>
+        <p:nvSpPr>
+          <p:cNvPr id="5" name="Text 3"/>
+          <p:cNvSpPr/>
+          <p:nvPr/>
+        </p:nvSpPr>
+        <p:spPr>
+          <a:xfrm>
+            <a:off x="548640" y="1508760"/>
+            <a:ext cx="11091672" cy="1371600"/>
+          </a:xfrm>
+          <a:prstGeom prst="rect">
+            <a:avLst/>
+          </a:prstGeom>
+          <a:noFill/>
+          <a:ln/>
+        </p:spPr>
+        <p:txBody>
+          <a:bodyPr wrap="square" rtlCol="0" anchor="t"/>
+          <a:lstStyle/>
+          <a:p>
+            <a:pPr indent="0" marL="0">
+              <a:lnSpc>
+                <a:spcPct val="110000"/>
+              </a:lnSpc>
+              <a:buNone/>
+            </a:pPr>
+            <a:r>
+              <a:rPr lang="en-US" sz="4200" b="1" spc="-50" kern="0" dirty="0">
+                <a:solidFill>
+                  <a:srgbClr val="1A1F36"/>
+                </a:solidFill>
+                <a:latin typeface="Noto Sans KR" pitchFamily="34" charset="0"/>
+                <a:ea typeface="Noto Sans KR" pitchFamily="34" charset="-122"/>
+                <a:cs typeface="Noto Sans KR" pitchFamily="34" charset="-120"/>
+              </a:rPr>
+              <a:t>산출물 정리 + 운영 채널 업로드</a:t>
+            </a:r>
+            <a:endParaRPr lang="en-US" sz="4200" dirty="0"/>
+          </a:p>
+        </p:txBody>
+      </p:sp>
+      <p:sp>
+        <p:nvSpPr>
+          <p:cNvPr id="6" name="Shape 4"/>
+          <p:cNvSpPr/>
+          <p:nvPr/>
+        </p:nvSpPr>
+        <p:spPr>
+          <a:xfrm>
+            <a:off x="548640" y="2971800"/>
+            <a:ext cx="1828800" cy="0"/>
+          </a:xfrm>
+          <a:prstGeom prst="line">
+            <a:avLst/>
+          </a:prstGeom>
+          <a:noFill/>
+          <a:ln w="25400">
+            <a:solidFill>
+              <a:srgbClr val="00D4AA"/>
+            </a:solidFill>
+            <a:prstDash val="solid"/>
+          </a:ln>
+        </p:spPr>
+      </p:sp>
+      <p:sp>
+        <p:nvSpPr>
+          <p:cNvPr id="7" name="Text 5"/>
+          <p:cNvSpPr/>
+          <p:nvPr/>
+        </p:nvSpPr>
+        <p:spPr>
+          <a:xfrm>
+            <a:off x="548640" y="3200400"/>
+            <a:ext cx="11091672" cy="2788920"/>
+          </a:xfrm>
+          <a:prstGeom prst="rect">
+            <a:avLst/>
+          </a:prstGeom>
+          <a:noFill/>
+          <a:ln/>
+        </p:spPr>
+        <p:txBody>
+          <a:bodyPr wrap="square" rtlCol="0" anchor="t"/>
+          <a:lstStyle/>
+          <a:p>
+            <a:pPr indent="0" marL="0">
+              <a:lnSpc>
+                <a:spcPct val="155000"/>
+              </a:lnSpc>
+              <a:buNone/>
+            </a:pPr>
+            <a:r>
+              <a:rPr lang="en-US" sz="1700" dirty="0">
+                <a:solidFill>
+                  <a:srgbClr val="4A5568"/>
+                </a:solidFill>
+                <a:latin typeface="Noto Sans KR" pitchFamily="34" charset="0"/>
+                <a:ea typeface="Noto Sans KR" pitchFamily="34" charset="-122"/>
+                <a:cs typeface="Noto Sans KR" pitchFamily="34" charset="-120"/>
+              </a:rPr>
+              <a:t>inflearn_ccd_challenge/</a:t>
+            </a:r>
+            <a:endParaRPr lang="en-US" sz="1700" dirty="0"/>
+          </a:p>
+          <a:p>
+            <a:pPr indent="0" marL="0">
+              <a:lnSpc>
+                <a:spcPct val="155000"/>
+              </a:lnSpc>
+              <a:buNone/>
+            </a:pPr>
+            <a:r>
+              <a:rPr lang="en-US" sz="1700" dirty="0">
+                <a:solidFill>
+                  <a:srgbClr val="4A5568"/>
+                </a:solidFill>
+                <a:latin typeface="Noto Sans KR" pitchFamily="34" charset="0"/>
+                <a:ea typeface="Noto Sans KR" pitchFamily="34" charset="-122"/>
+                <a:cs typeface="Noto Sans KR" pitchFamily="34" charset="-120"/>
+              </a:rPr>
+              <a:t>├── CLAUDE.md   (1일차 그대로 + 자연어 누적 반영)</a:t>
+            </a:r>
+            <a:endParaRPr lang="en-US" sz="1700" dirty="0"/>
+          </a:p>
+          <a:p>
+            <a:pPr indent="0" marL="0">
+              <a:lnSpc>
+                <a:spcPct val="155000"/>
+              </a:lnSpc>
+              <a:buNone/>
+            </a:pPr>
+            <a:r>
+              <a:rPr lang="en-US" sz="1700" dirty="0">
+                <a:solidFill>
+                  <a:srgbClr val="4A5568"/>
+                </a:solidFill>
+                <a:latin typeface="Noto Sans KR" pitchFamily="34" charset="0"/>
+                <a:ea typeface="Noto Sans KR" pitchFamily="34" charset="-122"/>
+                <a:cs typeface="Noto Sans KR" pitchFamily="34" charset="-120"/>
+              </a:rPr>
+              <a:t>├── outputs/</a:t>
+            </a:r>
+            <a:endParaRPr lang="en-US" sz="1700" dirty="0"/>
+          </a:p>
+          <a:p>
+            <a:pPr indent="0" marL="0">
+              <a:lnSpc>
+                <a:spcPct val="155000"/>
+              </a:lnSpc>
+              <a:buNone/>
+            </a:pPr>
+            <a:r>
+              <a:rPr lang="en-US" sz="1700" dirty="0">
+                <a:solidFill>
+                  <a:srgbClr val="4A5568"/>
+                </a:solidFill>
+                <a:latin typeface="Noto Sans KR" pitchFamily="34" charset="0"/>
+                <a:ea typeface="Noto Sans KR" pitchFamily="34" charset="-122"/>
+                <a:cs typeface="Noto Sans KR" pitchFamily="34" charset="-120"/>
+              </a:rPr>
+              <a:t>│   ├── eda_summary.png</a:t>
+            </a:r>
+            <a:endParaRPr lang="en-US" sz="1700" dirty="0"/>
+          </a:p>
+          <a:p>
+            <a:pPr indent="0" marL="0">
+              <a:lnSpc>
+                <a:spcPct val="155000"/>
+              </a:lnSpc>
+              <a:buNone/>
+            </a:pPr>
+            <a:r>
+              <a:rPr lang="en-US" sz="1700" dirty="0">
+                <a:solidFill>
+                  <a:srgbClr val="4A5568"/>
+                </a:solidFill>
+                <a:latin typeface="Noto Sans KR" pitchFamily="34" charset="0"/>
+                <a:ea typeface="Noto Sans KR" pitchFamily="34" charset="-122"/>
+                <a:cs typeface="Noto Sans KR" pitchFamily="34" charset="-120"/>
+              </a:rPr>
+              <a:t>│   ├── joined_bike_vs_subway.png</a:t>
+            </a:r>
+            <a:endParaRPr lang="en-US" sz="1700" dirty="0"/>
+          </a:p>
+          <a:p>
+            <a:pPr indent="0" marL="0">
+              <a:lnSpc>
+                <a:spcPct val="155000"/>
+              </a:lnSpc>
+              <a:buNone/>
+            </a:pPr>
+            <a:r>
+              <a:rPr lang="en-US" sz="1700" dirty="0">
+                <a:solidFill>
+                  <a:srgbClr val="4A5568"/>
+                </a:solidFill>
+                <a:latin typeface="Noto Sans KR" pitchFamily="34" charset="0"/>
+                <a:ea typeface="Noto Sans KR" pitchFamily="34" charset="-122"/>
+                <a:cs typeface="Noto Sans KR" pitchFamily="34" charset="-120"/>
+              </a:rPr>
+              <a:t>│   ├── weather_corr.png</a:t>
+            </a:r>
+            <a:endParaRPr lang="en-US" sz="1700" dirty="0"/>
+          </a:p>
+          <a:p>
+            <a:pPr indent="0" marL="0">
+              <a:lnSpc>
+                <a:spcPct val="155000"/>
+              </a:lnSpc>
+              <a:buNone/>
+            </a:pPr>
+            <a:r>
+              <a:rPr lang="en-US" sz="1700" dirty="0">
+                <a:solidFill>
+                  <a:srgbClr val="4A5568"/>
+                </a:solidFill>
+                <a:latin typeface="Noto Sans KR" pitchFamily="34" charset="0"/>
+                <a:ea typeface="Noto Sans KR" pitchFamily="34" charset="-122"/>
+                <a:cs typeface="Noto Sans KR" pitchFamily="34" charset="-120"/>
+              </a:rPr>
+              <a:t>│   └── buzz_lag.png</a:t>
+            </a:r>
+            <a:endParaRPr lang="en-US" sz="1700" dirty="0"/>
+          </a:p>
+          <a:p>
+            <a:pPr indent="0" marL="0">
+              <a:lnSpc>
+                <a:spcPct val="155000"/>
+              </a:lnSpc>
+              <a:buNone/>
+            </a:pPr>
+            <a:r>
+              <a:rPr lang="en-US" sz="1700" dirty="0">
+                <a:solidFill>
+                  <a:srgbClr val="4A5568"/>
+                </a:solidFill>
+                <a:latin typeface="Noto Sans KR" pitchFamily="34" charset="0"/>
+                <a:ea typeface="Noto Sans KR" pitchFamily="34" charset="-122"/>
+                <a:cs typeface="Noto Sans KR" pitchFamily="34" charset="-120"/>
+              </a:rPr>
+              <a:t>└── notebook.ipynb</a:t>
+            </a:r>
+            <a:endParaRPr lang="en-US" sz="1700" dirty="0"/>
+          </a:p>
+          <a:p>
+            <a:pPr indent="0" marL="0">
+              <a:lnSpc>
+                <a:spcPct val="155000"/>
+              </a:lnSpc>
+              <a:buNone/>
+            </a:pPr>
+            <a:endParaRPr lang="en-US" sz="1700" dirty="0"/>
+          </a:p>
+          <a:p>
+            <a:pPr indent="0" marL="0">
+              <a:lnSpc>
+                <a:spcPct val="155000"/>
+              </a:lnSpc>
+              <a:buNone/>
+            </a:pPr>
+            <a:r>
+              <a:rPr lang="en-US" sz="1700" dirty="0">
+                <a:solidFill>
+                  <a:srgbClr val="4A5568"/>
+                </a:solidFill>
+                <a:latin typeface="Noto Sans KR" pitchFamily="34" charset="0"/>
+                <a:ea typeface="Noto Sans KR" pitchFamily="34" charset="-122"/>
+                <a:cs typeface="Noto Sans KR" pitchFamily="34" charset="-120"/>
+              </a:rPr>
+              <a:t>→ outputs/ PNG · CLAUDE.md · notebook.ipynb 를 인프런/운영 채널에 업로드</a:t>
+            </a:r>
+            <a:endParaRPr lang="en-US" sz="1700" dirty="0"/>
+          </a:p>
+        </p:txBody>
+      </p:sp>
+      <p:sp>
+        <p:nvSpPr>
+          <p:cNvPr id="8" name="Text 6"/>
+          <p:cNvSpPr/>
+          <p:nvPr/>
+        </p:nvSpPr>
+        <p:spPr>
+          <a:xfrm>
+            <a:off x="10972800" y="6446520"/>
+            <a:ext cx="1005840" cy="256032"/>
+          </a:xfrm>
+          <a:prstGeom prst="rect">
+            <a:avLst/>
+          </a:prstGeom>
+          <a:noFill/>
+          <a:ln/>
+        </p:spPr>
+        <p:txBody>
+          <a:bodyPr wrap="square" rtlCol="0" anchor="ctr"/>
+          <a:lstStyle/>
+          <a:p>
+            <a:pPr algn="r" indent="0" marL="0">
+              <a:buNone/>
+            </a:pPr>
+            <a:r>
+              <a:rPr lang="en-US" sz="900" dirty="0">
+                <a:solidFill>
+                  <a:srgbClr val="718096"/>
+                </a:solidFill>
+                <a:latin typeface="Noto Sans KR" pitchFamily="34" charset="0"/>
+                <a:ea typeface="Noto Sans KR" pitchFamily="34" charset="-122"/>
+                <a:cs typeface="Noto Sans KR" pitchFamily="34" charset="-120"/>
+              </a:rPr>
+              <a:t>28 / 30</a:t>
+            </a:r>
+            <a:endParaRPr lang="en-US" sz="900" dirty="0"/>
+          </a:p>
+        </p:txBody>
+      </p:sp>
+    </p:spTree>
+  </p:cSld>
+  <p:clrMapOvr>
+    <a:masterClrMapping/>
+  </p:clrMapOvr>
+</p:sld>
+</file>
+
+<file path=ppt/slides/slide29.xml><?xml version="1.0" encoding="utf-8"?>
+<p:sld xmlns:a="http://schemas.openxmlformats.org/drawingml/2006/main" xmlns:r="http://schemas.openxmlformats.org/officeDocument/2006/relationships" xmlns:p="http://schemas.openxmlformats.org/presentationml/2006/main">
+  <p:cSld name="Slide 29">
+    <p:spTree>
+      <p:nvGrpSpPr>
+        <p:cNvPr id="1" name=""/>
+        <p:cNvGrpSpPr/>
+        <p:nvPr/>
+      </p:nvGrpSpPr>
+      <p:grpSpPr>
+        <a:xfrm>
+          <a:off x="0" y="0"/>
+          <a:ext cx="0" cy="0"/>
+          <a:chOff x="0" y="0"/>
+          <a:chExt cx="0" cy="0"/>
+        </a:xfrm>
+      </p:grpSpPr>
+      <p:sp>
+        <p:nvSpPr>
+          <p:cNvPr id="2" name="Shape 0"/>
+          <p:cNvSpPr/>
+          <p:nvPr/>
+        </p:nvSpPr>
+        <p:spPr>
+          <a:xfrm>
+            <a:off x="548640" y="384048"/>
+            <a:ext cx="914400" cy="54864"/>
+          </a:xfrm>
+          <a:prstGeom prst="rect">
+            <a:avLst/>
+          </a:prstGeom>
+          <a:solidFill>
+            <a:srgbClr val="00D4AA"/>
+          </a:solidFill>
+          <a:ln/>
+        </p:spPr>
+      </p:sp>
+      <p:sp>
+        <p:nvSpPr>
+          <p:cNvPr id="3" name="Text 1"/>
+          <p:cNvSpPr/>
+          <p:nvPr/>
+        </p:nvSpPr>
+        <p:spPr>
+          <a:xfrm>
+            <a:off x="548640" y="530352"/>
+            <a:ext cx="10515600" cy="502920"/>
+          </a:xfrm>
+          <a:prstGeom prst="rect">
+            <a:avLst/>
+          </a:prstGeom>
+          <a:noFill/>
+          <a:ln/>
+        </p:spPr>
+        <p:txBody>
+          <a:bodyPr wrap="square" rtlCol="0" anchor="ctr"/>
+          <a:lstStyle/>
+          <a:p>
+            <a:pPr indent="0" marL="0">
+              <a:buNone/>
+            </a:pPr>
+            <a:r>
+              <a:rPr lang="en-US" sz="2600" b="1" spc="-30" kern="0" dirty="0">
+                <a:solidFill>
+                  <a:srgbClr val="1A1F36"/>
+                </a:solidFill>
+                <a:latin typeface="Noto Sans KR" pitchFamily="34" charset="0"/>
+                <a:ea typeface="Noto Sans KR" pitchFamily="34" charset="-122"/>
+                <a:cs typeface="Noto Sans KR" pitchFamily="34" charset="-120"/>
+              </a:rPr>
+              <a:t>🎯 미션 2 — EDA + 결합 + CLAUDE.md</a:t>
+            </a:r>
+            <a:endParaRPr lang="en-US" sz="2600" dirty="0"/>
+          </a:p>
+        </p:txBody>
+      </p:sp>
+      <p:sp>
+        <p:nvSpPr>
+          <p:cNvPr id="4" name="Text 2"/>
+          <p:cNvSpPr/>
+          <p:nvPr/>
+        </p:nvSpPr>
+        <p:spPr>
+          <a:xfrm>
+            <a:off x="548640" y="1051560"/>
+            <a:ext cx="10515600" cy="347472"/>
+          </a:xfrm>
+          <a:prstGeom prst="rect">
+            <a:avLst/>
+          </a:prstGeom>
+          <a:noFill/>
+          <a:ln/>
+        </p:spPr>
+        <p:txBody>
+          <a:bodyPr wrap="square" rtlCol="0" anchor="ctr"/>
+          <a:lstStyle/>
+          <a:p>
+            <a:pPr indent="0" marL="0">
+              <a:buNone/>
+            </a:pPr>
+            <a:r>
+              <a:rPr lang="en-US" sz="1400" dirty="0">
+                <a:solidFill>
+                  <a:srgbClr val="718096"/>
+                </a:solidFill>
+                <a:latin typeface="Noto Sans KR" pitchFamily="34" charset="0"/>
+                <a:ea typeface="Noto Sans KR" pitchFamily="34" charset="-122"/>
+                <a:cs typeface="Noto Sans KR" pitchFamily="34" charset="-120"/>
+              </a:rPr>
+              <a:t>질문 5개 (단독 3 + 결합 2) + Colab + CLAUDE.md → 인프런/운영 채널 업로드</a:t>
+            </a:r>
+            <a:endParaRPr lang="en-US" sz="1400" dirty="0"/>
+          </a:p>
+        </p:txBody>
+      </p:sp>
+      <p:sp>
+        <p:nvSpPr>
+          <p:cNvPr id="5" name="Shape 3"/>
+          <p:cNvSpPr/>
+          <p:nvPr/>
+        </p:nvSpPr>
+        <p:spPr>
+          <a:xfrm>
+            <a:off x="548640" y="1554480"/>
+            <a:ext cx="5669280" cy="4572000"/>
+          </a:xfrm>
+          <a:prstGeom prst="roundRect">
+            <a:avLst>
+              <a:gd name="adj" fmla="val 2000"/>
+            </a:avLst>
+          </a:prstGeom>
+          <a:solidFill>
+            <a:srgbClr val="FFFFFF"/>
+          </a:solidFill>
+          <a:ln/>
+          <a:effectLst>
+            <a:outerShdw sx="100000" sy="100000" kx="0" ky="0" algn="bl" rotWithShape="0" blurRad="76200" dist="25400" dir="16200000">
+              <a:srgbClr val="000000">
+                <a:alpha val="8000"/>
+              </a:srgbClr>
+            </a:outerShdw>
+          </a:effectLst>
+        </p:spPr>
+      </p:sp>
+      <p:sp>
+        <p:nvSpPr>
+          <p:cNvPr id="6" name="Shape 4"/>
+          <p:cNvSpPr/>
+          <p:nvPr/>
+        </p:nvSpPr>
+        <p:spPr>
+          <a:xfrm>
+            <a:off x="548640" y="1554480"/>
+            <a:ext cx="5669280" cy="64008"/>
+          </a:xfrm>
+          <a:prstGeom prst="rect">
+            <a:avLst/>
+          </a:prstGeom>
+          <a:solidFill>
+            <a:srgbClr val="00D4AA"/>
+          </a:solidFill>
+          <a:ln/>
+        </p:spPr>
+      </p:sp>
+      <p:sp>
+        <p:nvSpPr>
+          <p:cNvPr id="7" name="Text 5"/>
+          <p:cNvSpPr/>
+          <p:nvPr/>
+        </p:nvSpPr>
+        <p:spPr>
+          <a:xfrm>
+            <a:off x="777240" y="1691640"/>
+            <a:ext cx="5212080" cy="365760"/>
+          </a:xfrm>
+          <a:prstGeom prst="rect">
+            <a:avLst/>
+          </a:prstGeom>
+          <a:noFill/>
+          <a:ln/>
+        </p:spPr>
+        <p:txBody>
+          <a:bodyPr wrap="square" rtlCol="0" anchor="ctr"/>
+          <a:lstStyle/>
+          <a:p>
+            <a:pPr indent="0" marL="0">
+              <a:buNone/>
+            </a:pPr>
+            <a:r>
+              <a:rPr lang="en-US" sz="1500" b="1" dirty="0">
+                <a:solidFill>
+                  <a:srgbClr val="1A1F36"/>
+                </a:solidFill>
+                <a:latin typeface="Noto Sans KR" pitchFamily="34" charset="0"/>
+                <a:ea typeface="Noto Sans KR" pitchFamily="34" charset="-122"/>
+                <a:cs typeface="Noto Sans KR" pitchFamily="34" charset="-120"/>
+              </a:rPr>
+              <a:t>필수 제출</a:t>
+            </a:r>
+            <a:endParaRPr lang="en-US" sz="1500" dirty="0"/>
+          </a:p>
+        </p:txBody>
+      </p:sp>
+      <p:sp>
+        <p:nvSpPr>
+          <p:cNvPr id="8" name="Text 6"/>
+          <p:cNvSpPr/>
+          <p:nvPr/>
+        </p:nvSpPr>
+        <p:spPr>
+          <a:xfrm>
+            <a:off x="777240" y="2148840"/>
+            <a:ext cx="5212080" cy="3840480"/>
+          </a:xfrm>
+          <a:prstGeom prst="rect">
+            <a:avLst/>
+          </a:prstGeom>
+          <a:noFill/>
+          <a:ln/>
+        </p:spPr>
+        <p:txBody>
+          <a:bodyPr wrap="square" rtlCol="0" anchor="t"/>
+          <a:lstStyle/>
+          <a:p>
+            <a:pPr indent="0" marL="0">
+              <a:lnSpc>
+                <a:spcPct val="150000"/>
+              </a:lnSpc>
+              <a:spcAft>
+                <a:spcPts val="1000"/>
+              </a:spcAft>
+              <a:buNone/>
+            </a:pPr>
+            <a:r>
+              <a:rPr lang="en-US" sz="1300" dirty="0">
+                <a:solidFill>
+                  <a:srgbClr val="4A5568"/>
+                </a:solidFill>
+                <a:latin typeface="Noto Sans KR" pitchFamily="34" charset="0"/>
+                <a:ea typeface="Noto Sans KR" pitchFamily="34" charset="-122"/>
+                <a:cs typeface="Noto Sans KR" pitchFamily="34" charset="-120"/>
+              </a:rPr>
+              <a:t>✅ 분석 질문 5개 + 결과 캡처 (단독 3 + 결합 2 권장)</a:t>
+            </a:r>
+            <a:endParaRPr lang="en-US" sz="1300" dirty="0"/>
+          </a:p>
+          <a:p>
+            <a:pPr indent="0" marL="0">
+              <a:lnSpc>
+                <a:spcPct val="150000"/>
+              </a:lnSpc>
+              <a:spcAft>
+                <a:spcPts val="1000"/>
+              </a:spcAft>
+              <a:buNone/>
+            </a:pPr>
+            <a:r>
+              <a:rPr lang="en-US" sz="1300" dirty="0">
+                <a:solidFill>
+                  <a:srgbClr val="4A5568"/>
+                </a:solidFill>
+                <a:latin typeface="Noto Sans KR" pitchFamily="34" charset="0"/>
+                <a:ea typeface="Noto Sans KR" pitchFamily="34" charset="-122"/>
+                <a:cs typeface="Noto Sans KR" pitchFamily="34" charset="-120"/>
+              </a:rPr>
+              <a:t>✅ Colab 노트북 1개 (코드 변형 흔적 포함)</a:t>
+            </a:r>
+            <a:endParaRPr lang="en-US" sz="1300" dirty="0"/>
+          </a:p>
+          <a:p>
+            <a:pPr indent="0" marL="0">
+              <a:lnSpc>
+                <a:spcPct val="150000"/>
+              </a:lnSpc>
+              <a:spcAft>
+                <a:spcPts val="1000"/>
+              </a:spcAft>
+              <a:buNone/>
+            </a:pPr>
+            <a:r>
+              <a:rPr lang="en-US" sz="1300" dirty="0">
+                <a:solidFill>
+                  <a:srgbClr val="4A5568"/>
+                </a:solidFill>
+                <a:latin typeface="Noto Sans KR" pitchFamily="34" charset="0"/>
+                <a:ea typeface="Noto Sans KR" pitchFamily="34" charset="-122"/>
+                <a:cs typeface="Noto Sans KR" pitchFamily="34" charset="-120"/>
+              </a:rPr>
+              <a:t>✅ CLAUDE.md 누적분 (자연어로 추가, 1일차 대비 +5개 이상)</a:t>
+            </a:r>
+            <a:endParaRPr lang="en-US" sz="1300" dirty="0"/>
+          </a:p>
+          <a:p>
+            <a:pPr indent="0" marL="0">
+              <a:lnSpc>
+                <a:spcPct val="150000"/>
+              </a:lnSpc>
+              <a:spcAft>
+                <a:spcPts val="1000"/>
+              </a:spcAft>
+              <a:buNone/>
+            </a:pPr>
+            <a:r>
+              <a:rPr lang="en-US" sz="1300" dirty="0">
+                <a:solidFill>
+                  <a:srgbClr val="4A5568"/>
+                </a:solidFill>
+                <a:latin typeface="Noto Sans KR" pitchFamily="34" charset="0"/>
+                <a:ea typeface="Noto Sans KR" pitchFamily="34" charset="-122"/>
+                <a:cs typeface="Noto Sans KR" pitchFamily="34" charset="-120"/>
+              </a:rPr>
+              <a:t>✅ 운영 채널 업로드 (PNG · CLAUDE.md · notebook)</a:t>
+            </a:r>
+            <a:endParaRPr lang="en-US" sz="1300" dirty="0"/>
+          </a:p>
+        </p:txBody>
+      </p:sp>
+      <p:sp>
+        <p:nvSpPr>
+          <p:cNvPr id="9" name="Shape 7"/>
+          <p:cNvSpPr/>
+          <p:nvPr/>
+        </p:nvSpPr>
+        <p:spPr>
+          <a:xfrm>
+            <a:off x="6400800" y="1554480"/>
+            <a:ext cx="5212080" cy="4572000"/>
+          </a:xfrm>
+          <a:prstGeom prst="roundRect">
+            <a:avLst>
+              <a:gd name="adj" fmla="val 2000"/>
+            </a:avLst>
+          </a:prstGeom>
+          <a:solidFill>
+            <a:srgbClr val="F5F7FA"/>
+          </a:solidFill>
+          <a:ln w="6350">
+            <a:solidFill>
+              <a:srgbClr val="E2E8F0"/>
+            </a:solidFill>
+            <a:prstDash val="solid"/>
+          </a:ln>
+        </p:spPr>
+      </p:sp>
+      <p:sp>
+        <p:nvSpPr>
+          <p:cNvPr id="10" name="Shape 8"/>
+          <p:cNvSpPr/>
+          <p:nvPr/>
+        </p:nvSpPr>
+        <p:spPr>
+          <a:xfrm>
+            <a:off x="6400800" y="1554480"/>
+            <a:ext cx="5212080" cy="64008"/>
+          </a:xfrm>
+          <a:prstGeom prst="rect">
+            <a:avLst/>
+          </a:prstGeom>
+          <a:solidFill>
+            <a:srgbClr val="00D4AA"/>
+          </a:solidFill>
+          <a:ln/>
+        </p:spPr>
+      </p:sp>
+      <p:sp>
+        <p:nvSpPr>
+          <p:cNvPr id="11" name="Text 9"/>
+          <p:cNvSpPr/>
+          <p:nvPr/>
+        </p:nvSpPr>
+        <p:spPr>
+          <a:xfrm>
+            <a:off x="6629400" y="1691640"/>
+            <a:ext cx="4754880" cy="365760"/>
+          </a:xfrm>
+          <a:prstGeom prst="rect">
+            <a:avLst/>
+          </a:prstGeom>
+          <a:noFill/>
+          <a:ln/>
+        </p:spPr>
+        <p:txBody>
+          <a:bodyPr wrap="square" rtlCol="0" anchor="ctr"/>
+          <a:lstStyle/>
+          <a:p>
+            <a:pPr indent="0" marL="0">
+              <a:buNone/>
+            </a:pPr>
+            <a:r>
+              <a:rPr lang="en-US" sz="1500" b="1" dirty="0">
+                <a:solidFill>
+                  <a:srgbClr val="1A1F36"/>
+                </a:solidFill>
+                <a:latin typeface="Noto Sans KR" pitchFamily="34" charset="0"/>
+                <a:ea typeface="Noto Sans KR" pitchFamily="34" charset="-122"/>
+                <a:cs typeface="Noto Sans KR" pitchFamily="34" charset="-120"/>
+              </a:rPr>
+              <a:t>선택 (보너스)</a:t>
+            </a:r>
+            <a:endParaRPr lang="en-US" sz="1500" dirty="0"/>
+          </a:p>
+        </p:txBody>
+      </p:sp>
+      <p:sp>
+        <p:nvSpPr>
+          <p:cNvPr id="12" name="Text 10"/>
+          <p:cNvSpPr/>
+          <p:nvPr/>
+        </p:nvSpPr>
+        <p:spPr>
+          <a:xfrm>
+            <a:off x="6629400" y="2148840"/>
+            <a:ext cx="4754880" cy="3840480"/>
+          </a:xfrm>
+          <a:prstGeom prst="rect">
+            <a:avLst/>
+          </a:prstGeom>
+          <a:noFill/>
+          <a:ln/>
+        </p:spPr>
+        <p:txBody>
+          <a:bodyPr wrap="square" rtlCol="0" anchor="t"/>
+          <a:lstStyle/>
+          <a:p>
+            <a:pPr indent="0" marL="0">
+              <a:lnSpc>
+                <a:spcPct val="150000"/>
+              </a:lnSpc>
+              <a:spcAft>
+                <a:spcPts val="1000"/>
+              </a:spcAft>
+              <a:buNone/>
+            </a:pPr>
+            <a:r>
+              <a:rPr lang="en-US" sz="1300" dirty="0">
+                <a:solidFill>
+                  <a:srgbClr val="4A5568"/>
+                </a:solidFill>
+                <a:latin typeface="Noto Sans KR" pitchFamily="34" charset="0"/>
+                <a:ea typeface="Noto Sans KR" pitchFamily="34" charset="-122"/>
+                <a:cs typeface="Noto Sans KR" pitchFamily="34" charset="-120"/>
+              </a:rPr>
+              <a:t>⭐ 답 안 되는 질문 1개 + 왜 답 못 하는지 한 줄</a:t>
+            </a:r>
+            <a:endParaRPr lang="en-US" sz="1300" dirty="0"/>
+          </a:p>
+          <a:p>
+            <a:pPr indent="0" marL="0">
+              <a:lnSpc>
+                <a:spcPct val="150000"/>
+              </a:lnSpc>
+              <a:spcAft>
+                <a:spcPts val="1000"/>
+              </a:spcAft>
+              <a:buNone/>
+            </a:pPr>
+            <a:r>
+              <a:rPr lang="en-US" sz="1300" dirty="0">
+                <a:solidFill>
+                  <a:srgbClr val="4A5568"/>
+                </a:solidFill>
+                <a:latin typeface="Noto Sans KR" pitchFamily="34" charset="0"/>
+                <a:ea typeface="Noto Sans KR" pitchFamily="34" charset="-122"/>
+                <a:cs typeface="Noto Sans KR" pitchFamily="34" charset="-120"/>
+              </a:rPr>
+              <a:t>⭐ 본인 회사 데이터 결합 시도</a:t>
+            </a:r>
+            <a:endParaRPr lang="en-US" sz="1300" dirty="0"/>
+          </a:p>
+        </p:txBody>
+      </p:sp>
+      <p:sp>
+        <p:nvSpPr>
+          <p:cNvPr id="13" name="Text 11"/>
+          <p:cNvSpPr/>
+          <p:nvPr/>
+        </p:nvSpPr>
+        <p:spPr>
+          <a:xfrm>
+            <a:off x="10972800" y="6446520"/>
+            <a:ext cx="1005840" cy="256032"/>
+          </a:xfrm>
+          <a:prstGeom prst="rect">
+            <a:avLst/>
+          </a:prstGeom>
+          <a:noFill/>
+          <a:ln/>
+        </p:spPr>
+        <p:txBody>
+          <a:bodyPr wrap="square" rtlCol="0" anchor="ctr"/>
+          <a:lstStyle/>
+          <a:p>
+            <a:pPr algn="r" indent="0" marL="0">
+              <a:buNone/>
+            </a:pPr>
+            <a:r>
+              <a:rPr lang="en-US" sz="900" dirty="0">
+                <a:solidFill>
+                  <a:srgbClr val="718096"/>
+                </a:solidFill>
+                <a:latin typeface="Noto Sans KR" pitchFamily="34" charset="0"/>
+                <a:ea typeface="Noto Sans KR" pitchFamily="34" charset="-122"/>
+                <a:cs typeface="Noto Sans KR" pitchFamily="34" charset="-120"/>
+              </a:rPr>
+              <a:t>29 / 30</a:t>
             </a:r>
             <a:endParaRPr lang="en-US" sz="900" dirty="0"/>
           </a:p>
@@ -11510,7 +12379,274 @@
                 <a:ea typeface="Noto Sans KR" pitchFamily="34" charset="-122"/>
                 <a:cs typeface="Noto Sans KR" pitchFamily="34" charset="-120"/>
               </a:rPr>
-              <a:t>3 / 27</a:t>
+              <a:t>3 / 30</a:t>
+            </a:r>
+            <a:endParaRPr lang="en-US" sz="900" dirty="0"/>
+          </a:p>
+        </p:txBody>
+      </p:sp>
+    </p:spTree>
+  </p:cSld>
+  <p:clrMapOvr>
+    <a:masterClrMapping/>
+  </p:clrMapOvr>
+</p:sld>
+</file>
+
+<file path=ppt/slides/slide30.xml><?xml version="1.0" encoding="utf-8"?>
+<p:sld xmlns:a="http://schemas.openxmlformats.org/drawingml/2006/main" xmlns:r="http://schemas.openxmlformats.org/officeDocument/2006/relationships" xmlns:p="http://schemas.openxmlformats.org/presentationml/2006/main">
+  <p:cSld name="Slide 30">
+    <p:spTree>
+      <p:nvGrpSpPr>
+        <p:cNvPr id="1" name=""/>
+        <p:cNvGrpSpPr/>
+        <p:nvPr/>
+      </p:nvGrpSpPr>
+      <p:grpSpPr>
+        <a:xfrm>
+          <a:off x="0" y="0"/>
+          <a:ext cx="0" cy="0"/>
+          <a:chOff x="0" y="0"/>
+          <a:chExt cx="0" cy="0"/>
+        </a:xfrm>
+      </p:grpSpPr>
+      <p:sp>
+        <p:nvSpPr>
+          <p:cNvPr id="2" name="Shape 0"/>
+          <p:cNvSpPr/>
+          <p:nvPr/>
+        </p:nvSpPr>
+        <p:spPr>
+          <a:xfrm>
+            <a:off x="0" y="0"/>
+            <a:ext cx="12192000" cy="6858000"/>
+          </a:xfrm>
+          <a:prstGeom prst="rect">
+            <a:avLst/>
+          </a:prstGeom>
+          <a:solidFill>
+            <a:srgbClr val="1A1F36"/>
+          </a:solidFill>
+          <a:ln/>
+        </p:spPr>
+      </p:sp>
+      <p:sp>
+        <p:nvSpPr>
+          <p:cNvPr id="3" name="Shape 1"/>
+          <p:cNvSpPr/>
+          <p:nvPr/>
+        </p:nvSpPr>
+        <p:spPr>
+          <a:xfrm>
+            <a:off x="0" y="0"/>
+            <a:ext cx="12192000" cy="548640"/>
+          </a:xfrm>
+          <a:prstGeom prst="rect">
+            <a:avLst/>
+          </a:prstGeom>
+          <a:solidFill>
+            <a:srgbClr val="00D4AA"/>
+          </a:solidFill>
+          <a:ln/>
+        </p:spPr>
+      </p:sp>
+      <p:sp>
+        <p:nvSpPr>
+          <p:cNvPr id="4" name="Text 2"/>
+          <p:cNvSpPr/>
+          <p:nvPr/>
+        </p:nvSpPr>
+        <p:spPr>
+          <a:xfrm>
+            <a:off x="731520" y="1645920"/>
+            <a:ext cx="10515600" cy="457200"/>
+          </a:xfrm>
+          <a:prstGeom prst="rect">
+            <a:avLst/>
+          </a:prstGeom>
+          <a:noFill/>
+          <a:ln/>
+        </p:spPr>
+        <p:txBody>
+          <a:bodyPr wrap="square" rtlCol="0" anchor="ctr"/>
+          <a:lstStyle/>
+          <a:p>
+            <a:pPr indent="0" marL="0">
+              <a:buNone/>
+            </a:pPr>
+            <a:r>
+              <a:rPr lang="en-US" sz="1400" b="1" spc="250" kern="0" dirty="0">
+                <a:solidFill>
+                  <a:srgbClr val="00D4AA"/>
+                </a:solidFill>
+                <a:latin typeface="Noto Sans KR" pitchFamily="34" charset="0"/>
+                <a:ea typeface="Noto Sans KR" pitchFamily="34" charset="-122"/>
+                <a:cs typeface="Noto Sans KR" pitchFamily="34" charset="-120"/>
+              </a:rPr>
+              <a:t>다음 회차 사전 안내</a:t>
+            </a:r>
+            <a:endParaRPr lang="en-US" sz="1400" dirty="0"/>
+          </a:p>
+        </p:txBody>
+      </p:sp>
+      <p:sp>
+        <p:nvSpPr>
+          <p:cNvPr id="5" name="Text 3"/>
+          <p:cNvSpPr/>
+          <p:nvPr/>
+        </p:nvSpPr>
+        <p:spPr>
+          <a:xfrm>
+            <a:off x="731520" y="2194560"/>
+            <a:ext cx="10515600" cy="1371600"/>
+          </a:xfrm>
+          <a:prstGeom prst="rect">
+            <a:avLst/>
+          </a:prstGeom>
+          <a:noFill/>
+          <a:ln/>
+        </p:spPr>
+        <p:txBody>
+          <a:bodyPr wrap="square" rtlCol="0" anchor="ctr"/>
+          <a:lstStyle/>
+          <a:p>
+            <a:pPr indent="0" marL="0">
+              <a:lnSpc>
+                <a:spcPct val="115000"/>
+              </a:lnSpc>
+              <a:buNone/>
+            </a:pPr>
+            <a:r>
+              <a:rPr lang="en-US" sz="3800" b="1" spc="-50" kern="0" dirty="0">
+                <a:solidFill>
+                  <a:srgbClr val="FFFFFF"/>
+                </a:solidFill>
+                <a:latin typeface="Noto Sans KR" pitchFamily="34" charset="0"/>
+                <a:ea typeface="Noto Sans KR" pitchFamily="34" charset="-122"/>
+                <a:cs typeface="Noto Sans KR" pitchFamily="34" charset="-120"/>
+              </a:rPr>
+              <a:t>Day 3 — 대시보드 만들기</a:t>
+            </a:r>
+            <a:endParaRPr lang="en-US" sz="3800" dirty="0"/>
+          </a:p>
+        </p:txBody>
+      </p:sp>
+      <p:sp>
+        <p:nvSpPr>
+          <p:cNvPr id="6" name="Text 4"/>
+          <p:cNvSpPr/>
+          <p:nvPr/>
+        </p:nvSpPr>
+        <p:spPr>
+          <a:xfrm>
+            <a:off x="731520" y="4114800"/>
+            <a:ext cx="10515600" cy="1828800"/>
+          </a:xfrm>
+          <a:prstGeom prst="rect">
+            <a:avLst/>
+          </a:prstGeom>
+          <a:noFill/>
+          <a:ln/>
+        </p:spPr>
+        <p:txBody>
+          <a:bodyPr wrap="square" rtlCol="0" anchor="ctr"/>
+          <a:lstStyle/>
+          <a:p>
+            <a:pPr indent="0" marL="0">
+              <a:lnSpc>
+                <a:spcPct val="170000"/>
+              </a:lnSpc>
+              <a:buNone/>
+            </a:pPr>
+            <a:r>
+              <a:rPr lang="en-US" sz="1500" dirty="0">
+                <a:solidFill>
+                  <a:srgbClr val="A0AEC0"/>
+                </a:solidFill>
+                <a:latin typeface="Noto Sans KR" pitchFamily="34" charset="0"/>
+                <a:ea typeface="Noto Sans KR" pitchFamily="34" charset="-122"/>
+                <a:cs typeface="Noto Sans KR" pitchFamily="34" charset="-120"/>
+              </a:rPr>
+              <a:t>· 정적 HTML 리포트(매거진 톤) + 인터랙티브 Streamlit 둘 다</a:t>
+            </a:r>
+            <a:endParaRPr lang="en-US" sz="1500" dirty="0"/>
+          </a:p>
+          <a:p>
+            <a:pPr indent="0" marL="0">
+              <a:lnSpc>
+                <a:spcPct val="170000"/>
+              </a:lnSpc>
+              <a:buNone/>
+            </a:pPr>
+            <a:r>
+              <a:rPr lang="en-US" sz="1500" dirty="0">
+                <a:solidFill>
+                  <a:srgbClr val="A0AEC0"/>
+                </a:solidFill>
+                <a:latin typeface="Noto Sans KR" pitchFamily="34" charset="0"/>
+                <a:ea typeface="Noto Sans KR" pitchFamily="34" charset="-122"/>
+                <a:cs typeface="Noto Sans KR" pitchFamily="34" charset="-120"/>
+              </a:rPr>
+              <a:t>· 본인 인사이트 한 줄 메모해 오기 — "강조할 메시지가 있어야 디자인이 산다"</a:t>
+            </a:r>
+            <a:endParaRPr lang="en-US" sz="1500" dirty="0"/>
+          </a:p>
+          <a:p>
+            <a:pPr indent="0" marL="0">
+              <a:lnSpc>
+                <a:spcPct val="170000"/>
+              </a:lnSpc>
+              <a:buNone/>
+            </a:pPr>
+            <a:r>
+              <a:rPr lang="en-US" sz="1500" dirty="0">
+                <a:solidFill>
+                  <a:srgbClr val="A0AEC0"/>
+                </a:solidFill>
+                <a:latin typeface="Noto Sans KR" pitchFamily="34" charset="0"/>
+                <a:ea typeface="Noto Sans KR" pitchFamily="34" charset="-122"/>
+                <a:cs typeface="Noto Sans KR" pitchFamily="34" charset="-120"/>
+              </a:rPr>
+              <a:t>· report.html 산출물이 4일차 의사결정 리포트로 이어짐</a:t>
+            </a:r>
+            <a:endParaRPr lang="en-US" sz="1500" dirty="0"/>
+          </a:p>
+        </p:txBody>
+      </p:sp>
+      <p:sp>
+        <p:nvSpPr>
+          <p:cNvPr id="7" name="Text 5"/>
+          <p:cNvSpPr/>
+          <p:nvPr/>
+        </p:nvSpPr>
+        <p:spPr>
+          <a:xfrm>
+            <a:off x="10972800" y="6446520"/>
+            <a:ext cx="1005840" cy="256032"/>
+          </a:xfrm>
+          <a:prstGeom prst="rect">
+            <a:avLst/>
+          </a:prstGeom>
+          <a:noFill/>
+          <a:ln/>
+        </p:spPr>
+        <p:txBody>
+          <a:bodyPr wrap="square" rtlCol="0" anchor="ctr"/>
+          <a:lstStyle/>
+          <a:p>
+            <a:pPr algn="r" indent="0" marL="0">
+              <a:buNone/>
+            </a:pPr>
+            <a:r>
+              <a:rPr lang="en-US" sz="900" dirty="0">
+                <a:solidFill>
+                  <a:srgbClr val="718096"/>
+                </a:solidFill>
+                <a:latin typeface="Noto Sans KR" pitchFamily="34" charset="0"/>
+                <a:ea typeface="Noto Sans KR" pitchFamily="34" charset="-122"/>
+                <a:cs typeface="Noto Sans KR" pitchFamily="34" charset="-120"/>
+              </a:rPr>
+              <a:t>30 / 30</a:t>
             </a:r>
             <a:endParaRPr lang="en-US" sz="900" dirty="0"/>
           </a:p>
@@ -11549,8 +12685,28 @@
         </p:nvSpPr>
         <p:spPr>
           <a:xfrm>
-            <a:off x="548640" y="384048"/>
-            <a:ext cx="914400" cy="54864"/>
+            <a:off x="0" y="0"/>
+            <a:ext cx="12192000" cy="6858000"/>
+          </a:xfrm>
+          <a:prstGeom prst="rect">
+            <a:avLst/>
+          </a:prstGeom>
+          <a:solidFill>
+            <a:srgbClr val="1A1F36"/>
+          </a:solidFill>
+          <a:ln/>
+        </p:spPr>
+      </p:sp>
+      <p:sp>
+        <p:nvSpPr>
+          <p:cNvPr id="3" name="Shape 1"/>
+          <p:cNvSpPr/>
+          <p:nvPr/>
+        </p:nvSpPr>
+        <p:spPr>
+          <a:xfrm>
+            <a:off x="9875520" y="0"/>
+            <a:ext cx="2313432" cy="6858000"/>
           </a:xfrm>
           <a:prstGeom prst="rect">
             <a:avLst/>
@@ -11563,14 +12719,14 @@
       </p:sp>
       <p:sp>
         <p:nvSpPr>
-          <p:cNvPr id="3" name="Text 1"/>
-          <p:cNvSpPr/>
-          <p:nvPr/>
-        </p:nvSpPr>
-        <p:spPr>
-          <a:xfrm>
-            <a:off x="548640" y="530352"/>
-            <a:ext cx="10515600" cy="411480"/>
+          <p:cNvPr id="4" name="Text 2"/>
+          <p:cNvSpPr/>
+          <p:nvPr/>
+        </p:nvSpPr>
+        <p:spPr>
+          <a:xfrm>
+            <a:off x="731520" y="1828800"/>
+            <a:ext cx="10515600" cy="457200"/>
           </a:xfrm>
           <a:prstGeom prst="rect">
             <a:avLst/>
@@ -11586,15 +12742,15 @@
               <a:buNone/>
             </a:pPr>
             <a:r>
-              <a:rPr lang="en-US" sz="1400" b="1" spc="50" kern="0" dirty="0">
-                <a:solidFill>
-                  <a:srgbClr val="718096"/>
-                </a:solidFill>
-                <a:latin typeface="Noto Sans KR" pitchFamily="34" charset="0"/>
-                <a:ea typeface="Noto Sans KR" pitchFamily="34" charset="-122"/>
-                <a:cs typeface="Noto Sans KR" pitchFamily="34" charset="-120"/>
-              </a:rPr>
-              <a:t>파트 1. 오프닝 + EDA 라이브 시연</a:t>
+              <a:rPr lang="en-US" sz="1400" b="1" spc="500" kern="0" dirty="0">
+                <a:solidFill>
+                  <a:srgbClr val="00D4AA"/>
+                </a:solidFill>
+                <a:latin typeface="Noto Sans KR" pitchFamily="34" charset="0"/>
+                <a:ea typeface="Noto Sans KR" pitchFamily="34" charset="-122"/>
+                <a:cs typeface="Noto Sans KR" pitchFamily="34" charset="-120"/>
+              </a:rPr>
+              <a:t>PART 1</a:t>
             </a:r>
             <a:endParaRPr lang="en-US" sz="1400" dirty="0"/>
           </a:p>
@@ -11602,14 +12758,14 @@
       </p:sp>
       <p:sp>
         <p:nvSpPr>
-          <p:cNvPr id="4" name="Text 2"/>
-          <p:cNvSpPr/>
-          <p:nvPr/>
-        </p:nvSpPr>
-        <p:spPr>
-          <a:xfrm>
-            <a:off x="548640" y="960120"/>
-            <a:ext cx="10515600" cy="292608"/>
+          <p:cNvPr id="5" name="Text 3"/>
+          <p:cNvSpPr/>
+          <p:nvPr/>
+        </p:nvSpPr>
+        <p:spPr>
+          <a:xfrm>
+            <a:off x="731520" y="2468880"/>
+            <a:ext cx="10515600" cy="1645920"/>
           </a:xfrm>
           <a:prstGeom prst="rect">
             <a:avLst/>
@@ -11622,62 +12778,43 @@
           <a:lstStyle/>
           <a:p>
             <a:pPr indent="0" marL="0">
-              <a:buNone/>
-            </a:pPr>
-            <a:r>
-              <a:rPr lang="en-US" sz="1100" b="1" spc="150" kern="0" dirty="0">
-                <a:solidFill>
-                  <a:srgbClr val="00D4AA"/>
-                </a:solidFill>
-                <a:latin typeface="Noto Sans KR" pitchFamily="34" charset="0"/>
-                <a:ea typeface="Noto Sans KR" pitchFamily="34" charset="-122"/>
-                <a:cs typeface="Noto Sans KR" pitchFamily="34" charset="-120"/>
-              </a:rPr>
-              <a:t>섹션 1 / 4</a:t>
-            </a:r>
-            <a:endParaRPr lang="en-US" sz="1100" dirty="0"/>
-          </a:p>
-        </p:txBody>
-      </p:sp>
-      <p:sp>
-        <p:nvSpPr>
-          <p:cNvPr id="5" name="Text 3"/>
-          <p:cNvSpPr/>
-          <p:nvPr/>
-        </p:nvSpPr>
-        <p:spPr>
-          <a:xfrm>
-            <a:off x="548640" y="1508760"/>
-            <a:ext cx="11091672" cy="1371600"/>
-          </a:xfrm>
-          <a:prstGeom prst="rect">
-            <a:avLst/>
-          </a:prstGeom>
-          <a:noFill/>
-          <a:ln/>
-        </p:spPr>
-        <p:txBody>
-          <a:bodyPr wrap="square" rtlCol="0" anchor="t"/>
-          <a:lstStyle/>
-          <a:p>
-            <a:pPr indent="0" marL="0">
               <a:lnSpc>
-                <a:spcPct val="110000"/>
+                <a:spcPct val="115000"/>
               </a:lnSpc>
               <a:buNone/>
             </a:pPr>
             <a:r>
-              <a:rPr lang="en-US" sz="4200" b="1" spc="-50" kern="0" dirty="0">
-                <a:solidFill>
-                  <a:srgbClr val="1A1F36"/>
-                </a:solidFill>
-                <a:latin typeface="Noto Sans KR" pitchFamily="34" charset="0"/>
-                <a:ea typeface="Noto Sans KR" pitchFamily="34" charset="-122"/>
-                <a:cs typeface="Noto Sans KR" pitchFamily="34" charset="-120"/>
-              </a:rPr>
-              <a:t>Wrap up — 1일차에서 가져갈 것</a:t>
-            </a:r>
-            <a:endParaRPr lang="en-US" sz="4200" dirty="0"/>
+              <a:rPr lang="en-US" sz="5400" b="1" spc="-50" kern="0" dirty="0">
+                <a:solidFill>
+                  <a:srgbClr val="FFFFFF"/>
+                </a:solidFill>
+                <a:latin typeface="Noto Sans KR" pitchFamily="34" charset="0"/>
+                <a:ea typeface="Noto Sans KR" pitchFamily="34" charset="-122"/>
+                <a:cs typeface="Noto Sans KR" pitchFamily="34" charset="-120"/>
+              </a:rPr>
+              <a:t>오프닝 +</a:t>
+            </a:r>
+            <a:endParaRPr lang="en-US" sz="5400" dirty="0"/>
+          </a:p>
+          <a:p>
+            <a:pPr indent="0" marL="0">
+              <a:lnSpc>
+                <a:spcPct val="115000"/>
+              </a:lnSpc>
+              <a:buNone/>
+            </a:pPr>
+            <a:r>
+              <a:rPr lang="en-US" sz="5400" b="1" spc="-50" kern="0" dirty="0">
+                <a:solidFill>
+                  <a:srgbClr val="FFFFFF"/>
+                </a:solidFill>
+                <a:latin typeface="Noto Sans KR" pitchFamily="34" charset="0"/>
+                <a:ea typeface="Noto Sans KR" pitchFamily="34" charset="-122"/>
+                <a:cs typeface="Noto Sans KR" pitchFamily="34" charset="-120"/>
+              </a:rPr>
+              <a:t>EDA 라이브 시연</a:t>
+            </a:r>
+            <a:endParaRPr lang="en-US" sz="5400" dirty="0"/>
           </a:p>
         </p:txBody>
       </p:sp>
@@ -11689,14 +12826,14 @@
         </p:nvSpPr>
         <p:spPr>
           <a:xfrm>
-            <a:off x="548640" y="2971800"/>
-            <a:ext cx="1828800" cy="0"/>
+            <a:off x="731520" y="4297680"/>
+            <a:ext cx="3200400" cy="0"/>
           </a:xfrm>
           <a:prstGeom prst="line">
             <a:avLst/>
           </a:prstGeom>
           <a:noFill/>
-          <a:ln w="25400">
+          <a:ln w="19050">
             <a:solidFill>
               <a:srgbClr val="00D4AA"/>
             </a:solidFill>
@@ -11712,77 +12849,37 @@
         </p:nvSpPr>
         <p:spPr>
           <a:xfrm>
-            <a:off x="548640" y="3200400"/>
-            <a:ext cx="11091672" cy="2788920"/>
-          </a:xfrm>
-          <a:prstGeom prst="rect">
-            <a:avLst/>
-          </a:prstGeom>
-          <a:noFill/>
-          <a:ln/>
-        </p:spPr>
-        <p:txBody>
-          <a:bodyPr wrap="square" rtlCol="0" anchor="t"/>
+            <a:off x="731520" y="4526280"/>
+            <a:ext cx="10515600" cy="548640"/>
+          </a:xfrm>
+          <a:prstGeom prst="rect">
+            <a:avLst/>
+          </a:prstGeom>
+          <a:noFill/>
+          <a:ln/>
+        </p:spPr>
+        <p:txBody>
+          <a:bodyPr wrap="square" rtlCol="0" anchor="ctr"/>
           <a:lstStyle/>
           <a:p>
             <a:pPr indent="0" marL="0">
               <a:lnSpc>
-                <a:spcPct val="155000"/>
+                <a:spcPct val="150000"/>
               </a:lnSpc>
               <a:buNone/>
             </a:pPr>
             <a:r>
-              <a:rPr lang="en-US" sz="1700" dirty="0">
-                <a:solidFill>
-                  <a:srgbClr val="4A5568"/>
-                </a:solidFill>
-                <a:latin typeface="Noto Sans KR" pitchFamily="34" charset="0"/>
-                <a:ea typeface="Noto Sans KR" pitchFamily="34" charset="-122"/>
-                <a:cs typeface="Noto Sans KR" pitchFamily="34" charset="-120"/>
-              </a:rPr>
-              <a:t>· 첫 결과 = 환경 세팅 + 데이터 가져오기 끝났다는 신호</a:t>
-            </a:r>
-            <a:endParaRPr lang="en-US" sz="1700" dirty="0"/>
-          </a:p>
-          <a:p>
-            <a:pPr indent="0" marL="0">
-              <a:lnSpc>
-                <a:spcPct val="155000"/>
-              </a:lnSpc>
-              <a:buNone/>
-            </a:pPr>
-            <a:r>
-              <a:rPr lang="en-US" sz="1700" dirty="0">
-                <a:solidFill>
-                  <a:srgbClr val="4A5568"/>
-                </a:solidFill>
-                <a:latin typeface="Noto Sans KR" pitchFamily="34" charset="0"/>
-                <a:ea typeface="Noto Sans KR" pitchFamily="34" charset="-122"/>
-                <a:cs typeface="Noto Sans KR" pitchFamily="34" charset="-120"/>
-              </a:rPr>
-              <a:t>· CLAUDE.md 적어둔 덕분에 인코딩·폰트 설명을 더 안 해도 된다</a:t>
-            </a:r>
-            <a:endParaRPr lang="en-US" sz="1700" dirty="0"/>
-          </a:p>
-          <a:p>
-            <a:pPr indent="0" marL="0">
-              <a:lnSpc>
-                <a:spcPct val="155000"/>
-              </a:lnSpc>
-              <a:buNone/>
-            </a:pPr>
-            <a:r>
-              <a:rPr lang="en-US" sz="1700" dirty="0">
-                <a:solidFill>
-                  <a:srgbClr val="4A5568"/>
-                </a:solidFill>
-                <a:latin typeface="Noto Sans KR" pitchFamily="34" charset="0"/>
-                <a:ea typeface="Noto Sans KR" pitchFamily="34" charset="-122"/>
-                <a:cs typeface="Noto Sans KR" pitchFamily="34" charset="-120"/>
-              </a:rPr>
-              <a:t>· 오늘 흐름: 질문 던지기 → 단독 분석 → 결합 분석 → CLAUDE.md 업데이트</a:t>
-            </a:r>
-            <a:endParaRPr lang="en-US" sz="1700" dirty="0"/>
+              <a:rPr lang="en-US" sz="1600" dirty="0">
+                <a:solidFill>
+                  <a:srgbClr val="A0AEC0"/>
+                </a:solidFill>
+                <a:latin typeface="Noto Sans KR" pitchFamily="34" charset="0"/>
+                <a:ea typeface="Noto Sans KR" pitchFamily="34" charset="-122"/>
+                <a:cs typeface="Noto Sans KR" pitchFamily="34" charset="-120"/>
+              </a:rPr>
+              <a:t>어제 만든 CLAUDE.md 그대로 — 오늘은 분석에 집중</a:t>
+            </a:r>
+            <a:endParaRPr lang="en-US" sz="1600" dirty="0"/>
           </a:p>
         </p:txBody>
       </p:sp>
@@ -11819,7 +12916,7 @@
                 <a:ea typeface="Noto Sans KR" pitchFamily="34" charset="-122"/>
                 <a:cs typeface="Noto Sans KR" pitchFamily="34" charset="-120"/>
               </a:rPr>
-              <a:t>4 / 27</a:t>
+              <a:t>4 / 30</a:t>
             </a:r>
             <a:endParaRPr lang="en-US" sz="900" dirty="0"/>
           </a:p>
@@ -11942,7 +13039,7 @@
                 <a:ea typeface="Noto Sans KR" pitchFamily="34" charset="-122"/>
                 <a:cs typeface="Noto Sans KR" pitchFamily="34" charset="-120"/>
               </a:rPr>
-              <a:t>섹션 2 / 4</a:t>
+              <a:t>섹션 1 / 4</a:t>
             </a:r>
             <a:endParaRPr lang="en-US" sz="1100" dirty="0"/>
           </a:p>
@@ -11984,7 +13081,7 @@
                 <a:ea typeface="Noto Sans KR" pitchFamily="34" charset="-122"/>
                 <a:cs typeface="Noto Sans KR" pitchFamily="34" charset="-120"/>
               </a:rPr>
-              <a:t>오늘 쓸 데이터 6종 (한눈에)</a:t>
+              <a:t>Wrap up — 1일차에서 가져갈 것</a:t>
             </a:r>
             <a:endParaRPr lang="en-US" sz="4200" dirty="0"/>
           </a:p>
@@ -12049,7 +13146,7 @@
                 <a:ea typeface="Noto Sans KR" pitchFamily="34" charset="-122"/>
                 <a:cs typeface="Noto Sans KR" pitchFamily="34" charset="-120"/>
               </a:rPr>
-              <a:t>· AQ — 서울 미세먼지 일별 (1일차에 받은 그대로)</a:t>
+              <a:t>· 첫 결과 = 환경 세팅 + 데이터 가져오기 끝났다는 신호</a:t>
             </a:r>
             <a:endParaRPr lang="en-US" sz="1700" dirty="0"/>
           </a:p>
@@ -12069,7 +13166,7 @@
                 <a:ea typeface="Noto Sans KR" pitchFamily="34" charset="-122"/>
                 <a:cs typeface="Noto Sans KR" pitchFamily="34" charset="-120"/>
               </a:rPr>
-              <a:t>· BIKE — 서울 따릉이 일별 대여 건수</a:t>
+              <a:t>· CLAUDE.md 적어둔 덕분에 인코딩·폰트 설명을 더 안 해도 된다</a:t>
             </a:r>
             <a:endParaRPr lang="en-US" sz="1700" dirty="0"/>
           </a:p>
@@ -12089,96 +13186,7 @@
                 <a:ea typeface="Noto Sans KR" pitchFamily="34" charset="-122"/>
                 <a:cs typeface="Noto Sans KR" pitchFamily="34" charset="-120"/>
               </a:rPr>
-              <a:t>· SUBWAY — 서울 지하철 일별 총 승하차</a:t>
-            </a:r>
-            <a:endParaRPr lang="en-US" sz="1700" dirty="0"/>
-          </a:p>
-          <a:p>
-            <a:pPr indent="0" marL="0">
-              <a:lnSpc>
-                <a:spcPct val="155000"/>
-              </a:lnSpc>
-              <a:buNone/>
-            </a:pPr>
-            <a:r>
-              <a:rPr lang="en-US" sz="1700" dirty="0">
-                <a:solidFill>
-                  <a:srgbClr val="4A5568"/>
-                </a:solidFill>
-                <a:latin typeface="Noto Sans KR" pitchFamily="34" charset="0"/>
-                <a:ea typeface="Noto Sans KR" pitchFamily="34" charset="-122"/>
-                <a:cs typeface="Noto Sans KR" pitchFamily="34" charset="-120"/>
-              </a:rPr>
-              <a:t>· WEATHER — 기상청 ASOS 서울 일자료</a:t>
-            </a:r>
-            <a:endParaRPr lang="en-US" sz="1700" dirty="0"/>
-          </a:p>
-          <a:p>
-            <a:pPr indent="0" marL="0">
-              <a:lnSpc>
-                <a:spcPct val="155000"/>
-              </a:lnSpc>
-              <a:buNone/>
-            </a:pPr>
-            <a:r>
-              <a:rPr lang="en-US" sz="1700" dirty="0">
-                <a:solidFill>
-                  <a:srgbClr val="4A5568"/>
-                </a:solidFill>
-                <a:latin typeface="Noto Sans KR" pitchFamily="34" charset="0"/>
-                <a:ea typeface="Noto Sans KR" pitchFamily="34" charset="-122"/>
-                <a:cs typeface="Noto Sans KR" pitchFamily="34" charset="-120"/>
-              </a:rPr>
-              <a:t>· BUZZ — 검색량/언급량 (네이버 데이터랩 + 구글 트렌드)</a:t>
-            </a:r>
-            <a:endParaRPr lang="en-US" sz="1700" dirty="0"/>
-          </a:p>
-          <a:p>
-            <a:pPr indent="0" marL="0">
-              <a:lnSpc>
-                <a:spcPct val="155000"/>
-              </a:lnSpc>
-              <a:buNone/>
-            </a:pPr>
-            <a:r>
-              <a:rPr lang="en-US" sz="1700" dirty="0">
-                <a:solidFill>
-                  <a:srgbClr val="4A5568"/>
-                </a:solidFill>
-                <a:latin typeface="Noto Sans KR" pitchFamily="34" charset="0"/>
-                <a:ea typeface="Noto Sans KR" pitchFamily="34" charset="-122"/>
-                <a:cs typeface="Noto Sans KR" pitchFamily="34" charset="-120"/>
-              </a:rPr>
-              <a:t>· SHOP — 4개 도메인 적재본 (다이소·올리브영·컬리·네이버쇼핑) — 4일차 결합용 강사 자산</a:t>
-            </a:r>
-            <a:endParaRPr lang="en-US" sz="1700" dirty="0"/>
-          </a:p>
-          <a:p>
-            <a:pPr indent="0" marL="0">
-              <a:lnSpc>
-                <a:spcPct val="155000"/>
-              </a:lnSpc>
-              <a:buNone/>
-            </a:pPr>
-            <a:endParaRPr lang="en-US" sz="1700" dirty="0"/>
-          </a:p>
-          <a:p>
-            <a:pPr indent="0" marL="0">
-              <a:lnSpc>
-                <a:spcPct val="155000"/>
-              </a:lnSpc>
-              <a:buNone/>
-            </a:pPr>
-            <a:r>
-              <a:rPr lang="en-US" sz="1700" dirty="0">
-                <a:solidFill>
-                  <a:srgbClr val="4A5568"/>
-                </a:solidFill>
-                <a:latin typeface="Noto Sans KR" pitchFamily="34" charset="0"/>
-                <a:ea typeface="Noto Sans KR" pitchFamily="34" charset="-122"/>
-                <a:cs typeface="Noto Sans KR" pitchFamily="34" charset="-120"/>
-              </a:rPr>
-              <a:t>다음 슬라이드에서 각 데이터 다운로드 방법 함께 봅니다</a:t>
+              <a:t>· 오늘 흐름: 질문 던지기 → 단독 분석 → 결합 분석 → CLAUDE.md 업데이트</a:t>
             </a:r>
             <a:endParaRPr lang="en-US" sz="1700" dirty="0"/>
           </a:p>
@@ -12217,7 +13225,7 @@
                 <a:ea typeface="Noto Sans KR" pitchFamily="34" charset="-122"/>
                 <a:cs typeface="Noto Sans KR" pitchFamily="34" charset="-120"/>
               </a:rPr>
-              <a:t>5 / 27</a:t>
+              <a:t>5 / 30</a:t>
             </a:r>
             <a:endParaRPr lang="en-US" sz="900" dirty="0"/>
           </a:p>
@@ -12340,7 +13348,7 @@
                 <a:ea typeface="Noto Sans KR" pitchFamily="34" charset="-122"/>
                 <a:cs typeface="Noto Sans KR" pitchFamily="34" charset="-120"/>
               </a:rPr>
-              <a:t>섹션 3 / 4</a:t>
+              <a:t>섹션 2 / 4</a:t>
             </a:r>
             <a:endParaRPr lang="en-US" sz="1100" dirty="0"/>
           </a:p>
@@ -12382,7 +13390,7 @@
                 <a:ea typeface="Noto Sans KR" pitchFamily="34" charset="-122"/>
                 <a:cs typeface="Noto Sans KR" pitchFamily="34" charset="-120"/>
               </a:rPr>
-              <a:t>데이터 다운로드 가이드 — 어디서, 어떻게, 어떤 파일명?</a:t>
+              <a:t>오늘 쓸 데이터 6종 (한눈에)</a:t>
             </a:r>
             <a:endParaRPr lang="en-US" sz="4200" dirty="0"/>
           </a:p>
@@ -12447,7 +13455,7 @@
                 <a:ea typeface="Noto Sans KR" pitchFamily="34" charset="-122"/>
                 <a:cs typeface="Noto Sans KR" pitchFamily="34" charset="-120"/>
               </a:rPr>
-              <a:t>· BIKE — data.seoul.go.kr → "따릉이 일별 대여" 검색 → "파일" 탭 → CSV</a:t>
+              <a:t>· AQ — 서울 미세먼지 일별 (1일차에 받은 그대로)</a:t>
             </a:r>
             <a:endParaRPr lang="en-US" sz="1700" dirty="0"/>
           </a:p>
@@ -12467,7 +13475,7 @@
                 <a:ea typeface="Noto Sans KR" pitchFamily="34" charset="-122"/>
                 <a:cs typeface="Noto Sans KR" pitchFamily="34" charset="-120"/>
               </a:rPr>
-              <a:t>  파일명 예: 서울특별시_공공자전거_일별_대여건수_YYYY.csv</a:t>
+              <a:t>· BIKE — 서울 따릉이 일별 대여 건수</a:t>
             </a:r>
             <a:endParaRPr lang="en-US" sz="1700" dirty="0"/>
           </a:p>
@@ -12487,7 +13495,7 @@
                 <a:ea typeface="Noto Sans KR" pitchFamily="34" charset="-122"/>
                 <a:cs typeface="Noto Sans KR" pitchFamily="34" charset="-120"/>
               </a:rPr>
-              <a:t>· SUBWAY — data.seoul.go.kr → "지하철 일별 승하차" 검색 → "파일" 탭 → CSV</a:t>
+              <a:t>· SUBWAY — 서울 지하철 일별 총 승하차</a:t>
             </a:r>
             <a:endParaRPr lang="en-US" sz="1700" dirty="0"/>
           </a:p>
@@ -12507,7 +13515,7 @@
                 <a:ea typeface="Noto Sans KR" pitchFamily="34" charset="-122"/>
                 <a:cs typeface="Noto Sans KR" pitchFamily="34" charset="-120"/>
               </a:rPr>
-              <a:t>  파일명 예: 서울교통공사_일별_지하철_승하차_YYYY.csv</a:t>
+              <a:t>· WEATHER — 기상청 ASOS 서울 일자료</a:t>
             </a:r>
             <a:endParaRPr lang="en-US" sz="1700" dirty="0"/>
           </a:p>
@@ -12527,7 +13535,7 @@
                 <a:ea typeface="Noto Sans KR" pitchFamily="34" charset="-122"/>
                 <a:cs typeface="Noto Sans KR" pitchFamily="34" charset="-120"/>
               </a:rPr>
-              <a:t>· WEATHER — data.kma.go.kr 가입 → 기후통계분석 → 통계분석 → 지점 "서울(108)" → 일자료 → CSV</a:t>
+              <a:t>· BUZZ — 검색량/언급량 (네이버 데이터랩 + 구글 트렌드)</a:t>
             </a:r>
             <a:endParaRPr lang="en-US" sz="1700" dirty="0"/>
           </a:p>
@@ -12547,7 +13555,7 @@
                 <a:ea typeface="Noto Sans KR" pitchFamily="34" charset="-122"/>
                 <a:cs typeface="Noto Sans KR" pitchFamily="34" charset="-120"/>
               </a:rPr>
-              <a:t>· BUZZ — datalab.naver.com (검색어트렌드) + trends.google.com (개별 키워드 다운로드)</a:t>
+              <a:t>· SHOP — 4개 도메인 적재본 (다이소·올리브영·컬리·네이버쇼핑) — 4일차 결합용 강사 자산</a:t>
             </a:r>
             <a:endParaRPr lang="en-US" sz="1700" dirty="0"/>
           </a:p>
@@ -12576,7 +13584,7 @@
                 <a:ea typeface="Noto Sans KR" pitchFamily="34" charset="-122"/>
                 <a:cs typeface="Noto Sans KR" pitchFamily="34" charset="-120"/>
               </a:rPr>
-              <a:t>· 파일명은 광장에서 받은 그대로 사용. 받기 정말 어려운 분만 강사에게 요청</a:t>
+              <a:t>다음 슬라이드에서 각 데이터 다운로드 방법 함께 봅니다</a:t>
             </a:r>
             <a:endParaRPr lang="en-US" sz="1700" dirty="0"/>
           </a:p>
@@ -12615,7 +13623,7 @@
                 <a:ea typeface="Noto Sans KR" pitchFamily="34" charset="-122"/>
                 <a:cs typeface="Noto Sans KR" pitchFamily="34" charset="-120"/>
               </a:rPr>
-              <a:t>6 / 27</a:t>
+              <a:t>6 / 30</a:t>
             </a:r>
             <a:endParaRPr lang="en-US" sz="900" dirty="0"/>
           </a:p>
@@ -12714,7 +13722,7 @@
         <p:spPr>
           <a:xfrm>
             <a:off x="548640" y="960120"/>
-            <a:ext cx="11091672" cy="292608"/>
+            <a:ext cx="10515600" cy="292608"/>
           </a:xfrm>
           <a:prstGeom prst="rect">
             <a:avLst/>
@@ -12730,7 +13738,7 @@
               <a:buNone/>
             </a:pPr>
             <a:r>
-              <a:rPr lang="en-US" sz="1100" b="1" spc="50" kern="0" dirty="0">
+              <a:rPr lang="en-US" sz="1100" b="1" spc="150" kern="0" dirty="0">
                 <a:solidFill>
                   <a:srgbClr val="00D4AA"/>
                 </a:solidFill>
@@ -12738,7 +13746,7 @@
                 <a:ea typeface="Noto Sans KR" pitchFamily="34" charset="-122"/>
                 <a:cs typeface="Noto Sans KR" pitchFamily="34" charset="-120"/>
               </a:rPr>
-              <a:t>💬 함께 볼 시연 프롬프트 — 안 따라쳐도 OK (보기만 해도 됩니다)</a:t>
+              <a:t>섹션 3 / 4</a:t>
             </a:r>
             <a:endParaRPr lang="en-US" sz="1100" dirty="0"/>
           </a:p>
@@ -12753,7 +13761,7 @@
         <p:spPr>
           <a:xfrm>
             <a:off x="548640" y="1508760"/>
-            <a:ext cx="11091672" cy="1005840"/>
+            <a:ext cx="11091672" cy="1371600"/>
           </a:xfrm>
           <a:prstGeom prst="rect">
             <a:avLst/>
@@ -12767,12 +13775,12 @@
           <a:p>
             <a:pPr indent="0" marL="0">
               <a:lnSpc>
-                <a:spcPct val="115000"/>
+                <a:spcPct val="110000"/>
               </a:lnSpc>
               <a:buNone/>
             </a:pPr>
             <a:r>
-              <a:rPr lang="en-US" sz="3400" b="1" spc="-50" kern="0" dirty="0">
+              <a:rPr lang="en-US" sz="4200" b="1" spc="-50" kern="0" dirty="0">
                 <a:solidFill>
                   <a:srgbClr val="1A1F36"/>
                 </a:solidFill>
@@ -12780,9 +13788,9 @@
                 <a:ea typeface="Noto Sans KR" pitchFamily="34" charset="-122"/>
                 <a:cs typeface="Noto Sans KR" pitchFamily="34" charset="-120"/>
               </a:rPr>
-              <a:t>2024+2025 통합 본격 EDA 시연</a:t>
-            </a:r>
-            <a:endParaRPr lang="en-US" sz="3400" dirty="0"/>
+              <a:t>데이터 다운로드 가이드 — 어디서, 어떻게, 어떤 파일명?</a:t>
+            </a:r>
+            <a:endParaRPr lang="en-US" sz="4200" dirty="0"/>
           </a:p>
         </p:txBody>
       </p:sp>
@@ -12794,7 +13802,7 @@
         </p:nvSpPr>
         <p:spPr>
           <a:xfrm>
-            <a:off x="548640" y="2606040"/>
+            <a:off x="548640" y="2971800"/>
             <a:ext cx="1828800" cy="0"/>
           </a:xfrm>
           <a:prstGeom prst="line">
@@ -12811,156 +13819,178 @@
       </p:sp>
       <p:sp>
         <p:nvSpPr>
-          <p:cNvPr id="7" name="Shape 5"/>
-          <p:cNvSpPr/>
-          <p:nvPr/>
-        </p:nvSpPr>
-        <p:spPr>
-          <a:xfrm>
-            <a:off x="548640" y="2926080"/>
-            <a:ext cx="11091672" cy="3200400"/>
-          </a:xfrm>
-          <a:prstGeom prst="roundRect">
-            <a:avLst>
-              <a:gd name="adj" fmla="val 1714"/>
-            </a:avLst>
-          </a:prstGeom>
-          <a:solidFill>
-            <a:srgbClr val="F1F5F9"/>
-          </a:solidFill>
-          <a:ln w="6350">
-            <a:solidFill>
-              <a:srgbClr val="E2E8F0"/>
-            </a:solidFill>
-            <a:prstDash val="solid"/>
-          </a:ln>
-        </p:spPr>
+          <p:cNvPr id="7" name="Text 5"/>
+          <p:cNvSpPr/>
+          <p:nvPr/>
+        </p:nvSpPr>
+        <p:spPr>
+          <a:xfrm>
+            <a:off x="548640" y="3200400"/>
+            <a:ext cx="11091672" cy="2788920"/>
+          </a:xfrm>
+          <a:prstGeom prst="rect">
+            <a:avLst/>
+          </a:prstGeom>
+          <a:noFill/>
+          <a:ln/>
+        </p:spPr>
+        <p:txBody>
+          <a:bodyPr wrap="square" rtlCol="0" anchor="t"/>
+          <a:lstStyle/>
+          <a:p>
+            <a:pPr indent="0" marL="0">
+              <a:lnSpc>
+                <a:spcPct val="155000"/>
+              </a:lnSpc>
+              <a:buNone/>
+            </a:pPr>
+            <a:r>
+              <a:rPr lang="en-US" sz="1700" dirty="0">
+                <a:solidFill>
+                  <a:srgbClr val="4A5568"/>
+                </a:solidFill>
+                <a:latin typeface="Noto Sans KR" pitchFamily="34" charset="0"/>
+                <a:ea typeface="Noto Sans KR" pitchFamily="34" charset="-122"/>
+                <a:cs typeface="Noto Sans KR" pitchFamily="34" charset="-120"/>
+              </a:rPr>
+              <a:t>· BIKE — data.seoul.go.kr → "따릉이 일별 대여" 검색 → "파일" 탭 → CSV</a:t>
+            </a:r>
+            <a:endParaRPr lang="en-US" sz="1700" dirty="0"/>
+          </a:p>
+          <a:p>
+            <a:pPr indent="0" marL="0">
+              <a:lnSpc>
+                <a:spcPct val="155000"/>
+              </a:lnSpc>
+              <a:buNone/>
+            </a:pPr>
+            <a:r>
+              <a:rPr lang="en-US" sz="1700" dirty="0">
+                <a:solidFill>
+                  <a:srgbClr val="4A5568"/>
+                </a:solidFill>
+                <a:latin typeface="Noto Sans KR" pitchFamily="34" charset="0"/>
+                <a:ea typeface="Noto Sans KR" pitchFamily="34" charset="-122"/>
+                <a:cs typeface="Noto Sans KR" pitchFamily="34" charset="-120"/>
+              </a:rPr>
+              <a:t>  파일명 예: 서울특별시_공공자전거_일별_대여건수_YYYY.csv</a:t>
+            </a:r>
+            <a:endParaRPr lang="en-US" sz="1700" dirty="0"/>
+          </a:p>
+          <a:p>
+            <a:pPr indent="0" marL="0">
+              <a:lnSpc>
+                <a:spcPct val="155000"/>
+              </a:lnSpc>
+              <a:buNone/>
+            </a:pPr>
+            <a:r>
+              <a:rPr lang="en-US" sz="1700" dirty="0">
+                <a:solidFill>
+                  <a:srgbClr val="4A5568"/>
+                </a:solidFill>
+                <a:latin typeface="Noto Sans KR" pitchFamily="34" charset="0"/>
+                <a:ea typeface="Noto Sans KR" pitchFamily="34" charset="-122"/>
+                <a:cs typeface="Noto Sans KR" pitchFamily="34" charset="-120"/>
+              </a:rPr>
+              <a:t>· SUBWAY — data.seoul.go.kr → "지하철 일별 승하차" 검색 → "파일" 탭 → CSV</a:t>
+            </a:r>
+            <a:endParaRPr lang="en-US" sz="1700" dirty="0"/>
+          </a:p>
+          <a:p>
+            <a:pPr indent="0" marL="0">
+              <a:lnSpc>
+                <a:spcPct val="155000"/>
+              </a:lnSpc>
+              <a:buNone/>
+            </a:pPr>
+            <a:r>
+              <a:rPr lang="en-US" sz="1700" dirty="0">
+                <a:solidFill>
+                  <a:srgbClr val="4A5568"/>
+                </a:solidFill>
+                <a:latin typeface="Noto Sans KR" pitchFamily="34" charset="0"/>
+                <a:ea typeface="Noto Sans KR" pitchFamily="34" charset="-122"/>
+                <a:cs typeface="Noto Sans KR" pitchFamily="34" charset="-120"/>
+              </a:rPr>
+              <a:t>  파일명 예: 서울교통공사_일별_지하철_승하차_YYYY.csv</a:t>
+            </a:r>
+            <a:endParaRPr lang="en-US" sz="1700" dirty="0"/>
+          </a:p>
+          <a:p>
+            <a:pPr indent="0" marL="0">
+              <a:lnSpc>
+                <a:spcPct val="155000"/>
+              </a:lnSpc>
+              <a:buNone/>
+            </a:pPr>
+            <a:r>
+              <a:rPr lang="en-US" sz="1700" dirty="0">
+                <a:solidFill>
+                  <a:srgbClr val="4A5568"/>
+                </a:solidFill>
+                <a:latin typeface="Noto Sans KR" pitchFamily="34" charset="0"/>
+                <a:ea typeface="Noto Sans KR" pitchFamily="34" charset="-122"/>
+                <a:cs typeface="Noto Sans KR" pitchFamily="34" charset="-120"/>
+              </a:rPr>
+              <a:t>· WEATHER — data.kma.go.kr 가입 → 기후통계분석 → 통계분석 → 지점 "서울(108)" → 일자료 → CSV</a:t>
+            </a:r>
+            <a:endParaRPr lang="en-US" sz="1700" dirty="0"/>
+          </a:p>
+          <a:p>
+            <a:pPr indent="0" marL="0">
+              <a:lnSpc>
+                <a:spcPct val="155000"/>
+              </a:lnSpc>
+              <a:buNone/>
+            </a:pPr>
+            <a:r>
+              <a:rPr lang="en-US" sz="1700" dirty="0">
+                <a:solidFill>
+                  <a:srgbClr val="4A5568"/>
+                </a:solidFill>
+                <a:latin typeface="Noto Sans KR" pitchFamily="34" charset="0"/>
+                <a:ea typeface="Noto Sans KR" pitchFamily="34" charset="-122"/>
+                <a:cs typeface="Noto Sans KR" pitchFamily="34" charset="-120"/>
+              </a:rPr>
+              <a:t>· BUZZ — datalab.naver.com (검색어트렌드) + trends.google.com (개별 키워드 다운로드)</a:t>
+            </a:r>
+            <a:endParaRPr lang="en-US" sz="1700" dirty="0"/>
+          </a:p>
+          <a:p>
+            <a:pPr indent="0" marL="0">
+              <a:lnSpc>
+                <a:spcPct val="155000"/>
+              </a:lnSpc>
+              <a:buNone/>
+            </a:pPr>
+            <a:endParaRPr lang="en-US" sz="1700" dirty="0"/>
+          </a:p>
+          <a:p>
+            <a:pPr indent="0" marL="0">
+              <a:lnSpc>
+                <a:spcPct val="155000"/>
+              </a:lnSpc>
+              <a:buNone/>
+            </a:pPr>
+            <a:r>
+              <a:rPr lang="en-US" sz="1700" dirty="0">
+                <a:solidFill>
+                  <a:srgbClr val="4A5568"/>
+                </a:solidFill>
+                <a:latin typeface="Noto Sans KR" pitchFamily="34" charset="0"/>
+                <a:ea typeface="Noto Sans KR" pitchFamily="34" charset="-122"/>
+                <a:cs typeface="Noto Sans KR" pitchFamily="34" charset="-120"/>
+              </a:rPr>
+              <a:t>· 파일명은 광장에서 받은 그대로 사용. 받기 정말 어려운 분만 강사에게 요청</a:t>
+            </a:r>
+            <a:endParaRPr lang="en-US" sz="1700" dirty="0"/>
+          </a:p>
+        </p:txBody>
       </p:sp>
       <p:sp>
         <p:nvSpPr>
           <p:cNvPr id="8" name="Text 6"/>
-          <p:cNvSpPr/>
-          <p:nvPr/>
-        </p:nvSpPr>
-        <p:spPr>
-          <a:xfrm>
-            <a:off x="713232" y="3035808"/>
-            <a:ext cx="10762488" cy="2980944"/>
-          </a:xfrm>
-          <a:prstGeom prst="rect">
-            <a:avLst/>
-          </a:prstGeom>
-          <a:noFill/>
-          <a:ln/>
-        </p:spPr>
-        <p:txBody>
-          <a:bodyPr wrap="square" rtlCol="0" anchor="t"/>
-          <a:lstStyle/>
-          <a:p>
-            <a:pPr indent="0" marL="0">
-              <a:lnSpc>
-                <a:spcPct val="140000"/>
-              </a:lnSpc>
-              <a:buNone/>
-            </a:pPr>
-            <a:r>
-              <a:rPr lang="en-US" sz="1150" dirty="0">
-                <a:solidFill>
-                  <a:srgbClr val="1A1F36"/>
-                </a:solidFill>
-                <a:latin typeface="Roboto Mono" pitchFamily="34" charset="0"/>
-                <a:ea typeface="Roboto Mono" pitchFamily="34" charset="-122"/>
-                <a:cs typeface="Roboto Mono" pitchFamily="34" charset="-120"/>
-              </a:rPr>
-              <a:t>기간별_일평균_대기환경_정보_2024년.csv + 기간별_일평균_대기환경_정보_2025년.csv 통합해서 EDA 해줘.</a:t>
-            </a:r>
-            <a:endParaRPr lang="en-US" sz="1150" dirty="0"/>
-          </a:p>
-          <a:p>
-            <a:pPr indent="0" marL="0">
-              <a:lnSpc>
-                <a:spcPct val="140000"/>
-              </a:lnSpc>
-              <a:buNone/>
-            </a:pPr>
-            <a:r>
-              <a:rPr lang="en-US" sz="1150" dirty="0">
-                <a:solidFill>
-                  <a:srgbClr val="1A1F36"/>
-                </a:solidFill>
-                <a:latin typeface="Roboto Mono" pitchFamily="34" charset="0"/>
-                <a:ea typeface="Roboto Mono" pitchFamily="34" charset="-122"/>
-                <a:cs typeface="Roboto Mono" pitchFamily="34" charset="-120"/>
-              </a:rPr>
-              <a:t>순서: shape → dtypes → 결측 비율 (연도별) →</a:t>
-            </a:r>
-            <a:endParaRPr lang="en-US" sz="1150" dirty="0"/>
-          </a:p>
-          <a:p>
-            <a:pPr indent="0" marL="0">
-              <a:lnSpc>
-                <a:spcPct val="140000"/>
-              </a:lnSpc>
-              <a:buNone/>
-            </a:pPr>
-            <a:r>
-              <a:rPr lang="en-US" sz="1150" dirty="0">
-                <a:solidFill>
-                  <a:srgbClr val="1A1F36"/>
-                </a:solidFill>
-                <a:latin typeface="Roboto Mono" pitchFamily="34" charset="0"/>
-                <a:ea typeface="Roboto Mono" pitchFamily="34" charset="-122"/>
-                <a:cs typeface="Roboto Mono" pitchFamily="34" charset="-120"/>
-              </a:rPr>
-              <a:t>자치구별 PM2.5 연평균 비교 (2024 vs 2025) →</a:t>
-            </a:r>
-            <a:endParaRPr lang="en-US" sz="1150" dirty="0"/>
-          </a:p>
-          <a:p>
-            <a:pPr indent="0" marL="0">
-              <a:lnSpc>
-                <a:spcPct val="140000"/>
-              </a:lnSpc>
-              <a:buNone/>
-            </a:pPr>
-            <a:r>
-              <a:rPr lang="en-US" sz="1150" dirty="0">
-                <a:solidFill>
-                  <a:srgbClr val="1A1F36"/>
-                </a:solidFill>
-                <a:latin typeface="Roboto Mono" pitchFamily="34" charset="0"/>
-                <a:ea typeface="Roboto Mono" pitchFamily="34" charset="-122"/>
-                <a:cs typeface="Roboto Mono" pitchFamily="34" charset="-120"/>
-              </a:rPr>
-              <a:t>월별·요일별 시즌성 → 이상치 후보 (연도별 spike Top 5) → 등급 분포 변화.</a:t>
-            </a:r>
-            <a:endParaRPr lang="en-US" sz="1150" dirty="0"/>
-          </a:p>
-          <a:p>
-            <a:pPr indent="0" marL="0">
-              <a:lnSpc>
-                <a:spcPct val="140000"/>
-              </a:lnSpc>
-              <a:buNone/>
-            </a:pPr>
-            <a:r>
-              <a:rPr lang="en-US" sz="1150" dirty="0">
-                <a:solidFill>
-                  <a:srgbClr val="1A1F36"/>
-                </a:solidFill>
-                <a:latin typeface="Roboto Mono" pitchFamily="34" charset="0"/>
-                <a:ea typeface="Roboto Mono" pitchFamily="34" charset="-122"/>
-                <a:cs typeface="Roboto Mono" pitchFamily="34" charset="-120"/>
-              </a:rPr>
-              <a:t>차트 다 그려서 ./outputs/ 에 저장하고, 핵심 인사이트 5줄로 요약.</a:t>
-            </a:r>
-            <a:endParaRPr lang="en-US" sz="1150" dirty="0"/>
-          </a:p>
-        </p:txBody>
-      </p:sp>
-      <p:sp>
-        <p:nvSpPr>
-          <p:cNvPr id="9" name="Text 7"/>
           <p:cNvSpPr/>
           <p:nvPr/>
         </p:nvSpPr>
@@ -12991,7 +14021,7 @@
                 <a:ea typeface="Noto Sans KR" pitchFamily="34" charset="-122"/>
                 <a:cs typeface="Noto Sans KR" pitchFamily="34" charset="-120"/>
               </a:rPr>
-              <a:t>7 / 27</a:t>
+              <a:t>7 / 30</a:t>
             </a:r>
             <a:endParaRPr lang="en-US" sz="900" dirty="0"/>
           </a:p>
@@ -13075,7 +14105,7 @@
                 <a:ea typeface="Noto Sans KR" pitchFamily="34" charset="-122"/>
                 <a:cs typeface="Noto Sans KR" pitchFamily="34" charset="-120"/>
               </a:rPr>
-              <a:t>DAY 2 · EDA DEMO</a:t>
+              <a:t>파트 1. 오프닝 + EDA 라이브 시연</a:t>
             </a:r>
             <a:endParaRPr lang="en-US" sz="1400" dirty="0"/>
           </a:p>
@@ -13090,7 +14120,7 @@
         <p:spPr>
           <a:xfrm>
             <a:off x="548640" y="960120"/>
-            <a:ext cx="10515600" cy="292608"/>
+            <a:ext cx="11091672" cy="292608"/>
           </a:xfrm>
           <a:prstGeom prst="rect">
             <a:avLst/>
@@ -13106,7 +14136,7 @@
               <a:buNone/>
             </a:pPr>
             <a:r>
-              <a:rPr lang="en-US" sz="1100" b="1" spc="150" kern="0" dirty="0">
+              <a:rPr lang="en-US" sz="1100" b="1" spc="50" kern="0" dirty="0">
                 <a:solidFill>
                   <a:srgbClr val="00D4AA"/>
                 </a:solidFill>
@@ -13114,7 +14144,7 @@
                 <a:ea typeface="Noto Sans KR" pitchFamily="34" charset="-122"/>
                 <a:cs typeface="Noto Sans KR" pitchFamily="34" charset="-120"/>
               </a:rPr>
-              <a:t>오늘 만든 결과물</a:t>
+              <a:t>💬 함께 볼 시연 프롬프트 — 안 따라쳐도 OK (보기만 해도 됩니다)</a:t>
             </a:r>
             <a:endParaRPr lang="en-US" sz="1100" dirty="0"/>
           </a:p>
@@ -13128,8 +14158,8 @@
         </p:nvSpPr>
         <p:spPr>
           <a:xfrm>
-            <a:off x="548640" y="1417320"/>
-            <a:ext cx="11091672" cy="640080"/>
+            <a:off x="548640" y="1508760"/>
+            <a:ext cx="11091672" cy="1005840"/>
           </a:xfrm>
           <a:prstGeom prst="rect">
             <a:avLst/>
@@ -13142,10 +14172,13 @@
           <a:lstStyle/>
           <a:p>
             <a:pPr indent="0" marL="0">
-              <a:buNone/>
-            </a:pPr>
-            <a:r>
-              <a:rPr lang="en-US" sz="2800" b="1" spc="-30" kern="0" dirty="0">
+              <a:lnSpc>
+                <a:spcPct val="115000"/>
+              </a:lnSpc>
+              <a:buNone/>
+            </a:pPr>
+            <a:r>
+              <a:rPr lang="en-US" sz="3400" b="1" spc="-50" kern="0" dirty="0">
                 <a:solidFill>
                   <a:srgbClr val="1A1F36"/>
                 </a:solidFill>
@@ -13153,77 +14186,187 @@
                 <a:ea typeface="Noto Sans KR" pitchFamily="34" charset="-122"/>
                 <a:cs typeface="Noto Sans KR" pitchFamily="34" charset="-120"/>
               </a:rPr>
-              <a:t>EDA 시연 결과 — shape · 시즌성 · spike</a:t>
-            </a:r>
-            <a:endParaRPr lang="en-US" sz="2800" dirty="0"/>
-          </a:p>
-        </p:txBody>
-      </p:sp>
-      <p:pic>
-        <p:nvPicPr>
-          <p:cNvPr id="6" name="Image 0" descr="/Users/sujinpark/b2b-lecture-note/20260512_inflearn_B2G_dataanalysis/assets/screenshots/day2/eda_demo.png">    </p:cNvPr>
-          <p:cNvPicPr>
-            <a:picLocks noChangeAspect="1"/>
-          </p:cNvPicPr>
-          <p:nvPr/>
-        </p:nvPicPr>
-        <p:blipFill>
-          <a:blip r:embed="rId1"/>
-          <a:srcRect l="0" r="0" t="0" b="0"/>
-          <a:stretch/>
-        </p:blipFill>
-        <p:spPr>
-          <a:xfrm>
-            <a:off x="2194560" y="2240280"/>
-            <a:ext cx="7772400" cy="3657600"/>
-          </a:xfrm>
-          <a:prstGeom prst="rect">
-            <a:avLst/>
-          </a:prstGeom>
-        </p:spPr>
-      </p:pic>
-      <p:sp>
-        <p:nvSpPr>
-          <p:cNvPr id="7" name="Text 4"/>
-          <p:cNvSpPr/>
-          <p:nvPr/>
-        </p:nvSpPr>
-        <p:spPr>
-          <a:xfrm>
-            <a:off x="548640" y="5989320"/>
-            <a:ext cx="11091672" cy="411480"/>
-          </a:xfrm>
-          <a:prstGeom prst="rect">
-            <a:avLst/>
-          </a:prstGeom>
-          <a:noFill/>
-          <a:ln/>
-        </p:spPr>
-        <p:txBody>
-          <a:bodyPr wrap="square" rtlCol="0" anchor="ctr"/>
-          <a:lstStyle/>
-          <a:p>
-            <a:pPr algn="ctr" indent="0" marL="0">
-              <a:buNone/>
-            </a:pPr>
-            <a:r>
-              <a:rPr lang="en-US" sz="1200" i="1" dirty="0">
-                <a:solidFill>
-                  <a:srgbClr val="718096"/>
-                </a:solidFill>
-                <a:latin typeface="Noto Sans KR" pitchFamily="34" charset="0"/>
-                <a:ea typeface="Noto Sans KR" pitchFamily="34" charset="-122"/>
-                <a:cs typeface="Noto Sans KR" pitchFamily="34" charset="-120"/>
-              </a:rPr>
-              <a:t>통합 EDA 결과 한눈에</a:t>
-            </a:r>
-            <a:endParaRPr lang="en-US" sz="1200" dirty="0"/>
-          </a:p>
-        </p:txBody>
-      </p:sp>
-      <p:sp>
-        <p:nvSpPr>
-          <p:cNvPr id="8" name="Text 5"/>
+              <a:t>2024+2025 통합 본격 EDA 시연</a:t>
+            </a:r>
+            <a:endParaRPr lang="en-US" sz="3400" dirty="0"/>
+          </a:p>
+        </p:txBody>
+      </p:sp>
+      <p:sp>
+        <p:nvSpPr>
+          <p:cNvPr id="6" name="Shape 4"/>
+          <p:cNvSpPr/>
+          <p:nvPr/>
+        </p:nvSpPr>
+        <p:spPr>
+          <a:xfrm>
+            <a:off x="548640" y="2606040"/>
+            <a:ext cx="1828800" cy="0"/>
+          </a:xfrm>
+          <a:prstGeom prst="line">
+            <a:avLst/>
+          </a:prstGeom>
+          <a:noFill/>
+          <a:ln w="25400">
+            <a:solidFill>
+              <a:srgbClr val="00D4AA"/>
+            </a:solidFill>
+            <a:prstDash val="solid"/>
+          </a:ln>
+        </p:spPr>
+      </p:sp>
+      <p:sp>
+        <p:nvSpPr>
+          <p:cNvPr id="7" name="Shape 5"/>
+          <p:cNvSpPr/>
+          <p:nvPr/>
+        </p:nvSpPr>
+        <p:spPr>
+          <a:xfrm>
+            <a:off x="548640" y="2926080"/>
+            <a:ext cx="11091672" cy="3200400"/>
+          </a:xfrm>
+          <a:prstGeom prst="roundRect">
+            <a:avLst>
+              <a:gd name="adj" fmla="val 1714"/>
+            </a:avLst>
+          </a:prstGeom>
+          <a:solidFill>
+            <a:srgbClr val="F1F5F9"/>
+          </a:solidFill>
+          <a:ln w="6350">
+            <a:solidFill>
+              <a:srgbClr val="E2E8F0"/>
+            </a:solidFill>
+            <a:prstDash val="solid"/>
+          </a:ln>
+        </p:spPr>
+      </p:sp>
+      <p:sp>
+        <p:nvSpPr>
+          <p:cNvPr id="8" name="Text 6"/>
+          <p:cNvSpPr/>
+          <p:nvPr/>
+        </p:nvSpPr>
+        <p:spPr>
+          <a:xfrm>
+            <a:off x="713232" y="3035808"/>
+            <a:ext cx="10762488" cy="2980944"/>
+          </a:xfrm>
+          <a:prstGeom prst="rect">
+            <a:avLst/>
+          </a:prstGeom>
+          <a:noFill/>
+          <a:ln/>
+        </p:spPr>
+        <p:txBody>
+          <a:bodyPr wrap="square" rtlCol="0" anchor="t"/>
+          <a:lstStyle/>
+          <a:p>
+            <a:pPr indent="0" marL="0">
+              <a:lnSpc>
+                <a:spcPct val="140000"/>
+              </a:lnSpc>
+              <a:buNone/>
+            </a:pPr>
+            <a:r>
+              <a:rPr lang="en-US" sz="1150" dirty="0">
+                <a:solidFill>
+                  <a:srgbClr val="1A1F36"/>
+                </a:solidFill>
+                <a:latin typeface="Roboto Mono" pitchFamily="34" charset="0"/>
+                <a:ea typeface="Roboto Mono" pitchFamily="34" charset="-122"/>
+                <a:cs typeface="Roboto Mono" pitchFamily="34" charset="-120"/>
+              </a:rPr>
+              <a:t>기간별_일평균_대기환경_정보_2024년.csv + 기간별_일평균_대기환경_정보_2025년.csv 통합해서 EDA 해줘.</a:t>
+            </a:r>
+            <a:endParaRPr lang="en-US" sz="1150" dirty="0"/>
+          </a:p>
+          <a:p>
+            <a:pPr indent="0" marL="0">
+              <a:lnSpc>
+                <a:spcPct val="140000"/>
+              </a:lnSpc>
+              <a:buNone/>
+            </a:pPr>
+            <a:r>
+              <a:rPr lang="en-US" sz="1150" dirty="0">
+                <a:solidFill>
+                  <a:srgbClr val="1A1F36"/>
+                </a:solidFill>
+                <a:latin typeface="Roboto Mono" pitchFamily="34" charset="0"/>
+                <a:ea typeface="Roboto Mono" pitchFamily="34" charset="-122"/>
+                <a:cs typeface="Roboto Mono" pitchFamily="34" charset="-120"/>
+              </a:rPr>
+              <a:t>순서: shape → dtypes → 결측 비율 (연도별) →</a:t>
+            </a:r>
+            <a:endParaRPr lang="en-US" sz="1150" dirty="0"/>
+          </a:p>
+          <a:p>
+            <a:pPr indent="0" marL="0">
+              <a:lnSpc>
+                <a:spcPct val="140000"/>
+              </a:lnSpc>
+              <a:buNone/>
+            </a:pPr>
+            <a:r>
+              <a:rPr lang="en-US" sz="1150" dirty="0">
+                <a:solidFill>
+                  <a:srgbClr val="1A1F36"/>
+                </a:solidFill>
+                <a:latin typeface="Roboto Mono" pitchFamily="34" charset="0"/>
+                <a:ea typeface="Roboto Mono" pitchFamily="34" charset="-122"/>
+                <a:cs typeface="Roboto Mono" pitchFamily="34" charset="-120"/>
+              </a:rPr>
+              <a:t>자치구별 PM2.5 연평균 비교 (2024 vs 2025) →</a:t>
+            </a:r>
+            <a:endParaRPr lang="en-US" sz="1150" dirty="0"/>
+          </a:p>
+          <a:p>
+            <a:pPr indent="0" marL="0">
+              <a:lnSpc>
+                <a:spcPct val="140000"/>
+              </a:lnSpc>
+              <a:buNone/>
+            </a:pPr>
+            <a:r>
+              <a:rPr lang="en-US" sz="1150" dirty="0">
+                <a:solidFill>
+                  <a:srgbClr val="1A1F36"/>
+                </a:solidFill>
+                <a:latin typeface="Roboto Mono" pitchFamily="34" charset="0"/>
+                <a:ea typeface="Roboto Mono" pitchFamily="34" charset="-122"/>
+                <a:cs typeface="Roboto Mono" pitchFamily="34" charset="-120"/>
+              </a:rPr>
+              <a:t>월별·요일별 시즌성 → 이상치 후보 (연도별 spike Top 5) → 등급 분포 변화.</a:t>
+            </a:r>
+            <a:endParaRPr lang="en-US" sz="1150" dirty="0"/>
+          </a:p>
+          <a:p>
+            <a:pPr indent="0" marL="0">
+              <a:lnSpc>
+                <a:spcPct val="140000"/>
+              </a:lnSpc>
+              <a:buNone/>
+            </a:pPr>
+            <a:r>
+              <a:rPr lang="en-US" sz="1150" dirty="0">
+                <a:solidFill>
+                  <a:srgbClr val="1A1F36"/>
+                </a:solidFill>
+                <a:latin typeface="Roboto Mono" pitchFamily="34" charset="0"/>
+                <a:ea typeface="Roboto Mono" pitchFamily="34" charset="-122"/>
+                <a:cs typeface="Roboto Mono" pitchFamily="34" charset="-120"/>
+              </a:rPr>
+              <a:t>차트 다 그려서 ./outputs/ 에 저장하고, 핵심 인사이트 5줄로 요약.</a:t>
+            </a:r>
+            <a:endParaRPr lang="en-US" sz="1150" dirty="0"/>
+          </a:p>
+        </p:txBody>
+      </p:sp>
+      <p:sp>
+        <p:nvSpPr>
+          <p:cNvPr id="9" name="Text 7"/>
           <p:cNvSpPr/>
           <p:nvPr/>
         </p:nvSpPr>
@@ -13254,7 +14397,7 @@
                 <a:ea typeface="Noto Sans KR" pitchFamily="34" charset="-122"/>
                 <a:cs typeface="Noto Sans KR" pitchFamily="34" charset="-120"/>
               </a:rPr>
-              <a:t>8 / 27</a:t>
+              <a:t>8 / 30</a:t>
             </a:r>
             <a:endParaRPr lang="en-US" sz="900" dirty="0"/>
           </a:p>
@@ -13338,7 +14481,7 @@
                 <a:ea typeface="Noto Sans KR" pitchFamily="34" charset="-122"/>
                 <a:cs typeface="Noto Sans KR" pitchFamily="34" charset="-120"/>
               </a:rPr>
-              <a:t>파트 1. 오프닝 + EDA 라이브 시연</a:t>
+              <a:t>DAY 2 · EDA DEMO</a:t>
             </a:r>
             <a:endParaRPr lang="en-US" sz="1400" dirty="0"/>
           </a:p>
@@ -13377,7 +14520,7 @@
                 <a:ea typeface="Noto Sans KR" pitchFamily="34" charset="-122"/>
                 <a:cs typeface="Noto Sans KR" pitchFamily="34" charset="-120"/>
               </a:rPr>
-              <a:t>섹션 4 / 4</a:t>
+              <a:t>오늘 만든 결과물</a:t>
             </a:r>
             <a:endParaRPr lang="en-US" sz="1100" dirty="0"/>
           </a:p>
@@ -13391,8 +14534,8 @@
         </p:nvSpPr>
         <p:spPr>
           <a:xfrm>
-            <a:off x="548640" y="1508760"/>
-            <a:ext cx="11091672" cy="1371600"/>
+            <a:off x="548640" y="1417320"/>
+            <a:ext cx="11091672" cy="640080"/>
           </a:xfrm>
           <a:prstGeom prst="rect">
             <a:avLst/>
@@ -13405,13 +14548,10 @@
           <a:lstStyle/>
           <a:p>
             <a:pPr indent="0" marL="0">
-              <a:lnSpc>
-                <a:spcPct val="110000"/>
-              </a:lnSpc>
-              <a:buNone/>
-            </a:pPr>
-            <a:r>
-              <a:rPr lang="en-US" sz="4200" b="1" spc="-50" kern="0" dirty="0">
+              <a:buNone/>
+            </a:pPr>
+            <a:r>
+              <a:rPr lang="en-US" sz="2800" b="1" spc="-30" kern="0" dirty="0">
                 <a:solidFill>
                   <a:srgbClr val="1A1F36"/>
                 </a:solidFill>
@@ -13419,140 +14559,77 @@
                 <a:ea typeface="Noto Sans KR" pitchFamily="34" charset="-122"/>
                 <a:cs typeface="Noto Sans KR" pitchFamily="34" charset="-120"/>
               </a:rPr>
-              <a:t>이상치인가, 황사 spike인가?</a:t>
-            </a:r>
-            <a:endParaRPr lang="en-US" sz="4200" dirty="0"/>
-          </a:p>
-        </p:txBody>
-      </p:sp>
-      <p:sp>
-        <p:nvSpPr>
-          <p:cNvPr id="6" name="Shape 4"/>
-          <p:cNvSpPr/>
-          <p:nvPr/>
-        </p:nvSpPr>
-        <p:spPr>
-          <a:xfrm>
-            <a:off x="548640" y="2971800"/>
-            <a:ext cx="1828800" cy="0"/>
-          </a:xfrm>
-          <a:prstGeom prst="line">
-            <a:avLst/>
-          </a:prstGeom>
-          <a:noFill/>
-          <a:ln w="25400">
-            <a:solidFill>
-              <a:srgbClr val="00D4AA"/>
-            </a:solidFill>
-            <a:prstDash val="solid"/>
-          </a:ln>
-        </p:spPr>
-      </p:sp>
-      <p:sp>
-        <p:nvSpPr>
-          <p:cNvPr id="7" name="Text 5"/>
-          <p:cNvSpPr/>
-          <p:nvPr/>
-        </p:nvSpPr>
-        <p:spPr>
-          <a:xfrm>
-            <a:off x="548640" y="3200400"/>
-            <a:ext cx="11091672" cy="2788920"/>
-          </a:xfrm>
-          <a:prstGeom prst="rect">
-            <a:avLst/>
-          </a:prstGeom>
-          <a:noFill/>
-          <a:ln/>
-        </p:spPr>
-        <p:txBody>
-          <a:bodyPr wrap="square" rtlCol="0" anchor="t"/>
-          <a:lstStyle/>
-          <a:p>
-            <a:pPr indent="0" marL="0">
-              <a:lnSpc>
-                <a:spcPct val="155000"/>
-              </a:lnSpc>
-              <a:buNone/>
-            </a:pPr>
-            <a:r>
-              <a:rPr lang="en-US" sz="1700" dirty="0">
-                <a:solidFill>
-                  <a:srgbClr val="4A5568"/>
-                </a:solidFill>
-                <a:latin typeface="Noto Sans KR" pitchFamily="34" charset="0"/>
-                <a:ea typeface="Noto Sans KR" pitchFamily="34" charset="-122"/>
-                <a:cs typeface="Noto Sans KR" pitchFamily="34" charset="-120"/>
-              </a:rPr>
-              <a:t>· spike 1건 의심 → "이거 진짜 오류일까, 황사 이벤트일까?" 한 번 더 질문</a:t>
-            </a:r>
-            <a:endParaRPr lang="en-US" sz="1700" dirty="0"/>
-          </a:p>
-          <a:p>
-            <a:pPr indent="0" marL="0">
-              <a:lnSpc>
-                <a:spcPct val="155000"/>
-              </a:lnSpc>
-              <a:buNone/>
-            </a:pPr>
-            <a:r>
-              <a:rPr lang="en-US" sz="1700" dirty="0">
-                <a:solidFill>
-                  <a:srgbClr val="4A5568"/>
-                </a:solidFill>
-                <a:latin typeface="Noto Sans KR" pitchFamily="34" charset="0"/>
-                <a:ea typeface="Noto Sans KR" pitchFamily="34" charset="-122"/>
-                <a:cs typeface="Noto Sans KR" pitchFamily="34" charset="-120"/>
-              </a:rPr>
-              <a:t>· 분석가의 판단이 필요한 지점</a:t>
-            </a:r>
-            <a:endParaRPr lang="en-US" sz="1700" dirty="0"/>
-          </a:p>
-          <a:p>
-            <a:pPr indent="0" marL="0">
-              <a:lnSpc>
-                <a:spcPct val="155000"/>
-              </a:lnSpc>
-              <a:buNone/>
-            </a:pPr>
-            <a:r>
-              <a:rPr lang="en-US" sz="1700" dirty="0">
-                <a:solidFill>
-                  <a:srgbClr val="4A5568"/>
-                </a:solidFill>
-                <a:latin typeface="Noto Sans KR" pitchFamily="34" charset="0"/>
-                <a:ea typeface="Noto Sans KR" pitchFamily="34" charset="-122"/>
-                <a:cs typeface="Noto Sans KR" pitchFamily="34" charset="-120"/>
-              </a:rPr>
-              <a:t>· AI는 코드를 짜지만 도메인 해석은 사람의 일</a:t>
-            </a:r>
-            <a:endParaRPr lang="en-US" sz="1700" dirty="0"/>
-          </a:p>
-          <a:p>
-            <a:pPr indent="0" marL="0">
-              <a:lnSpc>
-                <a:spcPct val="155000"/>
-              </a:lnSpc>
-              <a:buNone/>
-            </a:pPr>
-            <a:r>
-              <a:rPr lang="en-US" sz="1700" dirty="0">
-                <a:solidFill>
-                  <a:srgbClr val="4A5568"/>
-                </a:solidFill>
-                <a:latin typeface="Noto Sans KR" pitchFamily="34" charset="0"/>
-                <a:ea typeface="Noto Sans KR" pitchFamily="34" charset="-122"/>
-                <a:cs typeface="Noto Sans KR" pitchFamily="34" charset="-120"/>
-              </a:rPr>
-              <a:t>· "AI가 짠 코드를 그냥 쓰면 도메인 모르는 결과가 나온다 — 손대야 한다"</a:t>
-            </a:r>
-            <a:endParaRPr lang="en-US" sz="1700" dirty="0"/>
-          </a:p>
-        </p:txBody>
-      </p:sp>
-      <p:sp>
-        <p:nvSpPr>
-          <p:cNvPr id="8" name="Text 6"/>
+              <a:t>EDA 시연 결과 — shape · 시즌성 · spike</a:t>
+            </a:r>
+            <a:endParaRPr lang="en-US" sz="2800" dirty="0"/>
+          </a:p>
+        </p:txBody>
+      </p:sp>
+      <p:pic>
+        <p:nvPicPr>
+          <p:cNvPr id="6" name="Image 0" descr="/Users/sujinpark/b2b-lecture-note/20260512_inflearn_B2G_dataanalysis/assets/screenshots/day2/eda_demo.png">    </p:cNvPr>
+          <p:cNvPicPr>
+            <a:picLocks noChangeAspect="1"/>
+          </p:cNvPicPr>
+          <p:nvPr/>
+        </p:nvPicPr>
+        <p:blipFill>
+          <a:blip r:embed="rId1"/>
+          <a:srcRect l="0" r="0" t="0" b="0"/>
+          <a:stretch/>
+        </p:blipFill>
+        <p:spPr>
+          <a:xfrm>
+            <a:off x="2194560" y="2240280"/>
+            <a:ext cx="7772400" cy="3657600"/>
+          </a:xfrm>
+          <a:prstGeom prst="rect">
+            <a:avLst/>
+          </a:prstGeom>
+        </p:spPr>
+      </p:pic>
+      <p:sp>
+        <p:nvSpPr>
+          <p:cNvPr id="7" name="Text 4"/>
+          <p:cNvSpPr/>
+          <p:nvPr/>
+        </p:nvSpPr>
+        <p:spPr>
+          <a:xfrm>
+            <a:off x="548640" y="5989320"/>
+            <a:ext cx="11091672" cy="411480"/>
+          </a:xfrm>
+          <a:prstGeom prst="rect">
+            <a:avLst/>
+          </a:prstGeom>
+          <a:noFill/>
+          <a:ln/>
+        </p:spPr>
+        <p:txBody>
+          <a:bodyPr wrap="square" rtlCol="0" anchor="ctr"/>
+          <a:lstStyle/>
+          <a:p>
+            <a:pPr algn="ctr" indent="0" marL="0">
+              <a:buNone/>
+            </a:pPr>
+            <a:r>
+              <a:rPr lang="en-US" sz="1200" i="1" dirty="0">
+                <a:solidFill>
+                  <a:srgbClr val="718096"/>
+                </a:solidFill>
+                <a:latin typeface="Noto Sans KR" pitchFamily="34" charset="0"/>
+                <a:ea typeface="Noto Sans KR" pitchFamily="34" charset="-122"/>
+                <a:cs typeface="Noto Sans KR" pitchFamily="34" charset="-120"/>
+              </a:rPr>
+              <a:t>통합 EDA 결과 한눈에</a:t>
+            </a:r>
+            <a:endParaRPr lang="en-US" sz="1200" dirty="0"/>
+          </a:p>
+        </p:txBody>
+      </p:sp>
+      <p:sp>
+        <p:nvSpPr>
+          <p:cNvPr id="8" name="Text 5"/>
           <p:cNvSpPr/>
           <p:nvPr/>
         </p:nvSpPr>
@@ -13583,7 +14660,7 @@
                 <a:ea typeface="Noto Sans KR" pitchFamily="34" charset="-122"/>
                 <a:cs typeface="Noto Sans KR" pitchFamily="34" charset="-120"/>
               </a:rPr>
-              <a:t>9 / 27</a:t>
+              <a:t>9 / 30</a:t>
             </a:r>
             <a:endParaRPr lang="en-US" sz="900" dirty="0"/>
           </a:p>

--- a/ppt/b2g_day2_eda.pptx
+++ b/ppt/b2g_day2_eda.pptx
@@ -13893,7 +13893,7 @@
                 <a:ea typeface="Noto Sans KR" pitchFamily="34" charset="-122"/>
                 <a:cs typeface="Noto Sans KR" pitchFamily="34" charset="-120"/>
               </a:rPr>
-              <a:t>· SUBWAY — data.seoul.go.kr → "지하철 일별 승하차" 검색 → "파일" 탭 → CSV</a:t>
+              <a:t>· SUBWAY — 공공데이터포털 (data.go.kr) ★ 서울 광장 아님</a:t>
             </a:r>
             <a:endParaRPr lang="en-US" sz="1700" dirty="0"/>
           </a:p>
@@ -13913,7 +13913,7 @@
                 <a:ea typeface="Noto Sans KR" pitchFamily="34" charset="-122"/>
                 <a:cs typeface="Noto Sans KR" pitchFamily="34" charset="-120"/>
               </a:rPr>
-              <a:t>  파일명 예: 서울교통공사_일별_지하철_승하차_YYYY.csv</a:t>
+              <a:t>  https://www.data.go.kr/data/15048032/fileData.do → 파일 탭 → CSV</a:t>
             </a:r>
             <a:endParaRPr lang="en-US" sz="1700" dirty="0"/>
           </a:p>
@@ -13933,7 +13933,7 @@
                 <a:ea typeface="Noto Sans KR" pitchFamily="34" charset="-122"/>
                 <a:cs typeface="Noto Sans KR" pitchFamily="34" charset="-120"/>
               </a:rPr>
-              <a:t>· WEATHER — data.kma.go.kr 가입 → 기후통계분석 → 통계분석 → 지점 "서울(108)" → 일자료 → CSV</a:t>
+              <a:t>  파일명 예: 서울교통공사_역별 일별 시간대별 승하차인원 정보_YYYYMMDD.csv</a:t>
             </a:r>
             <a:endParaRPr lang="en-US" sz="1700" dirty="0"/>
           </a:p>
@@ -13953,7 +13953,7 @@
                 <a:ea typeface="Noto Sans KR" pitchFamily="34" charset="-122"/>
                 <a:cs typeface="Noto Sans KR" pitchFamily="34" charset="-120"/>
               </a:rPr>
-              <a:t>· BUZZ — datalab.naver.com (검색어트렌드) + trends.google.com (개별 키워드 다운로드)</a:t>
+              <a:t>· WEATHER — data.kma.go.kr 가입 → 기후통계분석 → 통계분석 → 지점 "서울(108)" → 일자료 → CSV</a:t>
             </a:r>
             <a:endParaRPr lang="en-US" sz="1700" dirty="0"/>
           </a:p>
@@ -13964,6 +13964,17 @@
               </a:lnSpc>
               <a:buNone/>
             </a:pPr>
+            <a:r>
+              <a:rPr lang="en-US" sz="1700" dirty="0">
+                <a:solidFill>
+                  <a:srgbClr val="4A5568"/>
+                </a:solidFill>
+                <a:latin typeface="Noto Sans KR" pitchFamily="34" charset="0"/>
+                <a:ea typeface="Noto Sans KR" pitchFamily="34" charset="-122"/>
+                <a:cs typeface="Noto Sans KR" pitchFamily="34" charset="-120"/>
+              </a:rPr>
+              <a:t>· BUZZ — datalab.naver.com (검색어트렌드) + trends.google.com (개별 키워드 다운로드)</a:t>
+            </a:r>
             <a:endParaRPr lang="en-US" sz="1700" dirty="0"/>
           </a:p>
           <a:p>
@@ -13973,6 +13984,15 @@
               </a:lnSpc>
               <a:buNone/>
             </a:pPr>
+            <a:endParaRPr lang="en-US" sz="1700" dirty="0"/>
+          </a:p>
+          <a:p>
+            <a:pPr indent="0" marL="0">
+              <a:lnSpc>
+                <a:spcPct val="155000"/>
+              </a:lnSpc>
+              <a:buNone/>
+            </a:pPr>
             <a:r>
               <a:rPr lang="en-US" sz="1700" dirty="0">
                 <a:solidFill>
@@ -13982,7 +14002,7 @@
                 <a:ea typeface="Noto Sans KR" pitchFamily="34" charset="-122"/>
                 <a:cs typeface="Noto Sans KR" pitchFamily="34" charset="-120"/>
               </a:rPr>
-              <a:t>· 파일명은 광장에서 받은 그대로 사용. 받기 정말 어려운 분만 강사에게 요청</a:t>
+              <a:t>· 파일명은 받은 그대로 사용. 받기 정말 어려운 분만 강사에게 요청</a:t>
             </a:r>
             <a:endParaRPr lang="en-US" sz="1700" dirty="0"/>
           </a:p>
